--- a/sakura-housing-progress/さくらハウジング_進捗報告_改訂版.pptx
+++ b/sakura-housing-progress/さくらハウジング_進捗報告_改訂版.pptx
@@ -506,7 +506,7 @@
           <a:p>
             <a:r>
               <a:rPr lang="en-US" dirty="0"/>
-              <a:t>最初に結論です。8月末の達成率は57.6%で、年間の計画ペースより約9ポイント遅れています。残り4ヶ月で月265万円が必要です。その原因は営業に使う時間が足りないことなので、時間を取り戻す3つの施策を10月から12月で実行します。</a:t>
+              <a:t>最初に結論です。8月末の売上は1,675万円、達成率67.0%で、計画ペースを上回っています。このままいけば昨年の2,400万円を超えるペースです。特にAD・付帯商品が大きく伸びています。この流れを確実にするために、営業が営業に集中できる仕組みを10月から12月でつくります。</a:t>
             </a:r>
             <a:endParaRPr lang="en-US" dirty="0"/>
           </a:p>
@@ -594,7 +594,7 @@
           <a:p>
             <a:r>
               <a:rPr lang="en-US" dirty="0"/>
-              <a:t>年間目標2,500万円に対し、8月末で1,441万円、57.6%です。8ヶ月経過時点の計画ペースは66.7%なので、約9ポイント遅れています。残り1,059万円を4ヶ月で取るには月265万円が必要で、これまでの月平均180万円から約85万円の上積みが必要です。なお売買仲介手数料を含めると67.0%で、ほぼ計画どおりです。</a:t>
+              <a:t>年間目標2,500万円に対し、8月末で1,675万円、達成率67.0%です。8ヶ月経過時点の計画ペース66.7%を上回っています。このペースで行けば年間で約2,510万円、昨年の2,400万円を約110万円上回る見込みです。残り4ヶ月は月206万円で目標達成で、これまでの月平均209万円なら届く水準です。</a:t>
             </a:r>
             <a:endParaRPr lang="en-US" dirty="0"/>
           </a:p>
@@ -682,7 +682,7 @@
           <a:p>
             <a:r>
               <a:rPr lang="en-US" dirty="0"/>
-              <a:t>遅れの原因は、営業に使える時間が3つの業務に奪われていることです。会計業務に月40時間、ポータル掲載の手が回らない、クレームの突発対応で計画が崩れる。それぞれに対して、外注・専任パート・外部サービスで手を打ちます。広告費の見直しや業者との協議、課題の洗い出しはすでに終わっています。</a:t>
+              <a:t>売上の伸びを引っ張っているのはADと付帯商品です。昨年の同じ時期と比べて、この2つの上がり幅が大きくなっています。この伸びを続けるには、営業がお客様と向き合う時間を増やすことが一番の近道です。</a:t>
             </a:r>
             <a:endParaRPr lang="en-US" dirty="0"/>
           </a:p>
@@ -770,7 +770,7 @@
           <a:p>
             <a:r>
               <a:rPr lang="en-US" dirty="0"/>
-              <a:t>具体的にやることは4つです。それぞれ担当・期限・完了の基準を決めました。「完了の基準」を満たしたかどうかで毎月確認します。</a:t>
+              <a:t>具体的にやることは3つです。会計はDFEに外注、写真撮影と入力は9月に採用したパートさんにお願いし、クレームの一次対応はコールセンターと駆けつけ業者に任せます。それぞれ担当・期限・完了の基準を決め、毎月の会議で確認します。</a:t>
             </a:r>
             <a:endParaRPr lang="en-US" dirty="0"/>
           </a:p>
@@ -858,7 +858,7 @@
           <a:p>
             <a:r>
               <a:rPr lang="en-US" dirty="0"/>
-              <a:t>10月に契約と引き継ぎ、11月から会計外注とパートの単独稼働、12月にコールセンター等を稼働させます。最後に2点ご判断ください。外注3件の予算枠と、年間目標に仲介手数料を含めるかどうかです。含めるかどうかで、残り4ヶ月に必要な月額が206万円か265万円かに変わります。</a:t>
+              <a:t>10月に契約と引き継ぎ、11月から会計はDFE、写真撮影・入力はパートさんで回し、12月にクレーム一次対応の外注を稼働させます。最後に1点ご判断ください。DFEとコールセンター・駆けつけの外注の予算枠です。</a:t>
             </a:r>
             <a:endParaRPr lang="en-US" dirty="0"/>
           </a:p>
@@ -1306,7 +1306,7 @@
                 <a:ea typeface="Meiryo" pitchFamily="34" charset="-122"/>
                 <a:cs typeface="Meiryo" pitchFamily="34" charset="-120"/>
               </a:rPr>
-              <a:t>目標まであと1,059万円。</a:t>
+              <a:t>昨年を上回るペースで進んでいます。</a:t>
             </a:r>
             <a:endParaRPr lang="en-US" sz="4000" dirty="0"/>
           </a:p>
@@ -1326,7 +1326,7 @@
                 <a:ea typeface="Meiryo" pitchFamily="34" charset="-122"/>
                 <a:cs typeface="Meiryo" pitchFamily="34" charset="-120"/>
               </a:rPr>
-              <a:t>「時間を取り戻す」3つの施策を</a:t>
+              <a:t>営業に集中できる仕組みをつくり、</a:t>
             </a:r>
             <a:endParaRPr lang="en-US" sz="4000" dirty="0"/>
           </a:p>
@@ -1346,7 +1346,7 @@
                 <a:ea typeface="Meiryo" pitchFamily="34" charset="-122"/>
                 <a:cs typeface="Meiryo" pitchFamily="34" charset="-120"/>
               </a:rPr>
-              <a:t>10〜12月で実行します。</a:t>
+              <a:t>年間2,500万円を達成します。</a:t>
             </a:r>
             <a:endParaRPr lang="en-US" sz="4000" dirty="0"/>
           </a:p>
@@ -1451,35 +1451,7 @@
                 <a:ea typeface="Meiryo" pitchFamily="34" charset="-122"/>
                 <a:cs typeface="Meiryo" pitchFamily="34" charset="-120"/>
               </a:rPr>
-              <a:t>8月末 達成率 </a:t>
-            </a:r>
-            <a:pPr indent="0" marL="0">
-              <a:buNone/>
-            </a:pPr>
-            <a:r>
-              <a:rPr lang="en-US" sz="1600" b="1" dirty="0">
-                <a:solidFill>
-                  <a:srgbClr val="FFFFFF"/>
-                </a:solidFill>
-                <a:latin typeface="Meiryo" pitchFamily="34" charset="0"/>
-                <a:ea typeface="Meiryo" pitchFamily="34" charset="-122"/>
-                <a:cs typeface="Meiryo" pitchFamily="34" charset="-120"/>
-              </a:rPr>
-              <a:t>57.6%</a:t>
-            </a:r>
-            <a:pPr indent="0" marL="0">
-              <a:buNone/>
-            </a:pPr>
-            <a:r>
-              <a:rPr lang="en-US" sz="1600" dirty="0">
-                <a:solidFill>
-                  <a:srgbClr val="FFFFFF"/>
-                </a:solidFill>
-                <a:latin typeface="Meiryo" pitchFamily="34" charset="0"/>
-                <a:ea typeface="Meiryo" pitchFamily="34" charset="-122"/>
-                <a:cs typeface="Meiryo" pitchFamily="34" charset="-120"/>
-              </a:rPr>
-              <a:t>（計画ペース 66.7%に対し −9.1pt）</a:t>
+              <a:t>8月末 1,675万円（達成率 67.0%）　計画ペース 66.7%を上回る</a:t>
             </a:r>
             <a:endParaRPr lang="en-US" sz="1600" dirty="0"/>
           </a:p>
@@ -1545,7 +1517,7 @@
                 <a:ea typeface="Meiryo" pitchFamily="34" charset="-122"/>
                 <a:cs typeface="Meiryo" pitchFamily="34" charset="-120"/>
               </a:rPr>
-              <a:t>必要</a:t>
+              <a:t>伸び</a:t>
             </a:r>
             <a:endParaRPr lang="en-US" sz="1400" dirty="0"/>
           </a:p>
@@ -1584,35 +1556,7 @@
                 <a:ea typeface="Meiryo" pitchFamily="34" charset="-122"/>
                 <a:cs typeface="Meiryo" pitchFamily="34" charset="-120"/>
               </a:rPr>
-              <a:t>残り4ヶ月は </a:t>
-            </a:r>
-            <a:pPr indent="0" marL="0">
-              <a:buNone/>
-            </a:pPr>
-            <a:r>
-              <a:rPr lang="en-US" sz="1600" b="1" dirty="0">
-                <a:solidFill>
-                  <a:srgbClr val="FFFFFF"/>
-                </a:solidFill>
-                <a:latin typeface="Meiryo" pitchFamily="34" charset="0"/>
-                <a:ea typeface="Meiryo" pitchFamily="34" charset="-122"/>
-                <a:cs typeface="Meiryo" pitchFamily="34" charset="-120"/>
-              </a:rPr>
-              <a:t>月265万円</a:t>
-            </a:r>
-            <a:pPr indent="0" marL="0">
-              <a:buNone/>
-            </a:pPr>
-            <a:r>
-              <a:rPr lang="en-US" sz="1600" dirty="0">
-                <a:solidFill>
-                  <a:srgbClr val="FFFFFF"/>
-                </a:solidFill>
-                <a:latin typeface="Meiryo" pitchFamily="34" charset="0"/>
-                <a:ea typeface="Meiryo" pitchFamily="34" charset="-122"/>
-                <a:cs typeface="Meiryo" pitchFamily="34" charset="-120"/>
-              </a:rPr>
-              <a:t> の売上が必要（これまでの月平均は180万円）</a:t>
+              <a:t>AD・付帯商品の上がり幅が大きい</a:t>
             </a:r>
             <a:endParaRPr lang="en-US" sz="1600" dirty="0"/>
           </a:p>
@@ -1717,7 +1661,7 @@
                 <a:ea typeface="Meiryo" pitchFamily="34" charset="-122"/>
                 <a:cs typeface="Meiryo" pitchFamily="34" charset="-120"/>
               </a:rPr>
-              <a:t>会計の外注／ポータル掲載パートの戦力化／クレーム一次対応の外注</a:t>
+              <a:t>会計はDFEへ／写真撮影・入力はパートさんへ／クレーム一次対応は外注</a:t>
             </a:r>
             <a:endParaRPr lang="en-US" sz="1600" dirty="0"/>
           </a:p>
@@ -1803,7 +1747,7 @@
         <p:spPr>
           <a:xfrm>
             <a:off x="548640" y="777240"/>
-            <a:ext cx="11094415" cy="548640"/>
+            <a:ext cx="11094415" cy="594360"/>
           </a:xfrm>
           <a:prstGeom prst="rect">
             <a:avLst/>
@@ -1819,7 +1763,7 @@
               <a:buNone/>
             </a:pPr>
             <a:r>
-              <a:rPr lang="en-US" sz="2800" b="1" dirty="0">
+              <a:rPr lang="en-US" sz="3000" b="1" dirty="0">
                 <a:solidFill>
                   <a:srgbClr val="2B2D42"/>
                 </a:solidFill>
@@ -1827,9 +1771,9 @@
                 <a:ea typeface="Meiryo" pitchFamily="34" charset="-122"/>
                 <a:cs typeface="Meiryo" pitchFamily="34" charset="-120"/>
               </a:rPr>
-              <a:t>計画より9ポイント遅れ。残り4ヶ月は月265万円が必要</a:t>
-            </a:r>
-            <a:endParaRPr lang="en-US" sz="2800" dirty="0"/>
+              <a:t>計画を上回り、昨年を超えるペース</a:t>
+            </a:r>
+            <a:endParaRPr lang="en-US" sz="3000" dirty="0"/>
           </a:p>
         </p:txBody>
       </p:sp>
@@ -1841,7 +1785,7 @@
         </p:nvSpPr>
         <p:spPr>
           <a:xfrm>
-            <a:off x="10545775" y="6172200"/>
+            <a:off x="10545775" y="6217920"/>
             <a:ext cx="1097280" cy="228600"/>
           </a:xfrm>
           <a:prstGeom prst="rect">
@@ -1880,12 +1824,170 @@
         </p:nvSpPr>
         <p:spPr>
           <a:xfrm>
-            <a:off x="548640" y="1691640"/>
-            <a:ext cx="6858000" cy="4389120"/>
+            <a:off x="548640" y="1783080"/>
+            <a:ext cx="3454298" cy="2514600"/>
           </a:xfrm>
           <a:prstGeom prst="roundRect">
             <a:avLst>
-              <a:gd name="adj" fmla="val 2500"/>
+              <a:gd name="adj" fmla="val 4364"/>
+            </a:avLst>
+          </a:prstGeom>
+          <a:solidFill>
+            <a:srgbClr val="C8315F"/>
+          </a:solidFill>
+          <a:ln w="12700">
+            <a:solidFill>
+              <a:srgbClr val="C8315F"/>
+            </a:solidFill>
+            <a:prstDash val="solid"/>
+          </a:ln>
+        </p:spPr>
+      </p:sp>
+      <p:sp>
+        <p:nvSpPr>
+          <p:cNvPr id="6" name="Text 4"/>
+          <p:cNvSpPr txBox="1"/>
+          <p:nvPr/>
+        </p:nvSpPr>
+        <p:spPr>
+          <a:xfrm>
+            <a:off x="868680" y="2057400"/>
+            <a:ext cx="2814218" cy="365760"/>
+          </a:xfrm>
+          <a:prstGeom prst="rect">
+            <a:avLst/>
+          </a:prstGeom>
+          <a:noFill/>
+          <a:ln/>
+        </p:spPr>
+        <p:txBody>
+          <a:bodyPr wrap="square" lIns="0" tIns="0" rIns="0" bIns="0" rtlCol="0" anchor="t"/>
+          <a:lstStyle/>
+          <a:p>
+            <a:pPr indent="0" marL="0">
+              <a:buNone/>
+            </a:pPr>
+            <a:r>
+              <a:rPr lang="en-US" sz="1600" b="1" dirty="0">
+                <a:solidFill>
+                  <a:srgbClr val="FFFFFF"/>
+                </a:solidFill>
+                <a:latin typeface="Meiryo" pitchFamily="34" charset="0"/>
+                <a:ea typeface="Meiryo" pitchFamily="34" charset="-122"/>
+                <a:cs typeface="Meiryo" pitchFamily="34" charset="-120"/>
+              </a:rPr>
+              <a:t>8月末 達成率</a:t>
+            </a:r>
+            <a:endParaRPr lang="en-US" sz="1600" dirty="0"/>
+          </a:p>
+        </p:txBody>
+      </p:sp>
+      <p:sp>
+        <p:nvSpPr>
+          <p:cNvPr id="7" name="Text 5"/>
+          <p:cNvSpPr txBox="1"/>
+          <p:nvPr/>
+        </p:nvSpPr>
+        <p:spPr>
+          <a:xfrm>
+            <a:off x="868680" y="2514600"/>
+            <a:ext cx="2997098" cy="1005840"/>
+          </a:xfrm>
+          <a:prstGeom prst="rect">
+            <a:avLst/>
+          </a:prstGeom>
+          <a:noFill/>
+          <a:ln/>
+        </p:spPr>
+        <p:txBody>
+          <a:bodyPr wrap="square" lIns="0" tIns="0" rIns="0" bIns="0" rtlCol="0" anchor="b"/>
+          <a:lstStyle/>
+          <a:p>
+            <a:pPr indent="0" marL="0">
+              <a:buNone/>
+            </a:pPr>
+            <a:r>
+              <a:rPr lang="en-US" sz="4800" b="1" dirty="0">
+                <a:solidFill>
+                  <a:srgbClr val="FFFFFF"/>
+                </a:solidFill>
+                <a:latin typeface="Meiryo" pitchFamily="34" charset="0"/>
+                <a:ea typeface="Meiryo" pitchFamily="34" charset="-122"/>
+                <a:cs typeface="Meiryo" pitchFamily="34" charset="-120"/>
+              </a:rPr>
+              <a:t>67.0</a:t>
+            </a:r>
+            <a:pPr indent="0" marL="0">
+              <a:buNone/>
+            </a:pPr>
+            <a:r>
+              <a:rPr lang="en-US" sz="2000" b="1" dirty="0">
+                <a:solidFill>
+                  <a:srgbClr val="FFFFFF"/>
+                </a:solidFill>
+                <a:latin typeface="Meiryo" pitchFamily="34" charset="0"/>
+                <a:ea typeface="Meiryo" pitchFamily="34" charset="-122"/>
+                <a:cs typeface="Meiryo" pitchFamily="34" charset="-120"/>
+              </a:rPr>
+              <a:t> %</a:t>
+            </a:r>
+            <a:endParaRPr lang="en-US" sz="4800" dirty="0"/>
+          </a:p>
+        </p:txBody>
+      </p:sp>
+      <p:sp>
+        <p:nvSpPr>
+          <p:cNvPr id="8" name="Text 6"/>
+          <p:cNvSpPr txBox="1"/>
+          <p:nvPr/>
+        </p:nvSpPr>
+        <p:spPr>
+          <a:xfrm>
+            <a:off x="868680" y="3657600"/>
+            <a:ext cx="2814218" cy="365760"/>
+          </a:xfrm>
+          <a:prstGeom prst="rect">
+            <a:avLst/>
+          </a:prstGeom>
+          <a:noFill/>
+          <a:ln/>
+        </p:spPr>
+        <p:txBody>
+          <a:bodyPr wrap="square" lIns="0" tIns="0" rIns="0" bIns="0" rtlCol="0" anchor="t"/>
+          <a:lstStyle/>
+          <a:p>
+            <a:pPr indent="0" marL="0">
+              <a:buNone/>
+            </a:pPr>
+            <a:r>
+              <a:rPr lang="en-US" sz="1500" dirty="0">
+                <a:solidFill>
+                  <a:srgbClr val="FFFFFF"/>
+                </a:solidFill>
+                <a:latin typeface="Meiryo" pitchFamily="34" charset="0"/>
+                <a:ea typeface="Meiryo" pitchFamily="34" charset="-122"/>
+                <a:cs typeface="Meiryo" pitchFamily="34" charset="-120"/>
+              </a:rPr>
+              <a:t>計画ペース 66.7%（+0.3pt）</a:t>
+            </a:r>
+            <a:endParaRPr lang="en-US" sz="1500" dirty="0"/>
+          </a:p>
+        </p:txBody>
+      </p:sp>
+      <p:sp>
+        <p:nvSpPr>
+          <p:cNvPr id="9" name="Shape 7"/>
+          <p:cNvSpPr/>
+          <p:nvPr/>
+        </p:nvSpPr>
+        <p:spPr>
+          <a:xfrm>
+            <a:off x="4368698" y="1783080"/>
+            <a:ext cx="3454298" cy="2514600"/>
+          </a:xfrm>
+          <a:prstGeom prst="roundRect">
+            <a:avLst>
+              <a:gd name="adj" fmla="val 4364"/>
             </a:avLst>
           </a:prstGeom>
           <a:solidFill>
@@ -1901,14 +2003,14 @@
       </p:sp>
       <p:sp>
         <p:nvSpPr>
-          <p:cNvPr id="6" name="Text 4"/>
+          <p:cNvPr id="10" name="Text 8"/>
           <p:cNvSpPr txBox="1"/>
           <p:nvPr/>
         </p:nvSpPr>
         <p:spPr>
           <a:xfrm>
-            <a:off x="914400" y="1965960"/>
-            <a:ext cx="6126480" cy="320040"/>
+            <a:off x="4688738" y="2057400"/>
+            <a:ext cx="2814218" cy="365760"/>
           </a:xfrm>
           <a:prstGeom prst="rect">
             <a:avLst/>
@@ -1924,7 +2026,7 @@
               <a:buNone/>
             </a:pPr>
             <a:r>
-              <a:rPr lang="en-US" sz="1400" dirty="0">
+              <a:rPr lang="en-US" sz="1600" b="1" dirty="0">
                 <a:solidFill>
                   <a:srgbClr val="6B6E80"/>
                 </a:solidFill>
@@ -1932,22 +2034,22 @@
                 <a:ea typeface="Meiryo" pitchFamily="34" charset="-122"/>
                 <a:cs typeface="Meiryo" pitchFamily="34" charset="-120"/>
               </a:rPr>
-              <a:t>年間目標 2,500万円 に対する達成率</a:t>
-            </a:r>
-            <a:endParaRPr lang="en-US" sz="1400" dirty="0"/>
-          </a:p>
-        </p:txBody>
-      </p:sp>
-      <p:sp>
-        <p:nvSpPr>
-          <p:cNvPr id="7" name="Text 5"/>
+              <a:t>このペースでの年間見込み</a:t>
+            </a:r>
+            <a:endParaRPr lang="en-US" sz="1600" dirty="0"/>
+          </a:p>
+        </p:txBody>
+      </p:sp>
+      <p:sp>
+        <p:nvSpPr>
+          <p:cNvPr id="11" name="Text 9"/>
           <p:cNvSpPr txBox="1"/>
           <p:nvPr/>
         </p:nvSpPr>
         <p:spPr>
           <a:xfrm>
-            <a:off x="914400" y="2286000"/>
-            <a:ext cx="3566160" cy="1188720"/>
+            <a:off x="4688738" y="2514600"/>
+            <a:ext cx="2997098" cy="1005840"/>
           </a:xfrm>
           <a:prstGeom prst="rect">
             <a:avLst/>
@@ -1963,44 +2065,58 @@
               <a:buNone/>
             </a:pPr>
             <a:r>
-              <a:rPr lang="en-US" sz="6600" b="1" dirty="0">
-                <a:solidFill>
-                  <a:srgbClr val="C8315F"/>
-                </a:solidFill>
-                <a:latin typeface="Meiryo" pitchFamily="34" charset="0"/>
-                <a:ea typeface="Meiryo" pitchFamily="34" charset="-122"/>
-                <a:cs typeface="Meiryo" pitchFamily="34" charset="-120"/>
-              </a:rPr>
-              <a:t>57.6</a:t>
+              <a:rPr lang="en-US" sz="2000" b="1" dirty="0">
+                <a:solidFill>
+                  <a:srgbClr val="2B2D42"/>
+                </a:solidFill>
+                <a:latin typeface="Meiryo" pitchFamily="34" charset="0"/>
+                <a:ea typeface="Meiryo" pitchFamily="34" charset="-122"/>
+                <a:cs typeface="Meiryo" pitchFamily="34" charset="-120"/>
+              </a:rPr>
+              <a:t>約</a:t>
             </a:r>
             <a:pPr indent="0" marL="0">
               <a:buNone/>
             </a:pPr>
             <a:r>
-              <a:rPr lang="en-US" sz="3000" b="1" dirty="0">
-                <a:solidFill>
-                  <a:srgbClr val="C8315F"/>
-                </a:solidFill>
-                <a:latin typeface="Meiryo" pitchFamily="34" charset="0"/>
-                <a:ea typeface="Meiryo" pitchFamily="34" charset="-122"/>
-                <a:cs typeface="Meiryo" pitchFamily="34" charset="-120"/>
-              </a:rPr>
-              <a:t> %</a:t>
-            </a:r>
-            <a:endParaRPr lang="en-US" sz="6600" dirty="0"/>
-          </a:p>
-        </p:txBody>
-      </p:sp>
-      <p:sp>
-        <p:nvSpPr>
-          <p:cNvPr id="8" name="Text 6"/>
+              <a:rPr lang="en-US" sz="4800" b="1" dirty="0">
+                <a:solidFill>
+                  <a:srgbClr val="2B2D42"/>
+                </a:solidFill>
+                <a:latin typeface="Meiryo" pitchFamily="34" charset="0"/>
+                <a:ea typeface="Meiryo" pitchFamily="34" charset="-122"/>
+                <a:cs typeface="Meiryo" pitchFamily="34" charset="-120"/>
+              </a:rPr>
+              <a:t>2,510</a:t>
+            </a:r>
+            <a:pPr indent="0" marL="0">
+              <a:buNone/>
+            </a:pPr>
+            <a:r>
+              <a:rPr lang="en-US" sz="2000" b="1" dirty="0">
+                <a:solidFill>
+                  <a:srgbClr val="2B2D42"/>
+                </a:solidFill>
+                <a:latin typeface="Meiryo" pitchFamily="34" charset="0"/>
+                <a:ea typeface="Meiryo" pitchFamily="34" charset="-122"/>
+                <a:cs typeface="Meiryo" pitchFamily="34" charset="-120"/>
+              </a:rPr>
+              <a:t> 万円</a:t>
+            </a:r>
+            <a:endParaRPr lang="en-US" sz="2000" dirty="0"/>
+          </a:p>
+        </p:txBody>
+      </p:sp>
+      <p:sp>
+        <p:nvSpPr>
+          <p:cNvPr id="12" name="Text 10"/>
           <p:cNvSpPr txBox="1"/>
           <p:nvPr/>
         </p:nvSpPr>
         <p:spPr>
           <a:xfrm>
-            <a:off x="4572000" y="2926080"/>
-            <a:ext cx="2468880" cy="502920"/>
+            <a:off x="4688738" y="3657600"/>
+            <a:ext cx="2814218" cy="365760"/>
           </a:xfrm>
           <a:prstGeom prst="rect">
             <a:avLst/>
@@ -2009,28 +2125,14 @@
           <a:ln/>
         </p:spPr>
         <p:txBody>
-          <a:bodyPr wrap="square" lIns="0" tIns="0" rIns="0" bIns="0" rtlCol="0" anchor="b"/>
+          <a:bodyPr wrap="square" lIns="0" tIns="0" rIns="0" bIns="0" rtlCol="0" anchor="t"/>
           <a:lstStyle/>
           <a:p>
             <a:pPr indent="0" marL="0">
               <a:buNone/>
             </a:pPr>
             <a:r>
-              <a:rPr lang="en-US" sz="1600" dirty="0">
-                <a:solidFill>
-                  <a:srgbClr val="6B6E80"/>
-                </a:solidFill>
-                <a:latin typeface="Meiryo" pitchFamily="34" charset="0"/>
-                <a:ea typeface="Meiryo" pitchFamily="34" charset="-122"/>
-                <a:cs typeface="Meiryo" pitchFamily="34" charset="-120"/>
-              </a:rPr>
-              <a:t>累計 </a:t>
-            </a:r>
-            <a:pPr indent="0" marL="0">
-              <a:buNone/>
-            </a:pPr>
-            <a:r>
-              <a:rPr lang="en-US" sz="2400" b="1" dirty="0">
+              <a:rPr lang="en-US" sz="1500" dirty="0">
                 <a:solidFill>
                   <a:srgbClr val="2B2D42"/>
                 </a:solidFill>
@@ -2038,352 +2140,26 @@
                 <a:ea typeface="Meiryo" pitchFamily="34" charset="-122"/>
                 <a:cs typeface="Meiryo" pitchFamily="34" charset="-120"/>
               </a:rPr>
-              <a:t>1,441</a:t>
-            </a:r>
-            <a:pPr indent="0" marL="0">
-              <a:buNone/>
-            </a:pPr>
-            <a:r>
-              <a:rPr lang="en-US" sz="1600" dirty="0">
-                <a:solidFill>
-                  <a:srgbClr val="6B6E80"/>
-                </a:solidFill>
-                <a:latin typeface="Meiryo" pitchFamily="34" charset="0"/>
-                <a:ea typeface="Meiryo" pitchFamily="34" charset="-122"/>
-                <a:cs typeface="Meiryo" pitchFamily="34" charset="-120"/>
-              </a:rPr>
-              <a:t> 万円</a:t>
-            </a:r>
-            <a:endParaRPr lang="en-US" sz="1600" dirty="0"/>
-          </a:p>
-        </p:txBody>
-      </p:sp>
-      <p:sp>
-        <p:nvSpPr>
-          <p:cNvPr id="9" name="Shape 7"/>
+              <a:t>年間目標 2,500万円</a:t>
+            </a:r>
+            <a:endParaRPr lang="en-US" sz="1500" dirty="0"/>
+          </a:p>
+        </p:txBody>
+      </p:sp>
+      <p:sp>
+        <p:nvSpPr>
+          <p:cNvPr id="13" name="Shape 11"/>
           <p:cNvSpPr/>
           <p:nvPr/>
         </p:nvSpPr>
         <p:spPr>
           <a:xfrm>
-            <a:off x="914400" y="4069080"/>
-            <a:ext cx="6126480" cy="365760"/>
-          </a:xfrm>
-          <a:prstGeom prst="rect">
-            <a:avLst/>
-          </a:prstGeom>
-          <a:solidFill>
-            <a:srgbClr val="FFFFFF"/>
-          </a:solidFill>
-          <a:ln w="12700">
-            <a:solidFill>
-              <a:srgbClr val="E3E4EA"/>
-            </a:solidFill>
-            <a:prstDash val="solid"/>
-          </a:ln>
-        </p:spPr>
-      </p:sp>
-      <p:sp>
-        <p:nvSpPr>
-          <p:cNvPr id="10" name="Shape 8"/>
-          <p:cNvSpPr/>
-          <p:nvPr/>
-        </p:nvSpPr>
-        <p:spPr>
-          <a:xfrm>
-            <a:off x="914400" y="4069080"/>
-            <a:ext cx="3528852" cy="365760"/>
-          </a:xfrm>
-          <a:prstGeom prst="rect">
-            <a:avLst/>
-          </a:prstGeom>
-          <a:solidFill>
-            <a:srgbClr val="C8315F"/>
-          </a:solidFill>
-          <a:ln w="12700">
-            <a:solidFill>
-              <a:srgbClr val="C8315F"/>
-            </a:solidFill>
-            <a:prstDash val="solid"/>
-          </a:ln>
-        </p:spPr>
-      </p:sp>
-      <p:sp>
-        <p:nvSpPr>
-          <p:cNvPr id="11" name="Shape 9"/>
-          <p:cNvSpPr/>
-          <p:nvPr/>
-        </p:nvSpPr>
-        <p:spPr>
-          <a:xfrm>
-            <a:off x="5000762" y="3840480"/>
-            <a:ext cx="0" cy="822960"/>
-          </a:xfrm>
-          <a:prstGeom prst="line">
-            <a:avLst/>
-          </a:prstGeom>
-          <a:noFill/>
-          <a:ln w="19050">
-            <a:solidFill>
-              <a:srgbClr val="2B2D42"/>
-            </a:solidFill>
-            <a:prstDash val="dash"/>
-          </a:ln>
-        </p:spPr>
-      </p:sp>
-      <p:sp>
-        <p:nvSpPr>
-          <p:cNvPr id="12" name="Text 10"/>
-          <p:cNvSpPr txBox="1"/>
-          <p:nvPr/>
-        </p:nvSpPr>
-        <p:spPr>
-          <a:xfrm>
-            <a:off x="3263402" y="3593592"/>
-            <a:ext cx="1645920" cy="274320"/>
-          </a:xfrm>
-          <a:prstGeom prst="rect">
-            <a:avLst/>
-          </a:prstGeom>
-          <a:noFill/>
-          <a:ln/>
-        </p:spPr>
-        <p:txBody>
-          <a:bodyPr wrap="square" lIns="0" tIns="0" rIns="0" bIns="0" rtlCol="0" anchor="t"/>
-          <a:lstStyle/>
-          <a:p>
-            <a:pPr algn="r" indent="0" marL="0">
-              <a:buNone/>
-            </a:pPr>
-            <a:r>
-              <a:rPr lang="en-US" sz="1300" b="1" dirty="0">
-                <a:solidFill>
-                  <a:srgbClr val="C8315F"/>
-                </a:solidFill>
-                <a:latin typeface="Meiryo" pitchFamily="34" charset="0"/>
-                <a:ea typeface="Meiryo" pitchFamily="34" charset="-122"/>
-                <a:cs typeface="Meiryo" pitchFamily="34" charset="-120"/>
-              </a:rPr>
-              <a:t>差 −9.1pt</a:t>
-            </a:r>
-            <a:endParaRPr lang="en-US" sz="1300" dirty="0"/>
-          </a:p>
-        </p:txBody>
-      </p:sp>
-      <p:sp>
-        <p:nvSpPr>
-          <p:cNvPr id="13" name="Text 11"/>
-          <p:cNvSpPr txBox="1"/>
-          <p:nvPr/>
-        </p:nvSpPr>
-        <p:spPr>
-          <a:xfrm>
-            <a:off x="5092202" y="4480560"/>
-            <a:ext cx="1948678" cy="502920"/>
-          </a:xfrm>
-          <a:prstGeom prst="rect">
-            <a:avLst/>
-          </a:prstGeom>
-          <a:noFill/>
-          <a:ln/>
-        </p:spPr>
-        <p:txBody>
-          <a:bodyPr wrap="square" lIns="0" tIns="0" rIns="0" bIns="0" rtlCol="0" anchor="t"/>
-          <a:lstStyle/>
-          <a:p>
-            <a:pPr indent="0" marL="0">
-              <a:buNone/>
-            </a:pPr>
-            <a:r>
-              <a:rPr lang="en-US" sz="1200" b="1" dirty="0">
-                <a:solidFill>
-                  <a:srgbClr val="2B2D42"/>
-                </a:solidFill>
-                <a:latin typeface="Meiryo" pitchFamily="34" charset="0"/>
-                <a:ea typeface="Meiryo" pitchFamily="34" charset="-122"/>
-                <a:cs typeface="Meiryo" pitchFamily="34" charset="-120"/>
-              </a:rPr>
-              <a:t>計画ペース 66.7%</a:t>
-            </a:r>
-            <a:endParaRPr lang="en-US" sz="1200" dirty="0"/>
-          </a:p>
-          <a:p>
-            <a:pPr indent="0" marL="0">
-              <a:buNone/>
-            </a:pPr>
-            <a:r>
-              <a:rPr lang="en-US" sz="1200" dirty="0">
-                <a:solidFill>
-                  <a:srgbClr val="2B2D42"/>
-                </a:solidFill>
-                <a:latin typeface="Meiryo" pitchFamily="34" charset="0"/>
-                <a:ea typeface="Meiryo" pitchFamily="34" charset="-122"/>
-                <a:cs typeface="Meiryo" pitchFamily="34" charset="-120"/>
-              </a:rPr>
-              <a:t>（8/12ヶ月）</a:t>
-            </a:r>
-            <a:endParaRPr lang="en-US" sz="1200" dirty="0"/>
-          </a:p>
-        </p:txBody>
-      </p:sp>
-      <p:sp>
-        <p:nvSpPr>
-          <p:cNvPr id="14" name="Shape 12"/>
-          <p:cNvSpPr/>
-          <p:nvPr/>
-        </p:nvSpPr>
-        <p:spPr>
-          <a:xfrm>
-            <a:off x="914400" y="5120640"/>
-            <a:ext cx="6126480" cy="457200"/>
+            <a:off x="8188757" y="1783080"/>
+            <a:ext cx="3454298" cy="2514600"/>
           </a:xfrm>
           <a:prstGeom prst="roundRect">
             <a:avLst>
-              <a:gd name="adj" fmla="val 12000"/>
-            </a:avLst>
-          </a:prstGeom>
-          <a:solidFill>
-            <a:srgbClr val="FFFFFF"/>
-          </a:solidFill>
-          <a:ln w="12700">
-            <a:solidFill>
-              <a:srgbClr val="E3E4EA"/>
-            </a:solidFill>
-            <a:prstDash val="solid"/>
-          </a:ln>
-        </p:spPr>
-      </p:sp>
-      <p:sp>
-        <p:nvSpPr>
-          <p:cNvPr id="15" name="Text 13"/>
-          <p:cNvSpPr txBox="1"/>
-          <p:nvPr/>
-        </p:nvSpPr>
-        <p:spPr>
-          <a:xfrm>
-            <a:off x="1097280" y="5120640"/>
-            <a:ext cx="5760720" cy="457200"/>
-          </a:xfrm>
-          <a:prstGeom prst="rect">
-            <a:avLst/>
-          </a:prstGeom>
-          <a:noFill/>
-          <a:ln/>
-        </p:spPr>
-        <p:txBody>
-          <a:bodyPr wrap="square" lIns="0" tIns="0" rIns="0" bIns="0" rtlCol="0" anchor="ctr"/>
-          <a:lstStyle/>
-          <a:p>
-            <a:pPr indent="0" marL="0">
-              <a:buNone/>
-            </a:pPr>
-            <a:r>
-              <a:rPr lang="en-US" sz="1300" dirty="0">
-                <a:solidFill>
-                  <a:srgbClr val="6B6E80"/>
-                </a:solidFill>
-                <a:latin typeface="Meiryo" pitchFamily="34" charset="0"/>
-                <a:ea typeface="Meiryo" pitchFamily="34" charset="-122"/>
-                <a:cs typeface="Meiryo" pitchFamily="34" charset="-120"/>
-              </a:rPr>
-              <a:t>参考：売買仲介手数料込みなら 1,675万円（67.0%）</a:t>
-            </a:r>
-            <a:endParaRPr lang="en-US" sz="1300" dirty="0"/>
-          </a:p>
-        </p:txBody>
-      </p:sp>
-      <p:sp>
-        <p:nvSpPr>
-          <p:cNvPr id="16" name="Text 14"/>
-          <p:cNvSpPr txBox="1"/>
-          <p:nvPr/>
-        </p:nvSpPr>
-        <p:spPr>
-          <a:xfrm>
-            <a:off x="914400" y="5687568"/>
-            <a:ext cx="6126480" cy="228600"/>
-          </a:xfrm>
-          <a:prstGeom prst="rect">
-            <a:avLst/>
-          </a:prstGeom>
-          <a:noFill/>
-          <a:ln/>
-        </p:spPr>
-        <p:txBody>
-          <a:bodyPr wrap="square" lIns="0" tIns="0" rIns="0" bIns="0" rtlCol="0" anchor="t"/>
-          <a:lstStyle/>
-          <a:p>
-            <a:pPr indent="0" marL="0">
-              <a:buNone/>
-            </a:pPr>
-            <a:r>
-              <a:rPr lang="en-US" sz="1100" dirty="0">
-                <a:solidFill>
-                  <a:srgbClr val="6B6E80"/>
-                </a:solidFill>
-                <a:latin typeface="Meiryo" pitchFamily="34" charset="0"/>
-                <a:ea typeface="Meiryo" pitchFamily="34" charset="-122"/>
-                <a:cs typeface="Meiryo" pitchFamily="34" charset="-120"/>
-              </a:rPr>
-              <a:t>※計画ペースは年度を1〜12月と仮定して算出</a:t>
-            </a:r>
-            <a:endParaRPr lang="en-US" sz="1100" dirty="0"/>
-          </a:p>
-        </p:txBody>
-      </p:sp>
-      <p:sp>
-        <p:nvSpPr>
-          <p:cNvPr id="17" name="Text 15"/>
-          <p:cNvSpPr txBox="1"/>
-          <p:nvPr/>
-        </p:nvSpPr>
-        <p:spPr>
-          <a:xfrm>
-            <a:off x="7772400" y="1691640"/>
-            <a:ext cx="3870655" cy="274320"/>
-          </a:xfrm>
-          <a:prstGeom prst="rect">
-            <a:avLst/>
-          </a:prstGeom>
-          <a:noFill/>
-          <a:ln/>
-        </p:spPr>
-        <p:txBody>
-          <a:bodyPr wrap="square" lIns="0" tIns="0" rIns="0" bIns="0" rtlCol="0" anchor="t"/>
-          <a:lstStyle/>
-          <a:p>
-            <a:pPr indent="0" marL="0">
-              <a:buNone/>
-            </a:pPr>
-            <a:r>
-              <a:rPr lang="en-US" sz="1300" dirty="0">
-                <a:solidFill>
-                  <a:srgbClr val="6B6E80"/>
-                </a:solidFill>
-                <a:latin typeface="Meiryo" pitchFamily="34" charset="0"/>
-                <a:ea typeface="Meiryo" pitchFamily="34" charset="-122"/>
-                <a:cs typeface="Meiryo" pitchFamily="34" charset="-120"/>
-              </a:rPr>
-              <a:t>残り4ヶ月（9〜12月）に必要な売上</a:t>
-            </a:r>
-            <a:endParaRPr lang="en-US" sz="1300" dirty="0"/>
-          </a:p>
-        </p:txBody>
-      </p:sp>
-      <p:sp>
-        <p:nvSpPr>
-          <p:cNvPr id="18" name="Shape 16"/>
-          <p:cNvSpPr/>
-          <p:nvPr/>
-        </p:nvSpPr>
-        <p:spPr>
-          <a:xfrm>
-            <a:off x="7772400" y="2103120"/>
-            <a:ext cx="3870655" cy="685800"/>
-          </a:xfrm>
-          <a:prstGeom prst="roundRect">
-            <a:avLst>
-              <a:gd name="adj" fmla="val 13333"/>
+              <a:gd name="adj" fmla="val 4364"/>
             </a:avLst>
           </a:prstGeom>
           <a:solidFill>
@@ -2399,14 +2175,14 @@
       </p:sp>
       <p:sp>
         <p:nvSpPr>
-          <p:cNvPr id="19" name="Text 17"/>
+          <p:cNvPr id="14" name="Text 12"/>
           <p:cNvSpPr txBox="1"/>
           <p:nvPr/>
         </p:nvSpPr>
         <p:spPr>
           <a:xfrm>
-            <a:off x="8001000" y="2103120"/>
-            <a:ext cx="2011680" cy="685800"/>
+            <a:off x="8508797" y="2057400"/>
+            <a:ext cx="2814218" cy="365760"/>
           </a:xfrm>
           <a:prstGeom prst="rect">
             <a:avLst/>
@@ -2415,37 +2191,37 @@
           <a:ln/>
         </p:spPr>
         <p:txBody>
-          <a:bodyPr wrap="square" lIns="0" tIns="0" rIns="0" bIns="0" rtlCol="0" anchor="ctr"/>
+          <a:bodyPr wrap="square" lIns="0" tIns="0" rIns="0" bIns="0" rtlCol="0" anchor="t"/>
           <a:lstStyle/>
           <a:p>
             <a:pPr indent="0" marL="0">
               <a:buNone/>
             </a:pPr>
             <a:r>
-              <a:rPr lang="en-US" sz="1400" b="1" dirty="0">
-                <a:solidFill>
-                  <a:srgbClr val="2B2D42"/>
-                </a:solidFill>
-                <a:latin typeface="Meiryo" pitchFamily="34" charset="0"/>
-                <a:ea typeface="Meiryo" pitchFamily="34" charset="-122"/>
-                <a:cs typeface="Meiryo" pitchFamily="34" charset="-120"/>
-              </a:rPr>
-              <a:t>これまでの月平均</a:t>
-            </a:r>
-            <a:endParaRPr lang="en-US" sz="1400" dirty="0"/>
-          </a:p>
-        </p:txBody>
-      </p:sp>
-      <p:sp>
-        <p:nvSpPr>
-          <p:cNvPr id="20" name="Text 18"/>
+              <a:rPr lang="en-US" sz="1600" b="1" dirty="0">
+                <a:solidFill>
+                  <a:srgbClr val="6B6E80"/>
+                </a:solidFill>
+                <a:latin typeface="Meiryo" pitchFamily="34" charset="0"/>
+                <a:ea typeface="Meiryo" pitchFamily="34" charset="-122"/>
+                <a:cs typeface="Meiryo" pitchFamily="34" charset="-120"/>
+              </a:rPr>
+              <a:t>昨年の年間売上</a:t>
+            </a:r>
+            <a:endParaRPr lang="en-US" sz="1600" dirty="0"/>
+          </a:p>
+        </p:txBody>
+      </p:sp>
+      <p:sp>
+        <p:nvSpPr>
+          <p:cNvPr id="15" name="Text 13"/>
           <p:cNvSpPr txBox="1"/>
           <p:nvPr/>
         </p:nvSpPr>
         <p:spPr>
           <a:xfrm>
-            <a:off x="9875520" y="2103120"/>
-            <a:ext cx="1584655" cy="685800"/>
+            <a:off x="8508797" y="2514600"/>
+            <a:ext cx="2997098" cy="1005840"/>
           </a:xfrm>
           <a:prstGeom prst="rect">
             <a:avLst/>
@@ -2454,14 +2230,14 @@
           <a:ln/>
         </p:spPr>
         <p:txBody>
-          <a:bodyPr wrap="square" lIns="0" tIns="0" rIns="0" bIns="0" rtlCol="0" anchor="ctr"/>
-          <a:lstStyle/>
-          <a:p>
-            <a:pPr algn="r" indent="0" marL="0">
-              <a:buNone/>
-            </a:pPr>
-            <a:r>
-              <a:rPr lang="en-US" sz="3400" b="1" dirty="0">
+          <a:bodyPr wrap="square" lIns="0" tIns="0" rIns="0" bIns="0" rtlCol="0" anchor="b"/>
+          <a:lstStyle/>
+          <a:p>
+            <a:pPr indent="0" marL="0">
+              <a:buNone/>
+            </a:pPr>
+            <a:r>
+              <a:rPr lang="en-US" sz="4800" b="1" dirty="0">
                 <a:solidFill>
                   <a:srgbClr val="2B2D42"/>
                 </a:solidFill>
@@ -2469,13 +2245,13 @@
                 <a:ea typeface="Meiryo" pitchFamily="34" charset="-122"/>
                 <a:cs typeface="Meiryo" pitchFamily="34" charset="-120"/>
               </a:rPr>
-              <a:t>180</a:t>
-            </a:r>
-            <a:pPr algn="r" indent="0" marL="0">
-              <a:buNone/>
-            </a:pPr>
-            <a:r>
-              <a:rPr lang="en-US" sz="1300" dirty="0">
+              <a:t>2,400</a:t>
+            </a:r>
+            <a:pPr indent="0" marL="0">
+              <a:buNone/>
+            </a:pPr>
+            <a:r>
+              <a:rPr lang="en-US" sz="2000" b="1" dirty="0">
                 <a:solidFill>
                   <a:srgbClr val="2B2D42"/>
                 </a:solidFill>
@@ -2485,32 +2261,71 @@
               </a:rPr>
               <a:t> 万円</a:t>
             </a:r>
-            <a:endParaRPr lang="en-US" sz="3400" dirty="0"/>
-          </a:p>
-        </p:txBody>
-      </p:sp>
-      <p:sp>
-        <p:nvSpPr>
-          <p:cNvPr id="21" name="Shape 19"/>
+            <a:endParaRPr lang="en-US" sz="4800" dirty="0"/>
+          </a:p>
+        </p:txBody>
+      </p:sp>
+      <p:sp>
+        <p:nvSpPr>
+          <p:cNvPr id="16" name="Text 14"/>
+          <p:cNvSpPr txBox="1"/>
+          <p:nvPr/>
+        </p:nvSpPr>
+        <p:spPr>
+          <a:xfrm>
+            <a:off x="8508797" y="3657600"/>
+            <a:ext cx="2814218" cy="365760"/>
+          </a:xfrm>
+          <a:prstGeom prst="rect">
+            <a:avLst/>
+          </a:prstGeom>
+          <a:noFill/>
+          <a:ln/>
+        </p:spPr>
+        <p:txBody>
+          <a:bodyPr wrap="square" lIns="0" tIns="0" rIns="0" bIns="0" rtlCol="0" anchor="t"/>
+          <a:lstStyle/>
+          <a:p>
+            <a:pPr indent="0" marL="0">
+              <a:buNone/>
+            </a:pPr>
+            <a:r>
+              <a:rPr lang="en-US" sz="1500" dirty="0">
+                <a:solidFill>
+                  <a:srgbClr val="2B2D42"/>
+                </a:solidFill>
+                <a:latin typeface="Meiryo" pitchFamily="34" charset="0"/>
+                <a:ea typeface="Meiryo" pitchFamily="34" charset="-122"/>
+                <a:cs typeface="Meiryo" pitchFamily="34" charset="-120"/>
+              </a:rPr>
+              <a:t>見込みは昨年より 約+110万円</a:t>
+            </a:r>
+            <a:endParaRPr lang="en-US" sz="1500" dirty="0"/>
+          </a:p>
+        </p:txBody>
+      </p:sp>
+      <p:sp>
+        <p:nvSpPr>
+          <p:cNvPr id="17" name="Shape 15"/>
           <p:cNvSpPr/>
           <p:nvPr/>
         </p:nvSpPr>
         <p:spPr>
           <a:xfrm>
-            <a:off x="7772400" y="3017520"/>
-            <a:ext cx="3870655" cy="685800"/>
+            <a:off x="548640" y="4663440"/>
+            <a:ext cx="11094415" cy="685800"/>
           </a:xfrm>
           <a:prstGeom prst="roundRect">
             <a:avLst>
-              <a:gd name="adj" fmla="val 13333"/>
+              <a:gd name="adj" fmla="val 16000"/>
             </a:avLst>
           </a:prstGeom>
           <a:solidFill>
-            <a:srgbClr val="F4F5F8"/>
+            <a:srgbClr val="E6F4ED"/>
           </a:solidFill>
           <a:ln w="12700">
             <a:solidFill>
-              <a:srgbClr val="F4F5F8"/>
+              <a:srgbClr val="E6F4ED"/>
             </a:solidFill>
             <a:prstDash val="solid"/>
           </a:ln>
@@ -2518,14 +2333,14 @@
       </p:sp>
       <p:sp>
         <p:nvSpPr>
-          <p:cNvPr id="22" name="Text 20"/>
+          <p:cNvPr id="18" name="Text 16"/>
           <p:cNvSpPr txBox="1"/>
           <p:nvPr/>
         </p:nvSpPr>
         <p:spPr>
           <a:xfrm>
-            <a:off x="8001000" y="3017520"/>
-            <a:ext cx="2011680" cy="685800"/>
+            <a:off x="868680" y="4663440"/>
+            <a:ext cx="10454335" cy="685800"/>
           </a:xfrm>
           <a:prstGeom prst="rect">
             <a:avLst/>
@@ -2541,7 +2356,21 @@
               <a:buNone/>
             </a:pPr>
             <a:r>
-              <a:rPr lang="en-US" sz="1400" b="1" dirty="0">
+              <a:rPr lang="en-US" sz="1800" b="1" dirty="0">
+                <a:solidFill>
+                  <a:srgbClr val="2E8B62"/>
+                </a:solidFill>
+                <a:latin typeface="Meiryo" pitchFamily="34" charset="0"/>
+                <a:ea typeface="Meiryo" pitchFamily="34" charset="-122"/>
+                <a:cs typeface="Meiryo" pitchFamily="34" charset="-120"/>
+              </a:rPr>
+              <a:t>残り4ヶ月は 月206万円 で目標達成</a:t>
+            </a:r>
+            <a:pPr indent="0" marL="0">
+              <a:buNone/>
+            </a:pPr>
+            <a:r>
+              <a:rPr lang="en-US" sz="1800" dirty="0">
                 <a:solidFill>
                   <a:srgbClr val="2B2D42"/>
                 </a:solidFill>
@@ -2549,22 +2378,22 @@
                 <a:ea typeface="Meiryo" pitchFamily="34" charset="-122"/>
                 <a:cs typeface="Meiryo" pitchFamily="34" charset="-120"/>
               </a:rPr>
-              <a:t>当初の月目標</a:t>
-            </a:r>
-            <a:endParaRPr lang="en-US" sz="1400" dirty="0"/>
-          </a:p>
-        </p:txBody>
-      </p:sp>
-      <p:sp>
-        <p:nvSpPr>
-          <p:cNvPr id="23" name="Text 21"/>
+              <a:t>（これまでの月平均 209万円）</a:t>
+            </a:r>
+            <a:endParaRPr lang="en-US" sz="1800" dirty="0"/>
+          </a:p>
+        </p:txBody>
+      </p:sp>
+      <p:sp>
+        <p:nvSpPr>
+          <p:cNvPr id="19" name="Text 17"/>
           <p:cNvSpPr txBox="1"/>
           <p:nvPr/>
         </p:nvSpPr>
         <p:spPr>
           <a:xfrm>
-            <a:off x="9875520" y="3017520"/>
-            <a:ext cx="1584655" cy="685800"/>
+            <a:off x="548640" y="5532120"/>
+            <a:ext cx="11094415" cy="228600"/>
           </a:xfrm>
           <a:prstGeom prst="rect">
             <a:avLst/>
@@ -2573,253 +2402,24 @@
           <a:ln/>
         </p:spPr>
         <p:txBody>
-          <a:bodyPr wrap="square" lIns="0" tIns="0" rIns="0" bIns="0" rtlCol="0" anchor="ctr"/>
-          <a:lstStyle/>
-          <a:p>
-            <a:pPr algn="r" indent="0" marL="0">
-              <a:buNone/>
-            </a:pPr>
-            <a:r>
-              <a:rPr lang="en-US" sz="3400" b="1" dirty="0">
-                <a:solidFill>
-                  <a:srgbClr val="2B2D42"/>
-                </a:solidFill>
-                <a:latin typeface="Meiryo" pitchFamily="34" charset="0"/>
-                <a:ea typeface="Meiryo" pitchFamily="34" charset="-122"/>
-                <a:cs typeface="Meiryo" pitchFamily="34" charset="-120"/>
-              </a:rPr>
-              <a:t>210</a:t>
-            </a:r>
-            <a:pPr algn="r" indent="0" marL="0">
-              <a:buNone/>
-            </a:pPr>
-            <a:r>
-              <a:rPr lang="en-US" sz="1300" dirty="0">
-                <a:solidFill>
-                  <a:srgbClr val="2B2D42"/>
-                </a:solidFill>
-                <a:latin typeface="Meiryo" pitchFamily="34" charset="0"/>
-                <a:ea typeface="Meiryo" pitchFamily="34" charset="-122"/>
-                <a:cs typeface="Meiryo" pitchFamily="34" charset="-120"/>
-              </a:rPr>
-              <a:t> 万円</a:t>
-            </a:r>
-            <a:endParaRPr lang="en-US" sz="3400" dirty="0"/>
-          </a:p>
-        </p:txBody>
-      </p:sp>
-      <p:sp>
-        <p:nvSpPr>
-          <p:cNvPr id="24" name="Shape 22"/>
-          <p:cNvSpPr/>
-          <p:nvPr/>
-        </p:nvSpPr>
-        <p:spPr>
-          <a:xfrm>
-            <a:off x="7772400" y="3931920"/>
-            <a:ext cx="3870655" cy="685800"/>
-          </a:xfrm>
-          <a:prstGeom prst="roundRect">
-            <a:avLst>
-              <a:gd name="adj" fmla="val 13333"/>
-            </a:avLst>
-          </a:prstGeom>
-          <a:solidFill>
-            <a:srgbClr val="C8315F"/>
-          </a:solidFill>
-          <a:ln w="12700">
-            <a:solidFill>
-              <a:srgbClr val="C8315F"/>
-            </a:solidFill>
-            <a:prstDash val="solid"/>
-          </a:ln>
-        </p:spPr>
-      </p:sp>
-      <p:sp>
-        <p:nvSpPr>
-          <p:cNvPr id="25" name="Text 23"/>
-          <p:cNvSpPr txBox="1"/>
-          <p:nvPr/>
-        </p:nvSpPr>
-        <p:spPr>
-          <a:xfrm>
-            <a:off x="8001000" y="3931920"/>
-            <a:ext cx="2011680" cy="685800"/>
-          </a:xfrm>
-          <a:prstGeom prst="rect">
-            <a:avLst/>
-          </a:prstGeom>
-          <a:noFill/>
-          <a:ln/>
-        </p:spPr>
-        <p:txBody>
-          <a:bodyPr wrap="square" lIns="0" tIns="0" rIns="0" bIns="0" rtlCol="0" anchor="ctr"/>
+          <a:bodyPr wrap="square" lIns="0" tIns="0" rIns="0" bIns="0" rtlCol="0" anchor="t"/>
           <a:lstStyle/>
           <a:p>
             <a:pPr indent="0" marL="0">
               <a:buNone/>
             </a:pPr>
             <a:r>
-              <a:rPr lang="en-US" sz="1400" b="1" dirty="0">
-                <a:solidFill>
-                  <a:srgbClr val="FFFFFF"/>
-                </a:solidFill>
-                <a:latin typeface="Meiryo" pitchFamily="34" charset="0"/>
-                <a:ea typeface="Meiryo" pitchFamily="34" charset="-122"/>
-                <a:cs typeface="Meiryo" pitchFamily="34" charset="-120"/>
-              </a:rPr>
-              <a:t>これから必要な月額</a:t>
-            </a:r>
-            <a:endParaRPr lang="en-US" sz="1400" dirty="0"/>
-          </a:p>
-        </p:txBody>
-      </p:sp>
-      <p:sp>
-        <p:nvSpPr>
-          <p:cNvPr id="26" name="Text 24"/>
-          <p:cNvSpPr txBox="1"/>
-          <p:nvPr/>
-        </p:nvSpPr>
-        <p:spPr>
-          <a:xfrm>
-            <a:off x="9875520" y="3931920"/>
-            <a:ext cx="1584655" cy="685800"/>
-          </a:xfrm>
-          <a:prstGeom prst="rect">
-            <a:avLst/>
-          </a:prstGeom>
-          <a:noFill/>
-          <a:ln/>
-        </p:spPr>
-        <p:txBody>
-          <a:bodyPr wrap="square" lIns="0" tIns="0" rIns="0" bIns="0" rtlCol="0" anchor="ctr"/>
-          <a:lstStyle/>
-          <a:p>
-            <a:pPr algn="r" indent="0" marL="0">
-              <a:buNone/>
-            </a:pPr>
-            <a:r>
-              <a:rPr lang="en-US" sz="3400" b="1" dirty="0">
-                <a:solidFill>
-                  <a:srgbClr val="FFFFFF"/>
-                </a:solidFill>
-                <a:latin typeface="Meiryo" pitchFamily="34" charset="0"/>
-                <a:ea typeface="Meiryo" pitchFamily="34" charset="-122"/>
-                <a:cs typeface="Meiryo" pitchFamily="34" charset="-120"/>
-              </a:rPr>
-              <a:t>265</a:t>
-            </a:r>
-            <a:pPr algn="r" indent="0" marL="0">
-              <a:buNone/>
-            </a:pPr>
-            <a:r>
-              <a:rPr lang="en-US" sz="1300" dirty="0">
-                <a:solidFill>
-                  <a:srgbClr val="FFFFFF"/>
-                </a:solidFill>
-                <a:latin typeface="Meiryo" pitchFamily="34" charset="0"/>
-                <a:ea typeface="Meiryo" pitchFamily="34" charset="-122"/>
-                <a:cs typeface="Meiryo" pitchFamily="34" charset="-120"/>
-              </a:rPr>
-              <a:t> 万円</a:t>
-            </a:r>
-            <a:endParaRPr lang="en-US" sz="3400" dirty="0"/>
-          </a:p>
-        </p:txBody>
-      </p:sp>
-      <p:sp>
-        <p:nvSpPr>
-          <p:cNvPr id="27" name="Text 25"/>
-          <p:cNvSpPr txBox="1"/>
-          <p:nvPr/>
-        </p:nvSpPr>
-        <p:spPr>
-          <a:xfrm>
-            <a:off x="7772400" y="4892040"/>
-            <a:ext cx="3870655" cy="731520"/>
-          </a:xfrm>
-          <a:prstGeom prst="rect">
-            <a:avLst/>
-          </a:prstGeom>
-          <a:noFill/>
-          <a:ln/>
-        </p:spPr>
-        <p:txBody>
-          <a:bodyPr wrap="square" lIns="0" tIns="0" rIns="0" bIns="0" rtlCol="0" anchor="t"/>
-          <a:lstStyle/>
-          <a:p>
-            <a:pPr indent="0" marL="0">
-              <a:lnSpc>
-                <a:spcPct val="120000"/>
-              </a:lnSpc>
-              <a:buNone/>
-            </a:pPr>
-            <a:r>
-              <a:rPr lang="en-US" sz="1400" b="1" dirty="0">
-                <a:solidFill>
-                  <a:srgbClr val="2B2D42"/>
-                </a:solidFill>
-                <a:latin typeface="Meiryo" pitchFamily="34" charset="0"/>
-                <a:ea typeface="Meiryo" pitchFamily="34" charset="-122"/>
-                <a:cs typeface="Meiryo" pitchFamily="34" charset="-120"/>
-              </a:rPr>
-              <a:t>残り 1,059万円 ÷ 4ヶ月 ＝ 月265万円</a:t>
-            </a:r>
-            <a:endParaRPr lang="en-US" sz="1400" dirty="0"/>
-          </a:p>
-          <a:p>
-            <a:pPr indent="0" marL="0">
-              <a:lnSpc>
-                <a:spcPct val="120000"/>
-              </a:lnSpc>
-              <a:buNone/>
-            </a:pPr>
-            <a:r>
-              <a:rPr lang="en-US" sz="1400" b="1" dirty="0">
-                <a:solidFill>
-                  <a:srgbClr val="2B2D42"/>
-                </a:solidFill>
-                <a:latin typeface="Meiryo" pitchFamily="34" charset="0"/>
-                <a:ea typeface="Meiryo" pitchFamily="34" charset="-122"/>
-                <a:cs typeface="Meiryo" pitchFamily="34" charset="-120"/>
-              </a:rPr>
-              <a:t>→ 月平均より </a:t>
-            </a:r>
-            <a:pPr indent="0" marL="0">
-              <a:lnSpc>
-                <a:spcPct val="120000"/>
-              </a:lnSpc>
-              <a:buNone/>
-            </a:pPr>
-            <a:r>
-              <a:rPr lang="en-US" sz="1400" b="1" dirty="0">
-                <a:solidFill>
-                  <a:srgbClr val="C8315F"/>
-                </a:solidFill>
-                <a:latin typeface="Meiryo" pitchFamily="34" charset="0"/>
-                <a:ea typeface="Meiryo" pitchFamily="34" charset="-122"/>
-                <a:cs typeface="Meiryo" pitchFamily="34" charset="-120"/>
-              </a:rPr>
-              <a:t>約85万円</a:t>
-            </a:r>
-            <a:pPr indent="0" marL="0">
-              <a:lnSpc>
-                <a:spcPct val="120000"/>
-              </a:lnSpc>
-              <a:buNone/>
-            </a:pPr>
-            <a:r>
-              <a:rPr lang="en-US" sz="1400" b="1" dirty="0">
-                <a:solidFill>
-                  <a:srgbClr val="2B2D42"/>
-                </a:solidFill>
-                <a:latin typeface="Meiryo" pitchFamily="34" charset="0"/>
-                <a:ea typeface="Meiryo" pitchFamily="34" charset="-122"/>
-                <a:cs typeface="Meiryo" pitchFamily="34" charset="-120"/>
-              </a:rPr>
-              <a:t> の上積みが必要</a:t>
-            </a:r>
-            <a:endParaRPr lang="en-US" sz="1400" dirty="0"/>
+              <a:rPr lang="en-US" sz="1100" dirty="0">
+                <a:solidFill>
+                  <a:srgbClr val="6B6E80"/>
+                </a:solidFill>
+                <a:latin typeface="Meiryo" pitchFamily="34" charset="0"/>
+                <a:ea typeface="Meiryo" pitchFamily="34" charset="-122"/>
+                <a:cs typeface="Meiryo" pitchFamily="34" charset="-120"/>
+              </a:rPr>
+              <a:t>※売上は売買仲介手数料を含む。計画ペースは年度を1〜12月と仮定して算出</a:t>
+            </a:r>
+            <a:endParaRPr lang="en-US" sz="1100" dirty="0"/>
           </a:p>
         </p:txBody>
       </p:sp>
@@ -2888,7 +2488,7 @@
                 <a:ea typeface="Meiryo" pitchFamily="34" charset="-122"/>
                 <a:cs typeface="Meiryo" pitchFamily="34" charset="-120"/>
               </a:rPr>
-              <a:t>② なぜ遅れているか</a:t>
+              <a:t>② 伸びている理由</a:t>
             </a:r>
             <a:endParaRPr lang="en-US" sz="1200" dirty="0"/>
           </a:p>
@@ -2903,7 +2503,7 @@
         <p:spPr>
           <a:xfrm>
             <a:off x="548640" y="777240"/>
-            <a:ext cx="11094415" cy="548640"/>
+            <a:ext cx="11094415" cy="594360"/>
           </a:xfrm>
           <a:prstGeom prst="rect">
             <a:avLst/>
@@ -2919,7 +2519,7 @@
               <a:buNone/>
             </a:pPr>
             <a:r>
-              <a:rPr lang="en-US" sz="2800" b="1" dirty="0">
+              <a:rPr lang="en-US" sz="3000" b="1" dirty="0">
                 <a:solidFill>
                   <a:srgbClr val="2B2D42"/>
                 </a:solidFill>
@@ -2927,9 +2527,9 @@
                 <a:ea typeface="Meiryo" pitchFamily="34" charset="-122"/>
                 <a:cs typeface="Meiryo" pitchFamily="34" charset="-120"/>
               </a:rPr>
-              <a:t>営業に使える時間が3つの業務に奪われている</a:t>
-            </a:r>
-            <a:endParaRPr lang="en-US" sz="2800" dirty="0"/>
+              <a:t>伸びを引っ張っているのは AD・付帯商品</a:t>
+            </a:r>
+            <a:endParaRPr lang="en-US" sz="3000" dirty="0"/>
           </a:p>
         </p:txBody>
       </p:sp>
@@ -2941,7 +2541,7 @@
         </p:nvSpPr>
         <p:spPr>
           <a:xfrm>
-            <a:off x="10545775" y="6172200"/>
+            <a:off x="10545775" y="6217920"/>
             <a:ext cx="1097280" cy="228600"/>
           </a:xfrm>
           <a:prstGeom prst="rect">
@@ -2974,14 +2574,41 @@
       </p:sp>
       <p:sp>
         <p:nvSpPr>
-          <p:cNvPr id="5" name="Text 3"/>
+          <p:cNvPr id="5" name="Shape 3"/>
+          <p:cNvSpPr/>
+          <p:nvPr/>
+        </p:nvSpPr>
+        <p:spPr>
+          <a:xfrm>
+            <a:off x="548640" y="1645920"/>
+            <a:ext cx="6949440" cy="4297680"/>
+          </a:xfrm>
+          <a:prstGeom prst="roundRect">
+            <a:avLst>
+              <a:gd name="adj" fmla="val 2553"/>
+            </a:avLst>
+          </a:prstGeom>
+          <a:solidFill>
+            <a:srgbClr val="FFF3DD"/>
+          </a:solidFill>
+          <a:ln w="12700">
+            <a:solidFill>
+              <a:srgbClr val="FFF3DD"/>
+            </a:solidFill>
+            <a:prstDash val="solid"/>
+          </a:ln>
+        </p:spPr>
+      </p:sp>
+      <p:sp>
+        <p:nvSpPr>
+          <p:cNvPr id="6" name="Text 4"/>
           <p:cNvSpPr txBox="1"/>
           <p:nvPr/>
         </p:nvSpPr>
         <p:spPr>
           <a:xfrm>
-            <a:off x="548640" y="1645920"/>
-            <a:ext cx="3332378" cy="274320"/>
+            <a:off x="1005840" y="1645920"/>
+            <a:ext cx="6035040" cy="4297680"/>
           </a:xfrm>
           <a:prstGeom prst="rect">
             <a:avLst/>
@@ -2990,37 +2617,71 @@
           <a:ln/>
         </p:spPr>
         <p:txBody>
-          <a:bodyPr wrap="square" lIns="0" tIns="0" rIns="0" bIns="0" rtlCol="0" anchor="t"/>
+          <a:bodyPr wrap="square" lIns="0" tIns="0" rIns="0" bIns="0" rtlCol="0" anchor="ctr"/>
           <a:lstStyle/>
           <a:p>
             <a:pPr indent="0" marL="0">
               <a:buNone/>
             </a:pPr>
             <a:r>
-              <a:rPr lang="en-US" sz="1300" b="1" dirty="0">
-                <a:solidFill>
-                  <a:srgbClr val="6B6E80"/>
-                </a:solidFill>
-                <a:latin typeface="Meiryo" pitchFamily="34" charset="0"/>
-                <a:ea typeface="Meiryo" pitchFamily="34" charset="-122"/>
-                <a:cs typeface="Meiryo" pitchFamily="34" charset="-120"/>
-              </a:rPr>
-              <a:t>課題（時間を奪っているもの）</a:t>
-            </a:r>
-            <a:endParaRPr lang="en-US" sz="1300" dirty="0"/>
-          </a:p>
-        </p:txBody>
-      </p:sp>
-      <p:sp>
-        <p:nvSpPr>
-          <p:cNvPr id="6" name="Text 4"/>
+              <a:rPr lang="en-US" sz="1800" b="1" dirty="0">
+                <a:solidFill>
+                  <a:srgbClr val="C77700"/>
+                </a:solidFill>
+                <a:latin typeface="Meiryo" pitchFamily="34" charset="0"/>
+                <a:ea typeface="Meiryo" pitchFamily="34" charset="-122"/>
+                <a:cs typeface="Meiryo" pitchFamily="34" charset="-120"/>
+              </a:rPr>
+              <a:t>積み上げ棒グラフ：要記入</a:t>
+            </a:r>
+            <a:endParaRPr lang="en-US" sz="1400" dirty="0"/>
+          </a:p>
+          <a:p>
+            <a:pPr indent="0" marL="0">
+              <a:buNone/>
+            </a:pPr>
+            <a:r>
+              <a:rPr lang="en-US" sz="1400" dirty="0">
+                <a:solidFill>
+                  <a:srgbClr val="2B2D42"/>
+                </a:solidFill>
+                <a:latin typeface="Meiryo" pitchFamily="34" charset="0"/>
+                <a:ea typeface="Meiryo" pitchFamily="34" charset="-122"/>
+                <a:cs typeface="Meiryo" pitchFamily="34" charset="-120"/>
+              </a:rPr>
+              <a:t>build.js の MIX に、昨年・今年（1〜8月）の</a:t>
+            </a:r>
+            <a:endParaRPr lang="en-US" sz="1400" dirty="0"/>
+          </a:p>
+          <a:p>
+            <a:pPr indent="0" marL="0">
+              <a:buNone/>
+            </a:pPr>
+            <a:r>
+              <a:rPr lang="en-US" sz="1400" dirty="0">
+                <a:solidFill>
+                  <a:srgbClr val="2B2D42"/>
+                </a:solidFill>
+                <a:latin typeface="Meiryo" pitchFamily="34" charset="0"/>
+                <a:ea typeface="Meiryo" pitchFamily="34" charset="-122"/>
+                <a:cs typeface="Meiryo" pitchFamily="34" charset="-120"/>
+              </a:rPr>
+              <a:t>売上合計・AD・付帯商品の金額を入れて再生成</a:t>
+            </a:r>
+            <a:endParaRPr lang="en-US" sz="1400" dirty="0"/>
+          </a:p>
+        </p:txBody>
+      </p:sp>
+      <p:sp>
+        <p:nvSpPr>
+          <p:cNvPr id="7" name="Text 5"/>
           <p:cNvSpPr txBox="1"/>
           <p:nvPr/>
         </p:nvSpPr>
         <p:spPr>
           <a:xfrm>
-            <a:off x="4429658" y="1645920"/>
-            <a:ext cx="3332378" cy="274320"/>
+            <a:off x="7955280" y="1645920"/>
+            <a:ext cx="3687775" cy="320040"/>
           </a:xfrm>
           <a:prstGeom prst="rect">
             <a:avLst/>
@@ -3036,7 +2697,7 @@
               <a:buNone/>
             </a:pPr>
             <a:r>
-              <a:rPr lang="en-US" sz="1300" b="1" dirty="0">
+              <a:rPr lang="en-US" sz="1400" b="1" dirty="0">
                 <a:solidFill>
                   <a:srgbClr val="6B6E80"/>
                 </a:solidFill>
@@ -3044,48 +2705,9 @@
                 <a:ea typeface="Meiryo" pitchFamily="34" charset="-122"/>
                 <a:cs typeface="Meiryo" pitchFamily="34" charset="-120"/>
               </a:rPr>
-              <a:t>打ち手</a:t>
-            </a:r>
-            <a:endParaRPr lang="en-US" sz="1300" dirty="0"/>
-          </a:p>
-        </p:txBody>
-      </p:sp>
-      <p:sp>
-        <p:nvSpPr>
-          <p:cNvPr id="7" name="Text 5"/>
-          <p:cNvSpPr txBox="1"/>
-          <p:nvPr/>
-        </p:nvSpPr>
-        <p:spPr>
-          <a:xfrm>
-            <a:off x="8310677" y="1645920"/>
-            <a:ext cx="3332378" cy="274320"/>
-          </a:xfrm>
-          <a:prstGeom prst="rect">
-            <a:avLst/>
-          </a:prstGeom>
-          <a:noFill/>
-          <a:ln/>
-        </p:spPr>
-        <p:txBody>
-          <a:bodyPr wrap="square" lIns="0" tIns="0" rIns="0" bIns="0" rtlCol="0" anchor="t"/>
-          <a:lstStyle/>
-          <a:p>
-            <a:pPr indent="0" marL="0">
-              <a:buNone/>
-            </a:pPr>
-            <a:r>
-              <a:rPr lang="en-US" sz="1300" b="1" dirty="0">
-                <a:solidFill>
-                  <a:srgbClr val="6B6E80"/>
-                </a:solidFill>
-                <a:latin typeface="Meiryo" pitchFamily="34" charset="0"/>
-                <a:ea typeface="Meiryo" pitchFamily="34" charset="-122"/>
-                <a:cs typeface="Meiryo" pitchFamily="34" charset="-120"/>
-              </a:rPr>
-              <a:t>狙う効果</a:t>
-            </a:r>
-            <a:endParaRPr lang="en-US" sz="1300" dirty="0"/>
+              <a:t>昨年同期（1〜8月）からの上がり幅</a:t>
+            </a:r>
+            <a:endParaRPr lang="en-US" sz="1400" dirty="0"/>
           </a:p>
         </p:txBody>
       </p:sp>
@@ -3097,12 +2719,12 @@
         </p:nvSpPr>
         <p:spPr>
           <a:xfrm>
-            <a:off x="548640" y="2057400"/>
-            <a:ext cx="3332378" cy="868680"/>
+            <a:off x="7955280" y="2148840"/>
+            <a:ext cx="3687775" cy="1097280"/>
           </a:xfrm>
           <a:prstGeom prst="roundRect">
             <a:avLst>
-              <a:gd name="adj" fmla="val 10526"/>
+              <a:gd name="adj" fmla="val 10000"/>
             </a:avLst>
           </a:prstGeom>
           <a:solidFill>
@@ -3124,20 +2746,18 @@
         </p:nvSpPr>
         <p:spPr>
           <a:xfrm>
-            <a:off x="4429658" y="2057400"/>
-            <a:ext cx="3332378" cy="868680"/>
-          </a:xfrm>
-          <a:prstGeom prst="roundRect">
-            <a:avLst>
-              <a:gd name="adj" fmla="val 10526"/>
-            </a:avLst>
+            <a:off x="8229600" y="2368296"/>
+            <a:ext cx="182880" cy="182880"/>
+          </a:xfrm>
+          <a:prstGeom prst="ellipse">
+            <a:avLst/>
           </a:prstGeom>
           <a:solidFill>
-            <a:srgbClr val="FBE9EF"/>
+            <a:srgbClr val="C8315F"/>
           </a:solidFill>
           <a:ln w="12700">
             <a:solidFill>
-              <a:srgbClr val="FBE9EF"/>
+              <a:srgbClr val="C8315F"/>
             </a:solidFill>
             <a:prstDash val="solid"/>
           </a:ln>
@@ -3145,249 +2765,96 @@
       </p:sp>
       <p:sp>
         <p:nvSpPr>
-          <p:cNvPr id="10" name="Shape 8"/>
+          <p:cNvPr id="10" name="Text 8"/>
+          <p:cNvSpPr txBox="1"/>
+          <p:nvPr/>
+        </p:nvSpPr>
+        <p:spPr>
+          <a:xfrm>
+            <a:off x="8503920" y="2286000"/>
+            <a:ext cx="2864815" cy="365760"/>
+          </a:xfrm>
+          <a:prstGeom prst="rect">
+            <a:avLst/>
+          </a:prstGeom>
+          <a:noFill/>
+          <a:ln/>
+        </p:spPr>
+        <p:txBody>
+          <a:bodyPr wrap="square" lIns="0" tIns="0" rIns="0" bIns="0" rtlCol="0" anchor="t"/>
+          <a:lstStyle/>
+          <a:p>
+            <a:pPr indent="0" marL="0">
+              <a:buNone/>
+            </a:pPr>
+            <a:r>
+              <a:rPr lang="en-US" sz="1600" b="1" dirty="0">
+                <a:solidFill>
+                  <a:srgbClr val="2B2D42"/>
+                </a:solidFill>
+                <a:latin typeface="Meiryo" pitchFamily="34" charset="0"/>
+                <a:ea typeface="Meiryo" pitchFamily="34" charset="-122"/>
+                <a:cs typeface="Meiryo" pitchFamily="34" charset="-120"/>
+              </a:rPr>
+              <a:t>AD</a:t>
+            </a:r>
+            <a:endParaRPr lang="en-US" sz="1600" dirty="0"/>
+          </a:p>
+        </p:txBody>
+      </p:sp>
+      <p:sp>
+        <p:nvSpPr>
+          <p:cNvPr id="11" name="Text 9"/>
+          <p:cNvSpPr txBox="1"/>
+          <p:nvPr/>
+        </p:nvSpPr>
+        <p:spPr>
+          <a:xfrm>
+            <a:off x="8229600" y="2606040"/>
+            <a:ext cx="3139135" cy="548640"/>
+          </a:xfrm>
+          <a:prstGeom prst="rect">
+            <a:avLst/>
+          </a:prstGeom>
+          <a:noFill/>
+          <a:ln/>
+        </p:spPr>
+        <p:txBody>
+          <a:bodyPr wrap="square" lIns="0" tIns="0" rIns="0" bIns="0" rtlCol="0" anchor="b"/>
+          <a:lstStyle/>
+          <a:p>
+            <a:pPr indent="0" marL="0">
+              <a:buNone/>
+            </a:pPr>
+            <a:r>
+              <a:rPr lang="en-US" sz="2200" b="1" dirty="0">
+                <a:solidFill>
+                  <a:srgbClr val="C77700"/>
+                </a:solidFill>
+                <a:latin typeface="Meiryo" pitchFamily="34" charset="0"/>
+                <a:ea typeface="Meiryo" pitchFamily="34" charset="-122"/>
+                <a:cs typeface="Meiryo" pitchFamily="34" charset="-120"/>
+              </a:rPr>
+              <a:t>要記入</a:t>
+            </a:r>
+            <a:endParaRPr lang="en-US" sz="2200" dirty="0"/>
+          </a:p>
+        </p:txBody>
+      </p:sp>
+      <p:sp>
+        <p:nvSpPr>
+          <p:cNvPr id="12" name="Shape 10"/>
           <p:cNvSpPr/>
           <p:nvPr/>
         </p:nvSpPr>
         <p:spPr>
           <a:xfrm>
-            <a:off x="8310677" y="2057400"/>
-            <a:ext cx="3332378" cy="868680"/>
+            <a:off x="7955280" y="3520440"/>
+            <a:ext cx="3687775" cy="1097280"/>
           </a:xfrm>
           <a:prstGeom prst="roundRect">
             <a:avLst>
-              <a:gd name="adj" fmla="val 10526"/>
-            </a:avLst>
-          </a:prstGeom>
-          <a:solidFill>
-            <a:srgbClr val="E6F4ED"/>
-          </a:solidFill>
-          <a:ln w="12700">
-            <a:solidFill>
-              <a:srgbClr val="E6F4ED"/>
-            </a:solidFill>
-            <a:prstDash val="solid"/>
-          </a:ln>
-        </p:spPr>
-      </p:sp>
-      <p:sp>
-        <p:nvSpPr>
-          <p:cNvPr id="11" name="Text 9"/>
-          <p:cNvSpPr txBox="1"/>
-          <p:nvPr/>
-        </p:nvSpPr>
-        <p:spPr>
-          <a:xfrm>
-            <a:off x="777240" y="2057400"/>
-            <a:ext cx="2875178" cy="868680"/>
-          </a:xfrm>
-          <a:prstGeom prst="rect">
-            <a:avLst/>
-          </a:prstGeom>
-          <a:noFill/>
-          <a:ln/>
-        </p:spPr>
-        <p:txBody>
-          <a:bodyPr wrap="square" lIns="0" tIns="0" rIns="0" bIns="0" rtlCol="0" anchor="ctr"/>
-          <a:lstStyle/>
-          <a:p>
-            <a:pPr indent="0" marL="0">
-              <a:spcAft>
-                <a:spcPts val="200"/>
-              </a:spcAft>
-              <a:buNone/>
-            </a:pPr>
-            <a:r>
-              <a:rPr lang="en-US" sz="1500" b="1" dirty="0">
-                <a:solidFill>
-                  <a:srgbClr val="2B2D42"/>
-                </a:solidFill>
-                <a:latin typeface="Meiryo" pitchFamily="34" charset="0"/>
-                <a:ea typeface="Meiryo" pitchFamily="34" charset="-122"/>
-                <a:cs typeface="Meiryo" pitchFamily="34" charset="-120"/>
-              </a:rPr>
-              <a:t>会計業務に追われている</a:t>
-            </a:r>
-            <a:endParaRPr lang="en-US" sz="1500" dirty="0"/>
-          </a:p>
-          <a:p>
-            <a:pPr indent="0" marL="0">
-              <a:spcAft>
-                <a:spcPts val="200"/>
-              </a:spcAft>
-              <a:buNone/>
-            </a:pPr>
-            <a:r>
-              <a:rPr lang="en-US" sz="1200" dirty="0">
-                <a:solidFill>
-                  <a:srgbClr val="6B6E80"/>
-                </a:solidFill>
-                <a:latin typeface="Meiryo" pitchFamily="34" charset="0"/>
-                <a:ea typeface="Meiryo" pitchFamily="34" charset="-122"/>
-                <a:cs typeface="Meiryo" pitchFamily="34" charset="-120"/>
-              </a:rPr>
-              <a:t>毎月 約40時間が会計作業に</a:t>
-            </a:r>
-            <a:endParaRPr lang="en-US" sz="1500" dirty="0"/>
-          </a:p>
-        </p:txBody>
-      </p:sp>
-      <p:sp>
-        <p:nvSpPr>
-          <p:cNvPr id="12" name="Text 10"/>
-          <p:cNvSpPr txBox="1"/>
-          <p:nvPr/>
-        </p:nvSpPr>
-        <p:spPr>
-          <a:xfrm>
-            <a:off x="4658258" y="2057400"/>
-            <a:ext cx="2875178" cy="868680"/>
-          </a:xfrm>
-          <a:prstGeom prst="rect">
-            <a:avLst/>
-          </a:prstGeom>
-          <a:noFill/>
-          <a:ln/>
-        </p:spPr>
-        <p:txBody>
-          <a:bodyPr wrap="square" lIns="0" tIns="0" rIns="0" bIns="0" rtlCol="0" anchor="ctr"/>
-          <a:lstStyle/>
-          <a:p>
-            <a:pPr indent="0" marL="0">
-              <a:buNone/>
-            </a:pPr>
-            <a:r>
-              <a:rPr lang="en-US" sz="1500" b="1" dirty="0">
-                <a:solidFill>
-                  <a:srgbClr val="C8315F"/>
-                </a:solidFill>
-                <a:latin typeface="Meiryo" pitchFamily="34" charset="0"/>
-                <a:ea typeface="Meiryo" pitchFamily="34" charset="-122"/>
-                <a:cs typeface="Meiryo" pitchFamily="34" charset="-120"/>
-              </a:rPr>
-              <a:t>01  </a:t>
-            </a:r>
-            <a:pPr indent="0" marL="0">
-              <a:buNone/>
-            </a:pPr>
-            <a:r>
-              <a:rPr lang="en-US" sz="1500" b="1" dirty="0">
-                <a:solidFill>
-                  <a:srgbClr val="2B2D42"/>
-                </a:solidFill>
-                <a:latin typeface="Meiryo" pitchFamily="34" charset="0"/>
-                <a:ea typeface="Meiryo" pitchFamily="34" charset="-122"/>
-                <a:cs typeface="Meiryo" pitchFamily="34" charset="-120"/>
-              </a:rPr>
-              <a:t>会計業務を外注する</a:t>
-            </a:r>
-            <a:endParaRPr lang="en-US" sz="1500" dirty="0"/>
-          </a:p>
-        </p:txBody>
-      </p:sp>
-      <p:sp>
-        <p:nvSpPr>
-          <p:cNvPr id="13" name="Text 11"/>
-          <p:cNvSpPr txBox="1"/>
-          <p:nvPr/>
-        </p:nvSpPr>
-        <p:spPr>
-          <a:xfrm>
-            <a:off x="8539277" y="2057400"/>
-            <a:ext cx="2875178" cy="868680"/>
-          </a:xfrm>
-          <a:prstGeom prst="rect">
-            <a:avLst/>
-          </a:prstGeom>
-          <a:noFill/>
-          <a:ln/>
-        </p:spPr>
-        <p:txBody>
-          <a:bodyPr wrap="square" lIns="0" tIns="0" rIns="0" bIns="0" rtlCol="0" anchor="ctr"/>
-          <a:lstStyle/>
-          <a:p>
-            <a:pPr indent="0" marL="0">
-              <a:buNone/>
-            </a:pPr>
-            <a:r>
-              <a:rPr lang="en-US" sz="1500" b="1" dirty="0">
-                <a:solidFill>
-                  <a:srgbClr val="2E8B62"/>
-                </a:solidFill>
-                <a:latin typeface="Meiryo" pitchFamily="34" charset="0"/>
-                <a:ea typeface="Meiryo" pitchFamily="34" charset="-122"/>
-                <a:cs typeface="Meiryo" pitchFamily="34" charset="-120"/>
-              </a:rPr>
-              <a:t>月40時間を営業に回す</a:t>
-            </a:r>
-            <a:endParaRPr lang="en-US" sz="1500" dirty="0"/>
-          </a:p>
-        </p:txBody>
-      </p:sp>
-      <p:sp>
-        <p:nvSpPr>
-          <p:cNvPr id="14" name="Shape 12"/>
-          <p:cNvSpPr/>
-          <p:nvPr/>
-        </p:nvSpPr>
-        <p:spPr>
-          <a:xfrm>
-            <a:off x="4018178" y="2354580"/>
-            <a:ext cx="274320" cy="274320"/>
-          </a:xfrm>
-          <a:prstGeom prst="rightArrow">
-            <a:avLst/>
-          </a:prstGeom>
-          <a:solidFill>
-            <a:srgbClr val="F2B8CA"/>
-          </a:solidFill>
-          <a:ln w="12700">
-            <a:solidFill>
-              <a:srgbClr val="F2B8CA"/>
-            </a:solidFill>
-            <a:prstDash val="solid"/>
-          </a:ln>
-        </p:spPr>
-      </p:sp>
-      <p:sp>
-        <p:nvSpPr>
-          <p:cNvPr id="15" name="Shape 13"/>
-          <p:cNvSpPr/>
-          <p:nvPr/>
-        </p:nvSpPr>
-        <p:spPr>
-          <a:xfrm>
-            <a:off x="7899197" y="2354580"/>
-            <a:ext cx="274320" cy="274320"/>
-          </a:xfrm>
-          <a:prstGeom prst="rightArrow">
-            <a:avLst/>
-          </a:prstGeom>
-          <a:solidFill>
-            <a:srgbClr val="F2B8CA"/>
-          </a:solidFill>
-          <a:ln w="12700">
-            <a:solidFill>
-              <a:srgbClr val="F2B8CA"/>
-            </a:solidFill>
-            <a:prstDash val="solid"/>
-          </a:ln>
-        </p:spPr>
-      </p:sp>
-      <p:sp>
-        <p:nvSpPr>
-          <p:cNvPr id="16" name="Shape 14"/>
-          <p:cNvSpPr/>
-          <p:nvPr/>
-        </p:nvSpPr>
-        <p:spPr>
-          <a:xfrm>
-            <a:off x="548640" y="3200400"/>
-            <a:ext cx="3332378" cy="868680"/>
-          </a:xfrm>
-          <a:prstGeom prst="roundRect">
-            <a:avLst>
-              <a:gd name="adj" fmla="val 10526"/>
+              <a:gd name="adj" fmla="val 10000"/>
             </a:avLst>
           </a:prstGeom>
           <a:solidFill>
@@ -3403,26 +2870,24 @@
       </p:sp>
       <p:sp>
         <p:nvSpPr>
-          <p:cNvPr id="17" name="Shape 15"/>
+          <p:cNvPr id="13" name="Shape 11"/>
           <p:cNvSpPr/>
           <p:nvPr/>
         </p:nvSpPr>
         <p:spPr>
           <a:xfrm>
-            <a:off x="4429658" y="3200400"/>
-            <a:ext cx="3332378" cy="868680"/>
-          </a:xfrm>
-          <a:prstGeom prst="roundRect">
-            <a:avLst>
-              <a:gd name="adj" fmla="val 10526"/>
-            </a:avLst>
+            <a:off x="8229600" y="3739896"/>
+            <a:ext cx="182880" cy="182880"/>
+          </a:xfrm>
+          <a:prstGeom prst="ellipse">
+            <a:avLst/>
           </a:prstGeom>
           <a:solidFill>
-            <a:srgbClr val="FBE9EF"/>
+            <a:srgbClr val="E88AA8"/>
           </a:solidFill>
           <a:ln w="12700">
             <a:solidFill>
-              <a:srgbClr val="FBE9EF"/>
+              <a:srgbClr val="E88AA8"/>
             </a:solidFill>
             <a:prstDash val="solid"/>
           </a:ln>
@@ -3430,41 +2895,14 @@
       </p:sp>
       <p:sp>
         <p:nvSpPr>
-          <p:cNvPr id="18" name="Shape 16"/>
-          <p:cNvSpPr/>
-          <p:nvPr/>
-        </p:nvSpPr>
-        <p:spPr>
-          <a:xfrm>
-            <a:off x="8310677" y="3200400"/>
-            <a:ext cx="3332378" cy="868680"/>
-          </a:xfrm>
-          <a:prstGeom prst="roundRect">
-            <a:avLst>
-              <a:gd name="adj" fmla="val 10526"/>
-            </a:avLst>
-          </a:prstGeom>
-          <a:solidFill>
-            <a:srgbClr val="E6F4ED"/>
-          </a:solidFill>
-          <a:ln w="12700">
-            <a:solidFill>
-              <a:srgbClr val="E6F4ED"/>
-            </a:solidFill>
-            <a:prstDash val="solid"/>
-          </a:ln>
-        </p:spPr>
-      </p:sp>
-      <p:sp>
-        <p:nvSpPr>
-          <p:cNvPr id="19" name="Text 17"/>
+          <p:cNvPr id="14" name="Text 12"/>
           <p:cNvSpPr txBox="1"/>
           <p:nvPr/>
         </p:nvSpPr>
         <p:spPr>
           <a:xfrm>
-            <a:off x="777240" y="3200400"/>
-            <a:ext cx="2875178" cy="868680"/>
+            <a:off x="8503920" y="3657600"/>
+            <a:ext cx="2864815" cy="365760"/>
           </a:xfrm>
           <a:prstGeom prst="rect">
             <a:avLst/>
@@ -3473,17 +2911,14 @@
           <a:ln/>
         </p:spPr>
         <p:txBody>
-          <a:bodyPr wrap="square" lIns="0" tIns="0" rIns="0" bIns="0" rtlCol="0" anchor="ctr"/>
+          <a:bodyPr wrap="square" lIns="0" tIns="0" rIns="0" bIns="0" rtlCol="0" anchor="t"/>
           <a:lstStyle/>
           <a:p>
             <a:pPr indent="0" marL="0">
-              <a:spcAft>
-                <a:spcPts val="200"/>
-              </a:spcAft>
-              <a:buNone/>
-            </a:pPr>
-            <a:r>
-              <a:rPr lang="en-US" sz="1500" b="1" dirty="0">
+              <a:buNone/>
+            </a:pPr>
+            <a:r>
+              <a:rPr lang="en-US" sz="1600" b="1" dirty="0">
                 <a:solidFill>
                   <a:srgbClr val="2B2D42"/>
                 </a:solidFill>
@@ -3491,42 +2926,22 @@
                 <a:ea typeface="Meiryo" pitchFamily="34" charset="-122"/>
                 <a:cs typeface="Meiryo" pitchFamily="34" charset="-120"/>
               </a:rPr>
-              <a:t>ポータル掲載が追いつかない</a:t>
-            </a:r>
-            <a:endParaRPr lang="en-US" sz="1500" dirty="0"/>
-          </a:p>
-          <a:p>
-            <a:pPr indent="0" marL="0">
-              <a:spcAft>
-                <a:spcPts val="200"/>
-              </a:spcAft>
-              <a:buNone/>
-            </a:pPr>
-            <a:r>
-              <a:rPr lang="en-US" sz="1200" dirty="0">
-                <a:solidFill>
-                  <a:srgbClr val="6B6E80"/>
-                </a:solidFill>
-                <a:latin typeface="Meiryo" pitchFamily="34" charset="0"/>
-                <a:ea typeface="Meiryo" pitchFamily="34" charset="-122"/>
-                <a:cs typeface="Meiryo" pitchFamily="34" charset="-120"/>
-              </a:rPr>
-              <a:t>集客の要なのに更新の時間がない</a:t>
-            </a:r>
-            <a:endParaRPr lang="en-US" sz="1500" dirty="0"/>
-          </a:p>
-        </p:txBody>
-      </p:sp>
-      <p:sp>
-        <p:nvSpPr>
-          <p:cNvPr id="20" name="Text 18"/>
+              <a:t>付帯商品</a:t>
+            </a:r>
+            <a:endParaRPr lang="en-US" sz="1600" dirty="0"/>
+          </a:p>
+        </p:txBody>
+      </p:sp>
+      <p:sp>
+        <p:nvSpPr>
+          <p:cNvPr id="15" name="Text 13"/>
           <p:cNvSpPr txBox="1"/>
           <p:nvPr/>
         </p:nvSpPr>
         <p:spPr>
           <a:xfrm>
-            <a:off x="4658258" y="3200400"/>
-            <a:ext cx="2875178" cy="868680"/>
+            <a:off x="8229600" y="3977640"/>
+            <a:ext cx="3139135" cy="548640"/>
           </a:xfrm>
           <a:prstGeom prst="rect">
             <a:avLst/>
@@ -3535,68 +2950,37 @@
           <a:ln/>
         </p:spPr>
         <p:txBody>
-          <a:bodyPr wrap="square" lIns="0" tIns="0" rIns="0" bIns="0" rtlCol="0" anchor="ctr"/>
+          <a:bodyPr wrap="square" lIns="0" tIns="0" rIns="0" bIns="0" rtlCol="0" anchor="b"/>
           <a:lstStyle/>
           <a:p>
             <a:pPr indent="0" marL="0">
               <a:buNone/>
             </a:pPr>
             <a:r>
-              <a:rPr lang="en-US" sz="1500" b="1" dirty="0">
-                <a:solidFill>
-                  <a:srgbClr val="C8315F"/>
-                </a:solidFill>
-                <a:latin typeface="Meiryo" pitchFamily="34" charset="0"/>
-                <a:ea typeface="Meiryo" pitchFamily="34" charset="-122"/>
-                <a:cs typeface="Meiryo" pitchFamily="34" charset="-120"/>
-              </a:rPr>
-              <a:t>02  </a:t>
-            </a:r>
-            <a:pPr indent="0" marL="0">
-              <a:buNone/>
-            </a:pPr>
-            <a:r>
-              <a:rPr lang="en-US" sz="1500" b="1" dirty="0">
-                <a:solidFill>
-                  <a:srgbClr val="2B2D42"/>
-                </a:solidFill>
-                <a:latin typeface="Meiryo" pitchFamily="34" charset="0"/>
-                <a:ea typeface="Meiryo" pitchFamily="34" charset="-122"/>
-                <a:cs typeface="Meiryo" pitchFamily="34" charset="-120"/>
-              </a:rPr>
-              <a:t>掲載専任パートを戦力化</a:t>
-            </a:r>
-            <a:endParaRPr lang="en-US" sz="1500" dirty="0"/>
-          </a:p>
-          <a:p>
-            <a:pPr indent="0" marL="0">
-              <a:buNone/>
-            </a:pPr>
-            <a:r>
-              <a:rPr lang="en-US" sz="1500" b="1" dirty="0">
-                <a:solidFill>
-                  <a:srgbClr val="2B2D42"/>
-                </a:solidFill>
-                <a:latin typeface="Meiryo" pitchFamily="34" charset="0"/>
-                <a:ea typeface="Meiryo" pitchFamily="34" charset="-122"/>
-                <a:cs typeface="Meiryo" pitchFamily="34" charset="-120"/>
-              </a:rPr>
-              <a:t>（9/18採用済）</a:t>
-            </a:r>
-            <a:endParaRPr lang="en-US" sz="1500" dirty="0"/>
-          </a:p>
-        </p:txBody>
-      </p:sp>
-      <p:sp>
-        <p:nvSpPr>
-          <p:cNvPr id="21" name="Text 19"/>
+              <a:rPr lang="en-US" sz="2200" b="1" dirty="0">
+                <a:solidFill>
+                  <a:srgbClr val="C77700"/>
+                </a:solidFill>
+                <a:latin typeface="Meiryo" pitchFamily="34" charset="0"/>
+                <a:ea typeface="Meiryo" pitchFamily="34" charset="-122"/>
+                <a:cs typeface="Meiryo" pitchFamily="34" charset="-120"/>
+              </a:rPr>
+              <a:t>要記入</a:t>
+            </a:r>
+            <a:endParaRPr lang="en-US" sz="2200" dirty="0"/>
+          </a:p>
+        </p:txBody>
+      </p:sp>
+      <p:sp>
+        <p:nvSpPr>
+          <p:cNvPr id="16" name="Text 14"/>
           <p:cNvSpPr txBox="1"/>
           <p:nvPr/>
         </p:nvSpPr>
         <p:spPr>
           <a:xfrm>
-            <a:off x="8539277" y="3200400"/>
-            <a:ext cx="2875178" cy="868680"/>
+            <a:off x="7955280" y="4983480"/>
+            <a:ext cx="3687775" cy="822960"/>
           </a:xfrm>
           <a:prstGeom prst="rect">
             <a:avLst/>
@@ -3605,473 +2989,27 @@
           <a:ln/>
         </p:spPr>
         <p:txBody>
-          <a:bodyPr wrap="square" lIns="0" tIns="0" rIns="0" bIns="0" rtlCol="0" anchor="ctr"/>
+          <a:bodyPr wrap="square" lIns="0" tIns="0" rIns="0" bIns="0" rtlCol="0" anchor="t"/>
           <a:lstStyle/>
           <a:p>
             <a:pPr indent="0" marL="0">
+              <a:lnSpc>
+                <a:spcPct val="120000"/>
+              </a:lnSpc>
               <a:buNone/>
             </a:pPr>
             <a:r>
               <a:rPr lang="en-US" sz="1500" b="1" dirty="0">
                 <a:solidFill>
-                  <a:srgbClr val="2E8B62"/>
-                </a:solidFill>
-                <a:latin typeface="Meiryo" pitchFamily="34" charset="0"/>
-                <a:ea typeface="Meiryo" pitchFamily="34" charset="-122"/>
-                <a:cs typeface="Meiryo" pitchFamily="34" charset="-120"/>
-              </a:rPr>
-              <a:t>掲載スピードUP → 反響UP</a:t>
+                  <a:srgbClr val="2B2D42"/>
+                </a:solidFill>
+                <a:latin typeface="Meiryo" pitchFamily="34" charset="0"/>
+                <a:ea typeface="Meiryo" pitchFamily="34" charset="-122"/>
+                <a:cs typeface="Meiryo" pitchFamily="34" charset="-120"/>
+              </a:rPr>
+              <a:t>この伸びを続けるため、営業が接客・提案に使える時間を増やす</a:t>
             </a:r>
             <a:endParaRPr lang="en-US" sz="1500" dirty="0"/>
-          </a:p>
-        </p:txBody>
-      </p:sp>
-      <p:sp>
-        <p:nvSpPr>
-          <p:cNvPr id="22" name="Shape 20"/>
-          <p:cNvSpPr/>
-          <p:nvPr/>
-        </p:nvSpPr>
-        <p:spPr>
-          <a:xfrm>
-            <a:off x="4018178" y="3497580"/>
-            <a:ext cx="274320" cy="274320"/>
-          </a:xfrm>
-          <a:prstGeom prst="rightArrow">
-            <a:avLst/>
-          </a:prstGeom>
-          <a:solidFill>
-            <a:srgbClr val="F2B8CA"/>
-          </a:solidFill>
-          <a:ln w="12700">
-            <a:solidFill>
-              <a:srgbClr val="F2B8CA"/>
-            </a:solidFill>
-            <a:prstDash val="solid"/>
-          </a:ln>
-        </p:spPr>
-      </p:sp>
-      <p:sp>
-        <p:nvSpPr>
-          <p:cNvPr id="23" name="Shape 21"/>
-          <p:cNvSpPr/>
-          <p:nvPr/>
-        </p:nvSpPr>
-        <p:spPr>
-          <a:xfrm>
-            <a:off x="7899197" y="3497580"/>
-            <a:ext cx="274320" cy="274320"/>
-          </a:xfrm>
-          <a:prstGeom prst="rightArrow">
-            <a:avLst/>
-          </a:prstGeom>
-          <a:solidFill>
-            <a:srgbClr val="F2B8CA"/>
-          </a:solidFill>
-          <a:ln w="12700">
-            <a:solidFill>
-              <a:srgbClr val="F2B8CA"/>
-            </a:solidFill>
-            <a:prstDash val="solid"/>
-          </a:ln>
-        </p:spPr>
-      </p:sp>
-      <p:sp>
-        <p:nvSpPr>
-          <p:cNvPr id="24" name="Shape 22"/>
-          <p:cNvSpPr/>
-          <p:nvPr/>
-        </p:nvSpPr>
-        <p:spPr>
-          <a:xfrm>
-            <a:off x="548640" y="4343400"/>
-            <a:ext cx="3332378" cy="868680"/>
-          </a:xfrm>
-          <a:prstGeom prst="roundRect">
-            <a:avLst>
-              <a:gd name="adj" fmla="val 10526"/>
-            </a:avLst>
-          </a:prstGeom>
-          <a:solidFill>
-            <a:srgbClr val="F4F5F8"/>
-          </a:solidFill>
-          <a:ln w="12700">
-            <a:solidFill>
-              <a:srgbClr val="F4F5F8"/>
-            </a:solidFill>
-            <a:prstDash val="solid"/>
-          </a:ln>
-        </p:spPr>
-      </p:sp>
-      <p:sp>
-        <p:nvSpPr>
-          <p:cNvPr id="25" name="Shape 23"/>
-          <p:cNvSpPr/>
-          <p:nvPr/>
-        </p:nvSpPr>
-        <p:spPr>
-          <a:xfrm>
-            <a:off x="4429658" y="4343400"/>
-            <a:ext cx="3332378" cy="868680"/>
-          </a:xfrm>
-          <a:prstGeom prst="roundRect">
-            <a:avLst>
-              <a:gd name="adj" fmla="val 10526"/>
-            </a:avLst>
-          </a:prstGeom>
-          <a:solidFill>
-            <a:srgbClr val="FBE9EF"/>
-          </a:solidFill>
-          <a:ln w="12700">
-            <a:solidFill>
-              <a:srgbClr val="FBE9EF"/>
-            </a:solidFill>
-            <a:prstDash val="solid"/>
-          </a:ln>
-        </p:spPr>
-      </p:sp>
-      <p:sp>
-        <p:nvSpPr>
-          <p:cNvPr id="26" name="Shape 24"/>
-          <p:cNvSpPr/>
-          <p:nvPr/>
-        </p:nvSpPr>
-        <p:spPr>
-          <a:xfrm>
-            <a:off x="8310677" y="4343400"/>
-            <a:ext cx="3332378" cy="868680"/>
-          </a:xfrm>
-          <a:prstGeom prst="roundRect">
-            <a:avLst>
-              <a:gd name="adj" fmla="val 10526"/>
-            </a:avLst>
-          </a:prstGeom>
-          <a:solidFill>
-            <a:srgbClr val="E6F4ED"/>
-          </a:solidFill>
-          <a:ln w="12700">
-            <a:solidFill>
-              <a:srgbClr val="E6F4ED"/>
-            </a:solidFill>
-            <a:prstDash val="solid"/>
-          </a:ln>
-        </p:spPr>
-      </p:sp>
-      <p:sp>
-        <p:nvSpPr>
-          <p:cNvPr id="27" name="Text 25"/>
-          <p:cNvSpPr txBox="1"/>
-          <p:nvPr/>
-        </p:nvSpPr>
-        <p:spPr>
-          <a:xfrm>
-            <a:off x="777240" y="4343400"/>
-            <a:ext cx="2875178" cy="868680"/>
-          </a:xfrm>
-          <a:prstGeom prst="rect">
-            <a:avLst/>
-          </a:prstGeom>
-          <a:noFill/>
-          <a:ln/>
-        </p:spPr>
-        <p:txBody>
-          <a:bodyPr wrap="square" lIns="0" tIns="0" rIns="0" bIns="0" rtlCol="0" anchor="ctr"/>
-          <a:lstStyle/>
-          <a:p>
-            <a:pPr indent="0" marL="0">
-              <a:spcAft>
-                <a:spcPts val="200"/>
-              </a:spcAft>
-              <a:buNone/>
-            </a:pPr>
-            <a:r>
-              <a:rPr lang="en-US" sz="1500" b="1" dirty="0">
-                <a:solidFill>
-                  <a:srgbClr val="2B2D42"/>
-                </a:solidFill>
-                <a:latin typeface="Meiryo" pitchFamily="34" charset="0"/>
-                <a:ea typeface="Meiryo" pitchFamily="34" charset="-122"/>
-                <a:cs typeface="Meiryo" pitchFamily="34" charset="-120"/>
-              </a:rPr>
-              <a:t>クレームで仕事が中断</a:t>
-            </a:r>
-            <a:endParaRPr lang="en-US" sz="1500" dirty="0"/>
-          </a:p>
-          <a:p>
-            <a:pPr indent="0" marL="0">
-              <a:spcAft>
-                <a:spcPts val="200"/>
-              </a:spcAft>
-              <a:buNone/>
-            </a:pPr>
-            <a:r>
-              <a:rPr lang="en-US" sz="1200" dirty="0">
-                <a:solidFill>
-                  <a:srgbClr val="6B6E80"/>
-                </a:solidFill>
-                <a:latin typeface="Meiryo" pitchFamily="34" charset="0"/>
-                <a:ea typeface="Meiryo" pitchFamily="34" charset="-122"/>
-                <a:cs typeface="Meiryo" pitchFamily="34" charset="-120"/>
-              </a:rPr>
-              <a:t>突発対応で1日の計画が崩れる</a:t>
-            </a:r>
-            <a:endParaRPr lang="en-US" sz="1500" dirty="0"/>
-          </a:p>
-        </p:txBody>
-      </p:sp>
-      <p:sp>
-        <p:nvSpPr>
-          <p:cNvPr id="28" name="Text 26"/>
-          <p:cNvSpPr txBox="1"/>
-          <p:nvPr/>
-        </p:nvSpPr>
-        <p:spPr>
-          <a:xfrm>
-            <a:off x="4658258" y="4343400"/>
-            <a:ext cx="2875178" cy="868680"/>
-          </a:xfrm>
-          <a:prstGeom prst="rect">
-            <a:avLst/>
-          </a:prstGeom>
-          <a:noFill/>
-          <a:ln/>
-        </p:spPr>
-        <p:txBody>
-          <a:bodyPr wrap="square" lIns="0" tIns="0" rIns="0" bIns="0" rtlCol="0" anchor="ctr"/>
-          <a:lstStyle/>
-          <a:p>
-            <a:pPr indent="0" marL="0">
-              <a:buNone/>
-            </a:pPr>
-            <a:r>
-              <a:rPr lang="en-US" sz="1500" b="1" dirty="0">
-                <a:solidFill>
-                  <a:srgbClr val="C8315F"/>
-                </a:solidFill>
-                <a:latin typeface="Meiryo" pitchFamily="34" charset="0"/>
-                <a:ea typeface="Meiryo" pitchFamily="34" charset="-122"/>
-                <a:cs typeface="Meiryo" pitchFamily="34" charset="-120"/>
-              </a:rPr>
-              <a:t>03  </a:t>
-            </a:r>
-            <a:pPr indent="0" marL="0">
-              <a:buNone/>
-            </a:pPr>
-            <a:r>
-              <a:rPr lang="en-US" sz="1500" b="1" dirty="0">
-                <a:solidFill>
-                  <a:srgbClr val="2B2D42"/>
-                </a:solidFill>
-                <a:latin typeface="Meiryo" pitchFamily="34" charset="0"/>
-                <a:ea typeface="Meiryo" pitchFamily="34" charset="-122"/>
-                <a:cs typeface="Meiryo" pitchFamily="34" charset="-120"/>
-              </a:rPr>
-              <a:t>コールセンター・</a:t>
-            </a:r>
-            <a:endParaRPr lang="en-US" sz="1500" dirty="0"/>
-          </a:p>
-          <a:p>
-            <a:pPr indent="0" marL="0">
-              <a:buNone/>
-            </a:pPr>
-            <a:r>
-              <a:rPr lang="en-US" sz="1500" b="1" dirty="0">
-                <a:solidFill>
-                  <a:srgbClr val="2B2D42"/>
-                </a:solidFill>
-                <a:latin typeface="Meiryo" pitchFamily="34" charset="0"/>
-                <a:ea typeface="Meiryo" pitchFamily="34" charset="-122"/>
-                <a:cs typeface="Meiryo" pitchFamily="34" charset="-120"/>
-              </a:rPr>
-              <a:t>駆けつけを外注</a:t>
-            </a:r>
-            <a:endParaRPr lang="en-US" sz="1500" dirty="0"/>
-          </a:p>
-        </p:txBody>
-      </p:sp>
-      <p:sp>
-        <p:nvSpPr>
-          <p:cNvPr id="29" name="Text 27"/>
-          <p:cNvSpPr txBox="1"/>
-          <p:nvPr/>
-        </p:nvSpPr>
-        <p:spPr>
-          <a:xfrm>
-            <a:off x="8539277" y="4343400"/>
-            <a:ext cx="2875178" cy="868680"/>
-          </a:xfrm>
-          <a:prstGeom prst="rect">
-            <a:avLst/>
-          </a:prstGeom>
-          <a:noFill/>
-          <a:ln/>
-        </p:spPr>
-        <p:txBody>
-          <a:bodyPr wrap="square" lIns="0" tIns="0" rIns="0" bIns="0" rtlCol="0" anchor="ctr"/>
-          <a:lstStyle/>
-          <a:p>
-            <a:pPr indent="0" marL="0">
-              <a:buNone/>
-            </a:pPr>
-            <a:r>
-              <a:rPr lang="en-US" sz="1500" b="1" dirty="0">
-                <a:solidFill>
-                  <a:srgbClr val="2E8B62"/>
-                </a:solidFill>
-                <a:latin typeface="Meiryo" pitchFamily="34" charset="0"/>
-                <a:ea typeface="Meiryo" pitchFamily="34" charset="-122"/>
-                <a:cs typeface="Meiryo" pitchFamily="34" charset="-120"/>
-              </a:rPr>
-              <a:t>一次対応を外に出し、</a:t>
-            </a:r>
-            <a:endParaRPr lang="en-US" sz="1500" dirty="0"/>
-          </a:p>
-          <a:p>
-            <a:pPr indent="0" marL="0">
-              <a:buNone/>
-            </a:pPr>
-            <a:r>
-              <a:rPr lang="en-US" sz="1500" b="1" dirty="0">
-                <a:solidFill>
-                  <a:srgbClr val="2E8B62"/>
-                </a:solidFill>
-                <a:latin typeface="Meiryo" pitchFamily="34" charset="0"/>
-                <a:ea typeface="Meiryo" pitchFamily="34" charset="-122"/>
-                <a:cs typeface="Meiryo" pitchFamily="34" charset="-120"/>
-              </a:rPr>
-              <a:t>計画どおり動ける</a:t>
-            </a:r>
-            <a:endParaRPr lang="en-US" sz="1500" dirty="0"/>
-          </a:p>
-        </p:txBody>
-      </p:sp>
-      <p:sp>
-        <p:nvSpPr>
-          <p:cNvPr id="30" name="Shape 28"/>
-          <p:cNvSpPr/>
-          <p:nvPr/>
-        </p:nvSpPr>
-        <p:spPr>
-          <a:xfrm>
-            <a:off x="4018178" y="4640580"/>
-            <a:ext cx="274320" cy="274320"/>
-          </a:xfrm>
-          <a:prstGeom prst="rightArrow">
-            <a:avLst/>
-          </a:prstGeom>
-          <a:solidFill>
-            <a:srgbClr val="F2B8CA"/>
-          </a:solidFill>
-          <a:ln w="12700">
-            <a:solidFill>
-              <a:srgbClr val="F2B8CA"/>
-            </a:solidFill>
-            <a:prstDash val="solid"/>
-          </a:ln>
-        </p:spPr>
-      </p:sp>
-      <p:sp>
-        <p:nvSpPr>
-          <p:cNvPr id="31" name="Shape 29"/>
-          <p:cNvSpPr/>
-          <p:nvPr/>
-        </p:nvSpPr>
-        <p:spPr>
-          <a:xfrm>
-            <a:off x="7899197" y="4640580"/>
-            <a:ext cx="274320" cy="274320"/>
-          </a:xfrm>
-          <a:prstGeom prst="rightArrow">
-            <a:avLst/>
-          </a:prstGeom>
-          <a:solidFill>
-            <a:srgbClr val="F2B8CA"/>
-          </a:solidFill>
-          <a:ln w="12700">
-            <a:solidFill>
-              <a:srgbClr val="F2B8CA"/>
-            </a:solidFill>
-            <a:prstDash val="solid"/>
-          </a:ln>
-        </p:spPr>
-      </p:sp>
-      <p:sp>
-        <p:nvSpPr>
-          <p:cNvPr id="32" name="Shape 30"/>
-          <p:cNvSpPr/>
-          <p:nvPr/>
-        </p:nvSpPr>
-        <p:spPr>
-          <a:xfrm>
-            <a:off x="548640" y="5486400"/>
-            <a:ext cx="11094415" cy="502920"/>
-          </a:xfrm>
-          <a:prstGeom prst="roundRect">
-            <a:avLst>
-              <a:gd name="adj" fmla="val 14545"/>
-            </a:avLst>
-          </a:prstGeom>
-          <a:solidFill>
-            <a:srgbClr val="FFFFFF"/>
-          </a:solidFill>
-          <a:ln w="12700">
-            <a:solidFill>
-              <a:srgbClr val="E3E4EA"/>
-            </a:solidFill>
-            <a:prstDash val="solid"/>
-          </a:ln>
-        </p:spPr>
-      </p:sp>
-      <p:sp>
-        <p:nvSpPr>
-          <p:cNvPr id="33" name="Text 31"/>
-          <p:cNvSpPr txBox="1"/>
-          <p:nvPr/>
-        </p:nvSpPr>
-        <p:spPr>
-          <a:xfrm>
-            <a:off x="777240" y="5486400"/>
-            <a:ext cx="10637215" cy="502920"/>
-          </a:xfrm>
-          <a:prstGeom prst="rect">
-            <a:avLst/>
-          </a:prstGeom>
-          <a:noFill/>
-          <a:ln/>
-        </p:spPr>
-        <p:txBody>
-          <a:bodyPr wrap="square" lIns="0" tIns="0" rIns="0" bIns="0" rtlCol="0" anchor="ctr"/>
-          <a:lstStyle/>
-          <a:p>
-            <a:pPr indent="0" marL="0">
-              <a:buNone/>
-            </a:pPr>
-            <a:r>
-              <a:rPr lang="en-US" sz="1300" b="1" dirty="0">
-                <a:solidFill>
-                  <a:srgbClr val="2E8B62"/>
-                </a:solidFill>
-                <a:latin typeface="Meiryo" pitchFamily="34" charset="0"/>
-                <a:ea typeface="Meiryo" pitchFamily="34" charset="-122"/>
-                <a:cs typeface="Meiryo" pitchFamily="34" charset="-120"/>
-              </a:rPr>
-              <a:t>準備済み</a:t>
-            </a:r>
-            <a:pPr indent="0" marL="0">
-              <a:buNone/>
-            </a:pPr>
-            <a:r>
-              <a:rPr lang="en-US" sz="1300" dirty="0">
-                <a:solidFill>
-                  <a:srgbClr val="2B2D42"/>
-                </a:solidFill>
-                <a:latin typeface="Meiryo" pitchFamily="34" charset="0"/>
-                <a:ea typeface="Meiryo" pitchFamily="34" charset="-122"/>
-                <a:cs typeface="Meiryo" pitchFamily="34" charset="-120"/>
-              </a:rPr>
-              <a:t>　広告料・販促物の見直し ／ 専門業者との協議 ／ 現場課題の洗い出し</a:t>
-            </a:r>
-            <a:endParaRPr lang="en-US" sz="1300" dirty="0"/>
           </a:p>
         </p:txBody>
       </p:sp>
@@ -4155,7 +3093,7 @@
         <p:spPr>
           <a:xfrm>
             <a:off x="548640" y="777240"/>
-            <a:ext cx="11094415" cy="548640"/>
+            <a:ext cx="11094415" cy="594360"/>
           </a:xfrm>
           <a:prstGeom prst="rect">
             <a:avLst/>
@@ -4171,7 +3109,7 @@
               <a:buNone/>
             </a:pPr>
             <a:r>
-              <a:rPr lang="en-US" sz="2800" b="1" dirty="0">
+              <a:rPr lang="en-US" sz="3000" b="1" dirty="0">
                 <a:solidFill>
                   <a:srgbClr val="2B2D42"/>
                 </a:solidFill>
@@ -4179,9 +3117,9 @@
                 <a:ea typeface="Meiryo" pitchFamily="34" charset="-122"/>
                 <a:cs typeface="Meiryo" pitchFamily="34" charset="-120"/>
               </a:rPr>
-              <a:t>誰が・いつまでに・何をやれば完了か</a:t>
-            </a:r>
-            <a:endParaRPr lang="en-US" sz="2800" dirty="0"/>
+              <a:t>営業に集中できる仕組みを3つつくる</a:t>
+            </a:r>
+            <a:endParaRPr lang="en-US" sz="3000" dirty="0"/>
           </a:p>
         </p:txBody>
       </p:sp>
@@ -4193,7 +3131,7 @@
         </p:nvSpPr>
         <p:spPr>
           <a:xfrm>
-            <a:off x="10545775" y="6172200"/>
+            <a:off x="10545775" y="6217920"/>
             <a:ext cx="1097280" cy="228600"/>
           </a:xfrm>
           <a:prstGeom prst="rect">
@@ -4239,7 +3177,7 @@
           </p:nvPr>
         </p:nvGraphicFramePr>
         <p:xfrm>
-          <a:off x="548640" y="1645920"/>
+          <a:off x="548640" y="1737360"/>
           <a:ext cx="11094415" cy="914400"/>
         </p:xfrm>
         <a:graphic>
@@ -4247,13 +3185,13 @@
             <a:tbl>
               <a:tblPr/>
               <a:tblGrid>
-                <a:gridCol w="685800"/>
-                <a:gridCol w="3931920"/>
-                <a:gridCol w="1371600"/>
+                <a:gridCol w="731520"/>
+                <a:gridCol w="4114800"/>
+                <a:gridCol w="1463040"/>
                 <a:gridCol w="2011680"/>
-                <a:gridCol w="3093415"/>
+                <a:gridCol w="2773375"/>
               </a:tblGrid>
-              <a:tr h="411480">
+              <a:tr h="457200">
                 <a:tc>
                   <a:txBody>
                     <a:bodyPr/>
@@ -4263,7 +3201,7 @@
                         <a:buNone/>
                       </a:pPr>
                       <a:r>
-                        <a:rPr lang="en-US" sz="1300" b="1" dirty="0">
+                        <a:rPr lang="en-US" sz="1400" b="1" dirty="0">
                           <a:solidFill>
                             <a:srgbClr val="FFFFFF"/>
                           </a:solidFill>
@@ -4273,14 +3211,14 @@
                         </a:rPr>
                         <a:t>No</a:t>
                       </a:r>
-                      <a:endParaRPr lang="en-US" sz="1300" dirty="0">
+                      <a:endParaRPr lang="en-US" sz="1400" dirty="0">
                         <a:latin typeface="Meiryo" charset="0"/>
                         <a:ea typeface="Meiryo" charset="0"/>
                         <a:cs typeface="Meiryo" charset="0"/>
                       </a:endParaRPr>
                     </a:p>
                   </a:txBody>
-                  <a:tcPr marL="109728" marR="109728" marT="54864" marB="54864" anchor="ctr">
+                  <a:tcPr marL="137160" marR="137160" marT="73152" marB="73152" anchor="ctr">
                     <a:lnL w="12700" cap="flat" cmpd="sng" algn="ctr">
                       <a:solidFill>
                         <a:srgbClr val="E3E4EA"/>
@@ -4331,7 +3269,7 @@
                         <a:buNone/>
                       </a:pPr>
                       <a:r>
-                        <a:rPr lang="en-US" sz="1300" b="1" dirty="0">
+                        <a:rPr lang="en-US" sz="1400" b="1" dirty="0">
                           <a:solidFill>
                             <a:srgbClr val="FFFFFF"/>
                           </a:solidFill>
@@ -4341,14 +3279,14 @@
                         </a:rPr>
                         <a:t>やること</a:t>
                       </a:r>
-                      <a:endParaRPr lang="en-US" sz="1300" dirty="0">
+                      <a:endParaRPr lang="en-US" sz="1400" dirty="0">
                         <a:latin typeface="Meiryo" charset="0"/>
                         <a:ea typeface="Meiryo" charset="0"/>
                         <a:cs typeface="Meiryo" charset="0"/>
                       </a:endParaRPr>
                     </a:p>
                   </a:txBody>
-                  <a:tcPr marL="109728" marR="109728" marT="54864" marB="54864" anchor="ctr">
+                  <a:tcPr marL="137160" marR="137160" marT="73152" marB="73152" anchor="ctr">
                     <a:lnL w="12700" cap="flat" cmpd="sng" algn="ctr">
                       <a:solidFill>
                         <a:srgbClr val="E3E4EA"/>
@@ -4399,7 +3337,7 @@
                         <a:buNone/>
                       </a:pPr>
                       <a:r>
-                        <a:rPr lang="en-US" sz="1300" b="1" dirty="0">
+                        <a:rPr lang="en-US" sz="1400" b="1" dirty="0">
                           <a:solidFill>
                             <a:srgbClr val="FFFFFF"/>
                           </a:solidFill>
@@ -4409,14 +3347,14 @@
                         </a:rPr>
                         <a:t>担当</a:t>
                       </a:r>
-                      <a:endParaRPr lang="en-US" sz="1300" dirty="0">
+                      <a:endParaRPr lang="en-US" sz="1400" dirty="0">
                         <a:latin typeface="Meiryo" charset="0"/>
                         <a:ea typeface="Meiryo" charset="0"/>
                         <a:cs typeface="Meiryo" charset="0"/>
                       </a:endParaRPr>
                     </a:p>
                   </a:txBody>
-                  <a:tcPr marL="109728" marR="109728" marT="54864" marB="54864" anchor="ctr">
+                  <a:tcPr marL="137160" marR="137160" marT="73152" marB="73152" anchor="ctr">
                     <a:lnL w="12700" cap="flat" cmpd="sng" algn="ctr">
                       <a:solidFill>
                         <a:srgbClr val="E3E4EA"/>
@@ -4467,7 +3405,7 @@
                         <a:buNone/>
                       </a:pPr>
                       <a:r>
-                        <a:rPr lang="en-US" sz="1300" b="1" dirty="0">
+                        <a:rPr lang="en-US" sz="1400" b="1" dirty="0">
                           <a:solidFill>
                             <a:srgbClr val="FFFFFF"/>
                           </a:solidFill>
@@ -4477,14 +3415,14 @@
                         </a:rPr>
                         <a:t>期限（案）</a:t>
                       </a:r>
-                      <a:endParaRPr lang="en-US" sz="1300" dirty="0">
+                      <a:endParaRPr lang="en-US" sz="1400" dirty="0">
                         <a:latin typeface="Meiryo" charset="0"/>
                         <a:ea typeface="Meiryo" charset="0"/>
                         <a:cs typeface="Meiryo" charset="0"/>
                       </a:endParaRPr>
                     </a:p>
                   </a:txBody>
-                  <a:tcPr marL="109728" marR="109728" marT="54864" marB="54864" anchor="ctr">
+                  <a:tcPr marL="137160" marR="137160" marT="73152" marB="73152" anchor="ctr">
                     <a:lnL w="12700" cap="flat" cmpd="sng" algn="ctr">
                       <a:solidFill>
                         <a:srgbClr val="E3E4EA"/>
@@ -4535,7 +3473,7 @@
                         <a:buNone/>
                       </a:pPr>
                       <a:r>
-                        <a:rPr lang="en-US" sz="1300" b="1" dirty="0">
+                        <a:rPr lang="en-US" sz="1400" b="1" dirty="0">
                           <a:solidFill>
                             <a:srgbClr val="FFFFFF"/>
                           </a:solidFill>
@@ -4545,14 +3483,14 @@
                         </a:rPr>
                         <a:t>完了の基準</a:t>
                       </a:r>
-                      <a:endParaRPr lang="en-US" sz="1300" dirty="0">
+                      <a:endParaRPr lang="en-US" sz="1400" dirty="0">
                         <a:latin typeface="Meiryo" charset="0"/>
                         <a:ea typeface="Meiryo" charset="0"/>
                         <a:cs typeface="Meiryo" charset="0"/>
                       </a:endParaRPr>
                     </a:p>
                   </a:txBody>
-                  <a:tcPr marL="109728" marR="109728" marT="54864" marB="54864" anchor="ctr">
+                  <a:tcPr marL="137160" marR="137160" marT="73152" marB="73152" anchor="ctr">
                     <a:lnL w="12700" cap="flat" cmpd="sng" algn="ctr">
                       <a:solidFill>
                         <a:srgbClr val="E3E4EA"/>
@@ -4595,7 +3533,7 @@
                   </a:tcPr>
                 </a:tc>
               </a:tr>
-              <a:tr h="777240">
+              <a:tr h="960120">
                 <a:tc>
                   <a:txBody>
                     <a:bodyPr/>
@@ -4605,7 +3543,7 @@
                         <a:buNone/>
                       </a:pPr>
                       <a:r>
-                        <a:rPr lang="en-US" sz="1400" b="1" dirty="0">
+                        <a:rPr lang="en-US" sz="1800" b="1" dirty="0">
                           <a:solidFill>
                             <a:srgbClr val="C8315F"/>
                           </a:solidFill>
@@ -4615,14 +3553,14 @@
                         </a:rPr>
                         <a:t>01</a:t>
                       </a:r>
-                      <a:endParaRPr lang="en-US" sz="1400" dirty="0">
+                      <a:endParaRPr lang="en-US" sz="1800" dirty="0">
                         <a:latin typeface="Meiryo" charset="0"/>
                         <a:ea typeface="Meiryo" charset="0"/>
                         <a:cs typeface="Meiryo" charset="0"/>
                       </a:endParaRPr>
                     </a:p>
                   </a:txBody>
-                  <a:tcPr marL="109728" marR="109728" marT="54864" marB="54864" anchor="ctr">
+                  <a:tcPr marL="137160" marR="137160" marT="73152" marB="73152" anchor="ctr">
                     <a:lnL w="12700" cap="flat" cmpd="sng" algn="ctr">
                       <a:solidFill>
                         <a:srgbClr val="E3E4EA"/>
@@ -4670,7 +3608,7 @@
                         <a:buNone/>
                       </a:pPr>
                       <a:r>
-                        <a:rPr lang="en-US" sz="1400" b="1" dirty="0">
+                        <a:rPr lang="en-US" sz="1700" b="1" dirty="0">
                           <a:solidFill>
                             <a:srgbClr val="2B2D42"/>
                           </a:solidFill>
@@ -4678,9 +3616,9 @@
                           <a:ea typeface="Meiryo" pitchFamily="34" charset="-122"/>
                           <a:cs typeface="Meiryo" pitchFamily="34" charset="-120"/>
                         </a:rPr>
-                        <a:t>会計業務の外注</a:t>
+                        <a:t>会計をDFEに外注</a:t>
                       </a:r>
-                      <a:endParaRPr lang="en-US" sz="1300" dirty="0">
+                      <a:endParaRPr lang="en-US" sz="1500" dirty="0">
                         <a:latin typeface="Meiryo" charset="0"/>
                         <a:ea typeface="Meiryo" charset="0"/>
                         <a:cs typeface="Meiryo" charset="0"/>
@@ -4691,7 +3629,7 @@
                         <a:buNone/>
                       </a:pPr>
                       <a:r>
-                        <a:rPr lang="en-US" sz="1100" dirty="0">
+                        <a:rPr lang="en-US" sz="1200" dirty="0">
                           <a:solidFill>
                             <a:srgbClr val="6B6E80"/>
                           </a:solidFill>
@@ -4699,16 +3637,16 @@
                           <a:ea typeface="Meiryo" pitchFamily="34" charset="-122"/>
                           <a:cs typeface="Meiryo" pitchFamily="34" charset="-120"/>
                         </a:rPr>
-                        <a:t>見積比較 → 外注先決定 → 10月分から移管</a:t>
+                        <a:t>見積 → 契約 → 10月分から移管</a:t>
                       </a:r>
-                      <a:endParaRPr lang="en-US" sz="1300" dirty="0">
+                      <a:endParaRPr lang="en-US" sz="1500" dirty="0">
                         <a:latin typeface="Meiryo" charset="0"/>
                         <a:ea typeface="Meiryo" charset="0"/>
                         <a:cs typeface="Meiryo" charset="0"/>
                       </a:endParaRPr>
                     </a:p>
                   </a:txBody>
-                  <a:tcPr marL="109728" marR="109728" marT="54864" marB="54864" anchor="ctr">
+                  <a:tcPr marL="137160" marR="137160" marT="73152" marB="73152" anchor="ctr">
                     <a:lnL w="12700" cap="flat" cmpd="sng" algn="ctr">
                       <a:solidFill>
                         <a:srgbClr val="E3E4EA"/>
@@ -4756,7 +3694,7 @@
                         <a:buNone/>
                       </a:pPr>
                       <a:r>
-                        <a:rPr lang="en-US" sz="1300" b="1" dirty="0">
+                        <a:rPr lang="en-US" sz="1500" b="1" dirty="0">
                           <a:solidFill>
                             <a:srgbClr val="C77700"/>
                           </a:solidFill>
@@ -4766,14 +3704,14 @@
                         </a:rPr>
                         <a:t>要記入</a:t>
                       </a:r>
-                      <a:endParaRPr lang="en-US" sz="1300" dirty="0">
+                      <a:endParaRPr lang="en-US" sz="1500" dirty="0">
                         <a:latin typeface="Meiryo" charset="0"/>
                         <a:ea typeface="Meiryo" charset="0"/>
                         <a:cs typeface="Meiryo" charset="0"/>
                       </a:endParaRPr>
                     </a:p>
                   </a:txBody>
-                  <a:tcPr marL="109728" marR="109728" marT="54864" marB="54864" anchor="ctr">
+                  <a:tcPr marL="137160" marR="137160" marT="73152" marB="73152" anchor="ctr">
                     <a:lnL w="12700" cap="flat" cmpd="sng" algn="ctr">
                       <a:solidFill>
                         <a:srgbClr val="E3E4EA"/>
@@ -4824,7 +3762,7 @@
                         <a:buNone/>
                       </a:pPr>
                       <a:r>
-                        <a:rPr lang="en-US" sz="1300" dirty="0">
+                        <a:rPr lang="en-US" sz="1500" dirty="0">
                           <a:solidFill>
                             <a:srgbClr val="2B2D42"/>
                           </a:solidFill>
@@ -4834,7 +3772,7 @@
                         </a:rPr>
                         <a:t>10月末 契約</a:t>
                       </a:r>
-                      <a:endParaRPr lang="en-US" sz="1300" dirty="0">
+                      <a:endParaRPr lang="en-US" sz="1500" dirty="0">
                         <a:latin typeface="Meiryo" charset="0"/>
                         <a:ea typeface="Meiryo" charset="0"/>
                         <a:cs typeface="Meiryo" charset="0"/>
@@ -4845,7 +3783,7 @@
                         <a:buNone/>
                       </a:pPr>
                       <a:r>
-                        <a:rPr lang="en-US" sz="1300" dirty="0">
+                        <a:rPr lang="en-US" sz="1500" dirty="0">
                           <a:solidFill>
                             <a:srgbClr val="2B2D42"/>
                           </a:solidFill>
@@ -4855,14 +3793,14 @@
                         </a:rPr>
                         <a:t>11月 移管完了</a:t>
                       </a:r>
-                      <a:endParaRPr lang="en-US" sz="1300" dirty="0">
+                      <a:endParaRPr lang="en-US" sz="1500" dirty="0">
                         <a:latin typeface="Meiryo" charset="0"/>
                         <a:ea typeface="Meiryo" charset="0"/>
                         <a:cs typeface="Meiryo" charset="0"/>
                       </a:endParaRPr>
                     </a:p>
                   </a:txBody>
-                  <a:tcPr marL="109728" marR="109728" marT="54864" marB="54864" anchor="ctr">
+                  <a:tcPr marL="137160" marR="137160" marT="73152" marB="73152" anchor="ctr">
                     <a:lnL w="12700" cap="flat" cmpd="sng" algn="ctr">
                       <a:solidFill>
                         <a:srgbClr val="E3E4EA"/>
@@ -4910,7 +3848,7 @@
                         <a:buNone/>
                       </a:pPr>
                       <a:r>
-                        <a:rPr lang="en-US" sz="1300" dirty="0">
+                        <a:rPr lang="en-US" sz="1500" dirty="0">
                           <a:solidFill>
                             <a:srgbClr val="2B2D42"/>
                           </a:solidFill>
@@ -4918,16 +3856,16 @@
                           <a:ea typeface="Meiryo" pitchFamily="34" charset="-122"/>
                           <a:cs typeface="Meiryo" pitchFamily="34" charset="-120"/>
                         </a:rPr>
-                        <a:t>社内の会計作業 月40h → ほぼゼロ</a:t>
+                        <a:t>社内の会計作業がほぼゼロ</a:t>
                       </a:r>
-                      <a:endParaRPr lang="en-US" sz="1300" dirty="0">
+                      <a:endParaRPr lang="en-US" sz="1500" dirty="0">
                         <a:latin typeface="Meiryo" charset="0"/>
                         <a:ea typeface="Meiryo" charset="0"/>
                         <a:cs typeface="Meiryo" charset="0"/>
                       </a:endParaRPr>
                     </a:p>
                   </a:txBody>
-                  <a:tcPr marL="109728" marR="109728" marT="54864" marB="54864" anchor="ctr">
+                  <a:tcPr marL="137160" marR="137160" marT="73152" marB="73152" anchor="ctr">
                     <a:lnL w="12700" cap="flat" cmpd="sng" algn="ctr">
                       <a:solidFill>
                         <a:srgbClr val="E3E4EA"/>
@@ -4967,7 +3905,7 @@
                   </a:tcPr>
                 </a:tc>
               </a:tr>
-              <a:tr h="777240">
+              <a:tr h="960120">
                 <a:tc>
                   <a:txBody>
                     <a:bodyPr/>
@@ -4977,7 +3915,7 @@
                         <a:buNone/>
                       </a:pPr>
                       <a:r>
-                        <a:rPr lang="en-US" sz="1400" b="1" dirty="0">
+                        <a:rPr lang="en-US" sz="1800" b="1" dirty="0">
                           <a:solidFill>
                             <a:srgbClr val="C8315F"/>
                           </a:solidFill>
@@ -4987,14 +3925,14 @@
                         </a:rPr>
                         <a:t>02</a:t>
                       </a:r>
-                      <a:endParaRPr lang="en-US" sz="1400" dirty="0">
+                      <a:endParaRPr lang="en-US" sz="1800" dirty="0">
                         <a:latin typeface="Meiryo" charset="0"/>
                         <a:ea typeface="Meiryo" charset="0"/>
                         <a:cs typeface="Meiryo" charset="0"/>
                       </a:endParaRPr>
                     </a:p>
                   </a:txBody>
-                  <a:tcPr marL="109728" marR="109728" marT="54864" marB="54864" anchor="ctr">
+                  <a:tcPr marL="137160" marR="137160" marT="73152" marB="73152" anchor="ctr">
                     <a:lnL w="12700" cap="flat" cmpd="sng" algn="ctr">
                       <a:solidFill>
                         <a:srgbClr val="E3E4EA"/>
@@ -5042,7 +3980,7 @@
                         <a:buNone/>
                       </a:pPr>
                       <a:r>
-                        <a:rPr lang="en-US" sz="1400" b="1" dirty="0">
+                        <a:rPr lang="en-US" sz="1700" b="1" dirty="0">
                           <a:solidFill>
                             <a:srgbClr val="2B2D42"/>
                           </a:solidFill>
@@ -5050,9 +3988,9 @@
                           <a:ea typeface="Meiryo" pitchFamily="34" charset="-122"/>
                           <a:cs typeface="Meiryo" pitchFamily="34" charset="-120"/>
                         </a:rPr>
-                        <a:t>ポータル掲載パートの戦力化</a:t>
+                        <a:t>写真撮影・入力をパートさんへ</a:t>
                       </a:r>
-                      <a:endParaRPr lang="en-US" sz="1300" dirty="0">
+                      <a:endParaRPr lang="en-US" sz="1500" dirty="0">
                         <a:latin typeface="Meiryo" charset="0"/>
                         <a:ea typeface="Meiryo" charset="0"/>
                         <a:cs typeface="Meiryo" charset="0"/>
@@ -5063,7 +4001,7 @@
                         <a:buNone/>
                       </a:pPr>
                       <a:r>
-                        <a:rPr lang="en-US" sz="1100" dirty="0">
+                        <a:rPr lang="en-US" sz="1200" dirty="0">
                           <a:solidFill>
                             <a:srgbClr val="6B6E80"/>
                           </a:solidFill>
@@ -5071,16 +4009,16 @@
                           <a:ea typeface="Meiryo" pitchFamily="34" charset="-122"/>
                           <a:cs typeface="Meiryo" pitchFamily="34" charset="-120"/>
                         </a:rPr>
-                        <a:t>掲載手順を引き継ぎ、単独で更新できる状態に</a:t>
+                        <a:t>9/18採用のパートさんに手順を引き継ぐ</a:t>
                       </a:r>
-                      <a:endParaRPr lang="en-US" sz="1300" dirty="0">
+                      <a:endParaRPr lang="en-US" sz="1500" dirty="0">
                         <a:latin typeface="Meiryo" charset="0"/>
                         <a:ea typeface="Meiryo" charset="0"/>
                         <a:cs typeface="Meiryo" charset="0"/>
                       </a:endParaRPr>
                     </a:p>
                   </a:txBody>
-                  <a:tcPr marL="109728" marR="109728" marT="54864" marB="54864" anchor="ctr">
+                  <a:tcPr marL="137160" marR="137160" marT="73152" marB="73152" anchor="ctr">
                     <a:lnL w="12700" cap="flat" cmpd="sng" algn="ctr">
                       <a:solidFill>
                         <a:srgbClr val="E3E4EA"/>
@@ -5128,7 +4066,7 @@
                         <a:buNone/>
                       </a:pPr>
                       <a:r>
-                        <a:rPr lang="en-US" sz="1300" b="1" dirty="0">
+                        <a:rPr lang="en-US" sz="1500" b="1" dirty="0">
                           <a:solidFill>
                             <a:srgbClr val="C77700"/>
                           </a:solidFill>
@@ -5138,14 +4076,14 @@
                         </a:rPr>
                         <a:t>要記入</a:t>
                       </a:r>
-                      <a:endParaRPr lang="en-US" sz="1300" dirty="0">
+                      <a:endParaRPr lang="en-US" sz="1500" dirty="0">
                         <a:latin typeface="Meiryo" charset="0"/>
                         <a:ea typeface="Meiryo" charset="0"/>
                         <a:cs typeface="Meiryo" charset="0"/>
                       </a:endParaRPr>
                     </a:p>
                   </a:txBody>
-                  <a:tcPr marL="109728" marR="109728" marT="54864" marB="54864" anchor="ctr">
+                  <a:tcPr marL="137160" marR="137160" marT="73152" marB="73152" anchor="ctr">
                     <a:lnL w="12700" cap="flat" cmpd="sng" algn="ctr">
                       <a:solidFill>
                         <a:srgbClr val="E3E4EA"/>
@@ -5196,7 +4134,7 @@
                         <a:buNone/>
                       </a:pPr>
                       <a:r>
-                        <a:rPr lang="en-US" sz="1300" dirty="0">
+                        <a:rPr lang="en-US" sz="1500" dirty="0">
                           <a:solidFill>
                             <a:srgbClr val="2B2D42"/>
                           </a:solidFill>
@@ -5206,14 +4144,14 @@
                         </a:rPr>
                         <a:t>10月末 独り立ち</a:t>
                       </a:r>
-                      <a:endParaRPr lang="en-US" sz="1300" dirty="0">
+                      <a:endParaRPr lang="en-US" sz="1500" dirty="0">
                         <a:latin typeface="Meiryo" charset="0"/>
                         <a:ea typeface="Meiryo" charset="0"/>
                         <a:cs typeface="Meiryo" charset="0"/>
                       </a:endParaRPr>
                     </a:p>
                   </a:txBody>
-                  <a:tcPr marL="109728" marR="109728" marT="54864" marB="54864" anchor="ctr">
+                  <a:tcPr marL="137160" marR="137160" marT="73152" marB="73152" anchor="ctr">
                     <a:lnL w="12700" cap="flat" cmpd="sng" algn="ctr">
                       <a:solidFill>
                         <a:srgbClr val="E3E4EA"/>
@@ -5261,7 +4199,7 @@
                         <a:buNone/>
                       </a:pPr>
                       <a:r>
-                        <a:rPr lang="en-US" sz="1300" dirty="0">
+                        <a:rPr lang="en-US" sz="1500" dirty="0">
                           <a:solidFill>
                             <a:srgbClr val="2B2D42"/>
                           </a:solidFill>
@@ -5269,37 +4207,16 @@
                           <a:ea typeface="Meiryo" pitchFamily="34" charset="-122"/>
                           <a:cs typeface="Meiryo" pitchFamily="34" charset="-120"/>
                         </a:rPr>
-                        <a:t>掲載件数・反響数が月目標に到達</a:t>
+                        <a:t>営業が撮影・入力をしない</a:t>
                       </a:r>
-                      <a:endParaRPr lang="en-US" sz="1300" dirty="0">
-                        <a:latin typeface="Meiryo" charset="0"/>
-                        <a:ea typeface="Meiryo" charset="0"/>
-                        <a:cs typeface="Meiryo" charset="0"/>
-                      </a:endParaRPr>
-                    </a:p>
-                    <a:p>
-                      <a:pPr indent="0" marL="0">
-                        <a:buNone/>
-                      </a:pPr>
-                      <a:r>
-                        <a:rPr lang="en-US" sz="1300" b="1" dirty="0">
-                          <a:solidFill>
-                            <a:srgbClr val="C77700"/>
-                          </a:solidFill>
-                          <a:latin typeface="Meiryo" pitchFamily="34" charset="0"/>
-                          <a:ea typeface="Meiryo" pitchFamily="34" charset="-122"/>
-                          <a:cs typeface="Meiryo" pitchFamily="34" charset="-120"/>
-                        </a:rPr>
-                        <a:t>（目標値：要記入）</a:t>
-                      </a:r>
-                      <a:endParaRPr lang="en-US" sz="1300" dirty="0">
+                      <a:endParaRPr lang="en-US" sz="1500" dirty="0">
                         <a:latin typeface="Meiryo" charset="0"/>
                         <a:ea typeface="Meiryo" charset="0"/>
                         <a:cs typeface="Meiryo" charset="0"/>
                       </a:endParaRPr>
                     </a:p>
                   </a:txBody>
-                  <a:tcPr marL="109728" marR="109728" marT="54864" marB="54864" anchor="ctr">
+                  <a:tcPr marL="137160" marR="137160" marT="73152" marB="73152" anchor="ctr">
                     <a:lnL w="12700" cap="flat" cmpd="sng" algn="ctr">
                       <a:solidFill>
                         <a:srgbClr val="E3E4EA"/>
@@ -5336,13 +4253,10 @@
                       <a:headEnd type="none" w="med" len="med"/>
                       <a:tailEnd type="none" w="med" len="med"/>
                     </a:lnB>
-                    <a:solidFill>
-                      <a:srgbClr val="FFF3DD"/>
-                    </a:solidFill>
                   </a:tcPr>
                 </a:tc>
               </a:tr>
-              <a:tr h="777240">
+              <a:tr h="960120">
                 <a:tc>
                   <a:txBody>
                     <a:bodyPr/>
@@ -5352,7 +4266,7 @@
                         <a:buNone/>
                       </a:pPr>
                       <a:r>
-                        <a:rPr lang="en-US" sz="1400" b="1" dirty="0">
+                        <a:rPr lang="en-US" sz="1800" b="1" dirty="0">
                           <a:solidFill>
                             <a:srgbClr val="C8315F"/>
                           </a:solidFill>
@@ -5362,14 +4276,14 @@
                         </a:rPr>
                         <a:t>03</a:t>
                       </a:r>
-                      <a:endParaRPr lang="en-US" sz="1400" dirty="0">
+                      <a:endParaRPr lang="en-US" sz="1800" dirty="0">
                         <a:latin typeface="Meiryo" charset="0"/>
                         <a:ea typeface="Meiryo" charset="0"/>
                         <a:cs typeface="Meiryo" charset="0"/>
                       </a:endParaRPr>
                     </a:p>
                   </a:txBody>
-                  <a:tcPr marL="109728" marR="109728" marT="54864" marB="54864" anchor="ctr">
+                  <a:tcPr marL="137160" marR="137160" marT="73152" marB="73152" anchor="ctr">
                     <a:lnL w="12700" cap="flat" cmpd="sng" algn="ctr">
                       <a:solidFill>
                         <a:srgbClr val="E3E4EA"/>
@@ -5417,7 +4331,7 @@
                         <a:buNone/>
                       </a:pPr>
                       <a:r>
-                        <a:rPr lang="en-US" sz="1400" b="1" dirty="0">
+                        <a:rPr lang="en-US" sz="1700" b="1" dirty="0">
                           <a:solidFill>
                             <a:srgbClr val="2B2D42"/>
                           </a:solidFill>
@@ -5425,9 +4339,9 @@
                           <a:ea typeface="Meiryo" pitchFamily="34" charset="-122"/>
                           <a:cs typeface="Meiryo" pitchFamily="34" charset="-120"/>
                         </a:rPr>
-                        <a:t>コールセンター・駆けつけの外注</a:t>
+                        <a:t>クレーム一次対応を外注</a:t>
                       </a:r>
-                      <a:endParaRPr lang="en-US" sz="1300" dirty="0">
+                      <a:endParaRPr lang="en-US" sz="1500" dirty="0">
                         <a:latin typeface="Meiryo" charset="0"/>
                         <a:ea typeface="Meiryo" charset="0"/>
                         <a:cs typeface="Meiryo" charset="0"/>
@@ -5438,7 +4352,7 @@
                         <a:buNone/>
                       </a:pPr>
                       <a:r>
-                        <a:rPr lang="en-US" sz="1100" dirty="0">
+                        <a:rPr lang="en-US" sz="1200" dirty="0">
                           <a:solidFill>
                             <a:srgbClr val="6B6E80"/>
                           </a:solidFill>
@@ -5446,16 +4360,16 @@
                           <a:ea typeface="Meiryo" pitchFamily="34" charset="-122"/>
                           <a:cs typeface="Meiryo" pitchFamily="34" charset="-120"/>
                         </a:rPr>
-                        <a:t>業者比較 → 契約 → 入居者・オーナーへ周知</a:t>
+                        <a:t>コールセンター・駆けつけ業者と契約</a:t>
                       </a:r>
-                      <a:endParaRPr lang="en-US" sz="1300" dirty="0">
+                      <a:endParaRPr lang="en-US" sz="1500" dirty="0">
                         <a:latin typeface="Meiryo" charset="0"/>
                         <a:ea typeface="Meiryo" charset="0"/>
                         <a:cs typeface="Meiryo" charset="0"/>
                       </a:endParaRPr>
                     </a:p>
                   </a:txBody>
-                  <a:tcPr marL="109728" marR="109728" marT="54864" marB="54864" anchor="ctr">
+                  <a:tcPr marL="137160" marR="137160" marT="73152" marB="73152" anchor="ctr">
                     <a:lnL w="12700" cap="flat" cmpd="sng" algn="ctr">
                       <a:solidFill>
                         <a:srgbClr val="E3E4EA"/>
@@ -5503,7 +4417,7 @@
                         <a:buNone/>
                       </a:pPr>
                       <a:r>
-                        <a:rPr lang="en-US" sz="1300" b="1" dirty="0">
+                        <a:rPr lang="en-US" sz="1500" b="1" dirty="0">
                           <a:solidFill>
                             <a:srgbClr val="C77700"/>
                           </a:solidFill>
@@ -5513,14 +4427,14 @@
                         </a:rPr>
                         <a:t>要記入</a:t>
                       </a:r>
-                      <a:endParaRPr lang="en-US" sz="1300" dirty="0">
+                      <a:endParaRPr lang="en-US" sz="1500" dirty="0">
                         <a:latin typeface="Meiryo" charset="0"/>
                         <a:ea typeface="Meiryo" charset="0"/>
                         <a:cs typeface="Meiryo" charset="0"/>
                       </a:endParaRPr>
                     </a:p>
                   </a:txBody>
-                  <a:tcPr marL="109728" marR="109728" marT="54864" marB="54864" anchor="ctr">
+                  <a:tcPr marL="137160" marR="137160" marT="73152" marB="73152" anchor="ctr">
                     <a:lnL w="12700" cap="flat" cmpd="sng" algn="ctr">
                       <a:solidFill>
                         <a:srgbClr val="E3E4EA"/>
@@ -5571,7 +4485,7 @@
                         <a:buNone/>
                       </a:pPr>
                       <a:r>
-                        <a:rPr lang="en-US" sz="1300" dirty="0">
+                        <a:rPr lang="en-US" sz="1500" dirty="0">
                           <a:solidFill>
                             <a:srgbClr val="2B2D42"/>
                           </a:solidFill>
@@ -5581,7 +4495,7 @@
                         </a:rPr>
                         <a:t>11月末 契約</a:t>
                       </a:r>
-                      <a:endParaRPr lang="en-US" sz="1300" dirty="0">
+                      <a:endParaRPr lang="en-US" sz="1500" dirty="0">
                         <a:latin typeface="Meiryo" charset="0"/>
                         <a:ea typeface="Meiryo" charset="0"/>
                         <a:cs typeface="Meiryo" charset="0"/>
@@ -5592,7 +4506,7 @@
                         <a:buNone/>
                       </a:pPr>
                       <a:r>
-                        <a:rPr lang="en-US" sz="1300" dirty="0">
+                        <a:rPr lang="en-US" sz="1500" dirty="0">
                           <a:solidFill>
                             <a:srgbClr val="2B2D42"/>
                           </a:solidFill>
@@ -5602,14 +4516,14 @@
                         </a:rPr>
                         <a:t>12月 稼働</a:t>
                       </a:r>
-                      <a:endParaRPr lang="en-US" sz="1300" dirty="0">
+                      <a:endParaRPr lang="en-US" sz="1500" dirty="0">
                         <a:latin typeface="Meiryo" charset="0"/>
                         <a:ea typeface="Meiryo" charset="0"/>
                         <a:cs typeface="Meiryo" charset="0"/>
                       </a:endParaRPr>
                     </a:p>
                   </a:txBody>
-                  <a:tcPr marL="109728" marR="109728" marT="54864" marB="54864" anchor="ctr">
+                  <a:tcPr marL="137160" marR="137160" marT="73152" marB="73152" anchor="ctr">
                     <a:lnL w="12700" cap="flat" cmpd="sng" algn="ctr">
                       <a:solidFill>
                         <a:srgbClr val="E3E4EA"/>
@@ -5657,7 +4571,7 @@
                         <a:buNone/>
                       </a:pPr>
                       <a:r>
-                        <a:rPr lang="en-US" sz="1300" dirty="0">
+                        <a:rPr lang="en-US" sz="1500" dirty="0">
                           <a:solidFill>
                             <a:srgbClr val="2B2D42"/>
                           </a:solidFill>
@@ -5665,367 +4579,16 @@
                           <a:ea typeface="Meiryo" pitchFamily="34" charset="-122"/>
                           <a:cs typeface="Meiryo" pitchFamily="34" charset="-120"/>
                         </a:rPr>
-                        <a:t>営業時間中のクレーム一次対応を社員が受けない</a:t>
+                        <a:t>営業時間中のクレームを社員が受けない</a:t>
                       </a:r>
-                      <a:endParaRPr lang="en-US" sz="1300" dirty="0">
+                      <a:endParaRPr lang="en-US" sz="1500" dirty="0">
                         <a:latin typeface="Meiryo" charset="0"/>
                         <a:ea typeface="Meiryo" charset="0"/>
                         <a:cs typeface="Meiryo" charset="0"/>
                       </a:endParaRPr>
                     </a:p>
                   </a:txBody>
-                  <a:tcPr marL="109728" marR="109728" marT="54864" marB="54864" anchor="ctr">
-                    <a:lnL w="12700" cap="flat" cmpd="sng" algn="ctr">
-                      <a:solidFill>
-                        <a:srgbClr val="E3E4EA"/>
-                      </a:solidFill>
-                      <a:prstDash val="solid"/>
-                      <a:round/>
-                      <a:headEnd type="none" w="med" len="med"/>
-                      <a:tailEnd type="none" w="med" len="med"/>
-                    </a:lnL>
-                    <a:lnR w="12700" cap="flat" cmpd="sng" algn="ctr">
-                      <a:solidFill>
-                        <a:srgbClr val="E3E4EA"/>
-                      </a:solidFill>
-                      <a:prstDash val="solid"/>
-                      <a:round/>
-                      <a:headEnd type="none" w="med" len="med"/>
-                      <a:tailEnd type="none" w="med" len="med"/>
-                    </a:lnR>
-                    <a:lnT w="12700" cap="flat" cmpd="sng" algn="ctr">
-                      <a:solidFill>
-                        <a:srgbClr val="E3E4EA"/>
-                      </a:solidFill>
-                      <a:prstDash val="solid"/>
-                      <a:round/>
-                      <a:headEnd type="none" w="med" len="med"/>
-                      <a:tailEnd type="none" w="med" len="med"/>
-                    </a:lnT>
-                    <a:lnB w="12700" cap="flat" cmpd="sng" algn="ctr">
-                      <a:solidFill>
-                        <a:srgbClr val="E3E4EA"/>
-                      </a:solidFill>
-                      <a:prstDash val="solid"/>
-                      <a:round/>
-                      <a:headEnd type="none" w="med" len="med"/>
-                      <a:tailEnd type="none" w="med" len="med"/>
-                    </a:lnB>
-                  </a:tcPr>
-                </a:tc>
-              </a:tr>
-              <a:tr h="777240">
-                <a:tc>
-                  <a:txBody>
-                    <a:bodyPr/>
-                    <a:lstStyle/>
-                    <a:p>
-                      <a:pPr algn="ctr" indent="0" marL="0">
-                        <a:buNone/>
-                      </a:pPr>
-                      <a:r>
-                        <a:rPr lang="en-US" sz="1400" b="1" dirty="0">
-                          <a:solidFill>
-                            <a:srgbClr val="C8315F"/>
-                          </a:solidFill>
-                          <a:latin typeface="Meiryo" pitchFamily="34" charset="0"/>
-                          <a:ea typeface="Meiryo" pitchFamily="34" charset="-122"/>
-                          <a:cs typeface="Meiryo" pitchFamily="34" charset="-120"/>
-                        </a:rPr>
-                        <a:t>04</a:t>
-                      </a:r>
-                      <a:endParaRPr lang="en-US" sz="1400" dirty="0">
-                        <a:latin typeface="Meiryo" charset="0"/>
-                        <a:ea typeface="Meiryo" charset="0"/>
-                        <a:cs typeface="Meiryo" charset="0"/>
-                      </a:endParaRPr>
-                    </a:p>
-                  </a:txBody>
-                  <a:tcPr marL="109728" marR="109728" marT="54864" marB="54864" anchor="ctr">
-                    <a:lnL w="12700" cap="flat" cmpd="sng" algn="ctr">
-                      <a:solidFill>
-                        <a:srgbClr val="E3E4EA"/>
-                      </a:solidFill>
-                      <a:prstDash val="solid"/>
-                      <a:round/>
-                      <a:headEnd type="none" w="med" len="med"/>
-                      <a:tailEnd type="none" w="med" len="med"/>
-                    </a:lnL>
-                    <a:lnR w="12700" cap="flat" cmpd="sng" algn="ctr">
-                      <a:solidFill>
-                        <a:srgbClr val="E3E4EA"/>
-                      </a:solidFill>
-                      <a:prstDash val="solid"/>
-                      <a:round/>
-                      <a:headEnd type="none" w="med" len="med"/>
-                      <a:tailEnd type="none" w="med" len="med"/>
-                    </a:lnR>
-                    <a:lnT w="12700" cap="flat" cmpd="sng" algn="ctr">
-                      <a:solidFill>
-                        <a:srgbClr val="E3E4EA"/>
-                      </a:solidFill>
-                      <a:prstDash val="solid"/>
-                      <a:round/>
-                      <a:headEnd type="none" w="med" len="med"/>
-                      <a:tailEnd type="none" w="med" len="med"/>
-                    </a:lnT>
-                    <a:lnB w="12700" cap="flat" cmpd="sng" algn="ctr">
-                      <a:solidFill>
-                        <a:srgbClr val="E3E4EA"/>
-                      </a:solidFill>
-                      <a:prstDash val="solid"/>
-                      <a:round/>
-                      <a:headEnd type="none" w="med" len="med"/>
-                      <a:tailEnd type="none" w="med" len="med"/>
-                    </a:lnB>
-                  </a:tcPr>
-                </a:tc>
-                <a:tc>
-                  <a:txBody>
-                    <a:bodyPr/>
-                    <a:lstStyle/>
-                    <a:p>
-                      <a:pPr indent="0" marL="0">
-                        <a:buNone/>
-                      </a:pPr>
-                      <a:r>
-                        <a:rPr lang="en-US" sz="1400" b="1" dirty="0">
-                          <a:solidFill>
-                            <a:srgbClr val="2B2D42"/>
-                          </a:solidFill>
-                          <a:latin typeface="Meiryo" pitchFamily="34" charset="0"/>
-                          <a:ea typeface="Meiryo" pitchFamily="34" charset="-122"/>
-                          <a:cs typeface="Meiryo" pitchFamily="34" charset="-120"/>
-                        </a:rPr>
-                        <a:t>売上の進捗確認</a:t>
-                      </a:r>
-                      <a:endParaRPr lang="en-US" sz="1300" dirty="0">
-                        <a:latin typeface="Meiryo" charset="0"/>
-                        <a:ea typeface="Meiryo" charset="0"/>
-                        <a:cs typeface="Meiryo" charset="0"/>
-                      </a:endParaRPr>
-                    </a:p>
-                    <a:p>
-                      <a:pPr indent="0" marL="0">
-                        <a:buNone/>
-                      </a:pPr>
-                      <a:r>
-                        <a:rPr lang="en-US" sz="1100" dirty="0">
-                          <a:solidFill>
-                            <a:srgbClr val="6B6E80"/>
-                          </a:solidFill>
-                          <a:latin typeface="Meiryo" pitchFamily="34" charset="0"/>
-                          <a:ea typeface="Meiryo" pitchFamily="34" charset="-122"/>
-                          <a:cs typeface="Meiryo" pitchFamily="34" charset="-120"/>
-                        </a:rPr>
-                        <a:t>月265万円に届いているかを毎月チェック</a:t>
-                      </a:r>
-                      <a:endParaRPr lang="en-US" sz="1300" dirty="0">
-                        <a:latin typeface="Meiryo" charset="0"/>
-                        <a:ea typeface="Meiryo" charset="0"/>
-                        <a:cs typeface="Meiryo" charset="0"/>
-                      </a:endParaRPr>
-                    </a:p>
-                  </a:txBody>
-                  <a:tcPr marL="109728" marR="109728" marT="54864" marB="54864" anchor="ctr">
-                    <a:lnL w="12700" cap="flat" cmpd="sng" algn="ctr">
-                      <a:solidFill>
-                        <a:srgbClr val="E3E4EA"/>
-                      </a:solidFill>
-                      <a:prstDash val="solid"/>
-                      <a:round/>
-                      <a:headEnd type="none" w="med" len="med"/>
-                      <a:tailEnd type="none" w="med" len="med"/>
-                    </a:lnL>
-                    <a:lnR w="12700" cap="flat" cmpd="sng" algn="ctr">
-                      <a:solidFill>
-                        <a:srgbClr val="E3E4EA"/>
-                      </a:solidFill>
-                      <a:prstDash val="solid"/>
-                      <a:round/>
-                      <a:headEnd type="none" w="med" len="med"/>
-                      <a:tailEnd type="none" w="med" len="med"/>
-                    </a:lnR>
-                    <a:lnT w="12700" cap="flat" cmpd="sng" algn="ctr">
-                      <a:solidFill>
-                        <a:srgbClr val="E3E4EA"/>
-                      </a:solidFill>
-                      <a:prstDash val="solid"/>
-                      <a:round/>
-                      <a:headEnd type="none" w="med" len="med"/>
-                      <a:tailEnd type="none" w="med" len="med"/>
-                    </a:lnT>
-                    <a:lnB w="12700" cap="flat" cmpd="sng" algn="ctr">
-                      <a:solidFill>
-                        <a:srgbClr val="E3E4EA"/>
-                      </a:solidFill>
-                      <a:prstDash val="solid"/>
-                      <a:round/>
-                      <a:headEnd type="none" w="med" len="med"/>
-                      <a:tailEnd type="none" w="med" len="med"/>
-                    </a:lnB>
-                  </a:tcPr>
-                </a:tc>
-                <a:tc>
-                  <a:txBody>
-                    <a:bodyPr/>
-                    <a:lstStyle/>
-                    <a:p>
-                      <a:pPr algn="ctr" indent="0" marL="0">
-                        <a:buNone/>
-                      </a:pPr>
-                      <a:r>
-                        <a:rPr lang="en-US" sz="1300" b="1" dirty="0">
-                          <a:solidFill>
-                            <a:srgbClr val="C77700"/>
-                          </a:solidFill>
-                          <a:latin typeface="Meiryo" pitchFamily="34" charset="0"/>
-                          <a:ea typeface="Meiryo" pitchFamily="34" charset="-122"/>
-                          <a:cs typeface="Meiryo" pitchFamily="34" charset="-120"/>
-                        </a:rPr>
-                        <a:t>要記入</a:t>
-                      </a:r>
-                      <a:endParaRPr lang="en-US" sz="1300" dirty="0">
-                        <a:latin typeface="Meiryo" charset="0"/>
-                        <a:ea typeface="Meiryo" charset="0"/>
-                        <a:cs typeface="Meiryo" charset="0"/>
-                      </a:endParaRPr>
-                    </a:p>
-                  </a:txBody>
-                  <a:tcPr marL="109728" marR="109728" marT="54864" marB="54864" anchor="ctr">
-                    <a:lnL w="12700" cap="flat" cmpd="sng" algn="ctr">
-                      <a:solidFill>
-                        <a:srgbClr val="E3E4EA"/>
-                      </a:solidFill>
-                      <a:prstDash val="solid"/>
-                      <a:round/>
-                      <a:headEnd type="none" w="med" len="med"/>
-                      <a:tailEnd type="none" w="med" len="med"/>
-                    </a:lnL>
-                    <a:lnR w="12700" cap="flat" cmpd="sng" algn="ctr">
-                      <a:solidFill>
-                        <a:srgbClr val="E3E4EA"/>
-                      </a:solidFill>
-                      <a:prstDash val="solid"/>
-                      <a:round/>
-                      <a:headEnd type="none" w="med" len="med"/>
-                      <a:tailEnd type="none" w="med" len="med"/>
-                    </a:lnR>
-                    <a:lnT w="12700" cap="flat" cmpd="sng" algn="ctr">
-                      <a:solidFill>
-                        <a:srgbClr val="E3E4EA"/>
-                      </a:solidFill>
-                      <a:prstDash val="solid"/>
-                      <a:round/>
-                      <a:headEnd type="none" w="med" len="med"/>
-                      <a:tailEnd type="none" w="med" len="med"/>
-                    </a:lnT>
-                    <a:lnB w="12700" cap="flat" cmpd="sng" algn="ctr">
-                      <a:solidFill>
-                        <a:srgbClr val="E3E4EA"/>
-                      </a:solidFill>
-                      <a:prstDash val="solid"/>
-                      <a:round/>
-                      <a:headEnd type="none" w="med" len="med"/>
-                      <a:tailEnd type="none" w="med" len="med"/>
-                    </a:lnB>
-                    <a:solidFill>
-                      <a:srgbClr val="FFF3DD"/>
-                    </a:solidFill>
-                  </a:tcPr>
-                </a:tc>
-                <a:tc>
-                  <a:txBody>
-                    <a:bodyPr/>
-                    <a:lstStyle/>
-                    <a:p>
-                      <a:pPr indent="0" marL="0">
-                        <a:buNone/>
-                      </a:pPr>
-                      <a:r>
-                        <a:rPr lang="en-US" sz="1300" dirty="0">
-                          <a:solidFill>
-                            <a:srgbClr val="2B2D42"/>
-                          </a:solidFill>
-                          <a:latin typeface="Meiryo" pitchFamily="34" charset="0"/>
-                          <a:ea typeface="Meiryo" pitchFamily="34" charset="-122"/>
-                          <a:cs typeface="Meiryo" pitchFamily="34" charset="-120"/>
-                        </a:rPr>
-                        <a:t>毎月末</a:t>
-                      </a:r>
-                      <a:endParaRPr lang="en-US" sz="1300" dirty="0">
-                        <a:latin typeface="Meiryo" charset="0"/>
-                        <a:ea typeface="Meiryo" charset="0"/>
-                        <a:cs typeface="Meiryo" charset="0"/>
-                      </a:endParaRPr>
-                    </a:p>
-                  </a:txBody>
-                  <a:tcPr marL="109728" marR="109728" marT="54864" marB="54864" anchor="ctr">
-                    <a:lnL w="12700" cap="flat" cmpd="sng" algn="ctr">
-                      <a:solidFill>
-                        <a:srgbClr val="E3E4EA"/>
-                      </a:solidFill>
-                      <a:prstDash val="solid"/>
-                      <a:round/>
-                      <a:headEnd type="none" w="med" len="med"/>
-                      <a:tailEnd type="none" w="med" len="med"/>
-                    </a:lnL>
-                    <a:lnR w="12700" cap="flat" cmpd="sng" algn="ctr">
-                      <a:solidFill>
-                        <a:srgbClr val="E3E4EA"/>
-                      </a:solidFill>
-                      <a:prstDash val="solid"/>
-                      <a:round/>
-                      <a:headEnd type="none" w="med" len="med"/>
-                      <a:tailEnd type="none" w="med" len="med"/>
-                    </a:lnR>
-                    <a:lnT w="12700" cap="flat" cmpd="sng" algn="ctr">
-                      <a:solidFill>
-                        <a:srgbClr val="E3E4EA"/>
-                      </a:solidFill>
-                      <a:prstDash val="solid"/>
-                      <a:round/>
-                      <a:headEnd type="none" w="med" len="med"/>
-                      <a:tailEnd type="none" w="med" len="med"/>
-                    </a:lnT>
-                    <a:lnB w="12700" cap="flat" cmpd="sng" algn="ctr">
-                      <a:solidFill>
-                        <a:srgbClr val="E3E4EA"/>
-                      </a:solidFill>
-                      <a:prstDash val="solid"/>
-                      <a:round/>
-                      <a:headEnd type="none" w="med" len="med"/>
-                      <a:tailEnd type="none" w="med" len="med"/>
-                    </a:lnB>
-                  </a:tcPr>
-                </a:tc>
-                <a:tc>
-                  <a:txBody>
-                    <a:bodyPr/>
-                    <a:lstStyle/>
-                    <a:p>
-                      <a:pPr indent="0" marL="0">
-                        <a:buNone/>
-                      </a:pPr>
-                      <a:r>
-                        <a:rPr lang="en-US" sz="1300" dirty="0">
-                          <a:solidFill>
-                            <a:srgbClr val="2B2D42"/>
-                          </a:solidFill>
-                          <a:latin typeface="Meiryo" pitchFamily="34" charset="0"/>
-                          <a:ea typeface="Meiryo" pitchFamily="34" charset="-122"/>
-                          <a:cs typeface="Meiryo" pitchFamily="34" charset="-120"/>
-                        </a:rPr>
-                        <a:t>月次で目標との差と次の手を報告</a:t>
-                      </a:r>
-                      <a:endParaRPr lang="en-US" sz="1300" dirty="0">
-                        <a:latin typeface="Meiryo" charset="0"/>
-                        <a:ea typeface="Meiryo" charset="0"/>
-                        <a:cs typeface="Meiryo" charset="0"/>
-                      </a:endParaRPr>
-                    </a:p>
-                  </a:txBody>
-                  <a:tcPr marL="109728" marR="109728" marT="54864" marB="54864" anchor="ctr">
+                  <a:tcPr marL="137160" marR="137160" marT="73152" marB="73152" anchor="ctr">
                     <a:lnL w="12700" cap="flat" cmpd="sng" algn="ctr">
                       <a:solidFill>
                         <a:srgbClr val="E3E4EA"/>
@@ -6077,7 +4640,7 @@
         </p:nvSpPr>
         <p:spPr>
           <a:xfrm>
-            <a:off x="548640" y="5486400"/>
+            <a:off x="548640" y="5440680"/>
             <a:ext cx="11094415" cy="274320"/>
           </a:xfrm>
           <a:prstGeom prst="rect">
@@ -6202,7 +4765,7 @@
         <p:spPr>
           <a:xfrm>
             <a:off x="548640" y="777240"/>
-            <a:ext cx="11094415" cy="548640"/>
+            <a:ext cx="11094415" cy="594360"/>
           </a:xfrm>
           <a:prstGeom prst="rect">
             <a:avLst/>
@@ -6218,7 +4781,7 @@
               <a:buNone/>
             </a:pPr>
             <a:r>
-              <a:rPr lang="en-US" sz="2800" b="1" dirty="0">
+              <a:rPr lang="en-US" sz="3000" b="1" dirty="0">
                 <a:solidFill>
                   <a:srgbClr val="2B2D42"/>
                 </a:solidFill>
@@ -6226,9 +4789,9 @@
                 <a:ea typeface="Meiryo" pitchFamily="34" charset="-122"/>
                 <a:cs typeface="Meiryo" pitchFamily="34" charset="-120"/>
               </a:rPr>
-              <a:t>10〜12月の3ヶ月で、3施策をすべて稼働させる</a:t>
-            </a:r>
-            <a:endParaRPr lang="en-US" sz="2800" dirty="0"/>
+              <a:t>10〜12月で、3つとも動かす</a:t>
+            </a:r>
+            <a:endParaRPr lang="en-US" sz="3000" dirty="0"/>
           </a:p>
         </p:txBody>
       </p:sp>
@@ -6240,7 +4803,7 @@
         </p:nvSpPr>
         <p:spPr>
           <a:xfrm>
-            <a:off x="10545775" y="6172200"/>
+            <a:off x="10545775" y="6217920"/>
             <a:ext cx="1097280" cy="228600"/>
           </a:xfrm>
           <a:prstGeom prst="rect">
@@ -6279,8 +4842,8 @@
         </p:nvSpPr>
         <p:spPr>
           <a:xfrm>
-            <a:off x="3474720" y="1645920"/>
-            <a:ext cx="2722778" cy="384048"/>
+            <a:off x="3840480" y="1691640"/>
+            <a:ext cx="2600858" cy="411480"/>
           </a:xfrm>
           <a:prstGeom prst="rect">
             <a:avLst/>
@@ -6304,8 +4867,8 @@
         </p:nvSpPr>
         <p:spPr>
           <a:xfrm>
-            <a:off x="3474720" y="1645920"/>
-            <a:ext cx="2722778" cy="384048"/>
+            <a:off x="3840480" y="1691640"/>
+            <a:ext cx="2600858" cy="411480"/>
           </a:xfrm>
           <a:prstGeom prst="rect">
             <a:avLst/>
@@ -6321,7 +4884,7 @@
               <a:buNone/>
             </a:pPr>
             <a:r>
-              <a:rPr lang="en-US" sz="1400" b="1" dirty="0">
+              <a:rPr lang="en-US" sz="1500" b="1" dirty="0">
                 <a:solidFill>
                   <a:srgbClr val="FFFFFF"/>
                 </a:solidFill>
@@ -6331,7 +4894,7 @@
               </a:rPr>
               <a:t>10月</a:t>
             </a:r>
-            <a:endParaRPr lang="en-US" sz="1400" dirty="0"/>
+            <a:endParaRPr lang="en-US" sz="1500" dirty="0"/>
           </a:p>
         </p:txBody>
       </p:sp>
@@ -6343,8 +4906,8 @@
         </p:nvSpPr>
         <p:spPr>
           <a:xfrm>
-            <a:off x="6197498" y="1645920"/>
-            <a:ext cx="2722778" cy="384048"/>
+            <a:off x="6441338" y="1691640"/>
+            <a:ext cx="2600858" cy="411480"/>
           </a:xfrm>
           <a:prstGeom prst="rect">
             <a:avLst/>
@@ -6368,8 +4931,8 @@
         </p:nvSpPr>
         <p:spPr>
           <a:xfrm>
-            <a:off x="6197498" y="1645920"/>
-            <a:ext cx="2722778" cy="384048"/>
+            <a:off x="6441338" y="1691640"/>
+            <a:ext cx="2600858" cy="411480"/>
           </a:xfrm>
           <a:prstGeom prst="rect">
             <a:avLst/>
@@ -6385,7 +4948,7 @@
               <a:buNone/>
             </a:pPr>
             <a:r>
-              <a:rPr lang="en-US" sz="1400" b="1" dirty="0">
+              <a:rPr lang="en-US" sz="1500" b="1" dirty="0">
                 <a:solidFill>
                   <a:srgbClr val="FFFFFF"/>
                 </a:solidFill>
@@ -6395,7 +4958,7 @@
               </a:rPr>
               <a:t>11月</a:t>
             </a:r>
-            <a:endParaRPr lang="en-US" sz="1400" dirty="0"/>
+            <a:endParaRPr lang="en-US" sz="1500" dirty="0"/>
           </a:p>
         </p:txBody>
       </p:sp>
@@ -6407,8 +4970,8 @@
         </p:nvSpPr>
         <p:spPr>
           <a:xfrm>
-            <a:off x="8920277" y="1645920"/>
-            <a:ext cx="2722778" cy="384048"/>
+            <a:off x="9042197" y="1691640"/>
+            <a:ext cx="2600858" cy="411480"/>
           </a:xfrm>
           <a:prstGeom prst="rect">
             <a:avLst/>
@@ -6432,8 +4995,8 @@
         </p:nvSpPr>
         <p:spPr>
           <a:xfrm>
-            <a:off x="8920277" y="1645920"/>
-            <a:ext cx="2722778" cy="384048"/>
+            <a:off x="9042197" y="1691640"/>
+            <a:ext cx="2600858" cy="411480"/>
           </a:xfrm>
           <a:prstGeom prst="rect">
             <a:avLst/>
@@ -6449,7 +5012,7 @@
               <a:buNone/>
             </a:pPr>
             <a:r>
-              <a:rPr lang="en-US" sz="1400" b="1" dirty="0">
+              <a:rPr lang="en-US" sz="1500" b="1" dirty="0">
                 <a:solidFill>
                   <a:srgbClr val="FFFFFF"/>
                 </a:solidFill>
@@ -6459,7 +5022,7 @@
               </a:rPr>
               <a:t>12月</a:t>
             </a:r>
-            <a:endParaRPr lang="en-US" sz="1400" dirty="0"/>
+            <a:endParaRPr lang="en-US" sz="1500" dirty="0"/>
           </a:p>
         </p:txBody>
       </p:sp>
@@ -6471,8 +5034,8 @@
         </p:nvSpPr>
         <p:spPr>
           <a:xfrm>
-            <a:off x="548640" y="2121408"/>
-            <a:ext cx="2743200" cy="548640"/>
+            <a:off x="548640" y="2194560"/>
+            <a:ext cx="3108960" cy="640080"/>
           </a:xfrm>
           <a:prstGeom prst="rect">
             <a:avLst/>
@@ -6488,7 +5051,7 @@
               <a:buNone/>
             </a:pPr>
             <a:r>
-              <a:rPr lang="en-US" sz="1400" b="1" dirty="0">
+              <a:rPr lang="en-US" sz="1500" b="1" dirty="0">
                 <a:solidFill>
                   <a:srgbClr val="C8315F"/>
                 </a:solidFill>
@@ -6502,7 +5065,7 @@
               <a:buNone/>
             </a:pPr>
             <a:r>
-              <a:rPr lang="en-US" sz="1400" b="1" dirty="0">
+              <a:rPr lang="en-US" sz="1500" b="1" dirty="0">
                 <a:solidFill>
                   <a:srgbClr val="2B2D42"/>
                 </a:solidFill>
@@ -6510,9 +5073,9 @@
                 <a:ea typeface="Meiryo" pitchFamily="34" charset="-122"/>
                 <a:cs typeface="Meiryo" pitchFamily="34" charset="-120"/>
               </a:rPr>
-              <a:t>会計の外注</a:t>
-            </a:r>
-            <a:endParaRPr lang="en-US" sz="1400" dirty="0"/>
+              <a:t>会計 → DFE</a:t>
+            </a:r>
+            <a:endParaRPr lang="en-US" sz="1500" dirty="0"/>
           </a:p>
         </p:txBody>
       </p:sp>
@@ -6524,7 +5087,7 @@
         </p:nvSpPr>
         <p:spPr>
           <a:xfrm>
-            <a:off x="548640" y="2670048"/>
+            <a:off x="548640" y="2834640"/>
             <a:ext cx="11094415" cy="0"/>
           </a:xfrm>
           <a:prstGeom prst="line">
@@ -6547,8 +5110,8 @@
         </p:nvSpPr>
         <p:spPr>
           <a:xfrm>
-            <a:off x="548640" y="2670048"/>
-            <a:ext cx="2743200" cy="548640"/>
+            <a:off x="548640" y="2834640"/>
+            <a:ext cx="3108960" cy="640080"/>
           </a:xfrm>
           <a:prstGeom prst="rect">
             <a:avLst/>
@@ -6564,7 +5127,7 @@
               <a:buNone/>
             </a:pPr>
             <a:r>
-              <a:rPr lang="en-US" sz="1400" b="1" dirty="0">
+              <a:rPr lang="en-US" sz="1500" b="1" dirty="0">
                 <a:solidFill>
                   <a:srgbClr val="C8315F"/>
                 </a:solidFill>
@@ -6578,7 +5141,7 @@
               <a:buNone/>
             </a:pPr>
             <a:r>
-              <a:rPr lang="en-US" sz="1400" b="1" dirty="0">
+              <a:rPr lang="en-US" sz="1500" b="1" dirty="0">
                 <a:solidFill>
                   <a:srgbClr val="2B2D42"/>
                 </a:solidFill>
@@ -6586,9 +5149,9 @@
                 <a:ea typeface="Meiryo" pitchFamily="34" charset="-122"/>
                 <a:cs typeface="Meiryo" pitchFamily="34" charset="-120"/>
               </a:rPr>
-              <a:t>掲載パート戦力化</a:t>
-            </a:r>
-            <a:endParaRPr lang="en-US" sz="1400" dirty="0"/>
+              <a:t>写真撮影・入力 → パート</a:t>
+            </a:r>
+            <a:endParaRPr lang="en-US" sz="1500" dirty="0"/>
           </a:p>
         </p:txBody>
       </p:sp>
@@ -6600,7 +5163,7 @@
         </p:nvSpPr>
         <p:spPr>
           <a:xfrm>
-            <a:off x="548640" y="3218688"/>
+            <a:off x="548640" y="3474720"/>
             <a:ext cx="11094415" cy="0"/>
           </a:xfrm>
           <a:prstGeom prst="line">
@@ -6623,8 +5186,8 @@
         </p:nvSpPr>
         <p:spPr>
           <a:xfrm>
-            <a:off x="548640" y="3218688"/>
-            <a:ext cx="2743200" cy="548640"/>
+            <a:off x="548640" y="3474720"/>
+            <a:ext cx="3108960" cy="640080"/>
           </a:xfrm>
           <a:prstGeom prst="rect">
             <a:avLst/>
@@ -6640,7 +5203,7 @@
               <a:buNone/>
             </a:pPr>
             <a:r>
-              <a:rPr lang="en-US" sz="1400" b="1" dirty="0">
+              <a:rPr lang="en-US" sz="1500" b="1" dirty="0">
                 <a:solidFill>
                   <a:srgbClr val="C8315F"/>
                 </a:solidFill>
@@ -6654,7 +5217,7 @@
               <a:buNone/>
             </a:pPr>
             <a:r>
-              <a:rPr lang="en-US" sz="1400" b="1" dirty="0">
+              <a:rPr lang="en-US" sz="1500" b="1" dirty="0">
                 <a:solidFill>
                   <a:srgbClr val="2B2D42"/>
                 </a:solidFill>
@@ -6662,9 +5225,9 @@
                 <a:ea typeface="Meiryo" pitchFamily="34" charset="-122"/>
                 <a:cs typeface="Meiryo" pitchFamily="34" charset="-120"/>
               </a:rPr>
-              <a:t>コールセンター等</a:t>
-            </a:r>
-            <a:endParaRPr lang="en-US" sz="1400" dirty="0"/>
+              <a:t>クレーム一次対応 → 外注</a:t>
+            </a:r>
+            <a:endParaRPr lang="en-US" sz="1500" dirty="0"/>
           </a:p>
         </p:txBody>
       </p:sp>
@@ -6676,7 +5239,7 @@
         </p:nvSpPr>
         <p:spPr>
           <a:xfrm>
-            <a:off x="548640" y="3767328"/>
+            <a:off x="548640" y="4114800"/>
             <a:ext cx="11094415" cy="0"/>
           </a:xfrm>
           <a:prstGeom prst="line">
@@ -6693,94 +5256,18 @@
       </p:sp>
       <p:sp>
         <p:nvSpPr>
-          <p:cNvPr id="17" name="Text 15"/>
-          <p:cNvSpPr txBox="1"/>
-          <p:nvPr/>
-        </p:nvSpPr>
-        <p:spPr>
-          <a:xfrm>
-            <a:off x="548640" y="3767328"/>
-            <a:ext cx="2743200" cy="548640"/>
-          </a:xfrm>
-          <a:prstGeom prst="rect">
-            <a:avLst/>
-          </a:prstGeom>
-          <a:noFill/>
-          <a:ln/>
-        </p:spPr>
-        <p:txBody>
-          <a:bodyPr wrap="square" lIns="0" tIns="0" rIns="0" bIns="0" rtlCol="0" anchor="ctr"/>
-          <a:lstStyle/>
-          <a:p>
-            <a:pPr indent="0" marL="0">
-              <a:buNone/>
-            </a:pPr>
-            <a:r>
-              <a:rPr lang="en-US" sz="1400" b="1" dirty="0">
-                <a:solidFill>
-                  <a:srgbClr val="C8315F"/>
-                </a:solidFill>
-                <a:latin typeface="Meiryo" pitchFamily="34" charset="0"/>
-                <a:ea typeface="Meiryo" pitchFamily="34" charset="-122"/>
-                <a:cs typeface="Meiryo" pitchFamily="34" charset="-120"/>
-              </a:rPr>
-              <a:t>04  </a:t>
-            </a:r>
-            <a:pPr indent="0" marL="0">
-              <a:buNone/>
-            </a:pPr>
-            <a:r>
-              <a:rPr lang="en-US" sz="1400" b="1" dirty="0">
-                <a:solidFill>
-                  <a:srgbClr val="2B2D42"/>
-                </a:solidFill>
-                <a:latin typeface="Meiryo" pitchFamily="34" charset="0"/>
-                <a:ea typeface="Meiryo" pitchFamily="34" charset="-122"/>
-                <a:cs typeface="Meiryo" pitchFamily="34" charset="-120"/>
-              </a:rPr>
-              <a:t>進捗確認</a:t>
-            </a:r>
-            <a:endParaRPr lang="en-US" sz="1400" dirty="0"/>
-          </a:p>
-        </p:txBody>
-      </p:sp>
-      <p:sp>
-        <p:nvSpPr>
-          <p:cNvPr id="18" name="Shape 16"/>
+          <p:cNvPr id="17" name="Shape 15"/>
           <p:cNvSpPr/>
           <p:nvPr/>
         </p:nvSpPr>
         <p:spPr>
           <a:xfrm>
-            <a:off x="548640" y="4315968"/>
-            <a:ext cx="11094415" cy="0"/>
-          </a:xfrm>
-          <a:prstGeom prst="line">
-            <a:avLst/>
-          </a:prstGeom>
-          <a:noFill/>
-          <a:ln w="12700">
-            <a:solidFill>
-              <a:srgbClr val="E3E4EA"/>
-            </a:solidFill>
-            <a:prstDash val="solid"/>
-          </a:ln>
-        </p:spPr>
-      </p:sp>
-      <p:sp>
-        <p:nvSpPr>
-          <p:cNvPr id="19" name="Shape 17"/>
-          <p:cNvSpPr/>
-          <p:nvPr/>
-        </p:nvSpPr>
-        <p:spPr>
-          <a:xfrm>
-            <a:off x="3529584" y="2212848"/>
-            <a:ext cx="2613050" cy="365760"/>
+            <a:off x="3895344" y="2304288"/>
+            <a:ext cx="2491130" cy="420624"/>
           </a:xfrm>
           <a:prstGeom prst="roundRect">
             <a:avLst>
-              <a:gd name="adj" fmla="val 15000"/>
+              <a:gd name="adj" fmla="val 13043"/>
             </a:avLst>
           </a:prstGeom>
           <a:solidFill>
@@ -6796,14 +5283,14 @@
       </p:sp>
       <p:sp>
         <p:nvSpPr>
-          <p:cNvPr id="20" name="Text 18"/>
+          <p:cNvPr id="18" name="Text 16"/>
           <p:cNvSpPr txBox="1"/>
           <p:nvPr/>
         </p:nvSpPr>
         <p:spPr>
           <a:xfrm>
-            <a:off x="3666744" y="2212848"/>
-            <a:ext cx="2338730" cy="365760"/>
+            <a:off x="4032504" y="2304288"/>
+            <a:ext cx="2216810" cy="420624"/>
           </a:xfrm>
           <a:prstGeom prst="rect">
             <a:avLst/>
@@ -6819,7 +5306,7 @@
               <a:buNone/>
             </a:pPr>
             <a:r>
-              <a:rPr lang="en-US" sz="1200" b="1" dirty="0">
+              <a:rPr lang="en-US" sz="1300" b="1" dirty="0">
                 <a:solidFill>
                   <a:srgbClr val="2B2D42"/>
                 </a:solidFill>
@@ -6829,24 +5316,24 @@
               </a:rPr>
               <a:t>見積・契約</a:t>
             </a:r>
-            <a:endParaRPr lang="en-US" sz="1200" dirty="0"/>
-          </a:p>
-        </p:txBody>
-      </p:sp>
-      <p:sp>
-        <p:nvSpPr>
-          <p:cNvPr id="21" name="Shape 19"/>
+            <a:endParaRPr lang="en-US" sz="1300" dirty="0"/>
+          </a:p>
+        </p:txBody>
+      </p:sp>
+      <p:sp>
+        <p:nvSpPr>
+          <p:cNvPr id="19" name="Shape 17"/>
           <p:cNvSpPr/>
           <p:nvPr/>
         </p:nvSpPr>
         <p:spPr>
           <a:xfrm>
-            <a:off x="6252362" y="2212848"/>
-            <a:ext cx="5335829" cy="365760"/>
+            <a:off x="6496202" y="2304288"/>
+            <a:ext cx="5091989" cy="420624"/>
           </a:xfrm>
           <a:prstGeom prst="roundRect">
             <a:avLst>
-              <a:gd name="adj" fmla="val 15000"/>
+              <a:gd name="adj" fmla="val 13043"/>
             </a:avLst>
           </a:prstGeom>
           <a:solidFill>
@@ -6862,14 +5349,14 @@
       </p:sp>
       <p:sp>
         <p:nvSpPr>
-          <p:cNvPr id="22" name="Text 20"/>
+          <p:cNvPr id="20" name="Text 18"/>
           <p:cNvSpPr txBox="1"/>
           <p:nvPr/>
         </p:nvSpPr>
         <p:spPr>
           <a:xfrm>
-            <a:off x="6389522" y="2212848"/>
-            <a:ext cx="5061509" cy="365760"/>
+            <a:off x="6633362" y="2304288"/>
+            <a:ext cx="4817669" cy="420624"/>
           </a:xfrm>
           <a:prstGeom prst="rect">
             <a:avLst/>
@@ -6885,7 +5372,7 @@
               <a:buNone/>
             </a:pPr>
             <a:r>
-              <a:rPr lang="en-US" sz="1200" b="1" dirty="0">
+              <a:rPr lang="en-US" sz="1300" b="1" dirty="0">
                 <a:solidFill>
                   <a:srgbClr val="FFFFFF"/>
                 </a:solidFill>
@@ -6893,26 +5380,26 @@
                 <a:ea typeface="Meiryo" pitchFamily="34" charset="-122"/>
                 <a:cs typeface="Meiryo" pitchFamily="34" charset="-120"/>
               </a:rPr>
-              <a:t>外注で運用（月40h創出）</a:t>
-            </a:r>
-            <a:endParaRPr lang="en-US" sz="1200" dirty="0"/>
-          </a:p>
-        </p:txBody>
-      </p:sp>
-      <p:sp>
-        <p:nvSpPr>
-          <p:cNvPr id="23" name="Shape 21"/>
+              <a:t>DFEで運用</a:t>
+            </a:r>
+            <a:endParaRPr lang="en-US" sz="1300" dirty="0"/>
+          </a:p>
+        </p:txBody>
+      </p:sp>
+      <p:sp>
+        <p:nvSpPr>
+          <p:cNvPr id="21" name="Shape 19"/>
           <p:cNvSpPr/>
           <p:nvPr/>
         </p:nvSpPr>
         <p:spPr>
           <a:xfrm>
-            <a:off x="3529584" y="2761488"/>
-            <a:ext cx="2613050" cy="365760"/>
+            <a:off x="3895344" y="2944368"/>
+            <a:ext cx="2491130" cy="420624"/>
           </a:xfrm>
           <a:prstGeom prst="roundRect">
             <a:avLst>
-              <a:gd name="adj" fmla="val 15000"/>
+              <a:gd name="adj" fmla="val 13043"/>
             </a:avLst>
           </a:prstGeom>
           <a:solidFill>
@@ -6928,14 +5415,14 @@
       </p:sp>
       <p:sp>
         <p:nvSpPr>
-          <p:cNvPr id="24" name="Text 22"/>
+          <p:cNvPr id="22" name="Text 20"/>
           <p:cNvSpPr txBox="1"/>
           <p:nvPr/>
         </p:nvSpPr>
         <p:spPr>
           <a:xfrm>
-            <a:off x="3666744" y="2761488"/>
-            <a:ext cx="2338730" cy="365760"/>
+            <a:off x="4032504" y="2944368"/>
+            <a:ext cx="2216810" cy="420624"/>
           </a:xfrm>
           <a:prstGeom prst="rect">
             <a:avLst/>
@@ -6951,7 +5438,7 @@
               <a:buNone/>
             </a:pPr>
             <a:r>
-              <a:rPr lang="en-US" sz="1200" b="1" dirty="0">
+              <a:rPr lang="en-US" sz="1300" b="1" dirty="0">
                 <a:solidFill>
                   <a:srgbClr val="2B2D42"/>
                 </a:solidFill>
@@ -6961,24 +5448,24 @@
               </a:rPr>
               <a:t>引き継ぎ</a:t>
             </a:r>
-            <a:endParaRPr lang="en-US" sz="1200" dirty="0"/>
-          </a:p>
-        </p:txBody>
-      </p:sp>
-      <p:sp>
-        <p:nvSpPr>
-          <p:cNvPr id="25" name="Shape 23"/>
+            <a:endParaRPr lang="en-US" sz="1300" dirty="0"/>
+          </a:p>
+        </p:txBody>
+      </p:sp>
+      <p:sp>
+        <p:nvSpPr>
+          <p:cNvPr id="23" name="Shape 21"/>
           <p:cNvSpPr/>
           <p:nvPr/>
         </p:nvSpPr>
         <p:spPr>
           <a:xfrm>
-            <a:off x="6252362" y="2761488"/>
-            <a:ext cx="5335829" cy="365760"/>
+            <a:off x="6496202" y="2944368"/>
+            <a:ext cx="5091989" cy="420624"/>
           </a:xfrm>
           <a:prstGeom prst="roundRect">
             <a:avLst>
-              <a:gd name="adj" fmla="val 15000"/>
+              <a:gd name="adj" fmla="val 13043"/>
             </a:avLst>
           </a:prstGeom>
           <a:solidFill>
@@ -6994,14 +5481,14 @@
       </p:sp>
       <p:sp>
         <p:nvSpPr>
-          <p:cNvPr id="26" name="Text 24"/>
+          <p:cNvPr id="24" name="Text 22"/>
           <p:cNvSpPr txBox="1"/>
           <p:nvPr/>
         </p:nvSpPr>
         <p:spPr>
           <a:xfrm>
-            <a:off x="6389522" y="2761488"/>
-            <a:ext cx="5061509" cy="365760"/>
+            <a:off x="6633362" y="2944368"/>
+            <a:ext cx="4817669" cy="420624"/>
           </a:xfrm>
           <a:prstGeom prst="rect">
             <a:avLst/>
@@ -7017,7 +5504,7 @@
               <a:buNone/>
             </a:pPr>
             <a:r>
-              <a:rPr lang="en-US" sz="1200" b="1" dirty="0">
+              <a:rPr lang="en-US" sz="1300" b="1" dirty="0">
                 <a:solidFill>
                   <a:srgbClr val="FFFFFF"/>
                 </a:solidFill>
@@ -7025,26 +5512,26 @@
                 <a:ea typeface="Meiryo" pitchFamily="34" charset="-122"/>
                 <a:cs typeface="Meiryo" pitchFamily="34" charset="-120"/>
               </a:rPr>
-              <a:t>単独で掲載・反響を追う</a:t>
-            </a:r>
-            <a:endParaRPr lang="en-US" sz="1200" dirty="0"/>
-          </a:p>
-        </p:txBody>
-      </p:sp>
-      <p:sp>
-        <p:nvSpPr>
-          <p:cNvPr id="27" name="Shape 25"/>
+              <a:t>パートさんが担当</a:t>
+            </a:r>
+            <a:endParaRPr lang="en-US" sz="1300" dirty="0"/>
+          </a:p>
+        </p:txBody>
+      </p:sp>
+      <p:sp>
+        <p:nvSpPr>
+          <p:cNvPr id="25" name="Shape 23"/>
           <p:cNvSpPr/>
           <p:nvPr/>
         </p:nvSpPr>
         <p:spPr>
           <a:xfrm>
-            <a:off x="3529584" y="3310128"/>
-            <a:ext cx="5335829" cy="365760"/>
+            <a:off x="3895344" y="3584448"/>
+            <a:ext cx="5091989" cy="420624"/>
           </a:xfrm>
           <a:prstGeom prst="roundRect">
             <a:avLst>
-              <a:gd name="adj" fmla="val 15000"/>
+              <a:gd name="adj" fmla="val 13043"/>
             </a:avLst>
           </a:prstGeom>
           <a:solidFill>
@@ -7060,14 +5547,14 @@
       </p:sp>
       <p:sp>
         <p:nvSpPr>
-          <p:cNvPr id="28" name="Text 26"/>
+          <p:cNvPr id="26" name="Text 24"/>
           <p:cNvSpPr txBox="1"/>
           <p:nvPr/>
         </p:nvSpPr>
         <p:spPr>
           <a:xfrm>
-            <a:off x="3666744" y="3310128"/>
-            <a:ext cx="5061509" cy="365760"/>
+            <a:off x="4032504" y="3584448"/>
+            <a:ext cx="4817669" cy="420624"/>
           </a:xfrm>
           <a:prstGeom prst="rect">
             <a:avLst/>
@@ -7083,7 +5570,7 @@
               <a:buNone/>
             </a:pPr>
             <a:r>
-              <a:rPr lang="en-US" sz="1200" b="1" dirty="0">
+              <a:rPr lang="en-US" sz="1300" b="1" dirty="0">
                 <a:solidFill>
                   <a:srgbClr val="2B2D42"/>
                 </a:solidFill>
@@ -7091,26 +5578,26 @@
                 <a:ea typeface="Meiryo" pitchFamily="34" charset="-122"/>
                 <a:cs typeface="Meiryo" pitchFamily="34" charset="-120"/>
               </a:rPr>
-              <a:t>業者比較・契約・周知</a:t>
-            </a:r>
-            <a:endParaRPr lang="en-US" sz="1200" dirty="0"/>
-          </a:p>
-        </p:txBody>
-      </p:sp>
-      <p:sp>
-        <p:nvSpPr>
-          <p:cNvPr id="29" name="Shape 27"/>
+              <a:t>業者選び・契約・周知</a:t>
+            </a:r>
+            <a:endParaRPr lang="en-US" sz="1300" dirty="0"/>
+          </a:p>
+        </p:txBody>
+      </p:sp>
+      <p:sp>
+        <p:nvSpPr>
+          <p:cNvPr id="27" name="Shape 25"/>
           <p:cNvSpPr/>
           <p:nvPr/>
         </p:nvSpPr>
         <p:spPr>
           <a:xfrm>
-            <a:off x="8975141" y="3310128"/>
-            <a:ext cx="2613050" cy="365760"/>
+            <a:off x="9097061" y="3584448"/>
+            <a:ext cx="2491130" cy="420624"/>
           </a:xfrm>
           <a:prstGeom prst="roundRect">
             <a:avLst>
-              <a:gd name="adj" fmla="val 15000"/>
+              <a:gd name="adj" fmla="val 13043"/>
             </a:avLst>
           </a:prstGeom>
           <a:solidFill>
@@ -7126,14 +5613,14 @@
       </p:sp>
       <p:sp>
         <p:nvSpPr>
-          <p:cNvPr id="30" name="Text 28"/>
+          <p:cNvPr id="28" name="Text 26"/>
           <p:cNvSpPr txBox="1"/>
           <p:nvPr/>
         </p:nvSpPr>
         <p:spPr>
           <a:xfrm>
-            <a:off x="9112301" y="3310128"/>
-            <a:ext cx="2338730" cy="365760"/>
+            <a:off x="9234221" y="3584448"/>
+            <a:ext cx="2216810" cy="420624"/>
           </a:xfrm>
           <a:prstGeom prst="rect">
             <a:avLst/>
@@ -7149,7 +5636,7 @@
               <a:buNone/>
             </a:pPr>
             <a:r>
-              <a:rPr lang="en-US" sz="1200" b="1" dirty="0">
+              <a:rPr lang="en-US" sz="1300" b="1" dirty="0">
                 <a:solidFill>
                   <a:srgbClr val="FFFFFF"/>
                 </a:solidFill>
@@ -7159,120 +5646,20 @@
               </a:rPr>
               <a:t>稼働</a:t>
             </a:r>
-            <a:endParaRPr lang="en-US" sz="1200" dirty="0"/>
-          </a:p>
-        </p:txBody>
-      </p:sp>
-      <p:sp>
-        <p:nvSpPr>
-          <p:cNvPr id="31" name="Shape 29"/>
-          <p:cNvSpPr/>
-          <p:nvPr/>
-        </p:nvSpPr>
-        <p:spPr>
-          <a:xfrm>
-            <a:off x="5868314" y="3922776"/>
-            <a:ext cx="237744" cy="237744"/>
-          </a:xfrm>
-          <a:prstGeom prst="ellipse">
-            <a:avLst/>
-          </a:prstGeom>
-          <a:solidFill>
-            <a:srgbClr val="2E8B62"/>
-          </a:solidFill>
-          <a:ln w="12700">
-            <a:solidFill>
-              <a:srgbClr val="2E8B62"/>
-            </a:solidFill>
-            <a:prstDash val="solid"/>
-          </a:ln>
-        </p:spPr>
-      </p:sp>
-      <p:sp>
-        <p:nvSpPr>
-          <p:cNvPr id="32" name="Shape 30"/>
-          <p:cNvSpPr/>
-          <p:nvPr/>
-        </p:nvSpPr>
-        <p:spPr>
-          <a:xfrm>
-            <a:off x="8591093" y="3922776"/>
-            <a:ext cx="237744" cy="237744"/>
-          </a:xfrm>
-          <a:prstGeom prst="ellipse">
-            <a:avLst/>
-          </a:prstGeom>
-          <a:solidFill>
-            <a:srgbClr val="2E8B62"/>
-          </a:solidFill>
-          <a:ln w="12700">
-            <a:solidFill>
-              <a:srgbClr val="2E8B62"/>
-            </a:solidFill>
-            <a:prstDash val="solid"/>
-          </a:ln>
-        </p:spPr>
-      </p:sp>
-      <p:sp>
-        <p:nvSpPr>
-          <p:cNvPr id="33" name="Shape 31"/>
-          <p:cNvSpPr/>
-          <p:nvPr/>
-        </p:nvSpPr>
-        <p:spPr>
-          <a:xfrm>
-            <a:off x="11313871" y="3922776"/>
-            <a:ext cx="237744" cy="237744"/>
-          </a:xfrm>
-          <a:prstGeom prst="ellipse">
-            <a:avLst/>
-          </a:prstGeom>
-          <a:solidFill>
-            <a:srgbClr val="2E8B62"/>
-          </a:solidFill>
-          <a:ln w="12700">
-            <a:solidFill>
-              <a:srgbClr val="2E8B62"/>
-            </a:solidFill>
-            <a:prstDash val="solid"/>
-          </a:ln>
-        </p:spPr>
-      </p:sp>
-      <p:sp>
-        <p:nvSpPr>
-          <p:cNvPr id="34" name="Shape 32"/>
-          <p:cNvSpPr/>
-          <p:nvPr/>
-        </p:nvSpPr>
-        <p:spPr>
-          <a:xfrm>
-            <a:off x="3474720" y="4507992"/>
-            <a:ext cx="164592" cy="164592"/>
-          </a:xfrm>
-          <a:prstGeom prst="ellipse">
-            <a:avLst/>
-          </a:prstGeom>
-          <a:solidFill>
-            <a:srgbClr val="2E8B62"/>
-          </a:solidFill>
-          <a:ln w="12700">
-            <a:solidFill>
-              <a:srgbClr val="2E8B62"/>
-            </a:solidFill>
-            <a:prstDash val="solid"/>
-          </a:ln>
-        </p:spPr>
-      </p:sp>
-      <p:sp>
-        <p:nvSpPr>
-          <p:cNvPr id="35" name="Text 33"/>
+            <a:endParaRPr lang="en-US" sz="1300" dirty="0"/>
+          </a:p>
+        </p:txBody>
+      </p:sp>
+      <p:sp>
+        <p:nvSpPr>
+          <p:cNvPr id="29" name="Text 27"/>
           <p:cNvSpPr txBox="1"/>
           <p:nvPr/>
         </p:nvSpPr>
         <p:spPr>
           <a:xfrm>
-            <a:off x="3730752" y="4453128"/>
-            <a:ext cx="3657600" cy="274320"/>
+            <a:off x="3840480" y="4251960"/>
+            <a:ext cx="5486400" cy="274320"/>
           </a:xfrm>
           <a:prstGeom prst="rect">
             <a:avLst/>
@@ -7281,41 +5668,41 @@
           <a:ln/>
         </p:spPr>
         <p:txBody>
-          <a:bodyPr wrap="square" lIns="0" tIns="0" rIns="0" bIns="0" rtlCol="0" anchor="ctr"/>
+          <a:bodyPr wrap="square" lIns="0" tIns="0" rIns="0" bIns="0" rtlCol="0" anchor="t"/>
           <a:lstStyle/>
           <a:p>
             <a:pPr indent="0" marL="0">
               <a:buNone/>
             </a:pPr>
             <a:r>
-              <a:rPr lang="en-US" sz="1200" dirty="0">
-                <a:solidFill>
-                  <a:srgbClr val="2E8B62"/>
-                </a:solidFill>
-                <a:latin typeface="Meiryo" pitchFamily="34" charset="0"/>
-                <a:ea typeface="Meiryo" pitchFamily="34" charset="-122"/>
-                <a:cs typeface="Meiryo" pitchFamily="34" charset="-120"/>
-              </a:rPr>
-              <a:t>月末に売上と進捗を確認</a:t>
-            </a:r>
-            <a:endParaRPr lang="en-US" sz="1200" dirty="0"/>
-          </a:p>
-        </p:txBody>
-      </p:sp>
-      <p:sp>
-        <p:nvSpPr>
-          <p:cNvPr id="36" name="Shape 34"/>
+              <a:rPr lang="en-US" sz="1300" dirty="0">
+                <a:solidFill>
+                  <a:srgbClr val="6B6E80"/>
+                </a:solidFill>
+                <a:latin typeface="Meiryo" pitchFamily="34" charset="0"/>
+                <a:ea typeface="Meiryo" pitchFamily="34" charset="-122"/>
+                <a:cs typeface="Meiryo" pitchFamily="34" charset="-120"/>
+              </a:rPr>
+              <a:t>毎月末に売上と進み具合を確認</a:t>
+            </a:r>
+            <a:endParaRPr lang="en-US" sz="1300" dirty="0"/>
+          </a:p>
+        </p:txBody>
+      </p:sp>
+      <p:sp>
+        <p:nvSpPr>
+          <p:cNvPr id="30" name="Shape 28"/>
           <p:cNvSpPr/>
           <p:nvPr/>
         </p:nvSpPr>
         <p:spPr>
           <a:xfrm>
-            <a:off x="548640" y="4956048"/>
-            <a:ext cx="11094415" cy="1051560"/>
+            <a:off x="548640" y="4846320"/>
+            <a:ext cx="11094415" cy="914400"/>
           </a:xfrm>
           <a:prstGeom prst="roundRect">
             <a:avLst>
-              <a:gd name="adj" fmla="val 8696"/>
+              <a:gd name="adj" fmla="val 12000"/>
             </a:avLst>
           </a:prstGeom>
           <a:solidFill>
@@ -7331,14 +5718,14 @@
       </p:sp>
       <p:sp>
         <p:nvSpPr>
-          <p:cNvPr id="37" name="Text 35"/>
+          <p:cNvPr id="31" name="Text 29"/>
           <p:cNvSpPr txBox="1"/>
           <p:nvPr/>
         </p:nvSpPr>
         <p:spPr>
           <a:xfrm>
-            <a:off x="822960" y="4956048"/>
-            <a:ext cx="2194560" cy="1051560"/>
+            <a:off x="868680" y="4846320"/>
+            <a:ext cx="2926080" cy="914400"/>
           </a:xfrm>
           <a:prstGeom prst="rect">
             <a:avLst/>
@@ -7354,7 +5741,7 @@
               <a:buNone/>
             </a:pPr>
             <a:r>
-              <a:rPr lang="en-US" sz="1600" b="1" dirty="0">
+              <a:rPr lang="en-US" sz="1800" b="1" dirty="0">
                 <a:solidFill>
                   <a:srgbClr val="C77700"/>
                 </a:solidFill>
@@ -7364,20 +5751,20 @@
               </a:rPr>
               <a:t>会社に決めてほしいこと</a:t>
             </a:r>
-            <a:endParaRPr lang="en-US" sz="1600" dirty="0"/>
-          </a:p>
-        </p:txBody>
-      </p:sp>
-      <p:sp>
-        <p:nvSpPr>
-          <p:cNvPr id="38" name="Text 36"/>
+            <a:endParaRPr lang="en-US" sz="1800" dirty="0"/>
+          </a:p>
+        </p:txBody>
+      </p:sp>
+      <p:sp>
+        <p:nvSpPr>
+          <p:cNvPr id="32" name="Text 30"/>
           <p:cNvSpPr txBox="1"/>
           <p:nvPr/>
         </p:nvSpPr>
         <p:spPr>
           <a:xfrm>
-            <a:off x="3200400" y="4956048"/>
-            <a:ext cx="8168335" cy="1051560"/>
+            <a:off x="3931920" y="4846320"/>
+            <a:ext cx="7436815" cy="914400"/>
           </a:xfrm>
           <a:prstGeom prst="rect">
             <a:avLst/>
@@ -7390,13 +5777,10 @@
           <a:lstStyle/>
           <a:p>
             <a:pPr indent="0" marL="0">
-              <a:spcAft>
-                <a:spcPts val="600"/>
-              </a:spcAft>
-              <a:buNone/>
-            </a:pPr>
-            <a:r>
-              <a:rPr lang="en-US" sz="1400" dirty="0">
+              <a:buNone/>
+            </a:pPr>
+            <a:r>
+              <a:rPr lang="en-US" sz="1800" b="1" dirty="0">
                 <a:solidFill>
                   <a:srgbClr val="2B2D42"/>
                 </a:solidFill>
@@ -7404,29 +5788,9 @@
                 <a:ea typeface="Meiryo" pitchFamily="34" charset="-122"/>
                 <a:cs typeface="Meiryo" pitchFamily="34" charset="-120"/>
               </a:rPr>
-              <a:t>1.  外注3件（会計・コールセンター・駆けつけ）の予算枠</a:t>
-            </a:r>
-            <a:endParaRPr lang="en-US" sz="1400" dirty="0"/>
-          </a:p>
-          <a:p>
-            <a:pPr indent="0" marL="0">
-              <a:spcAft>
-                <a:spcPts val="600"/>
-              </a:spcAft>
-              <a:buNone/>
-            </a:pPr>
-            <a:r>
-              <a:rPr lang="en-US" sz="1400" dirty="0">
-                <a:solidFill>
-                  <a:srgbClr val="2B2D42"/>
-                </a:solidFill>
-                <a:latin typeface="Meiryo" pitchFamily="34" charset="0"/>
-                <a:ea typeface="Meiryo" pitchFamily="34" charset="-122"/>
-                <a:cs typeface="Meiryo" pitchFamily="34" charset="-120"/>
-              </a:rPr>
-              <a:t>2.  年間目標に売買仲介手数料を含めるか（含めれば月206万円、含めなければ月265万円が必要）</a:t>
-            </a:r>
-            <a:endParaRPr lang="en-US" sz="1400" dirty="0"/>
+              <a:t>外注の予算枠（DFE・コールセンター・駆けつけ）</a:t>
+            </a:r>
+            <a:endParaRPr lang="en-US" sz="1800" dirty="0"/>
           </a:p>
         </p:txBody>
       </p:sp>

--- a/sakura-housing-progress/さくらハウジング_進捗報告_改訂版.pptx
+++ b/sakura-housing-progress/さくらハウジング_進捗報告_改訂版.pptx
@@ -109,6 +109,406 @@
     </a:lvl9pPr>
   </p:defaultTextStyle>
 </p:presentation>
+</file>
+
+<file path=ppt/charts/chart1.xml><?xml version="1.0" encoding="utf-8"?>
+<c:chartSpace xmlns:c="http://schemas.openxmlformats.org/drawingml/2006/chart" xmlns:a="http://schemas.openxmlformats.org/drawingml/2006/main" xmlns:r="http://schemas.openxmlformats.org/officeDocument/2006/relationships">
+  <c:date1904 val="0"/>
+  <c:roundedCorners val="1"/>
+  <c:chart>
+    <c:title>
+      <c:tx>
+        <c:rich>
+          <a:bodyPr/>
+          <a:lstStyle/>
+          <a:p>
+            <a:pPr>
+              <a:defRPr sz="1400" b="0" i="0" u="none" strike="noStrike">
+                <a:solidFill>
+                  <a:srgbClr val="6B6E80"/>
+                </a:solidFill>
+                <a:latin typeface="Meiryo"/>
+              </a:defRPr>
+            </a:pPr>
+            <a:r>
+              <a:rPr sz="1400" b="0" i="0" u="none" strike="noStrike">
+                <a:solidFill>
+                  <a:srgbClr val="6B6E80"/>
+                </a:solidFill>
+                <a:latin typeface="Meiryo"/>
+              </a:rPr>
+              <a:t>AD・付帯系の月別売上（万円）</a:t>
+            </a:r>
+          </a:p>
+        </c:rich>
+      </c:tx>
+      <c:layout/>
+      <c:overlay val="0"/>
+    </c:title>
+    <c:autoTitleDeleted val="0"/>
+    <c:plotArea>
+      <c:layout/>
+      <c:barChart>
+        <c:barDir val="col"/>
+        <c:grouping val="stacked"/>
+        <c:varyColors val="0"/>
+        <c:ser>
+          <c:idx val="0"/>
+          <c:order val="0"/>
+          <c:tx>
+            <c:strRef>
+              <c:f>Sheet1!$B$1</c:f>
+              <c:strCache>
+                <c:ptCount val="1"/>
+                <c:pt idx="0">
+                  <c:v>AD</c:v>
+                </c:pt>
+              </c:strCache>
+            </c:strRef>
+          </c:tx>
+          <c:spPr>
+            <a:solidFill>
+              <a:srgbClr val="C8315F"/>
+            </a:solidFill>
+            <a:effectLst/>
+          </c:spPr>
+          <c:invertIfNegative val="0"/>
+          <c:dLbls>
+            <c:numFmt formatCode="0" sourceLinked="0"/>
+            <c:txPr>
+              <a:bodyPr/>
+              <a:lstStyle/>
+              <a:p>
+                <a:pPr>
+                  <a:defRPr b="0" i="0" strike="noStrike" sz="1200" u="none">
+                    <a:solidFill>
+                      <a:srgbClr val="FFFFFF"/>
+                    </a:solidFill>
+                    <a:latin typeface="Meiryo"/>
+                  </a:defRPr>
+                </a:pPr>
+              </a:p>
+            </c:txPr>
+            <c:dLblPos val="ctr"/>
+            <c:showLegendKey val="0"/>
+            <c:showVal val="1"/>
+            <c:showCatName val="0"/>
+            <c:showSerName val="0"/>
+            <c:showPercent val="0"/>
+            <c:showBubbleSize val="0"/>
+            <c:showLeaderLines val="0"/>
+          </c:dLbls>
+          <c:cat>
+            <c:multiLvlStrRef>
+              <c:f>Sheet1!$A$2:$A$7</c:f>
+              <c:multiLvlStrCache>
+                <c:ptCount val="6"/>
+                <c:lvl>
+                  <c:pt idx="0">
+                    <c:v>3月</c:v>
+                  </c:pt>
+                  <c:pt idx="1">
+                    <c:v>4月</c:v>
+                  </c:pt>
+                  <c:pt idx="2">
+                    <c:v>5月</c:v>
+                  </c:pt>
+                  <c:pt idx="3">
+                    <c:v>6月</c:v>
+                  </c:pt>
+                  <c:pt idx="4">
+                    <c:v>7月</c:v>
+                  </c:pt>
+                  <c:pt idx="5">
+                    <c:v>8月</c:v>
+                  </c:pt>
+                </c:lvl>
+              </c:multiLvlStrCache>
+            </c:multiLvlStrRef>
+          </c:cat>
+          <c:val>
+            <c:numRef>
+              <c:f>Sheet1!$B$2:$B$7</c:f>
+              <c:numCache>
+                <c:formatCode>General</c:formatCode>
+                <c:ptCount val="6"/>
+                <c:pt idx="0">
+                  <c:v>40</c:v>
+                </c:pt>
+                <c:pt idx="1">
+                  <c:v>40.4</c:v>
+                </c:pt>
+                <c:pt idx="2">
+                  <c:v>18</c:v>
+                </c:pt>
+                <c:pt idx="3">
+                  <c:v>23.9</c:v>
+                </c:pt>
+                <c:pt idx="4">
+                  <c:v>42.4</c:v>
+                </c:pt>
+                <c:pt idx="5">
+                  <c:v>28.9</c:v>
+                </c:pt>
+              </c:numCache>
+            </c:numRef>
+          </c:val>
+        </c:ser>
+        <c:ser>
+          <c:idx val="1"/>
+          <c:order val="1"/>
+          <c:tx>
+            <c:strRef>
+              <c:f>Sheet1!$C$1</c:f>
+              <c:strCache>
+                <c:ptCount val="1"/>
+                <c:pt idx="0">
+                  <c:v>付帯系（保険・保証・付帯商品）</c:v>
+                </c:pt>
+              </c:strCache>
+            </c:strRef>
+          </c:tx>
+          <c:spPr>
+            <a:solidFill>
+              <a:srgbClr val="E88AA8"/>
+            </a:solidFill>
+            <a:effectLst/>
+          </c:spPr>
+          <c:invertIfNegative val="0"/>
+          <c:dLbls>
+            <c:numFmt formatCode="0" sourceLinked="0"/>
+            <c:txPr>
+              <a:bodyPr/>
+              <a:lstStyle/>
+              <a:p>
+                <a:pPr>
+                  <a:defRPr b="0" i="0" strike="noStrike" sz="1200" u="none">
+                    <a:solidFill>
+                      <a:srgbClr val="FFFFFF"/>
+                    </a:solidFill>
+                    <a:latin typeface="Meiryo"/>
+                  </a:defRPr>
+                </a:pPr>
+              </a:p>
+            </c:txPr>
+            <c:dLblPos val="ctr"/>
+            <c:showLegendKey val="0"/>
+            <c:showVal val="1"/>
+            <c:showCatName val="0"/>
+            <c:showSerName val="0"/>
+            <c:showPercent val="0"/>
+            <c:showBubbleSize val="0"/>
+            <c:showLeaderLines val="0"/>
+          </c:dLbls>
+          <c:cat>
+            <c:multiLvlStrRef>
+              <c:f>Sheet1!$A$2:$A$7</c:f>
+              <c:multiLvlStrCache>
+                <c:ptCount val="6"/>
+                <c:lvl>
+                  <c:pt idx="0">
+                    <c:v>3月</c:v>
+                  </c:pt>
+                  <c:pt idx="1">
+                    <c:v>4月</c:v>
+                  </c:pt>
+                  <c:pt idx="2">
+                    <c:v>5月</c:v>
+                  </c:pt>
+                  <c:pt idx="3">
+                    <c:v>6月</c:v>
+                  </c:pt>
+                  <c:pt idx="4">
+                    <c:v>7月</c:v>
+                  </c:pt>
+                  <c:pt idx="5">
+                    <c:v>8月</c:v>
+                  </c:pt>
+                </c:lvl>
+              </c:multiLvlStrCache>
+            </c:multiLvlStrRef>
+          </c:cat>
+          <c:val>
+            <c:numRef>
+              <c:f>Sheet1!$C$2:$C$7</c:f>
+              <c:numCache>
+                <c:formatCode>General</c:formatCode>
+                <c:ptCount val="6"/>
+                <c:pt idx="0">
+                  <c:v>0.6</c:v>
+                </c:pt>
+                <c:pt idx="1">
+                  <c:v>5</c:v>
+                </c:pt>
+                <c:pt idx="2">
+                  <c:v>11.5</c:v>
+                </c:pt>
+                <c:pt idx="3">
+                  <c:v>18.2</c:v>
+                </c:pt>
+                <c:pt idx="4">
+                  <c:v>18.3</c:v>
+                </c:pt>
+                <c:pt idx="5">
+                  <c:v>18.6</c:v>
+                </c:pt>
+              </c:numCache>
+            </c:numRef>
+          </c:val>
+        </c:ser>
+        <c:dLbls>
+          <c:numFmt formatCode="0" sourceLinked="0"/>
+          <c:txPr>
+            <a:bodyPr/>
+            <a:lstStyle/>
+            <a:p>
+              <a:pPr>
+                <a:defRPr b="0" i="0" strike="noStrike" sz="1200" u="none">
+                  <a:solidFill>
+                    <a:srgbClr val="FFFFFF"/>
+                  </a:solidFill>
+                  <a:latin typeface="Meiryo"/>
+                </a:defRPr>
+              </a:pPr>
+            </a:p>
+          </c:txPr>
+          <c:dLblPos val="ctr"/>
+          <c:showLegendKey val="0"/>
+          <c:showVal val="1"/>
+          <c:showCatName val="0"/>
+          <c:showSerName val="0"/>
+          <c:showPercent val="0"/>
+          <c:showBubbleSize val="0"/>
+          <c:showLeaderLines val="0"/>
+        </c:dLbls>
+        <c:gapWidth val="60"/>
+        <c:overlap val="100"/>
+        <c:axId val="2094734554"/>
+        <c:axId val="2094734552"/>
+        <c:axId val="2094734556"/>
+      </c:barChart>
+      <c:catAx>
+        <c:axId val="2094734554"/>
+        <c:scaling>
+          <c:orientation val="minMax"/>
+        </c:scaling>
+        <c:delete val="0"/>
+        <c:axPos val="b"/>
+        <c:numFmt formatCode="General" sourceLinked="1"/>
+        <c:majorTickMark val="out"/>
+        <c:minorTickMark val="none"/>
+        <c:tickLblPos val="low"/>
+        <c:spPr>
+          <a:ln w="12700" cap="flat">
+            <a:solidFill>
+              <a:srgbClr val="E3E4EA"/>
+            </a:solidFill>
+            <a:prstDash val="solid"/>
+            <a:round/>
+          </a:ln>
+        </c:spPr>
+        <c:txPr>
+          <a:bodyPr/>
+          <a:lstStyle/>
+          <a:p>
+            <a:pPr>
+              <a:defRPr sz="1400" b="0" i="0" u="none" strike="noStrike">
+                <a:solidFill>
+                  <a:srgbClr val="2B2D42"/>
+                </a:solidFill>
+                <a:latin typeface="Meiryo"/>
+              </a:defRPr>
+            </a:pPr>
+            <a:endParaRPr lang="en-US"/>
+          </a:p>
+        </c:txPr>
+        <c:crossAx val="2094734552"/>
+        <c:crosses val="autoZero"/>
+        <c:auto val="1"/>
+        <c:lblAlgn val="ctr"/>
+        <c:noMultiLvlLbl val="1"/>
+      </c:catAx>
+      <c:valAx>
+        <c:axId val="2094734552"/>
+        <c:scaling>
+          <c:orientation val="minMax"/>
+        </c:scaling>
+        <c:delete val="1"/>
+        <c:axPos val="l"/>
+        <c:numFmt formatCode="General" sourceLinked="0"/>
+        <c:majorTickMark val="out"/>
+        <c:minorTickMark val="none"/>
+        <c:tickLblPos val="nextTo"/>
+        <c:spPr>
+          <a:ln w="12700" cap="flat">
+            <a:solidFill>
+              <a:srgbClr val="888888"/>
+            </a:solidFill>
+            <a:prstDash val="solid"/>
+            <a:round/>
+          </a:ln>
+        </c:spPr>
+        <c:txPr>
+          <a:bodyPr/>
+          <a:lstStyle/>
+          <a:p>
+            <a:pPr>
+              <a:defRPr sz="1200" b="0" i="0" u="none" strike="noStrike">
+                <a:solidFill>
+                  <a:srgbClr val="000000"/>
+                </a:solidFill>
+                <a:latin typeface="Arial"/>
+              </a:defRPr>
+            </a:pPr>
+            <a:endParaRPr lang="en-US"/>
+          </a:p>
+        </c:txPr>
+        <c:crossAx val="2094734554"/>
+        <c:crosses val="autoZero"/>
+        <c:crossBetween val="between"/>
+      </c:valAx>
+      <c:spPr>
+        <a:noFill/>
+        <a:ln>
+          <a:noFill/>
+        </a:ln>
+        <a:effectLst/>
+      </c:spPr>
+    </c:plotArea>
+    <c:legend>
+      <c:legendPos val="b"/>
+      <c:overlay val="0"/>
+      <c:txPr>
+        <a:bodyPr/>
+        <a:lstStyle/>
+        <a:p>
+          <a:pPr>
+            <a:defRPr sz="1300">
+              <a:solidFill>
+                <a:srgbClr val="2B2D42"/>
+              </a:solidFill>
+              <a:latin typeface="Meiryo"/>
+              <a:cs typeface="Meiryo"/>
+            </a:defRPr>
+          </a:pPr>
+          <a:endParaRPr lang="en-US"/>
+        </a:p>
+      </c:txPr>
+    </c:legend>
+    <c:plotVisOnly val="1"/>
+    <c:dispBlanksAs val="span"/>
+  </c:chart>
+  <c:spPr>
+    <a:noFill/>
+    <a:ln>
+      <a:noFill/>
+    </a:ln>
+    <a:effectLst/>
+  </c:spPr>
+  <c:externalData r:id="rId1">
+    <c:autoUpdate val="0"/>
+  </c:externalData>
+</c:chartSpace>
 </file>
 
 <file path=ppt/notesMasters/notesMaster1.xml><?xml version="1.0" encoding="utf-8"?>
@@ -506,7 +906,7 @@
           <a:p>
             <a:r>
               <a:rPr lang="en-US" dirty="0"/>
-              <a:t>最初に結論です。8月末の売上は1,675万円、達成率67.0%で、計画ペースを上回っています。このままいけば昨年の2,400万円を超えるペースです。特にAD・付帯商品が大きく伸びています。この流れを確実にするために、営業が営業に集中できる仕組みを10月から12月でつくります。</a:t>
+              <a:t>最初に結論です。3月から8月の半年で売上は1,676万円、年間目標2,500万円の67%まで来ました。このペースなら年間で3,000万円を超えます。伸びているのはADと付帯系の手数料です。この勢いを続けるために、営業が現地でしかできない仕事に集中できる仕組みをつくります。</a:t>
             </a:r>
             <a:endParaRPr lang="en-US" dirty="0"/>
           </a:p>
@@ -594,7 +994,7 @@
           <a:p>
             <a:r>
               <a:rPr lang="en-US" dirty="0"/>
-              <a:t>年間目標2,500万円に対し、8月末で1,675万円、達成率67.0%です。8ヶ月経過時点の計画ペース66.7%を上回っています。このペースで行けば年間で約2,510万円、昨年の2,400万円を約110万円上回る見込みです。残り4ヶ月は月206万円で目標達成で、これまでの月平均209万円なら届く水準です。</a:t>
+              <a:t>年度は3月始まりなので、8月末でちょうど半年です。半年で1,676万円、年間目標2,500万円の67%で、計画の50%を大きく上回っています。このペースが続けば年間で約3,350万円、昨年の2,400万円を大きく超えます。8月は売買の大きな案件があったので、売買を除いた見込みでも約2,880万円です。残り6ヶ月は月137万円で目標に届きます。</a:t>
             </a:r>
             <a:endParaRPr lang="en-US" dirty="0"/>
           </a:p>
@@ -682,7 +1082,7 @@
           <a:p>
             <a:r>
               <a:rPr lang="en-US" dirty="0"/>
-              <a:t>売上の伸びを引っ張っているのはADと付帯商品です。昨年の同じ時期と比べて、この2つの上がり幅が大きくなっています。この伸びを続けるには、営業がお客様と向き合う時間を増やすことが一番の近道です。</a:t>
+              <a:t>伸びを支えているのはADと付帯系の手数料です。ADは3月から8月で193.6万円、月平均で約32万円入っています。火災保険や保証会社の紹介手数料などの付帯系は、3月の0.6万円から8月は18.6万円まで増えました。これは営業が接客のたびにきちんと提案できているからで、この時間をもっと増やしたいと考えています。</a:t>
             </a:r>
             <a:endParaRPr lang="en-US" dirty="0"/>
           </a:p>
@@ -770,7 +1170,7 @@
           <a:p>
             <a:r>
               <a:rPr lang="en-US" dirty="0"/>
-              <a:t>具体的にやることは3つです。会計はDFEに外注、写真撮影と入力は9月に採用したパートさんにお願いし、クレームの一次対応はコールセンターと駆けつけ業者に任せます。それぞれ担当・期限・完了の基準を決め、毎月の会議で確認します。</a:t>
+              <a:t>考え方はシンプルです。営業の仕事を「現地でしかできないこと」と「そうでないこと」に分けます。物件の案内や接客、オーナーへの提案、現地の確認は営業にしかできません。一方で、物件入力や写真掲載は営業でなくてもできるので、パートの臼井さんと川上さんにお願いします。会計は現地でなくてもできるのでDFEに、クレームの一次対応は駆けつけサービスに任せます。</a:t>
             </a:r>
             <a:endParaRPr lang="en-US" dirty="0"/>
           </a:p>
@@ -858,7 +1258,7 @@
           <a:p>
             <a:r>
               <a:rPr lang="en-US" dirty="0"/>
-              <a:t>10月に契約と引き継ぎ、11月から会計はDFE、写真撮影・入力はパートさんで回し、12月にクレーム一次対応の外注を稼働させます。最後に1点ご判断ください。DFEとコールセンター・駆けつけの外注の予算枠です。</a:t>
+              <a:t>具体的にやることは3つです。10月中にパートさんへの引き継ぎとDFEとの契約、11月から会計を移し、12月に駆けつけサービスを稼働させます。毎月末に売上と進み具合を確認します。最後に1点、DFEと駆けつけサービスの外注予算についてご判断ください。</a:t>
             </a:r>
             <a:endParaRPr lang="en-US" dirty="0"/>
           </a:p>
@@ -1240,7 +1640,7 @@
         <p:spPr>
           <a:xfrm>
             <a:off x="731520" y="731520"/>
-            <a:ext cx="10058400" cy="365760"/>
+            <a:ext cx="7132320" cy="365760"/>
           </a:xfrm>
           <a:prstGeom prst="rect">
             <a:avLst/>
@@ -1278,8 +1678,8 @@
         </p:nvSpPr>
         <p:spPr>
           <a:xfrm>
-            <a:off x="731520" y="1371600"/>
-            <a:ext cx="10698480" cy="2468880"/>
+            <a:off x="731520" y="1280160"/>
+            <a:ext cx="7223760" cy="2651760"/>
           </a:xfrm>
           <a:prstGeom prst="rect">
             <a:avLst/>
@@ -1292,13 +1692,10 @@
           <a:lstStyle/>
           <a:p>
             <a:pPr indent="0" marL="0">
-              <a:lnSpc>
-                <a:spcPct val="105000"/>
-              </a:lnSpc>
-              <a:buNone/>
-            </a:pPr>
-            <a:r>
-              <a:rPr lang="en-US" sz="4000" b="1" dirty="0">
+              <a:buNone/>
+            </a:pPr>
+            <a:r>
+              <a:rPr lang="en-US" sz="3400" b="1" dirty="0">
                 <a:solidFill>
                   <a:srgbClr val="FFFFFF"/>
                 </a:solidFill>
@@ -1306,19 +1703,16 @@
                 <a:ea typeface="Meiryo" pitchFamily="34" charset="-122"/>
                 <a:cs typeface="Meiryo" pitchFamily="34" charset="-120"/>
               </a:rPr>
-              <a:t>昨年を上回るペースで進んでいます。</a:t>
-            </a:r>
-            <a:endParaRPr lang="en-US" sz="4000" dirty="0"/>
+              <a:t>半年で目標の67%。</a:t>
+            </a:r>
+            <a:endParaRPr lang="en-US" sz="3400" dirty="0"/>
           </a:p>
           <a:p>
             <a:pPr indent="0" marL="0">
-              <a:lnSpc>
-                <a:spcPct val="105000"/>
-              </a:lnSpc>
-              <a:buNone/>
-            </a:pPr>
-            <a:r>
-              <a:rPr lang="en-US" sz="4000" b="1" dirty="0">
+              <a:buNone/>
+            </a:pPr>
+            <a:r>
+              <a:rPr lang="en-US" sz="3400" b="1" dirty="0">
                 <a:solidFill>
                   <a:srgbClr val="FFFFFF"/>
                 </a:solidFill>
@@ -1326,19 +1720,16 @@
                 <a:ea typeface="Meiryo" pitchFamily="34" charset="-122"/>
                 <a:cs typeface="Meiryo" pitchFamily="34" charset="-120"/>
               </a:rPr>
-              <a:t>営業に集中できる仕組みをつくり、</a:t>
-            </a:r>
-            <a:endParaRPr lang="en-US" sz="4000" dirty="0"/>
+              <a:t>年間3,000万円超えのペース。</a:t>
+            </a:r>
+            <a:endParaRPr lang="en-US" sz="3400" dirty="0"/>
           </a:p>
           <a:p>
             <a:pPr indent="0" marL="0">
-              <a:lnSpc>
-                <a:spcPct val="105000"/>
-              </a:lnSpc>
-              <a:buNone/>
-            </a:pPr>
-            <a:r>
-              <a:rPr lang="en-US" sz="4000" b="1" dirty="0">
+              <a:buNone/>
+            </a:pPr>
+            <a:r>
+              <a:rPr lang="en-US" sz="3400" b="1" dirty="0">
                 <a:solidFill>
                   <a:srgbClr val="FFFFFF"/>
                 </a:solidFill>
@@ -1346,9 +1737,26 @@
                 <a:ea typeface="Meiryo" pitchFamily="34" charset="-122"/>
                 <a:cs typeface="Meiryo" pitchFamily="34" charset="-120"/>
               </a:rPr>
-              <a:t>年間2,500万円を達成します。</a:t>
-            </a:r>
-            <a:endParaRPr lang="en-US" sz="4000" dirty="0"/>
+              <a:t>営業を現地に集中させて、</a:t>
+            </a:r>
+            <a:endParaRPr lang="en-US" sz="3400" dirty="0"/>
+          </a:p>
+          <a:p>
+            <a:pPr indent="0" marL="0">
+              <a:buNone/>
+            </a:pPr>
+            <a:r>
+              <a:rPr lang="en-US" sz="3400" b="1" dirty="0">
+                <a:solidFill>
+                  <a:srgbClr val="FFFFFF"/>
+                </a:solidFill>
+                <a:latin typeface="Meiryo" pitchFamily="34" charset="0"/>
+                <a:ea typeface="Meiryo" pitchFamily="34" charset="-122"/>
+                <a:cs typeface="Meiryo" pitchFamily="34" charset="-120"/>
+              </a:rPr>
+              <a:t>さらに伸ばします。</a:t>
+            </a:r>
+            <a:endParaRPr lang="en-US" sz="3400" dirty="0"/>
           </a:p>
         </p:txBody>
       </p:sp>
@@ -1360,12 +1768,12 @@
         </p:nvSpPr>
         <p:spPr>
           <a:xfrm>
-            <a:off x="731520" y="4069080"/>
-            <a:ext cx="1188720" cy="420624"/>
+            <a:off x="731520" y="4251960"/>
+            <a:ext cx="1097280" cy="402336"/>
           </a:xfrm>
           <a:prstGeom prst="roundRect">
             <a:avLst>
-              <a:gd name="adj" fmla="val 17391"/>
+              <a:gd name="adj" fmla="val 18182"/>
             </a:avLst>
           </a:prstGeom>
           <a:solidFill>
@@ -1387,8 +1795,8 @@
         </p:nvSpPr>
         <p:spPr>
           <a:xfrm>
-            <a:off x="731520" y="4069080"/>
-            <a:ext cx="1188720" cy="420624"/>
+            <a:off x="731520" y="4251960"/>
+            <a:ext cx="1097280" cy="402336"/>
           </a:xfrm>
           <a:prstGeom prst="rect">
             <a:avLst/>
@@ -1426,8 +1834,8 @@
         </p:nvSpPr>
         <p:spPr>
           <a:xfrm>
-            <a:off x="2194560" y="4069080"/>
-            <a:ext cx="9235440" cy="420624"/>
+            <a:off x="2057400" y="4251960"/>
+            <a:ext cx="5943600" cy="402336"/>
           </a:xfrm>
           <a:prstGeom prst="rect">
             <a:avLst/>
@@ -1443,7 +1851,7 @@
               <a:buNone/>
             </a:pPr>
             <a:r>
-              <a:rPr lang="en-US" sz="1600" dirty="0">
+              <a:rPr lang="en-US" sz="1500" dirty="0">
                 <a:solidFill>
                   <a:srgbClr val="FFFFFF"/>
                 </a:solidFill>
@@ -1451,9 +1859,9 @@
                 <a:ea typeface="Meiryo" pitchFamily="34" charset="-122"/>
                 <a:cs typeface="Meiryo" pitchFamily="34" charset="-120"/>
               </a:rPr>
-              <a:t>8月末 1,675万円（達成率 67.0%）　計画ペース 66.7%を上回る</a:t>
-            </a:r>
-            <a:endParaRPr lang="en-US" sz="1600" dirty="0"/>
+              <a:t>3〜8月で 1,676万円（年間目標 2,500万円）</a:t>
+            </a:r>
+            <a:endParaRPr lang="en-US" sz="1500" dirty="0"/>
           </a:p>
         </p:txBody>
       </p:sp>
@@ -1465,12 +1873,12 @@
         </p:nvSpPr>
         <p:spPr>
           <a:xfrm>
-            <a:off x="731520" y="4754880"/>
-            <a:ext cx="1188720" cy="420624"/>
+            <a:off x="731520" y="4892040"/>
+            <a:ext cx="1097280" cy="402336"/>
           </a:xfrm>
           <a:prstGeom prst="roundRect">
             <a:avLst>
-              <a:gd name="adj" fmla="val 17391"/>
+              <a:gd name="adj" fmla="val 18182"/>
             </a:avLst>
           </a:prstGeom>
           <a:solidFill>
@@ -1492,8 +1900,8 @@
         </p:nvSpPr>
         <p:spPr>
           <a:xfrm>
-            <a:off x="731520" y="4754880"/>
-            <a:ext cx="1188720" cy="420624"/>
+            <a:off x="731520" y="4892040"/>
+            <a:ext cx="1097280" cy="402336"/>
           </a:xfrm>
           <a:prstGeom prst="rect">
             <a:avLst/>
@@ -1531,8 +1939,8 @@
         </p:nvSpPr>
         <p:spPr>
           <a:xfrm>
-            <a:off x="2194560" y="4754880"/>
-            <a:ext cx="9235440" cy="420624"/>
+            <a:off x="2057400" y="4892040"/>
+            <a:ext cx="5943600" cy="402336"/>
           </a:xfrm>
           <a:prstGeom prst="rect">
             <a:avLst/>
@@ -1548,7 +1956,7 @@
               <a:buNone/>
             </a:pPr>
             <a:r>
-              <a:rPr lang="en-US" sz="1600" dirty="0">
+              <a:rPr lang="en-US" sz="1500" dirty="0">
                 <a:solidFill>
                   <a:srgbClr val="FFFFFF"/>
                 </a:solidFill>
@@ -1556,9 +1964,9 @@
                 <a:ea typeface="Meiryo" pitchFamily="34" charset="-122"/>
                 <a:cs typeface="Meiryo" pitchFamily="34" charset="-120"/>
               </a:rPr>
-              <a:t>AD・付帯商品の上がり幅が大きい</a:t>
-            </a:r>
-            <a:endParaRPr lang="en-US" sz="1600" dirty="0"/>
+              <a:t>AD と 付帯系の手数料</a:t>
+            </a:r>
+            <a:endParaRPr lang="en-US" sz="1500" dirty="0"/>
           </a:p>
         </p:txBody>
       </p:sp>
@@ -1570,12 +1978,12 @@
         </p:nvSpPr>
         <p:spPr>
           <a:xfrm>
-            <a:off x="731520" y="5440680"/>
-            <a:ext cx="1188720" cy="420624"/>
+            <a:off x="731520" y="5532120"/>
+            <a:ext cx="1097280" cy="402336"/>
           </a:xfrm>
           <a:prstGeom prst="roundRect">
             <a:avLst>
-              <a:gd name="adj" fmla="val 17391"/>
+              <a:gd name="adj" fmla="val 18182"/>
             </a:avLst>
           </a:prstGeom>
           <a:solidFill>
@@ -1597,8 +2005,8 @@
         </p:nvSpPr>
         <p:spPr>
           <a:xfrm>
-            <a:off x="731520" y="5440680"/>
-            <a:ext cx="1188720" cy="420624"/>
+            <a:off x="731520" y="5532120"/>
+            <a:ext cx="1097280" cy="402336"/>
           </a:xfrm>
           <a:prstGeom prst="rect">
             <a:avLst/>
@@ -1636,8 +2044,8 @@
         </p:nvSpPr>
         <p:spPr>
           <a:xfrm>
-            <a:off x="2194560" y="5440680"/>
-            <a:ext cx="9235440" cy="420624"/>
+            <a:off x="2057400" y="5532120"/>
+            <a:ext cx="5943600" cy="402336"/>
           </a:xfrm>
           <a:prstGeom prst="rect">
             <a:avLst/>
@@ -1653,7 +2061,7 @@
               <a:buNone/>
             </a:pPr>
             <a:r>
-              <a:rPr lang="en-US" sz="1600" dirty="0">
+              <a:rPr lang="en-US" sz="1500" dirty="0">
                 <a:solidFill>
                   <a:srgbClr val="FFFFFF"/>
                 </a:solidFill>
@@ -1661,9 +2069,92 @@
                 <a:ea typeface="Meiryo" pitchFamily="34" charset="-122"/>
                 <a:cs typeface="Meiryo" pitchFamily="34" charset="-120"/>
               </a:rPr>
-              <a:t>会計はDFEへ／写真撮影・入力はパートさんへ／クレーム一次対応は外注</a:t>
-            </a:r>
-            <a:endParaRPr lang="en-US" sz="1600" dirty="0"/>
+              <a:t>入力→パートさん／会計→DFE／クレーム→駆けつけ</a:t>
+            </a:r>
+            <a:endParaRPr lang="en-US" sz="1500" dirty="0"/>
+          </a:p>
+        </p:txBody>
+      </p:sp>
+      <p:sp>
+        <p:nvSpPr>
+          <p:cNvPr id="13" name="Shape 11"/>
+          <p:cNvSpPr/>
+          <p:nvPr/>
+        </p:nvSpPr>
+        <p:spPr>
+          <a:xfrm>
+            <a:off x="8412480" y="731520"/>
+            <a:ext cx="3230575" cy="5394960"/>
+          </a:xfrm>
+          <a:prstGeom prst="roundRect">
+            <a:avLst>
+              <a:gd name="adj" fmla="val 2830"/>
+            </a:avLst>
+          </a:prstGeom>
+          <a:solidFill>
+            <a:srgbClr val="3A3D55"/>
+          </a:solidFill>
+          <a:ln w="15875">
+            <a:solidFill>
+              <a:srgbClr val="F2B8CA"/>
+            </a:solidFill>
+            <a:prstDash val="dash"/>
+          </a:ln>
+        </p:spPr>
+      </p:sp>
+      <p:sp>
+        <p:nvSpPr>
+          <p:cNvPr id="14" name="Text 12"/>
+          <p:cNvSpPr txBox="1"/>
+          <p:nvPr/>
+        </p:nvSpPr>
+        <p:spPr>
+          <a:xfrm>
+            <a:off x="8412480" y="731520"/>
+            <a:ext cx="3230575" cy="5394960"/>
+          </a:xfrm>
+          <a:prstGeom prst="rect">
+            <a:avLst/>
+          </a:prstGeom>
+          <a:noFill/>
+          <a:ln/>
+        </p:spPr>
+        <p:txBody>
+          <a:bodyPr wrap="square" lIns="0" tIns="0" rIns="0" bIns="0" rtlCol="0" anchor="ctr"/>
+          <a:lstStyle/>
+          <a:p>
+            <a:pPr algn="ctr" indent="0" marL="0">
+              <a:buNone/>
+            </a:pPr>
+            <a:r>
+              <a:rPr lang="en-US" sz="1300" b="1" dirty="0">
+                <a:solidFill>
+                  <a:srgbClr val="F2B8CA"/>
+                </a:solidFill>
+                <a:latin typeface="Meiryo" pitchFamily="34" charset="0"/>
+                <a:ea typeface="Meiryo" pitchFamily="34" charset="-122"/>
+                <a:cs typeface="Meiryo" pitchFamily="34" charset="-120"/>
+              </a:rPr>
+              <a:t>写真</a:t>
+            </a:r>
+            <a:endParaRPr lang="en-US" sz="1300" dirty="0"/>
+          </a:p>
+          <a:p>
+            <a:pPr algn="ctr" indent="0" marL="0">
+              <a:buNone/>
+            </a:pPr>
+            <a:r>
+              <a:rPr lang="en-US" sz="1100" dirty="0">
+                <a:solidFill>
+                  <a:srgbClr val="F2B8CA"/>
+                </a:solidFill>
+                <a:latin typeface="Meiryo" pitchFamily="34" charset="0"/>
+                <a:ea typeface="Meiryo" pitchFamily="34" charset="-122"/>
+                <a:cs typeface="Meiryo" pitchFamily="34" charset="-120"/>
+              </a:rPr>
+              <a:t>店舗・現場</a:t>
+            </a:r>
+            <a:endParaRPr lang="en-US" sz="1300" dirty="0"/>
           </a:p>
         </p:txBody>
       </p:sp>
@@ -1763,7 +2254,7 @@
               <a:buNone/>
             </a:pPr>
             <a:r>
-              <a:rPr lang="en-US" sz="3000" b="1" dirty="0">
+              <a:rPr lang="en-US" sz="2800" b="1" dirty="0">
                 <a:solidFill>
                   <a:srgbClr val="2B2D42"/>
                 </a:solidFill>
@@ -1771,9 +2262,9 @@
                 <a:ea typeface="Meiryo" pitchFamily="34" charset="-122"/>
                 <a:cs typeface="Meiryo" pitchFamily="34" charset="-120"/>
               </a:rPr>
-              <a:t>計画を上回り、昨年を超えるペース</a:t>
-            </a:r>
-            <a:endParaRPr lang="en-US" sz="3000" dirty="0"/>
+              <a:t>半年で目標の67%。年間3,000万円を超えるペース</a:t>
+            </a:r>
+            <a:endParaRPr lang="en-US" sz="2800" dirty="0"/>
           </a:p>
         </p:txBody>
       </p:sp>
@@ -1785,7 +2276,7 @@
         </p:nvSpPr>
         <p:spPr>
           <a:xfrm>
-            <a:off x="10545775" y="6217920"/>
+            <a:off x="10545775" y="6263640"/>
             <a:ext cx="1097280" cy="228600"/>
           </a:xfrm>
           <a:prstGeom prst="rect">
@@ -1818,19 +2309,313 @@
       </p:sp>
       <p:sp>
         <p:nvSpPr>
-          <p:cNvPr id="5" name="Shape 3"/>
+          <p:cNvPr id="5" name="Text 3"/>
+          <p:cNvSpPr txBox="1"/>
+          <p:nvPr/>
+        </p:nvSpPr>
+        <p:spPr>
+          <a:xfrm>
+            <a:off x="548640" y="1828800"/>
+            <a:ext cx="1737360" cy="731520"/>
+          </a:xfrm>
+          <a:prstGeom prst="rect">
+            <a:avLst/>
+          </a:prstGeom>
+          <a:noFill/>
+          <a:ln/>
+        </p:spPr>
+        <p:txBody>
+          <a:bodyPr wrap="square" lIns="0" tIns="0" rIns="0" bIns="0" rtlCol="0" anchor="ctr"/>
+          <a:lstStyle/>
+          <a:p>
+            <a:pPr indent="0" marL="0">
+              <a:buNone/>
+            </a:pPr>
+            <a:r>
+              <a:rPr lang="en-US" sz="1600" b="1" dirty="0">
+                <a:solidFill>
+                  <a:srgbClr val="2B2D42"/>
+                </a:solidFill>
+                <a:latin typeface="Meiryo" pitchFamily="34" charset="0"/>
+                <a:ea typeface="Meiryo" pitchFamily="34" charset="-122"/>
+                <a:cs typeface="Meiryo" pitchFamily="34" charset="-120"/>
+              </a:rPr>
+              <a:t>昨年</a:t>
+            </a:r>
+            <a:endParaRPr lang="en-US" sz="1600" dirty="0"/>
+          </a:p>
+          <a:p>
+            <a:pPr indent="0" marL="0">
+              <a:buNone/>
+            </a:pPr>
+            <a:r>
+              <a:rPr lang="en-US" sz="1100" dirty="0">
+                <a:solidFill>
+                  <a:srgbClr val="6B6E80"/>
+                </a:solidFill>
+                <a:latin typeface="Meiryo" pitchFamily="34" charset="0"/>
+                <a:ea typeface="Meiryo" pitchFamily="34" charset="-122"/>
+                <a:cs typeface="Meiryo" pitchFamily="34" charset="-120"/>
+              </a:rPr>
+              <a:t>年間実績</a:t>
+            </a:r>
+            <a:endParaRPr lang="en-US" sz="1600" dirty="0"/>
+          </a:p>
+        </p:txBody>
+      </p:sp>
+      <p:sp>
+        <p:nvSpPr>
+          <p:cNvPr id="6" name="Text 4"/>
+          <p:cNvSpPr txBox="1"/>
+          <p:nvPr/>
+        </p:nvSpPr>
+        <p:spPr>
+          <a:xfrm>
+            <a:off x="548640" y="2971800"/>
+            <a:ext cx="1737360" cy="731520"/>
+          </a:xfrm>
+          <a:prstGeom prst="rect">
+            <a:avLst/>
+          </a:prstGeom>
+          <a:noFill/>
+          <a:ln/>
+        </p:spPr>
+        <p:txBody>
+          <a:bodyPr wrap="square" lIns="0" tIns="0" rIns="0" bIns="0" rtlCol="0" anchor="ctr"/>
+          <a:lstStyle/>
+          <a:p>
+            <a:pPr indent="0" marL="0">
+              <a:buNone/>
+            </a:pPr>
+            <a:r>
+              <a:rPr lang="en-US" sz="1600" b="1" dirty="0">
+                <a:solidFill>
+                  <a:srgbClr val="2B2D42"/>
+                </a:solidFill>
+                <a:latin typeface="Meiryo" pitchFamily="34" charset="0"/>
+                <a:ea typeface="Meiryo" pitchFamily="34" charset="-122"/>
+                <a:cs typeface="Meiryo" pitchFamily="34" charset="-120"/>
+              </a:rPr>
+              <a:t>今年の目標</a:t>
+            </a:r>
+            <a:endParaRPr lang="en-US" sz="1600" dirty="0"/>
+          </a:p>
+          <a:p>
+            <a:pPr indent="0" marL="0">
+              <a:buNone/>
+            </a:pPr>
+            <a:r>
+              <a:rPr lang="en-US" sz="1100" dirty="0">
+                <a:solidFill>
+                  <a:srgbClr val="6B6E80"/>
+                </a:solidFill>
+                <a:latin typeface="Meiryo" pitchFamily="34" charset="0"/>
+                <a:ea typeface="Meiryo" pitchFamily="34" charset="-122"/>
+                <a:cs typeface="Meiryo" pitchFamily="34" charset="-120"/>
+              </a:rPr>
+              <a:t>年間</a:t>
+            </a:r>
+            <a:endParaRPr lang="en-US" sz="1600" dirty="0"/>
+          </a:p>
+        </p:txBody>
+      </p:sp>
+      <p:sp>
+        <p:nvSpPr>
+          <p:cNvPr id="7" name="Text 5"/>
+          <p:cNvSpPr txBox="1"/>
+          <p:nvPr/>
+        </p:nvSpPr>
+        <p:spPr>
+          <a:xfrm>
+            <a:off x="548640" y="4114800"/>
+            <a:ext cx="1737360" cy="731520"/>
+          </a:xfrm>
+          <a:prstGeom prst="rect">
+            <a:avLst/>
+          </a:prstGeom>
+          <a:noFill/>
+          <a:ln/>
+        </p:spPr>
+        <p:txBody>
+          <a:bodyPr wrap="square" lIns="0" tIns="0" rIns="0" bIns="0" rtlCol="0" anchor="ctr"/>
+          <a:lstStyle/>
+          <a:p>
+            <a:pPr indent="0" marL="0">
+              <a:buNone/>
+            </a:pPr>
+            <a:r>
+              <a:rPr lang="en-US" sz="1600" b="1" dirty="0">
+                <a:solidFill>
+                  <a:srgbClr val="2B2D42"/>
+                </a:solidFill>
+                <a:latin typeface="Meiryo" pitchFamily="34" charset="0"/>
+                <a:ea typeface="Meiryo" pitchFamily="34" charset="-122"/>
+                <a:cs typeface="Meiryo" pitchFamily="34" charset="-120"/>
+              </a:rPr>
+              <a:t>今年の見込み</a:t>
+            </a:r>
+            <a:endParaRPr lang="en-US" sz="1600" dirty="0"/>
+          </a:p>
+          <a:p>
+            <a:pPr indent="0" marL="0">
+              <a:buNone/>
+            </a:pPr>
+            <a:r>
+              <a:rPr lang="en-US" sz="1100" dirty="0">
+                <a:solidFill>
+                  <a:srgbClr val="6B6E80"/>
+                </a:solidFill>
+                <a:latin typeface="Meiryo" pitchFamily="34" charset="0"/>
+                <a:ea typeface="Meiryo" pitchFamily="34" charset="-122"/>
+                <a:cs typeface="Meiryo" pitchFamily="34" charset="-120"/>
+              </a:rPr>
+              <a:t>このペースなら</a:t>
+            </a:r>
+            <a:endParaRPr lang="en-US" sz="1600" dirty="0"/>
+          </a:p>
+        </p:txBody>
+      </p:sp>
+      <p:sp>
+        <p:nvSpPr>
+          <p:cNvPr id="8" name="Shape 6"/>
           <p:cNvSpPr/>
           <p:nvPr/>
         </p:nvSpPr>
         <p:spPr>
           <a:xfrm>
-            <a:off x="548640" y="1783080"/>
-            <a:ext cx="3454298" cy="2514600"/>
-          </a:xfrm>
-          <a:prstGeom prst="roundRect">
-            <a:avLst>
-              <a:gd name="adj" fmla="val 4364"/>
-            </a:avLst>
+            <a:off x="2468880" y="1828800"/>
+            <a:ext cx="3260489" cy="731520"/>
+          </a:xfrm>
+          <a:prstGeom prst="rect">
+            <a:avLst/>
+          </a:prstGeom>
+          <a:solidFill>
+            <a:srgbClr val="D5D7DF"/>
+          </a:solidFill>
+          <a:ln w="12700">
+            <a:solidFill>
+              <a:srgbClr val="D5D7DF"/>
+            </a:solidFill>
+            <a:prstDash val="solid"/>
+          </a:ln>
+        </p:spPr>
+      </p:sp>
+      <p:sp>
+        <p:nvSpPr>
+          <p:cNvPr id="9" name="Text 7"/>
+          <p:cNvSpPr txBox="1"/>
+          <p:nvPr/>
+        </p:nvSpPr>
+        <p:spPr>
+          <a:xfrm>
+            <a:off x="2606040" y="1828800"/>
+            <a:ext cx="2986169" cy="731520"/>
+          </a:xfrm>
+          <a:prstGeom prst="rect">
+            <a:avLst/>
+          </a:prstGeom>
+          <a:noFill/>
+          <a:ln/>
+        </p:spPr>
+        <p:txBody>
+          <a:bodyPr wrap="square" lIns="0" tIns="0" rIns="0" bIns="0" rtlCol="0" anchor="ctr"/>
+          <a:lstStyle/>
+          <a:p>
+            <a:pPr algn="r" indent="0" marL="0">
+              <a:buNone/>
+            </a:pPr>
+            <a:r>
+              <a:rPr lang="en-US" sz="1800" b="1" dirty="0">
+                <a:solidFill>
+                  <a:srgbClr val="2B2D42"/>
+                </a:solidFill>
+                <a:latin typeface="Meiryo" pitchFamily="34" charset="0"/>
+                <a:ea typeface="Meiryo" pitchFamily="34" charset="-122"/>
+                <a:cs typeface="Meiryo" pitchFamily="34" charset="-120"/>
+              </a:rPr>
+              <a:t>2,400万円</a:t>
+            </a:r>
+            <a:endParaRPr lang="en-US" sz="1800" dirty="0"/>
+          </a:p>
+        </p:txBody>
+      </p:sp>
+      <p:sp>
+        <p:nvSpPr>
+          <p:cNvPr id="10" name="Shape 8"/>
+          <p:cNvSpPr/>
+          <p:nvPr/>
+        </p:nvSpPr>
+        <p:spPr>
+          <a:xfrm>
+            <a:off x="2468880" y="2971800"/>
+            <a:ext cx="3396343" cy="731520"/>
+          </a:xfrm>
+          <a:prstGeom prst="rect">
+            <a:avLst/>
+          </a:prstGeom>
+          <a:solidFill>
+            <a:srgbClr val="2B2D42"/>
+          </a:solidFill>
+          <a:ln w="12700">
+            <a:solidFill>
+              <a:srgbClr val="2B2D42"/>
+            </a:solidFill>
+            <a:prstDash val="solid"/>
+          </a:ln>
+        </p:spPr>
+      </p:sp>
+      <p:sp>
+        <p:nvSpPr>
+          <p:cNvPr id="11" name="Text 9"/>
+          <p:cNvSpPr txBox="1"/>
+          <p:nvPr/>
+        </p:nvSpPr>
+        <p:spPr>
+          <a:xfrm>
+            <a:off x="6002383" y="2971800"/>
+            <a:ext cx="1828800" cy="731520"/>
+          </a:xfrm>
+          <a:prstGeom prst="rect">
+            <a:avLst/>
+          </a:prstGeom>
+          <a:noFill/>
+          <a:ln/>
+        </p:spPr>
+        <p:txBody>
+          <a:bodyPr wrap="square" lIns="0" tIns="0" rIns="0" bIns="0" rtlCol="0" anchor="ctr"/>
+          <a:lstStyle/>
+          <a:p>
+            <a:pPr indent="0" marL="0">
+              <a:buNone/>
+            </a:pPr>
+            <a:r>
+              <a:rPr lang="en-US" sz="1800" b="1" dirty="0">
+                <a:solidFill>
+                  <a:srgbClr val="2B2D42"/>
+                </a:solidFill>
+                <a:latin typeface="Meiryo" pitchFamily="34" charset="0"/>
+                <a:ea typeface="Meiryo" pitchFamily="34" charset="-122"/>
+                <a:cs typeface="Meiryo" pitchFamily="34" charset="-120"/>
+              </a:rPr>
+              <a:t>2,500万円</a:t>
+            </a:r>
+            <a:endParaRPr lang="en-US" sz="1800" dirty="0"/>
+          </a:p>
+        </p:txBody>
+      </p:sp>
+      <p:sp>
+        <p:nvSpPr>
+          <p:cNvPr id="12" name="Shape 10"/>
+          <p:cNvSpPr/>
+          <p:nvPr/>
+        </p:nvSpPr>
+        <p:spPr>
+          <a:xfrm>
+            <a:off x="2468880" y="4114800"/>
+            <a:ext cx="2276908" cy="731520"/>
+          </a:xfrm>
+          <a:prstGeom prst="rect">
+            <a:avLst/>
           </a:prstGeom>
           <a:solidFill>
             <a:srgbClr val="C8315F"/>
@@ -1845,157 +2630,24 @@
       </p:sp>
       <p:sp>
         <p:nvSpPr>
-          <p:cNvPr id="6" name="Text 4"/>
-          <p:cNvSpPr txBox="1"/>
-          <p:nvPr/>
-        </p:nvSpPr>
-        <p:spPr>
-          <a:xfrm>
-            <a:off x="868680" y="2057400"/>
-            <a:ext cx="2814218" cy="365760"/>
+          <p:cNvPr id="13" name="Shape 11"/>
+          <p:cNvSpPr/>
+          <p:nvPr/>
+        </p:nvSpPr>
+        <p:spPr>
+          <a:xfrm>
+            <a:off x="4745788" y="4114800"/>
+            <a:ext cx="2274191" cy="731520"/>
           </a:xfrm>
           <a:prstGeom prst="rect">
             <a:avLst/>
           </a:prstGeom>
-          <a:noFill/>
-          <a:ln/>
-        </p:spPr>
-        <p:txBody>
-          <a:bodyPr wrap="square" lIns="0" tIns="0" rIns="0" bIns="0" rtlCol="0" anchor="t"/>
-          <a:lstStyle/>
-          <a:p>
-            <a:pPr indent="0" marL="0">
-              <a:buNone/>
-            </a:pPr>
-            <a:r>
-              <a:rPr lang="en-US" sz="1600" b="1" dirty="0">
-                <a:solidFill>
-                  <a:srgbClr val="FFFFFF"/>
-                </a:solidFill>
-                <a:latin typeface="Meiryo" pitchFamily="34" charset="0"/>
-                <a:ea typeface="Meiryo" pitchFamily="34" charset="-122"/>
-                <a:cs typeface="Meiryo" pitchFamily="34" charset="-120"/>
-              </a:rPr>
-              <a:t>8月末 達成率</a:t>
-            </a:r>
-            <a:endParaRPr lang="en-US" sz="1600" dirty="0"/>
-          </a:p>
-        </p:txBody>
-      </p:sp>
-      <p:sp>
-        <p:nvSpPr>
-          <p:cNvPr id="7" name="Text 5"/>
-          <p:cNvSpPr txBox="1"/>
-          <p:nvPr/>
-        </p:nvSpPr>
-        <p:spPr>
-          <a:xfrm>
-            <a:off x="868680" y="2514600"/>
-            <a:ext cx="2997098" cy="1005840"/>
-          </a:xfrm>
-          <a:prstGeom prst="rect">
-            <a:avLst/>
-          </a:prstGeom>
-          <a:noFill/>
-          <a:ln/>
-        </p:spPr>
-        <p:txBody>
-          <a:bodyPr wrap="square" lIns="0" tIns="0" rIns="0" bIns="0" rtlCol="0" anchor="b"/>
-          <a:lstStyle/>
-          <a:p>
-            <a:pPr indent="0" marL="0">
-              <a:buNone/>
-            </a:pPr>
-            <a:r>
-              <a:rPr lang="en-US" sz="4800" b="1" dirty="0">
-                <a:solidFill>
-                  <a:srgbClr val="FFFFFF"/>
-                </a:solidFill>
-                <a:latin typeface="Meiryo" pitchFamily="34" charset="0"/>
-                <a:ea typeface="Meiryo" pitchFamily="34" charset="-122"/>
-                <a:cs typeface="Meiryo" pitchFamily="34" charset="-120"/>
-              </a:rPr>
-              <a:t>67.0</a:t>
-            </a:r>
-            <a:pPr indent="0" marL="0">
-              <a:buNone/>
-            </a:pPr>
-            <a:r>
-              <a:rPr lang="en-US" sz="2000" b="1" dirty="0">
-                <a:solidFill>
-                  <a:srgbClr val="FFFFFF"/>
-                </a:solidFill>
-                <a:latin typeface="Meiryo" pitchFamily="34" charset="0"/>
-                <a:ea typeface="Meiryo" pitchFamily="34" charset="-122"/>
-                <a:cs typeface="Meiryo" pitchFamily="34" charset="-120"/>
-              </a:rPr>
-              <a:t> %</a:t>
-            </a:r>
-            <a:endParaRPr lang="en-US" sz="4800" dirty="0"/>
-          </a:p>
-        </p:txBody>
-      </p:sp>
-      <p:sp>
-        <p:nvSpPr>
-          <p:cNvPr id="8" name="Text 6"/>
-          <p:cNvSpPr txBox="1"/>
-          <p:nvPr/>
-        </p:nvSpPr>
-        <p:spPr>
-          <a:xfrm>
-            <a:off x="868680" y="3657600"/>
-            <a:ext cx="2814218" cy="365760"/>
-          </a:xfrm>
-          <a:prstGeom prst="rect">
-            <a:avLst/>
-          </a:prstGeom>
-          <a:noFill/>
-          <a:ln/>
-        </p:spPr>
-        <p:txBody>
-          <a:bodyPr wrap="square" lIns="0" tIns="0" rIns="0" bIns="0" rtlCol="0" anchor="t"/>
-          <a:lstStyle/>
-          <a:p>
-            <a:pPr indent="0" marL="0">
-              <a:buNone/>
-            </a:pPr>
-            <a:r>
-              <a:rPr lang="en-US" sz="1500" dirty="0">
-                <a:solidFill>
-                  <a:srgbClr val="FFFFFF"/>
-                </a:solidFill>
-                <a:latin typeface="Meiryo" pitchFamily="34" charset="0"/>
-                <a:ea typeface="Meiryo" pitchFamily="34" charset="-122"/>
-                <a:cs typeface="Meiryo" pitchFamily="34" charset="-120"/>
-              </a:rPr>
-              <a:t>計画ペース 66.7%（+0.3pt）</a:t>
-            </a:r>
-            <a:endParaRPr lang="en-US" sz="1500" dirty="0"/>
-          </a:p>
-        </p:txBody>
-      </p:sp>
-      <p:sp>
-        <p:nvSpPr>
-          <p:cNvPr id="9" name="Shape 7"/>
-          <p:cNvSpPr/>
-          <p:nvPr/>
-        </p:nvSpPr>
-        <p:spPr>
-          <a:xfrm>
-            <a:off x="4368698" y="1783080"/>
-            <a:ext cx="3454298" cy="2514600"/>
-          </a:xfrm>
-          <a:prstGeom prst="roundRect">
-            <a:avLst>
-              <a:gd name="adj" fmla="val 4364"/>
-            </a:avLst>
-          </a:prstGeom>
           <a:solidFill>
-            <a:srgbClr val="F4F5F8"/>
+            <a:srgbClr val="F2B8CA"/>
           </a:solidFill>
           <a:ln w="12700">
             <a:solidFill>
-              <a:srgbClr val="F4F5F8"/>
+              <a:srgbClr val="F2B8CA"/>
             </a:solidFill>
             <a:prstDash val="solid"/>
           </a:ln>
@@ -2003,14 +2655,14 @@
       </p:sp>
       <p:sp>
         <p:nvSpPr>
-          <p:cNvPr id="10" name="Text 8"/>
+          <p:cNvPr id="14" name="Text 12"/>
           <p:cNvSpPr txBox="1"/>
           <p:nvPr/>
         </p:nvSpPr>
         <p:spPr>
           <a:xfrm>
-            <a:off x="4688738" y="2057400"/>
-            <a:ext cx="2814218" cy="365760"/>
+            <a:off x="2606040" y="4114800"/>
+            <a:ext cx="2002588" cy="731520"/>
           </a:xfrm>
           <a:prstGeom prst="rect">
             <a:avLst/>
@@ -2019,155 +2671,64 @@
           <a:ln/>
         </p:spPr>
         <p:txBody>
-          <a:bodyPr wrap="square" lIns="0" tIns="0" rIns="0" bIns="0" rtlCol="0" anchor="t"/>
+          <a:bodyPr wrap="square" lIns="0" tIns="0" rIns="0" bIns="0" rtlCol="0" anchor="ctr"/>
           <a:lstStyle/>
           <a:p>
             <a:pPr indent="0" marL="0">
               <a:buNone/>
             </a:pPr>
             <a:r>
-              <a:rPr lang="en-US" sz="1600" b="1" dirty="0">
-                <a:solidFill>
-                  <a:srgbClr val="6B6E80"/>
-                </a:solidFill>
-                <a:latin typeface="Meiryo" pitchFamily="34" charset="0"/>
-                <a:ea typeface="Meiryo" pitchFamily="34" charset="-122"/>
-                <a:cs typeface="Meiryo" pitchFamily="34" charset="-120"/>
-              </a:rPr>
-              <a:t>このペースでの年間見込み</a:t>
-            </a:r>
-            <a:endParaRPr lang="en-US" sz="1600" dirty="0"/>
-          </a:p>
-        </p:txBody>
-      </p:sp>
-      <p:sp>
-        <p:nvSpPr>
-          <p:cNvPr id="11" name="Text 9"/>
-          <p:cNvSpPr txBox="1"/>
-          <p:nvPr/>
-        </p:nvSpPr>
-        <p:spPr>
-          <a:xfrm>
-            <a:off x="4688738" y="2514600"/>
-            <a:ext cx="2997098" cy="1005840"/>
+              <a:rPr lang="en-US" sz="1100" dirty="0">
+                <a:solidFill>
+                  <a:srgbClr val="FFFFFF"/>
+                </a:solidFill>
+                <a:latin typeface="Meiryo" pitchFamily="34" charset="0"/>
+                <a:ea typeface="Meiryo" pitchFamily="34" charset="-122"/>
+                <a:cs typeface="Meiryo" pitchFamily="34" charset="-120"/>
+              </a:rPr>
+              <a:t>3〜8月 実績</a:t>
+            </a:r>
+            <a:endParaRPr lang="en-US" sz="1100" dirty="0"/>
+          </a:p>
+          <a:p>
+            <a:pPr indent="0" marL="0">
+              <a:buNone/>
+            </a:pPr>
+            <a:r>
+              <a:rPr lang="en-US" sz="1500" b="1" dirty="0">
+                <a:solidFill>
+                  <a:srgbClr val="FFFFFF"/>
+                </a:solidFill>
+                <a:latin typeface="Meiryo" pitchFamily="34" charset="0"/>
+                <a:ea typeface="Meiryo" pitchFamily="34" charset="-122"/>
+                <a:cs typeface="Meiryo" pitchFamily="34" charset="-120"/>
+              </a:rPr>
+              <a:t>1,676万円</a:t>
+            </a:r>
+            <a:endParaRPr lang="en-US" sz="1100" dirty="0"/>
+          </a:p>
+        </p:txBody>
+      </p:sp>
+      <p:sp>
+        <p:nvSpPr>
+          <p:cNvPr id="15" name="Shape 13"/>
+          <p:cNvSpPr/>
+          <p:nvPr/>
+        </p:nvSpPr>
+        <p:spPr>
+          <a:xfrm>
+            <a:off x="4745788" y="5020056"/>
+            <a:ext cx="164592" cy="164592"/>
           </a:xfrm>
           <a:prstGeom prst="rect">
             <a:avLst/>
           </a:prstGeom>
-          <a:noFill/>
-          <a:ln/>
-        </p:spPr>
-        <p:txBody>
-          <a:bodyPr wrap="square" lIns="0" tIns="0" rIns="0" bIns="0" rtlCol="0" anchor="b"/>
-          <a:lstStyle/>
-          <a:p>
-            <a:pPr indent="0" marL="0">
-              <a:buNone/>
-            </a:pPr>
-            <a:r>
-              <a:rPr lang="en-US" sz="2000" b="1" dirty="0">
-                <a:solidFill>
-                  <a:srgbClr val="2B2D42"/>
-                </a:solidFill>
-                <a:latin typeface="Meiryo" pitchFamily="34" charset="0"/>
-                <a:ea typeface="Meiryo" pitchFamily="34" charset="-122"/>
-                <a:cs typeface="Meiryo" pitchFamily="34" charset="-120"/>
-              </a:rPr>
-              <a:t>約</a:t>
-            </a:r>
-            <a:pPr indent="0" marL="0">
-              <a:buNone/>
-            </a:pPr>
-            <a:r>
-              <a:rPr lang="en-US" sz="4800" b="1" dirty="0">
-                <a:solidFill>
-                  <a:srgbClr val="2B2D42"/>
-                </a:solidFill>
-                <a:latin typeface="Meiryo" pitchFamily="34" charset="0"/>
-                <a:ea typeface="Meiryo" pitchFamily="34" charset="-122"/>
-                <a:cs typeface="Meiryo" pitchFamily="34" charset="-120"/>
-              </a:rPr>
-              <a:t>2,510</a:t>
-            </a:r>
-            <a:pPr indent="0" marL="0">
-              <a:buNone/>
-            </a:pPr>
-            <a:r>
-              <a:rPr lang="en-US" sz="2000" b="1" dirty="0">
-                <a:solidFill>
-                  <a:srgbClr val="2B2D42"/>
-                </a:solidFill>
-                <a:latin typeface="Meiryo" pitchFamily="34" charset="0"/>
-                <a:ea typeface="Meiryo" pitchFamily="34" charset="-122"/>
-                <a:cs typeface="Meiryo" pitchFamily="34" charset="-120"/>
-              </a:rPr>
-              <a:t> 万円</a:t>
-            </a:r>
-            <a:endParaRPr lang="en-US" sz="2000" dirty="0"/>
-          </a:p>
-        </p:txBody>
-      </p:sp>
-      <p:sp>
-        <p:nvSpPr>
-          <p:cNvPr id="12" name="Text 10"/>
-          <p:cNvSpPr txBox="1"/>
-          <p:nvPr/>
-        </p:nvSpPr>
-        <p:spPr>
-          <a:xfrm>
-            <a:off x="4688738" y="3657600"/>
-            <a:ext cx="2814218" cy="365760"/>
-          </a:xfrm>
-          <a:prstGeom prst="rect">
-            <a:avLst/>
-          </a:prstGeom>
-          <a:noFill/>
-          <a:ln/>
-        </p:spPr>
-        <p:txBody>
-          <a:bodyPr wrap="square" lIns="0" tIns="0" rIns="0" bIns="0" rtlCol="0" anchor="t"/>
-          <a:lstStyle/>
-          <a:p>
-            <a:pPr indent="0" marL="0">
-              <a:buNone/>
-            </a:pPr>
-            <a:r>
-              <a:rPr lang="en-US" sz="1500" dirty="0">
-                <a:solidFill>
-                  <a:srgbClr val="2B2D42"/>
-                </a:solidFill>
-                <a:latin typeface="Meiryo" pitchFamily="34" charset="0"/>
-                <a:ea typeface="Meiryo" pitchFamily="34" charset="-122"/>
-                <a:cs typeface="Meiryo" pitchFamily="34" charset="-120"/>
-              </a:rPr>
-              <a:t>年間目標 2,500万円</a:t>
-            </a:r>
-            <a:endParaRPr lang="en-US" sz="1500" dirty="0"/>
-          </a:p>
-        </p:txBody>
-      </p:sp>
-      <p:sp>
-        <p:nvSpPr>
-          <p:cNvPr id="13" name="Shape 11"/>
-          <p:cNvSpPr/>
-          <p:nvPr/>
-        </p:nvSpPr>
-        <p:spPr>
-          <a:xfrm>
-            <a:off x="8188757" y="1783080"/>
-            <a:ext cx="3454298" cy="2514600"/>
-          </a:xfrm>
-          <a:prstGeom prst="roundRect">
-            <a:avLst>
-              <a:gd name="adj" fmla="val 4364"/>
-            </a:avLst>
-          </a:prstGeom>
           <a:solidFill>
-            <a:srgbClr val="F4F5F8"/>
+            <a:srgbClr val="F2B8CA"/>
           </a:solidFill>
           <a:ln w="12700">
             <a:solidFill>
-              <a:srgbClr val="F4F5F8"/>
+              <a:srgbClr val="F2B8CA"/>
             </a:solidFill>
             <a:prstDash val="solid"/>
           </a:ln>
@@ -2175,14 +2736,14 @@
       </p:sp>
       <p:sp>
         <p:nvSpPr>
-          <p:cNvPr id="14" name="Text 12"/>
+          <p:cNvPr id="16" name="Text 14"/>
           <p:cNvSpPr txBox="1"/>
           <p:nvPr/>
         </p:nvSpPr>
         <p:spPr>
           <a:xfrm>
-            <a:off x="8508797" y="2057400"/>
-            <a:ext cx="2814218" cy="365760"/>
+            <a:off x="5001820" y="4956048"/>
+            <a:ext cx="4114800" cy="292608"/>
           </a:xfrm>
           <a:prstGeom prst="rect">
             <a:avLst/>
@@ -2191,14 +2752,14 @@
           <a:ln/>
         </p:spPr>
         <p:txBody>
-          <a:bodyPr wrap="square" lIns="0" tIns="0" rIns="0" bIns="0" rtlCol="0" anchor="t"/>
+          <a:bodyPr wrap="square" lIns="0" tIns="0" rIns="0" bIns="0" rtlCol="0" anchor="ctr"/>
           <a:lstStyle/>
           <a:p>
             <a:pPr indent="0" marL="0">
               <a:buNone/>
             </a:pPr>
             <a:r>
-              <a:rPr lang="en-US" sz="1600" b="1" dirty="0">
+              <a:rPr lang="en-US" sz="1200" dirty="0">
                 <a:solidFill>
                   <a:srgbClr val="6B6E80"/>
                 </a:solidFill>
@@ -2206,22 +2767,22 @@
                 <a:ea typeface="Meiryo" pitchFamily="34" charset="-122"/>
                 <a:cs typeface="Meiryo" pitchFamily="34" charset="-120"/>
               </a:rPr>
-              <a:t>昨年の年間売上</a:t>
-            </a:r>
-            <a:endParaRPr lang="en-US" sz="1600" dirty="0"/>
-          </a:p>
-        </p:txBody>
-      </p:sp>
-      <p:sp>
-        <p:nvSpPr>
-          <p:cNvPr id="15" name="Text 13"/>
+              <a:t>9〜2月の見込み（同じペースなら）</a:t>
+            </a:r>
+            <a:endParaRPr lang="en-US" sz="1200" dirty="0"/>
+          </a:p>
+        </p:txBody>
+      </p:sp>
+      <p:sp>
+        <p:nvSpPr>
+          <p:cNvPr id="17" name="Text 15"/>
           <p:cNvSpPr txBox="1"/>
           <p:nvPr/>
         </p:nvSpPr>
         <p:spPr>
           <a:xfrm>
-            <a:off x="8508797" y="2514600"/>
-            <a:ext cx="2997098" cy="1005840"/>
+            <a:off x="7157139" y="4114800"/>
+            <a:ext cx="1828800" cy="731520"/>
           </a:xfrm>
           <a:prstGeom prst="rect">
             <a:avLst/>
@@ -2230,51 +2791,87 @@
           <a:ln/>
         </p:spPr>
         <p:txBody>
-          <a:bodyPr wrap="square" lIns="0" tIns="0" rIns="0" bIns="0" rtlCol="0" anchor="b"/>
+          <a:bodyPr wrap="square" lIns="0" tIns="0" rIns="0" bIns="0" rtlCol="0" anchor="ctr"/>
           <a:lstStyle/>
           <a:p>
             <a:pPr indent="0" marL="0">
               <a:buNone/>
             </a:pPr>
             <a:r>
-              <a:rPr lang="en-US" sz="4800" b="1" dirty="0">
-                <a:solidFill>
-                  <a:srgbClr val="2B2D42"/>
-                </a:solidFill>
-                <a:latin typeface="Meiryo" pitchFamily="34" charset="0"/>
-                <a:ea typeface="Meiryo" pitchFamily="34" charset="-122"/>
-                <a:cs typeface="Meiryo" pitchFamily="34" charset="-120"/>
-              </a:rPr>
-              <a:t>2,400</a:t>
-            </a:r>
-            <a:pPr indent="0" marL="0">
-              <a:buNone/>
-            </a:pPr>
-            <a:r>
               <a:rPr lang="en-US" sz="2000" b="1" dirty="0">
                 <a:solidFill>
-                  <a:srgbClr val="2B2D42"/>
-                </a:solidFill>
-                <a:latin typeface="Meiryo" pitchFamily="34" charset="0"/>
-                <a:ea typeface="Meiryo" pitchFamily="34" charset="-122"/>
-                <a:cs typeface="Meiryo" pitchFamily="34" charset="-120"/>
-              </a:rPr>
-              <a:t> 万円</a:t>
-            </a:r>
-            <a:endParaRPr lang="en-US" sz="4800" dirty="0"/>
-          </a:p>
-        </p:txBody>
-      </p:sp>
-      <p:sp>
-        <p:nvSpPr>
-          <p:cNvPr id="16" name="Text 14"/>
+                  <a:srgbClr val="C8315F"/>
+                </a:solidFill>
+                <a:latin typeface="Meiryo" pitchFamily="34" charset="0"/>
+                <a:ea typeface="Meiryo" pitchFamily="34" charset="-122"/>
+                <a:cs typeface="Meiryo" pitchFamily="34" charset="-120"/>
+              </a:rPr>
+              <a:t>約3,350万円</a:t>
+            </a:r>
+            <a:endParaRPr lang="en-US" sz="2000" dirty="0"/>
+          </a:p>
+        </p:txBody>
+      </p:sp>
+      <p:sp>
+        <p:nvSpPr>
+          <p:cNvPr id="18" name="Shape 16"/>
+          <p:cNvSpPr/>
+          <p:nvPr/>
+        </p:nvSpPr>
+        <p:spPr>
+          <a:xfrm>
+            <a:off x="5865223" y="1645920"/>
+            <a:ext cx="0" cy="3246120"/>
+          </a:xfrm>
+          <a:prstGeom prst="line">
+            <a:avLst/>
+          </a:prstGeom>
+          <a:noFill/>
+          <a:ln w="15875">
+            <a:solidFill>
+              <a:srgbClr val="2B2D42"/>
+            </a:solidFill>
+            <a:prstDash val="dash"/>
+          </a:ln>
+        </p:spPr>
+      </p:sp>
+      <p:sp>
+        <p:nvSpPr>
+          <p:cNvPr id="19" name="Shape 17"/>
+          <p:cNvSpPr/>
+          <p:nvPr/>
+        </p:nvSpPr>
+        <p:spPr>
+          <a:xfrm>
+            <a:off x="9098280" y="1828800"/>
+            <a:ext cx="2544775" cy="1463040"/>
+          </a:xfrm>
+          <a:prstGeom prst="roundRect">
+            <a:avLst>
+              <a:gd name="adj" fmla="val 7500"/>
+            </a:avLst>
+          </a:prstGeom>
+          <a:solidFill>
+            <a:srgbClr val="FBE9EF"/>
+          </a:solidFill>
+          <a:ln w="12700">
+            <a:solidFill>
+              <a:srgbClr val="FBE9EF"/>
+            </a:solidFill>
+            <a:prstDash val="solid"/>
+          </a:ln>
+        </p:spPr>
+      </p:sp>
+      <p:sp>
+        <p:nvSpPr>
+          <p:cNvPr id="20" name="Text 18"/>
           <p:cNvSpPr txBox="1"/>
           <p:nvPr/>
         </p:nvSpPr>
         <p:spPr>
           <a:xfrm>
-            <a:off x="8508797" y="3657600"/>
-            <a:ext cx="2814218" cy="365760"/>
+            <a:off x="9326880" y="1828800"/>
+            <a:ext cx="2179015" cy="1463040"/>
           </a:xfrm>
           <a:prstGeom prst="rect">
             <a:avLst/>
@@ -2283,14 +2880,48 @@
           <a:ln/>
         </p:spPr>
         <p:txBody>
-          <a:bodyPr wrap="square" lIns="0" tIns="0" rIns="0" bIns="0" rtlCol="0" anchor="t"/>
+          <a:bodyPr wrap="square" lIns="0" tIns="0" rIns="0" bIns="0" rtlCol="0" anchor="ctr"/>
           <a:lstStyle/>
           <a:p>
             <a:pPr indent="0" marL="0">
               <a:buNone/>
             </a:pPr>
             <a:r>
-              <a:rPr lang="en-US" sz="1500" dirty="0">
+              <a:rPr lang="en-US" sz="1300" dirty="0">
+                <a:solidFill>
+                  <a:srgbClr val="6B6E80"/>
+                </a:solidFill>
+                <a:latin typeface="Meiryo" pitchFamily="34" charset="0"/>
+                <a:ea typeface="Meiryo" pitchFamily="34" charset="-122"/>
+                <a:cs typeface="Meiryo" pitchFamily="34" charset="-120"/>
+              </a:rPr>
+              <a:t>半年で達成率</a:t>
+            </a:r>
+            <a:endParaRPr lang="en-US" sz="1300" dirty="0"/>
+          </a:p>
+          <a:p>
+            <a:pPr indent="0" marL="0">
+              <a:buNone/>
+            </a:pPr>
+            <a:r>
+              <a:rPr lang="en-US" sz="3600" b="1" dirty="0">
+                <a:solidFill>
+                  <a:srgbClr val="C8315F"/>
+                </a:solidFill>
+                <a:latin typeface="Meiryo" pitchFamily="34" charset="0"/>
+                <a:ea typeface="Meiryo" pitchFamily="34" charset="-122"/>
+                <a:cs typeface="Meiryo" pitchFamily="34" charset="-120"/>
+              </a:rPr>
+              <a:t>67%</a:t>
+            </a:r>
+            <a:endParaRPr lang="en-US" sz="1300" dirty="0"/>
+          </a:p>
+          <a:p>
+            <a:pPr indent="0" marL="0">
+              <a:buNone/>
+            </a:pPr>
+            <a:r>
+              <a:rPr lang="en-US" sz="1300" b="1" dirty="0">
                 <a:solidFill>
                   <a:srgbClr val="2B2D42"/>
                 </a:solidFill>
@@ -2298,26 +2929,26 @@
                 <a:ea typeface="Meiryo" pitchFamily="34" charset="-122"/>
                 <a:cs typeface="Meiryo" pitchFamily="34" charset="-120"/>
               </a:rPr>
-              <a:t>見込みは昨年より 約+110万円</a:t>
-            </a:r>
-            <a:endParaRPr lang="en-US" sz="1500" dirty="0"/>
-          </a:p>
-        </p:txBody>
-      </p:sp>
-      <p:sp>
-        <p:nvSpPr>
-          <p:cNvPr id="17" name="Shape 15"/>
+              <a:t>計画 50%より +17pt</a:t>
+            </a:r>
+            <a:endParaRPr lang="en-US" sz="1300" dirty="0"/>
+          </a:p>
+        </p:txBody>
+      </p:sp>
+      <p:sp>
+        <p:nvSpPr>
+          <p:cNvPr id="21" name="Shape 19"/>
           <p:cNvSpPr/>
           <p:nvPr/>
         </p:nvSpPr>
         <p:spPr>
           <a:xfrm>
-            <a:off x="548640" y="4663440"/>
-            <a:ext cx="11094415" cy="685800"/>
+            <a:off x="9098280" y="3566160"/>
+            <a:ext cx="2544775" cy="1280160"/>
           </a:xfrm>
           <a:prstGeom prst="roundRect">
             <a:avLst>
-              <a:gd name="adj" fmla="val 16000"/>
+              <a:gd name="adj" fmla="val 8571"/>
             </a:avLst>
           </a:prstGeom>
           <a:solidFill>
@@ -2333,14 +2964,14 @@
       </p:sp>
       <p:sp>
         <p:nvSpPr>
-          <p:cNvPr id="18" name="Text 16"/>
+          <p:cNvPr id="22" name="Text 20"/>
           <p:cNvSpPr txBox="1"/>
           <p:nvPr/>
         </p:nvSpPr>
         <p:spPr>
           <a:xfrm>
-            <a:off x="868680" y="4663440"/>
-            <a:ext cx="10454335" cy="685800"/>
+            <a:off x="9326880" y="3566160"/>
+            <a:ext cx="2179015" cy="1280160"/>
           </a:xfrm>
           <a:prstGeom prst="rect">
             <a:avLst/>
@@ -2356,6 +2987,23 @@
               <a:buNone/>
             </a:pPr>
             <a:r>
+              <a:rPr lang="en-US" sz="1300" dirty="0">
+                <a:solidFill>
+                  <a:srgbClr val="2B2D42"/>
+                </a:solidFill>
+                <a:latin typeface="Meiryo" pitchFamily="34" charset="0"/>
+                <a:ea typeface="Meiryo" pitchFamily="34" charset="-122"/>
+                <a:cs typeface="Meiryo" pitchFamily="34" charset="-120"/>
+              </a:rPr>
+              <a:t>残り6ヶ月は</a:t>
+            </a:r>
+            <a:endParaRPr lang="en-US" sz="1300" dirty="0"/>
+          </a:p>
+          <a:p>
+            <a:pPr indent="0" marL="0">
+              <a:buNone/>
+            </a:pPr>
+            <a:r>
               <a:rPr lang="en-US" sz="1800" b="1" dirty="0">
                 <a:solidFill>
                   <a:srgbClr val="2E8B62"/>
@@ -2364,36 +3012,39 @@
                 <a:ea typeface="Meiryo" pitchFamily="34" charset="-122"/>
                 <a:cs typeface="Meiryo" pitchFamily="34" charset="-120"/>
               </a:rPr>
-              <a:t>残り4ヶ月は 月206万円 で目標達成</a:t>
-            </a:r>
+              <a:t>月137万円で達成</a:t>
+            </a:r>
+            <a:endParaRPr lang="en-US" sz="1300" dirty="0"/>
+          </a:p>
+          <a:p>
             <a:pPr indent="0" marL="0">
               <a:buNone/>
             </a:pPr>
             <a:r>
-              <a:rPr lang="en-US" sz="1800" dirty="0">
-                <a:solidFill>
-                  <a:srgbClr val="2B2D42"/>
-                </a:solidFill>
-                <a:latin typeface="Meiryo" pitchFamily="34" charset="0"/>
-                <a:ea typeface="Meiryo" pitchFamily="34" charset="-122"/>
-                <a:cs typeface="Meiryo" pitchFamily="34" charset="-120"/>
-              </a:rPr>
-              <a:t>（これまでの月平均 209万円）</a:t>
-            </a:r>
-            <a:endParaRPr lang="en-US" sz="1800" dirty="0"/>
-          </a:p>
-        </p:txBody>
-      </p:sp>
-      <p:sp>
-        <p:nvSpPr>
-          <p:cNvPr id="19" name="Text 17"/>
+              <a:rPr lang="en-US" sz="1200" dirty="0">
+                <a:solidFill>
+                  <a:srgbClr val="6B6E80"/>
+                </a:solidFill>
+                <a:latin typeface="Meiryo" pitchFamily="34" charset="0"/>
+                <a:ea typeface="Meiryo" pitchFamily="34" charset="-122"/>
+                <a:cs typeface="Meiryo" pitchFamily="34" charset="-120"/>
+              </a:rPr>
+              <a:t>今の月平均 279万円</a:t>
+            </a:r>
+            <a:endParaRPr lang="en-US" sz="1300" dirty="0"/>
+          </a:p>
+        </p:txBody>
+      </p:sp>
+      <p:sp>
+        <p:nvSpPr>
+          <p:cNvPr id="23" name="Text 21"/>
           <p:cNvSpPr txBox="1"/>
           <p:nvPr/>
         </p:nvSpPr>
         <p:spPr>
           <a:xfrm>
-            <a:off x="548640" y="5532120"/>
-            <a:ext cx="11094415" cy="228600"/>
+            <a:off x="548640" y="5349240"/>
+            <a:ext cx="11094415" cy="457200"/>
           </a:xfrm>
           <a:prstGeom prst="rect">
             <a:avLst/>
@@ -2417,7 +3068,7 @@
                 <a:ea typeface="Meiryo" pitchFamily="34" charset="-122"/>
                 <a:cs typeface="Meiryo" pitchFamily="34" charset="-120"/>
               </a:rPr>
-              <a:t>※売上は売買仲介手数料を含む。計画ペースは年度を1〜12月と仮定して算出</a:t>
+              <a:t>※売買仲介を含む。見込み＝3〜8月の月平均×12ヶ月。売買仲介を除くと 3〜8月 1,441万円・見込み 約2,880万円。昨年は年間実績（社内聞き取り）</a:t>
             </a:r>
             <a:endParaRPr lang="en-US" sz="1100" dirty="0"/>
           </a:p>
@@ -2519,7 +3170,7 @@
               <a:buNone/>
             </a:pPr>
             <a:r>
-              <a:rPr lang="en-US" sz="3000" b="1" dirty="0">
+              <a:rPr lang="en-US" sz="2800" b="1" dirty="0">
                 <a:solidFill>
                   <a:srgbClr val="2B2D42"/>
                 </a:solidFill>
@@ -2527,9 +3178,9 @@
                 <a:ea typeface="Meiryo" pitchFamily="34" charset="-122"/>
                 <a:cs typeface="Meiryo" pitchFamily="34" charset="-120"/>
               </a:rPr>
-              <a:t>伸びを引っ張っているのは AD・付帯商品</a:t>
-            </a:r>
-            <a:endParaRPr lang="en-US" sz="3000" dirty="0"/>
+              <a:t>AD に加えて、付帯系の手数料が大きく伸びている</a:t>
+            </a:r>
+            <a:endParaRPr lang="en-US" sz="2800" dirty="0"/>
           </a:p>
         </p:txBody>
       </p:sp>
@@ -2541,7 +3192,7 @@
         </p:nvSpPr>
         <p:spPr>
           <a:xfrm>
-            <a:off x="10545775" y="6217920"/>
+            <a:off x="10545775" y="6263640"/>
             <a:ext cx="1097280" cy="228600"/>
           </a:xfrm>
           <a:prstGeom prst="rect">
@@ -2572,159 +3223,36 @@
           </a:p>
         </p:txBody>
       </p:sp>
-      <p:sp>
-        <p:nvSpPr>
-          <p:cNvPr id="5" name="Shape 3"/>
+      <p:graphicFrame>
+        <p:nvGraphicFramePr>
+          <p:cNvPr id="5" name="Chart 0" descr=""/>
+          <p:cNvGraphicFramePr/>
+          <p:nvPr/>
+        </p:nvGraphicFramePr>
+        <p:xfrm>
+          <a:off x="548640" y="1600200"/>
+          <a:ext cx="7498080" cy="4434840"/>
+        </p:xfrm>
+        <a:graphic xmlns:a="http://schemas.openxmlformats.org/drawingml/2006/main">
+          <a:graphicData uri="http://schemas.openxmlformats.org/drawingml/2006/chart">
+            <c:chart xmlns:c="http://schemas.openxmlformats.org/drawingml/2006/chart" r:id="rId1"/>
+          </a:graphicData>
+        </a:graphic>
+      </p:graphicFrame>
+      <p:sp>
+        <p:nvSpPr>
+          <p:cNvPr id="6" name="Shape 3"/>
           <p:cNvSpPr/>
           <p:nvPr/>
         </p:nvSpPr>
         <p:spPr>
           <a:xfrm>
-            <a:off x="548640" y="1645920"/>
-            <a:ext cx="6949440" cy="4297680"/>
+            <a:off x="8412480" y="1691640"/>
+            <a:ext cx="3230575" cy="1554480"/>
           </a:xfrm>
           <a:prstGeom prst="roundRect">
             <a:avLst>
-              <a:gd name="adj" fmla="val 2553"/>
-            </a:avLst>
-          </a:prstGeom>
-          <a:solidFill>
-            <a:srgbClr val="FFF3DD"/>
-          </a:solidFill>
-          <a:ln w="12700">
-            <a:solidFill>
-              <a:srgbClr val="FFF3DD"/>
-            </a:solidFill>
-            <a:prstDash val="solid"/>
-          </a:ln>
-        </p:spPr>
-      </p:sp>
-      <p:sp>
-        <p:nvSpPr>
-          <p:cNvPr id="6" name="Text 4"/>
-          <p:cNvSpPr txBox="1"/>
-          <p:nvPr/>
-        </p:nvSpPr>
-        <p:spPr>
-          <a:xfrm>
-            <a:off x="1005840" y="1645920"/>
-            <a:ext cx="6035040" cy="4297680"/>
-          </a:xfrm>
-          <a:prstGeom prst="rect">
-            <a:avLst/>
-          </a:prstGeom>
-          <a:noFill/>
-          <a:ln/>
-        </p:spPr>
-        <p:txBody>
-          <a:bodyPr wrap="square" lIns="0" tIns="0" rIns="0" bIns="0" rtlCol="0" anchor="ctr"/>
-          <a:lstStyle/>
-          <a:p>
-            <a:pPr indent="0" marL="0">
-              <a:buNone/>
-            </a:pPr>
-            <a:r>
-              <a:rPr lang="en-US" sz="1800" b="1" dirty="0">
-                <a:solidFill>
-                  <a:srgbClr val="C77700"/>
-                </a:solidFill>
-                <a:latin typeface="Meiryo" pitchFamily="34" charset="0"/>
-                <a:ea typeface="Meiryo" pitchFamily="34" charset="-122"/>
-                <a:cs typeface="Meiryo" pitchFamily="34" charset="-120"/>
-              </a:rPr>
-              <a:t>積み上げ棒グラフ：要記入</a:t>
-            </a:r>
-            <a:endParaRPr lang="en-US" sz="1400" dirty="0"/>
-          </a:p>
-          <a:p>
-            <a:pPr indent="0" marL="0">
-              <a:buNone/>
-            </a:pPr>
-            <a:r>
-              <a:rPr lang="en-US" sz="1400" dirty="0">
-                <a:solidFill>
-                  <a:srgbClr val="2B2D42"/>
-                </a:solidFill>
-                <a:latin typeface="Meiryo" pitchFamily="34" charset="0"/>
-                <a:ea typeface="Meiryo" pitchFamily="34" charset="-122"/>
-                <a:cs typeface="Meiryo" pitchFamily="34" charset="-120"/>
-              </a:rPr>
-              <a:t>build.js の MIX に、昨年・今年（1〜8月）の</a:t>
-            </a:r>
-            <a:endParaRPr lang="en-US" sz="1400" dirty="0"/>
-          </a:p>
-          <a:p>
-            <a:pPr indent="0" marL="0">
-              <a:buNone/>
-            </a:pPr>
-            <a:r>
-              <a:rPr lang="en-US" sz="1400" dirty="0">
-                <a:solidFill>
-                  <a:srgbClr val="2B2D42"/>
-                </a:solidFill>
-                <a:latin typeface="Meiryo" pitchFamily="34" charset="0"/>
-                <a:ea typeface="Meiryo" pitchFamily="34" charset="-122"/>
-                <a:cs typeface="Meiryo" pitchFamily="34" charset="-120"/>
-              </a:rPr>
-              <a:t>売上合計・AD・付帯商品の金額を入れて再生成</a:t>
-            </a:r>
-            <a:endParaRPr lang="en-US" sz="1400" dirty="0"/>
-          </a:p>
-        </p:txBody>
-      </p:sp>
-      <p:sp>
-        <p:nvSpPr>
-          <p:cNvPr id="7" name="Text 5"/>
-          <p:cNvSpPr txBox="1"/>
-          <p:nvPr/>
-        </p:nvSpPr>
-        <p:spPr>
-          <a:xfrm>
-            <a:off x="7955280" y="1645920"/>
-            <a:ext cx="3687775" cy="320040"/>
-          </a:xfrm>
-          <a:prstGeom prst="rect">
-            <a:avLst/>
-          </a:prstGeom>
-          <a:noFill/>
-          <a:ln/>
-        </p:spPr>
-        <p:txBody>
-          <a:bodyPr wrap="square" lIns="0" tIns="0" rIns="0" bIns="0" rtlCol="0" anchor="t"/>
-          <a:lstStyle/>
-          <a:p>
-            <a:pPr indent="0" marL="0">
-              <a:buNone/>
-            </a:pPr>
-            <a:r>
-              <a:rPr lang="en-US" sz="1400" b="1" dirty="0">
-                <a:solidFill>
-                  <a:srgbClr val="6B6E80"/>
-                </a:solidFill>
-                <a:latin typeface="Meiryo" pitchFamily="34" charset="0"/>
-                <a:ea typeface="Meiryo" pitchFamily="34" charset="-122"/>
-                <a:cs typeface="Meiryo" pitchFamily="34" charset="-120"/>
-              </a:rPr>
-              <a:t>昨年同期（1〜8月）からの上がり幅</a:t>
-            </a:r>
-            <a:endParaRPr lang="en-US" sz="1400" dirty="0"/>
-          </a:p>
-        </p:txBody>
-      </p:sp>
-      <p:sp>
-        <p:nvSpPr>
-          <p:cNvPr id="8" name="Shape 6"/>
-          <p:cNvSpPr/>
-          <p:nvPr/>
-        </p:nvSpPr>
-        <p:spPr>
-          <a:xfrm>
-            <a:off x="7955280" y="2148840"/>
-            <a:ext cx="3687775" cy="1097280"/>
-          </a:xfrm>
-          <a:prstGeom prst="roundRect">
-            <a:avLst>
-              <a:gd name="adj" fmla="val 10000"/>
+              <a:gd name="adj" fmla="val 7059"/>
             </a:avLst>
           </a:prstGeom>
           <a:solidFill>
@@ -2740,13 +3268,13 @@
       </p:sp>
       <p:sp>
         <p:nvSpPr>
-          <p:cNvPr id="9" name="Shape 7"/>
+          <p:cNvPr id="7" name="Shape 4"/>
           <p:cNvSpPr/>
           <p:nvPr/>
         </p:nvSpPr>
         <p:spPr>
           <a:xfrm>
-            <a:off x="8229600" y="2368296"/>
+            <a:off x="8686800" y="1965960"/>
             <a:ext cx="182880" cy="182880"/>
           </a:xfrm>
           <a:prstGeom prst="ellipse">
@@ -2765,14 +3293,14 @@
       </p:sp>
       <p:sp>
         <p:nvSpPr>
-          <p:cNvPr id="10" name="Text 8"/>
+          <p:cNvPr id="8" name="Text 5"/>
           <p:cNvSpPr txBox="1"/>
           <p:nvPr/>
         </p:nvSpPr>
         <p:spPr>
           <a:xfrm>
-            <a:off x="8503920" y="2286000"/>
-            <a:ext cx="2864815" cy="365760"/>
+            <a:off x="8961120" y="1874520"/>
+            <a:ext cx="2499055" cy="365760"/>
           </a:xfrm>
           <a:prstGeom prst="rect">
             <a:avLst/>
@@ -2788,7 +3316,7 @@
               <a:buNone/>
             </a:pPr>
             <a:r>
-              <a:rPr lang="en-US" sz="1600" b="1" dirty="0">
+              <a:rPr lang="en-US" sz="1500" b="1" dirty="0">
                 <a:solidFill>
                   <a:srgbClr val="2B2D42"/>
                 </a:solidFill>
@@ -2796,22 +3324,22 @@
                 <a:ea typeface="Meiryo" pitchFamily="34" charset="-122"/>
                 <a:cs typeface="Meiryo" pitchFamily="34" charset="-120"/>
               </a:rPr>
-              <a:t>AD</a:t>
-            </a:r>
-            <a:endParaRPr lang="en-US" sz="1600" dirty="0"/>
-          </a:p>
-        </p:txBody>
-      </p:sp>
-      <p:sp>
-        <p:nvSpPr>
-          <p:cNvPr id="11" name="Text 9"/>
+              <a:t>AD（受取広告料）</a:t>
+            </a:r>
+            <a:endParaRPr lang="en-US" sz="1500" dirty="0"/>
+          </a:p>
+        </p:txBody>
+      </p:sp>
+      <p:sp>
+        <p:nvSpPr>
+          <p:cNvPr id="9" name="Text 6"/>
           <p:cNvSpPr txBox="1"/>
           <p:nvPr/>
         </p:nvSpPr>
         <p:spPr>
           <a:xfrm>
-            <a:off x="8229600" y="2606040"/>
-            <a:ext cx="3139135" cy="548640"/>
+            <a:off x="8686800" y="2240280"/>
+            <a:ext cx="2773375" cy="548640"/>
           </a:xfrm>
           <a:prstGeom prst="rect">
             <a:avLst/>
@@ -2827,34 +3355,87 @@
               <a:buNone/>
             </a:pPr>
             <a:r>
-              <a:rPr lang="en-US" sz="2200" b="1" dirty="0">
-                <a:solidFill>
-                  <a:srgbClr val="C77700"/>
-                </a:solidFill>
-                <a:latin typeface="Meiryo" pitchFamily="34" charset="0"/>
-                <a:ea typeface="Meiryo" pitchFamily="34" charset="-122"/>
-                <a:cs typeface="Meiryo" pitchFamily="34" charset="-120"/>
-              </a:rPr>
-              <a:t>要記入</a:t>
-            </a:r>
-            <a:endParaRPr lang="en-US" sz="2200" dirty="0"/>
-          </a:p>
-        </p:txBody>
-      </p:sp>
-      <p:sp>
-        <p:nvSpPr>
-          <p:cNvPr id="12" name="Shape 10"/>
+              <a:rPr lang="en-US" sz="3000" b="1" dirty="0">
+                <a:solidFill>
+                  <a:srgbClr val="C8315F"/>
+                </a:solidFill>
+                <a:latin typeface="Meiryo" pitchFamily="34" charset="0"/>
+                <a:ea typeface="Meiryo" pitchFamily="34" charset="-122"/>
+                <a:cs typeface="Meiryo" pitchFamily="34" charset="-120"/>
+              </a:rPr>
+              <a:t>193.6</a:t>
+            </a:r>
+            <a:pPr indent="0" marL="0">
+              <a:buNone/>
+            </a:pPr>
+            <a:r>
+              <a:rPr lang="en-US" sz="1400" dirty="0">
+                <a:solidFill>
+                  <a:srgbClr val="2B2D42"/>
+                </a:solidFill>
+                <a:latin typeface="Meiryo" pitchFamily="34" charset="0"/>
+                <a:ea typeface="Meiryo" pitchFamily="34" charset="-122"/>
+                <a:cs typeface="Meiryo" pitchFamily="34" charset="-120"/>
+              </a:rPr>
+              <a:t> 万円</a:t>
+            </a:r>
+            <a:endParaRPr lang="en-US" sz="3000" dirty="0"/>
+          </a:p>
+        </p:txBody>
+      </p:sp>
+      <p:sp>
+        <p:nvSpPr>
+          <p:cNvPr id="10" name="Text 7"/>
+          <p:cNvSpPr txBox="1"/>
+          <p:nvPr/>
+        </p:nvSpPr>
+        <p:spPr>
+          <a:xfrm>
+            <a:off x="8686800" y="2834640"/>
+            <a:ext cx="2773375" cy="274320"/>
+          </a:xfrm>
+          <a:prstGeom prst="rect">
+            <a:avLst/>
+          </a:prstGeom>
+          <a:noFill/>
+          <a:ln/>
+        </p:spPr>
+        <p:txBody>
+          <a:bodyPr wrap="square" lIns="0" tIns="0" rIns="0" bIns="0" rtlCol="0" anchor="t"/>
+          <a:lstStyle/>
+          <a:p>
+            <a:pPr indent="0" marL="0">
+              <a:buNone/>
+            </a:pPr>
+            <a:r>
+              <a:rPr lang="en-US" sz="1100" dirty="0">
+                <a:solidFill>
+                  <a:srgbClr val="6B6E80"/>
+                </a:solidFill>
+                <a:latin typeface="Meiryo" pitchFamily="34" charset="0"/>
+                <a:ea typeface="Meiryo" pitchFamily="34" charset="-122"/>
+                <a:cs typeface="Meiryo" pitchFamily="34" charset="-120"/>
+              </a:rPr>
+              <a:t>3〜8月の合計（月平均 約32万円）</a:t>
+            </a:r>
+            <a:endParaRPr lang="en-US" sz="1100" dirty="0"/>
+          </a:p>
+        </p:txBody>
+      </p:sp>
+      <p:sp>
+        <p:nvSpPr>
+          <p:cNvPr id="11" name="Shape 8"/>
           <p:cNvSpPr/>
           <p:nvPr/>
         </p:nvSpPr>
         <p:spPr>
           <a:xfrm>
-            <a:off x="7955280" y="3520440"/>
-            <a:ext cx="3687775" cy="1097280"/>
+            <a:off x="8412480" y="3474720"/>
+            <a:ext cx="3230575" cy="1554480"/>
           </a:xfrm>
           <a:prstGeom prst="roundRect">
             <a:avLst>
-              <a:gd name="adj" fmla="val 10000"/>
+              <a:gd name="adj" fmla="val 7059"/>
             </a:avLst>
           </a:prstGeom>
           <a:solidFill>
@@ -2870,13 +3451,13 @@
       </p:sp>
       <p:sp>
         <p:nvSpPr>
-          <p:cNvPr id="13" name="Shape 11"/>
+          <p:cNvPr id="12" name="Shape 9"/>
           <p:cNvSpPr/>
           <p:nvPr/>
         </p:nvSpPr>
         <p:spPr>
           <a:xfrm>
-            <a:off x="8229600" y="3739896"/>
+            <a:off x="8686800" y="3749040"/>
             <a:ext cx="182880" cy="182880"/>
           </a:xfrm>
           <a:prstGeom prst="ellipse">
@@ -2895,14 +3476,14 @@
       </p:sp>
       <p:sp>
         <p:nvSpPr>
-          <p:cNvPr id="14" name="Text 12"/>
+          <p:cNvPr id="13" name="Text 10"/>
           <p:cNvSpPr txBox="1"/>
           <p:nvPr/>
         </p:nvSpPr>
         <p:spPr>
           <a:xfrm>
-            <a:off x="8503920" y="3657600"/>
-            <a:ext cx="2864815" cy="365760"/>
+            <a:off x="8961120" y="3657600"/>
+            <a:ext cx="2499055" cy="365760"/>
           </a:xfrm>
           <a:prstGeom prst="rect">
             <a:avLst/>
@@ -2918,7 +3499,7 @@
               <a:buNone/>
             </a:pPr>
             <a:r>
-              <a:rPr lang="en-US" sz="1600" b="1" dirty="0">
+              <a:rPr lang="en-US" sz="1500" b="1" dirty="0">
                 <a:solidFill>
                   <a:srgbClr val="2B2D42"/>
                 </a:solidFill>
@@ -2926,22 +3507,22 @@
                 <a:ea typeface="Meiryo" pitchFamily="34" charset="-122"/>
                 <a:cs typeface="Meiryo" pitchFamily="34" charset="-120"/>
               </a:rPr>
-              <a:t>付帯商品</a:t>
-            </a:r>
-            <a:endParaRPr lang="en-US" sz="1600" dirty="0"/>
-          </a:p>
-        </p:txBody>
-      </p:sp>
-      <p:sp>
-        <p:nvSpPr>
-          <p:cNvPr id="15" name="Text 13"/>
+              <a:t>付帯系の手数料</a:t>
+            </a:r>
+            <a:endParaRPr lang="en-US" sz="1500" dirty="0"/>
+          </a:p>
+        </p:txBody>
+      </p:sp>
+      <p:sp>
+        <p:nvSpPr>
+          <p:cNvPr id="14" name="Text 11"/>
           <p:cNvSpPr txBox="1"/>
           <p:nvPr/>
         </p:nvSpPr>
         <p:spPr>
           <a:xfrm>
-            <a:off x="8229600" y="3977640"/>
-            <a:ext cx="3139135" cy="548640"/>
+            <a:off x="8686800" y="4023360"/>
+            <a:ext cx="2773375" cy="548640"/>
           </a:xfrm>
           <a:prstGeom prst="rect">
             <a:avLst/>
@@ -2957,30 +3538,44 @@
               <a:buNone/>
             </a:pPr>
             <a:r>
-              <a:rPr lang="en-US" sz="2200" b="1" dirty="0">
-                <a:solidFill>
-                  <a:srgbClr val="C77700"/>
-                </a:solidFill>
-                <a:latin typeface="Meiryo" pitchFamily="34" charset="0"/>
-                <a:ea typeface="Meiryo" pitchFamily="34" charset="-122"/>
-                <a:cs typeface="Meiryo" pitchFamily="34" charset="-120"/>
-              </a:rPr>
-              <a:t>要記入</a:t>
-            </a:r>
-            <a:endParaRPr lang="en-US" sz="2200" dirty="0"/>
-          </a:p>
-        </p:txBody>
-      </p:sp>
-      <p:sp>
-        <p:nvSpPr>
-          <p:cNvPr id="16" name="Text 14"/>
+              <a:rPr lang="en-US" sz="3000" b="1" dirty="0">
+                <a:solidFill>
+                  <a:srgbClr val="C8315F"/>
+                </a:solidFill>
+                <a:latin typeface="Meiryo" pitchFamily="34" charset="0"/>
+                <a:ea typeface="Meiryo" pitchFamily="34" charset="-122"/>
+                <a:cs typeface="Meiryo" pitchFamily="34" charset="-120"/>
+              </a:rPr>
+              <a:t>0.6 → 18.6</a:t>
+            </a:r>
+            <a:pPr indent="0" marL="0">
+              <a:buNone/>
+            </a:pPr>
+            <a:r>
+              <a:rPr lang="en-US" sz="1400" dirty="0">
+                <a:solidFill>
+                  <a:srgbClr val="2B2D42"/>
+                </a:solidFill>
+                <a:latin typeface="Meiryo" pitchFamily="34" charset="0"/>
+                <a:ea typeface="Meiryo" pitchFamily="34" charset="-122"/>
+                <a:cs typeface="Meiryo" pitchFamily="34" charset="-120"/>
+              </a:rPr>
+              <a:t> 万円</a:t>
+            </a:r>
+            <a:endParaRPr lang="en-US" sz="3000" dirty="0"/>
+          </a:p>
+        </p:txBody>
+      </p:sp>
+      <p:sp>
+        <p:nvSpPr>
+          <p:cNvPr id="15" name="Text 12"/>
           <p:cNvSpPr txBox="1"/>
           <p:nvPr/>
         </p:nvSpPr>
         <p:spPr>
           <a:xfrm>
-            <a:off x="7955280" y="4983480"/>
-            <a:ext cx="3687775" cy="822960"/>
+            <a:off x="8686800" y="4617720"/>
+            <a:ext cx="2773375" cy="274320"/>
           </a:xfrm>
           <a:prstGeom prst="rect">
             <a:avLst/>
@@ -2993,23 +3588,59 @@
           <a:lstStyle/>
           <a:p>
             <a:pPr indent="0" marL="0">
-              <a:lnSpc>
-                <a:spcPct val="120000"/>
-              </a:lnSpc>
-              <a:buNone/>
-            </a:pPr>
-            <a:r>
-              <a:rPr lang="en-US" sz="1500" b="1" dirty="0">
-                <a:solidFill>
-                  <a:srgbClr val="2B2D42"/>
-                </a:solidFill>
-                <a:latin typeface="Meiryo" pitchFamily="34" charset="0"/>
-                <a:ea typeface="Meiryo" pitchFamily="34" charset="-122"/>
-                <a:cs typeface="Meiryo" pitchFamily="34" charset="-120"/>
-              </a:rPr>
-              <a:t>この伸びを続けるため、営業が接客・提案に使える時間を増やす</a:t>
-            </a:r>
-            <a:endParaRPr lang="en-US" sz="1500" dirty="0"/>
+              <a:buNone/>
+            </a:pPr>
+            <a:r>
+              <a:rPr lang="en-US" sz="1100" dirty="0">
+                <a:solidFill>
+                  <a:srgbClr val="6B6E80"/>
+                </a:solidFill>
+                <a:latin typeface="Meiryo" pitchFamily="34" charset="0"/>
+                <a:ea typeface="Meiryo" pitchFamily="34" charset="-122"/>
+                <a:cs typeface="Meiryo" pitchFamily="34" charset="-120"/>
+              </a:rPr>
+              <a:t>3月 → 8月（1ヶ月あたり）</a:t>
+            </a:r>
+            <a:endParaRPr lang="en-US" sz="1100" dirty="0"/>
+          </a:p>
+        </p:txBody>
+      </p:sp>
+      <p:sp>
+        <p:nvSpPr>
+          <p:cNvPr id="16" name="Text 13"/>
+          <p:cNvSpPr txBox="1"/>
+          <p:nvPr/>
+        </p:nvSpPr>
+        <p:spPr>
+          <a:xfrm>
+            <a:off x="8412480" y="5349240"/>
+            <a:ext cx="3230575" cy="457200"/>
+          </a:xfrm>
+          <a:prstGeom prst="rect">
+            <a:avLst/>
+          </a:prstGeom>
+          <a:noFill/>
+          <a:ln/>
+        </p:spPr>
+        <p:txBody>
+          <a:bodyPr wrap="square" lIns="0" tIns="0" rIns="0" bIns="0" rtlCol="0" anchor="t"/>
+          <a:lstStyle/>
+          <a:p>
+            <a:pPr indent="0" marL="0">
+              <a:buNone/>
+            </a:pPr>
+            <a:r>
+              <a:rPr lang="en-US" sz="1100" dirty="0">
+                <a:solidFill>
+                  <a:srgbClr val="6B6E80"/>
+                </a:solidFill>
+                <a:latin typeface="Meiryo" pitchFamily="34" charset="0"/>
+                <a:ea typeface="Meiryo" pitchFamily="34" charset="-122"/>
+                <a:cs typeface="Meiryo" pitchFamily="34" charset="-120"/>
+              </a:rPr>
+              <a:t>※付帯系＝火災保険・保証会社の紹介手数料＋付帯商品</a:t>
+            </a:r>
+            <a:endParaRPr lang="en-US" sz="1100" dirty="0"/>
           </a:p>
         </p:txBody>
       </p:sp>
@@ -3078,7 +3709,7 @@
                 <a:ea typeface="Meiryo" pitchFamily="34" charset="-122"/>
                 <a:cs typeface="Meiryo" pitchFamily="34" charset="-120"/>
               </a:rPr>
-              <a:t>③ やること</a:t>
+              <a:t>③ 仕組み</a:t>
             </a:r>
             <a:endParaRPr lang="en-US" sz="1200" dirty="0"/>
           </a:p>
@@ -3109,7 +3740,7 @@
               <a:buNone/>
             </a:pPr>
             <a:r>
-              <a:rPr lang="en-US" sz="3000" b="1" dirty="0">
+              <a:rPr lang="en-US" sz="2800" b="1" dirty="0">
                 <a:solidFill>
                   <a:srgbClr val="2B2D42"/>
                 </a:solidFill>
@@ -3117,9 +3748,9 @@
                 <a:ea typeface="Meiryo" pitchFamily="34" charset="-122"/>
                 <a:cs typeface="Meiryo" pitchFamily="34" charset="-120"/>
               </a:rPr>
-              <a:t>営業に集中できる仕組みを3つつくる</a:t>
-            </a:r>
-            <a:endParaRPr lang="en-US" sz="3000" dirty="0"/>
+              <a:t>営業は「現地でしかできないこと」に集中する</a:t>
+            </a:r>
+            <a:endParaRPr lang="en-US" sz="2800" dirty="0"/>
           </a:p>
         </p:txBody>
       </p:sp>
@@ -3131,7 +3762,7 @@
         </p:nvSpPr>
         <p:spPr>
           <a:xfrm>
-            <a:off x="10545775" y="6217920"/>
+            <a:off x="10545775" y="6263640"/>
             <a:ext cx="1097280" cy="228600"/>
           </a:xfrm>
           <a:prstGeom prst="rect">
@@ -3162,9 +3793,1165 @@
           </a:p>
         </p:txBody>
       </p:sp>
+      <p:sp>
+        <p:nvSpPr>
+          <p:cNvPr id="5" name="Shape 3"/>
+          <p:cNvSpPr/>
+          <p:nvPr/>
+        </p:nvSpPr>
+        <p:spPr>
+          <a:xfrm>
+            <a:off x="548640" y="1645920"/>
+            <a:ext cx="4572000" cy="4343400"/>
+          </a:xfrm>
+          <a:prstGeom prst="roundRect">
+            <a:avLst>
+              <a:gd name="adj" fmla="val 2526"/>
+            </a:avLst>
+          </a:prstGeom>
+          <a:solidFill>
+            <a:srgbClr val="FBE9EF"/>
+          </a:solidFill>
+          <a:ln w="12700">
+            <a:solidFill>
+              <a:srgbClr val="FBE9EF"/>
+            </a:solidFill>
+            <a:prstDash val="solid"/>
+          </a:ln>
+        </p:spPr>
+      </p:sp>
+      <p:sp>
+        <p:nvSpPr>
+          <p:cNvPr id="6" name="Shape 4"/>
+          <p:cNvSpPr/>
+          <p:nvPr/>
+        </p:nvSpPr>
+        <p:spPr>
+          <a:xfrm>
+            <a:off x="822960" y="1920240"/>
+            <a:ext cx="2377440" cy="411480"/>
+          </a:xfrm>
+          <a:prstGeom prst="roundRect">
+            <a:avLst>
+              <a:gd name="adj" fmla="val 17778"/>
+            </a:avLst>
+          </a:prstGeom>
+          <a:solidFill>
+            <a:srgbClr val="C8315F"/>
+          </a:solidFill>
+          <a:ln w="12700">
+            <a:solidFill>
+              <a:srgbClr val="C8315F"/>
+            </a:solidFill>
+            <a:prstDash val="solid"/>
+          </a:ln>
+        </p:spPr>
+      </p:sp>
+      <p:sp>
+        <p:nvSpPr>
+          <p:cNvPr id="7" name="Text 5"/>
+          <p:cNvSpPr txBox="1"/>
+          <p:nvPr/>
+        </p:nvSpPr>
+        <p:spPr>
+          <a:xfrm>
+            <a:off x="822960" y="1920240"/>
+            <a:ext cx="2377440" cy="411480"/>
+          </a:xfrm>
+          <a:prstGeom prst="rect">
+            <a:avLst/>
+          </a:prstGeom>
+          <a:noFill/>
+          <a:ln/>
+        </p:spPr>
+        <p:txBody>
+          <a:bodyPr wrap="square" lIns="0" tIns="0" rIns="0" bIns="0" rtlCol="0" anchor="ctr"/>
+          <a:lstStyle/>
+          <a:p>
+            <a:pPr algn="ctr" indent="0" marL="0">
+              <a:buNone/>
+            </a:pPr>
+            <a:r>
+              <a:rPr lang="en-US" sz="1500" b="1" dirty="0">
+                <a:solidFill>
+                  <a:srgbClr val="FFFFFF"/>
+                </a:solidFill>
+                <a:latin typeface="Meiryo" pitchFamily="34" charset="0"/>
+                <a:ea typeface="Meiryo" pitchFamily="34" charset="-122"/>
+                <a:cs typeface="Meiryo" pitchFamily="34" charset="-120"/>
+              </a:rPr>
+              <a:t>営業がやる</a:t>
+            </a:r>
+            <a:endParaRPr lang="en-US" sz="1500" dirty="0"/>
+          </a:p>
+        </p:txBody>
+      </p:sp>
+      <p:sp>
+        <p:nvSpPr>
+          <p:cNvPr id="8" name="Text 6"/>
+          <p:cNvSpPr txBox="1"/>
+          <p:nvPr/>
+        </p:nvSpPr>
+        <p:spPr>
+          <a:xfrm>
+            <a:off x="822960" y="2468880"/>
+            <a:ext cx="4023360" cy="411480"/>
+          </a:xfrm>
+          <a:prstGeom prst="rect">
+            <a:avLst/>
+          </a:prstGeom>
+          <a:noFill/>
+          <a:ln/>
+        </p:spPr>
+        <p:txBody>
+          <a:bodyPr wrap="square" lIns="0" tIns="0" rIns="0" bIns="0" rtlCol="0" anchor="t"/>
+          <a:lstStyle/>
+          <a:p>
+            <a:pPr indent="0" marL="0">
+              <a:buNone/>
+            </a:pPr>
+            <a:r>
+              <a:rPr lang="en-US" sz="2000" b="1" dirty="0">
+                <a:solidFill>
+                  <a:srgbClr val="C8315F"/>
+                </a:solidFill>
+                <a:latin typeface="Meiryo" pitchFamily="34" charset="0"/>
+                <a:ea typeface="Meiryo" pitchFamily="34" charset="-122"/>
+                <a:cs typeface="Meiryo" pitchFamily="34" charset="-120"/>
+              </a:rPr>
+              <a:t>現地でしかできないこと</a:t>
+            </a:r>
+            <a:endParaRPr lang="en-US" sz="2000" dirty="0"/>
+          </a:p>
+        </p:txBody>
+      </p:sp>
+      <p:sp>
+        <p:nvSpPr>
+          <p:cNvPr id="9" name="Text 7"/>
+          <p:cNvSpPr txBox="1"/>
+          <p:nvPr/>
+        </p:nvSpPr>
+        <p:spPr>
+          <a:xfrm>
+            <a:off x="822960" y="2971800"/>
+            <a:ext cx="4023360" cy="1097280"/>
+          </a:xfrm>
+          <a:prstGeom prst="rect">
+            <a:avLst/>
+          </a:prstGeom>
+          <a:noFill/>
+          <a:ln/>
+        </p:spPr>
+        <p:txBody>
+          <a:bodyPr wrap="square" lIns="0" tIns="0" rIns="0" bIns="0" rtlCol="0" anchor="t"/>
+          <a:lstStyle/>
+          <a:p>
+            <a:pPr marL="342900" indent="-342900">
+              <a:spcAft>
+                <a:spcPts val="400"/>
+              </a:spcAft>
+              <a:buSzPct val="100000"/>
+              <a:buChar char="•"/>
+            </a:pPr>
+            <a:r>
+              <a:rPr lang="en-US" sz="1600" dirty="0">
+                <a:solidFill>
+                  <a:srgbClr val="2B2D42"/>
+                </a:solidFill>
+                <a:latin typeface="Meiryo" pitchFamily="34" charset="0"/>
+                <a:ea typeface="Meiryo" pitchFamily="34" charset="-122"/>
+                <a:cs typeface="Meiryo" pitchFamily="34" charset="-120"/>
+              </a:rPr>
+              <a:t>物件の案内・接客</a:t>
+            </a:r>
+            <a:endParaRPr lang="en-US" sz="1600" dirty="0"/>
+          </a:p>
+          <a:p>
+            <a:pPr marL="342900" indent="-342900">
+              <a:spcAft>
+                <a:spcPts val="400"/>
+              </a:spcAft>
+              <a:buSzPct val="100000"/>
+              <a:buChar char="•"/>
+            </a:pPr>
+            <a:r>
+              <a:rPr lang="en-US" sz="1600" dirty="0">
+                <a:solidFill>
+                  <a:srgbClr val="2B2D42"/>
+                </a:solidFill>
+                <a:latin typeface="Meiryo" pitchFamily="34" charset="0"/>
+                <a:ea typeface="Meiryo" pitchFamily="34" charset="-122"/>
+                <a:cs typeface="Meiryo" pitchFamily="34" charset="-120"/>
+              </a:rPr>
+              <a:t>オーナーへの提案</a:t>
+            </a:r>
+            <a:endParaRPr lang="en-US" sz="1600" dirty="0"/>
+          </a:p>
+          <a:p>
+            <a:pPr marL="342900" indent="-342900">
+              <a:spcAft>
+                <a:spcPts val="400"/>
+              </a:spcAft>
+              <a:buSzPct val="100000"/>
+              <a:buChar char="•"/>
+            </a:pPr>
+            <a:r>
+              <a:rPr lang="en-US" sz="1600" dirty="0">
+                <a:solidFill>
+                  <a:srgbClr val="2B2D42"/>
+                </a:solidFill>
+                <a:latin typeface="Meiryo" pitchFamily="34" charset="0"/>
+                <a:ea typeface="Meiryo" pitchFamily="34" charset="-122"/>
+                <a:cs typeface="Meiryo" pitchFamily="34" charset="-120"/>
+              </a:rPr>
+              <a:t>現地の確認・立会い</a:t>
+            </a:r>
+            <a:endParaRPr lang="en-US" sz="1600" dirty="0"/>
+          </a:p>
+        </p:txBody>
+      </p:sp>
+      <p:sp>
+        <p:nvSpPr>
+          <p:cNvPr id="10" name="Shape 8"/>
+          <p:cNvSpPr/>
+          <p:nvPr/>
+        </p:nvSpPr>
+        <p:spPr>
+          <a:xfrm>
+            <a:off x="822960" y="4206240"/>
+            <a:ext cx="4023360" cy="1508760"/>
+          </a:xfrm>
+          <a:prstGeom prst="roundRect">
+            <a:avLst>
+              <a:gd name="adj" fmla="val 6061"/>
+            </a:avLst>
+          </a:prstGeom>
+          <a:solidFill>
+            <a:srgbClr val="F4F5F8"/>
+          </a:solidFill>
+          <a:ln w="15875">
+            <a:solidFill>
+              <a:srgbClr val="6B6E80"/>
+            </a:solidFill>
+            <a:prstDash val="dash"/>
+          </a:ln>
+        </p:spPr>
+      </p:sp>
+      <p:sp>
+        <p:nvSpPr>
+          <p:cNvPr id="11" name="Text 9"/>
+          <p:cNvSpPr txBox="1"/>
+          <p:nvPr/>
+        </p:nvSpPr>
+        <p:spPr>
+          <a:xfrm>
+            <a:off x="822960" y="4206240"/>
+            <a:ext cx="4023360" cy="1508760"/>
+          </a:xfrm>
+          <a:prstGeom prst="rect">
+            <a:avLst/>
+          </a:prstGeom>
+          <a:noFill/>
+          <a:ln/>
+        </p:spPr>
+        <p:txBody>
+          <a:bodyPr wrap="square" lIns="0" tIns="0" rIns="0" bIns="0" rtlCol="0" anchor="ctr"/>
+          <a:lstStyle/>
+          <a:p>
+            <a:pPr algn="ctr" indent="0" marL="0">
+              <a:buNone/>
+            </a:pPr>
+            <a:r>
+              <a:rPr lang="en-US" sz="1300" b="1" dirty="0">
+                <a:solidFill>
+                  <a:srgbClr val="6B6E80"/>
+                </a:solidFill>
+                <a:latin typeface="Meiryo" pitchFamily="34" charset="0"/>
+                <a:ea typeface="Meiryo" pitchFamily="34" charset="-122"/>
+                <a:cs typeface="Meiryo" pitchFamily="34" charset="-120"/>
+              </a:rPr>
+              <a:t>写真</a:t>
+            </a:r>
+            <a:endParaRPr lang="en-US" sz="1300" dirty="0"/>
+          </a:p>
+          <a:p>
+            <a:pPr algn="ctr" indent="0" marL="0">
+              <a:buNone/>
+            </a:pPr>
+            <a:r>
+              <a:rPr lang="en-US" sz="1100" dirty="0">
+                <a:solidFill>
+                  <a:srgbClr val="6B6E80"/>
+                </a:solidFill>
+                <a:latin typeface="Meiryo" pitchFamily="34" charset="0"/>
+                <a:ea typeface="Meiryo" pitchFamily="34" charset="-122"/>
+                <a:cs typeface="Meiryo" pitchFamily="34" charset="-120"/>
+              </a:rPr>
+              <a:t>現地（案内・立会い）</a:t>
+            </a:r>
+            <a:endParaRPr lang="en-US" sz="1300" dirty="0"/>
+          </a:p>
+        </p:txBody>
+      </p:sp>
+      <p:sp>
+        <p:nvSpPr>
+          <p:cNvPr id="12" name="Shape 10"/>
+          <p:cNvSpPr/>
+          <p:nvPr/>
+        </p:nvSpPr>
+        <p:spPr>
+          <a:xfrm>
+            <a:off x="5303520" y="3497580"/>
+            <a:ext cx="914400" cy="640080"/>
+          </a:xfrm>
+          <a:prstGeom prst="rightArrow">
+            <a:avLst/>
+          </a:prstGeom>
+          <a:solidFill>
+            <a:srgbClr val="F2B8CA"/>
+          </a:solidFill>
+          <a:ln w="12700">
+            <a:solidFill>
+              <a:srgbClr val="F2B8CA"/>
+            </a:solidFill>
+            <a:prstDash val="solid"/>
+          </a:ln>
+        </p:spPr>
+      </p:sp>
+      <p:sp>
+        <p:nvSpPr>
+          <p:cNvPr id="13" name="Text 11"/>
+          <p:cNvSpPr txBox="1"/>
+          <p:nvPr/>
+        </p:nvSpPr>
+        <p:spPr>
+          <a:xfrm>
+            <a:off x="5166360" y="4229100"/>
+            <a:ext cx="1188720" cy="274320"/>
+          </a:xfrm>
+          <a:prstGeom prst="rect">
+            <a:avLst/>
+          </a:prstGeom>
+          <a:noFill/>
+          <a:ln/>
+        </p:spPr>
+        <p:txBody>
+          <a:bodyPr wrap="square" lIns="0" tIns="0" rIns="0" bIns="0" rtlCol="0" anchor="t"/>
+          <a:lstStyle/>
+          <a:p>
+            <a:pPr algn="ctr" indent="0" marL="0">
+              <a:buNone/>
+            </a:pPr>
+            <a:r>
+              <a:rPr lang="en-US" sz="1200" b="1" dirty="0">
+                <a:solidFill>
+                  <a:srgbClr val="6B6E80"/>
+                </a:solidFill>
+                <a:latin typeface="Meiryo" pitchFamily="34" charset="0"/>
+                <a:ea typeface="Meiryo" pitchFamily="34" charset="-122"/>
+                <a:cs typeface="Meiryo" pitchFamily="34" charset="-120"/>
+              </a:rPr>
+              <a:t>外に出す</a:t>
+            </a:r>
+            <a:endParaRPr lang="en-US" sz="1200" dirty="0"/>
+          </a:p>
+        </p:txBody>
+      </p:sp>
+      <p:sp>
+        <p:nvSpPr>
+          <p:cNvPr id="14" name="Shape 12"/>
+          <p:cNvSpPr/>
+          <p:nvPr/>
+        </p:nvSpPr>
+        <p:spPr>
+          <a:xfrm>
+            <a:off x="6400800" y="1645920"/>
+            <a:ext cx="5242255" cy="1783080"/>
+          </a:xfrm>
+          <a:prstGeom prst="roundRect">
+            <a:avLst>
+              <a:gd name="adj" fmla="val 6154"/>
+            </a:avLst>
+          </a:prstGeom>
+          <a:solidFill>
+            <a:srgbClr val="F4F5F8"/>
+          </a:solidFill>
+          <a:ln w="12700">
+            <a:solidFill>
+              <a:srgbClr val="F4F5F8"/>
+            </a:solidFill>
+            <a:prstDash val="solid"/>
+          </a:ln>
+        </p:spPr>
+      </p:sp>
+      <p:sp>
+        <p:nvSpPr>
+          <p:cNvPr id="15" name="Text 13"/>
+          <p:cNvSpPr txBox="1"/>
+          <p:nvPr/>
+        </p:nvSpPr>
+        <p:spPr>
+          <a:xfrm>
+            <a:off x="6675120" y="1828800"/>
+            <a:ext cx="3291840" cy="274320"/>
+          </a:xfrm>
+          <a:prstGeom prst="rect">
+            <a:avLst/>
+          </a:prstGeom>
+          <a:noFill/>
+          <a:ln/>
+        </p:spPr>
+        <p:txBody>
+          <a:bodyPr wrap="square" lIns="0" tIns="0" rIns="0" bIns="0" rtlCol="0" anchor="t"/>
+          <a:lstStyle/>
+          <a:p>
+            <a:pPr indent="0" marL="0">
+              <a:buNone/>
+            </a:pPr>
+            <a:r>
+              <a:rPr lang="en-US" sz="1200" b="1" dirty="0">
+                <a:solidFill>
+                  <a:srgbClr val="6B6E80"/>
+                </a:solidFill>
+                <a:latin typeface="Meiryo" pitchFamily="34" charset="0"/>
+                <a:ea typeface="Meiryo" pitchFamily="34" charset="-122"/>
+                <a:cs typeface="Meiryo" pitchFamily="34" charset="-120"/>
+              </a:rPr>
+              <a:t>営業でなくてもできる</a:t>
+            </a:r>
+            <a:endParaRPr lang="en-US" sz="1200" dirty="0"/>
+          </a:p>
+        </p:txBody>
+      </p:sp>
+      <p:sp>
+        <p:nvSpPr>
+          <p:cNvPr id="16" name="Text 14"/>
+          <p:cNvSpPr txBox="1"/>
+          <p:nvPr/>
+        </p:nvSpPr>
+        <p:spPr>
+          <a:xfrm>
+            <a:off x="6675120" y="2148840"/>
+            <a:ext cx="2590495" cy="822960"/>
+          </a:xfrm>
+          <a:prstGeom prst="rect">
+            <a:avLst/>
+          </a:prstGeom>
+          <a:noFill/>
+          <a:ln/>
+        </p:spPr>
+        <p:txBody>
+          <a:bodyPr wrap="square" lIns="0" tIns="0" rIns="0" bIns="0" rtlCol="0" anchor="t"/>
+          <a:lstStyle/>
+          <a:p>
+            <a:pPr indent="0" marL="0">
+              <a:buNone/>
+            </a:pPr>
+            <a:r>
+              <a:rPr lang="en-US" sz="1800" b="1" dirty="0">
+                <a:solidFill>
+                  <a:srgbClr val="2B2D42"/>
+                </a:solidFill>
+                <a:latin typeface="Meiryo" pitchFamily="34" charset="0"/>
+                <a:ea typeface="Meiryo" pitchFamily="34" charset="-122"/>
+                <a:cs typeface="Meiryo" pitchFamily="34" charset="-120"/>
+              </a:rPr>
+              <a:t>物件入力・写真掲載</a:t>
+            </a:r>
+            <a:pPr indent="0" marL="0">
+              <a:buNone/>
+            </a:pPr>
+            <a:r>
+              <a:rPr lang="en-US" sz="1800" b="1" dirty="0">
+                <a:solidFill>
+                  <a:srgbClr val="C8315F"/>
+                </a:solidFill>
+                <a:latin typeface="Meiryo" pitchFamily="34" charset="0"/>
+                <a:ea typeface="Meiryo" pitchFamily="34" charset="-122"/>
+                <a:cs typeface="Meiryo" pitchFamily="34" charset="-120"/>
+              </a:rPr>
+              <a:t>  →  </a:t>
+            </a:r>
+            <a:pPr indent="0" marL="0">
+              <a:buNone/>
+            </a:pPr>
+            <a:r>
+              <a:rPr lang="en-US" sz="1800" b="1" dirty="0">
+                <a:solidFill>
+                  <a:srgbClr val="C8315F"/>
+                </a:solidFill>
+                <a:latin typeface="Meiryo" pitchFamily="34" charset="0"/>
+                <a:ea typeface="Meiryo" pitchFamily="34" charset="-122"/>
+                <a:cs typeface="Meiryo" pitchFamily="34" charset="-120"/>
+              </a:rPr>
+              <a:t>パートさん（週2日）</a:t>
+            </a:r>
+            <a:endParaRPr lang="en-US" sz="1800" dirty="0"/>
+          </a:p>
+        </p:txBody>
+      </p:sp>
+      <p:sp>
+        <p:nvSpPr>
+          <p:cNvPr id="17" name="Shape 15"/>
+          <p:cNvSpPr/>
+          <p:nvPr/>
+        </p:nvSpPr>
+        <p:spPr>
+          <a:xfrm>
+            <a:off x="9311335" y="1828800"/>
+            <a:ext cx="960120" cy="1097280"/>
+          </a:xfrm>
+          <a:prstGeom prst="roundRect">
+            <a:avLst>
+              <a:gd name="adj" fmla="val 9524"/>
+            </a:avLst>
+          </a:prstGeom>
+          <a:solidFill>
+            <a:srgbClr val="F4F5F8"/>
+          </a:solidFill>
+          <a:ln w="15875">
+            <a:solidFill>
+              <a:srgbClr val="6B6E80"/>
+            </a:solidFill>
+            <a:prstDash val="dash"/>
+          </a:ln>
+        </p:spPr>
+      </p:sp>
+      <p:sp>
+        <p:nvSpPr>
+          <p:cNvPr id="18" name="Text 16"/>
+          <p:cNvSpPr txBox="1"/>
+          <p:nvPr/>
+        </p:nvSpPr>
+        <p:spPr>
+          <a:xfrm>
+            <a:off x="9311335" y="1828800"/>
+            <a:ext cx="960120" cy="1097280"/>
+          </a:xfrm>
+          <a:prstGeom prst="rect">
+            <a:avLst/>
+          </a:prstGeom>
+          <a:noFill/>
+          <a:ln/>
+        </p:spPr>
+        <p:txBody>
+          <a:bodyPr wrap="square" lIns="0" tIns="0" rIns="0" bIns="0" rtlCol="0" anchor="ctr"/>
+          <a:lstStyle/>
+          <a:p>
+            <a:pPr algn="ctr" indent="0" marL="0">
+              <a:buNone/>
+            </a:pPr>
+            <a:r>
+              <a:rPr lang="en-US" sz="1300" b="1" dirty="0">
+                <a:solidFill>
+                  <a:srgbClr val="6B6E80"/>
+                </a:solidFill>
+                <a:latin typeface="Meiryo" pitchFamily="34" charset="0"/>
+                <a:ea typeface="Meiryo" pitchFamily="34" charset="-122"/>
+                <a:cs typeface="Meiryo" pitchFamily="34" charset="-120"/>
+              </a:rPr>
+              <a:t>写真</a:t>
+            </a:r>
+            <a:endParaRPr lang="en-US" sz="1300" dirty="0"/>
+          </a:p>
+          <a:p>
+            <a:pPr algn="ctr" indent="0" marL="0">
+              <a:buNone/>
+            </a:pPr>
+            <a:r>
+              <a:rPr lang="en-US" sz="1100" dirty="0">
+                <a:solidFill>
+                  <a:srgbClr val="6B6E80"/>
+                </a:solidFill>
+                <a:latin typeface="Meiryo" pitchFamily="34" charset="0"/>
+                <a:ea typeface="Meiryo" pitchFamily="34" charset="-122"/>
+                <a:cs typeface="Meiryo" pitchFamily="34" charset="-120"/>
+              </a:rPr>
+              <a:t>臼井さん</a:t>
+            </a:r>
+            <a:endParaRPr lang="en-US" sz="1300" dirty="0"/>
+          </a:p>
+        </p:txBody>
+      </p:sp>
+      <p:sp>
+        <p:nvSpPr>
+          <p:cNvPr id="19" name="Text 17"/>
+          <p:cNvSpPr txBox="1"/>
+          <p:nvPr/>
+        </p:nvSpPr>
+        <p:spPr>
+          <a:xfrm>
+            <a:off x="9219895" y="2999232"/>
+            <a:ext cx="1143000" cy="274320"/>
+          </a:xfrm>
+          <a:prstGeom prst="rect">
+            <a:avLst/>
+          </a:prstGeom>
+          <a:noFill/>
+          <a:ln/>
+        </p:spPr>
+        <p:txBody>
+          <a:bodyPr wrap="square" lIns="0" tIns="0" rIns="0" bIns="0" rtlCol="0" anchor="t"/>
+          <a:lstStyle/>
+          <a:p>
+            <a:pPr algn="ctr" indent="0" marL="0">
+              <a:buNone/>
+            </a:pPr>
+            <a:r>
+              <a:rPr lang="en-US" sz="1100" b="1" dirty="0">
+                <a:solidFill>
+                  <a:srgbClr val="2B2D42"/>
+                </a:solidFill>
+                <a:latin typeface="Meiryo" pitchFamily="34" charset="0"/>
+                <a:ea typeface="Meiryo" pitchFamily="34" charset="-122"/>
+                <a:cs typeface="Meiryo" pitchFamily="34" charset="-120"/>
+              </a:rPr>
+              <a:t>臼井さん</a:t>
+            </a:r>
+            <a:endParaRPr lang="en-US" sz="1100" dirty="0"/>
+          </a:p>
+        </p:txBody>
+      </p:sp>
+      <p:sp>
+        <p:nvSpPr>
+          <p:cNvPr id="20" name="Shape 18"/>
+          <p:cNvSpPr/>
+          <p:nvPr/>
+        </p:nvSpPr>
+        <p:spPr>
+          <a:xfrm>
+            <a:off x="10454335" y="1828800"/>
+            <a:ext cx="960120" cy="1097280"/>
+          </a:xfrm>
+          <a:prstGeom prst="roundRect">
+            <a:avLst>
+              <a:gd name="adj" fmla="val 9524"/>
+            </a:avLst>
+          </a:prstGeom>
+          <a:solidFill>
+            <a:srgbClr val="F4F5F8"/>
+          </a:solidFill>
+          <a:ln w="15875">
+            <a:solidFill>
+              <a:srgbClr val="6B6E80"/>
+            </a:solidFill>
+            <a:prstDash val="dash"/>
+          </a:ln>
+        </p:spPr>
+      </p:sp>
+      <p:sp>
+        <p:nvSpPr>
+          <p:cNvPr id="21" name="Text 19"/>
+          <p:cNvSpPr txBox="1"/>
+          <p:nvPr/>
+        </p:nvSpPr>
+        <p:spPr>
+          <a:xfrm>
+            <a:off x="10454335" y="1828800"/>
+            <a:ext cx="960120" cy="1097280"/>
+          </a:xfrm>
+          <a:prstGeom prst="rect">
+            <a:avLst/>
+          </a:prstGeom>
+          <a:noFill/>
+          <a:ln/>
+        </p:spPr>
+        <p:txBody>
+          <a:bodyPr wrap="square" lIns="0" tIns="0" rIns="0" bIns="0" rtlCol="0" anchor="ctr"/>
+          <a:lstStyle/>
+          <a:p>
+            <a:pPr algn="ctr" indent="0" marL="0">
+              <a:buNone/>
+            </a:pPr>
+            <a:r>
+              <a:rPr lang="en-US" sz="1300" b="1" dirty="0">
+                <a:solidFill>
+                  <a:srgbClr val="6B6E80"/>
+                </a:solidFill>
+                <a:latin typeface="Meiryo" pitchFamily="34" charset="0"/>
+                <a:ea typeface="Meiryo" pitchFamily="34" charset="-122"/>
+                <a:cs typeface="Meiryo" pitchFamily="34" charset="-120"/>
+              </a:rPr>
+              <a:t>写真</a:t>
+            </a:r>
+            <a:endParaRPr lang="en-US" sz="1300" dirty="0"/>
+          </a:p>
+          <a:p>
+            <a:pPr algn="ctr" indent="0" marL="0">
+              <a:buNone/>
+            </a:pPr>
+            <a:r>
+              <a:rPr lang="en-US" sz="1100" dirty="0">
+                <a:solidFill>
+                  <a:srgbClr val="6B6E80"/>
+                </a:solidFill>
+                <a:latin typeface="Meiryo" pitchFamily="34" charset="0"/>
+                <a:ea typeface="Meiryo" pitchFamily="34" charset="-122"/>
+                <a:cs typeface="Meiryo" pitchFamily="34" charset="-120"/>
+              </a:rPr>
+              <a:t>川上さん</a:t>
+            </a:r>
+            <a:endParaRPr lang="en-US" sz="1300" dirty="0"/>
+          </a:p>
+        </p:txBody>
+      </p:sp>
+      <p:sp>
+        <p:nvSpPr>
+          <p:cNvPr id="22" name="Text 20"/>
+          <p:cNvSpPr txBox="1"/>
+          <p:nvPr/>
+        </p:nvSpPr>
+        <p:spPr>
+          <a:xfrm>
+            <a:off x="10362895" y="2999232"/>
+            <a:ext cx="1143000" cy="274320"/>
+          </a:xfrm>
+          <a:prstGeom prst="rect">
+            <a:avLst/>
+          </a:prstGeom>
+          <a:noFill/>
+          <a:ln/>
+        </p:spPr>
+        <p:txBody>
+          <a:bodyPr wrap="square" lIns="0" tIns="0" rIns="0" bIns="0" rtlCol="0" anchor="t"/>
+          <a:lstStyle/>
+          <a:p>
+            <a:pPr algn="ctr" indent="0" marL="0">
+              <a:buNone/>
+            </a:pPr>
+            <a:r>
+              <a:rPr lang="en-US" sz="1100" b="1" dirty="0">
+                <a:solidFill>
+                  <a:srgbClr val="2B2D42"/>
+                </a:solidFill>
+                <a:latin typeface="Meiryo" pitchFamily="34" charset="0"/>
+                <a:ea typeface="Meiryo" pitchFamily="34" charset="-122"/>
+                <a:cs typeface="Meiryo" pitchFamily="34" charset="-120"/>
+              </a:rPr>
+              <a:t>川上さん</a:t>
+            </a:r>
+            <a:endParaRPr lang="en-US" sz="1100" dirty="0"/>
+          </a:p>
+        </p:txBody>
+      </p:sp>
+      <p:sp>
+        <p:nvSpPr>
+          <p:cNvPr id="23" name="Shape 21"/>
+          <p:cNvSpPr/>
+          <p:nvPr/>
+        </p:nvSpPr>
+        <p:spPr>
+          <a:xfrm>
+            <a:off x="6400800" y="3749040"/>
+            <a:ext cx="5242255" cy="1097280"/>
+          </a:xfrm>
+          <a:prstGeom prst="roundRect">
+            <a:avLst>
+              <a:gd name="adj" fmla="val 10000"/>
+            </a:avLst>
+          </a:prstGeom>
+          <a:solidFill>
+            <a:srgbClr val="F4F5F8"/>
+          </a:solidFill>
+          <a:ln w="12700">
+            <a:solidFill>
+              <a:srgbClr val="F4F5F8"/>
+            </a:solidFill>
+            <a:prstDash val="solid"/>
+          </a:ln>
+        </p:spPr>
+      </p:sp>
+      <p:sp>
+        <p:nvSpPr>
+          <p:cNvPr id="24" name="Text 22"/>
+          <p:cNvSpPr txBox="1"/>
+          <p:nvPr/>
+        </p:nvSpPr>
+        <p:spPr>
+          <a:xfrm>
+            <a:off x="6675120" y="3931920"/>
+            <a:ext cx="3291840" cy="274320"/>
+          </a:xfrm>
+          <a:prstGeom prst="rect">
+            <a:avLst/>
+          </a:prstGeom>
+          <a:noFill/>
+          <a:ln/>
+        </p:spPr>
+        <p:txBody>
+          <a:bodyPr wrap="square" lIns="0" tIns="0" rIns="0" bIns="0" rtlCol="0" anchor="t"/>
+          <a:lstStyle/>
+          <a:p>
+            <a:pPr indent="0" marL="0">
+              <a:buNone/>
+            </a:pPr>
+            <a:r>
+              <a:rPr lang="en-US" sz="1200" b="1" dirty="0">
+                <a:solidFill>
+                  <a:srgbClr val="6B6E80"/>
+                </a:solidFill>
+                <a:latin typeface="Meiryo" pitchFamily="34" charset="0"/>
+                <a:ea typeface="Meiryo" pitchFamily="34" charset="-122"/>
+                <a:cs typeface="Meiryo" pitchFamily="34" charset="-120"/>
+              </a:rPr>
+              <a:t>現地でなくてもできる</a:t>
+            </a:r>
+            <a:endParaRPr lang="en-US" sz="1200" dirty="0"/>
+          </a:p>
+        </p:txBody>
+      </p:sp>
+      <p:sp>
+        <p:nvSpPr>
+          <p:cNvPr id="25" name="Text 23"/>
+          <p:cNvSpPr txBox="1"/>
+          <p:nvPr/>
+        </p:nvSpPr>
+        <p:spPr>
+          <a:xfrm>
+            <a:off x="6675120" y="4251960"/>
+            <a:ext cx="4693615" cy="411480"/>
+          </a:xfrm>
+          <a:prstGeom prst="rect">
+            <a:avLst/>
+          </a:prstGeom>
+          <a:noFill/>
+          <a:ln/>
+        </p:spPr>
+        <p:txBody>
+          <a:bodyPr wrap="square" lIns="0" tIns="0" rIns="0" bIns="0" rtlCol="0" anchor="t"/>
+          <a:lstStyle/>
+          <a:p>
+            <a:pPr indent="0" marL="0">
+              <a:buNone/>
+            </a:pPr>
+            <a:r>
+              <a:rPr lang="en-US" sz="1800" b="1" dirty="0">
+                <a:solidFill>
+                  <a:srgbClr val="2B2D42"/>
+                </a:solidFill>
+                <a:latin typeface="Meiryo" pitchFamily="34" charset="0"/>
+                <a:ea typeface="Meiryo" pitchFamily="34" charset="-122"/>
+                <a:cs typeface="Meiryo" pitchFamily="34" charset="-120"/>
+              </a:rPr>
+              <a:t>会計</a:t>
+            </a:r>
+            <a:pPr indent="0" marL="0">
+              <a:buNone/>
+            </a:pPr>
+            <a:r>
+              <a:rPr lang="en-US" sz="1800" b="1" dirty="0">
+                <a:solidFill>
+                  <a:srgbClr val="C8315F"/>
+                </a:solidFill>
+                <a:latin typeface="Meiryo" pitchFamily="34" charset="0"/>
+                <a:ea typeface="Meiryo" pitchFamily="34" charset="-122"/>
+                <a:cs typeface="Meiryo" pitchFamily="34" charset="-120"/>
+              </a:rPr>
+              <a:t>  →  </a:t>
+            </a:r>
+            <a:pPr indent="0" marL="0">
+              <a:buNone/>
+            </a:pPr>
+            <a:r>
+              <a:rPr lang="en-US" sz="1800" b="1" dirty="0">
+                <a:solidFill>
+                  <a:srgbClr val="C8315F"/>
+                </a:solidFill>
+                <a:latin typeface="Meiryo" pitchFamily="34" charset="0"/>
+                <a:ea typeface="Meiryo" pitchFamily="34" charset="-122"/>
+                <a:cs typeface="Meiryo" pitchFamily="34" charset="-120"/>
+              </a:rPr>
+              <a:t>DFE</a:t>
+            </a:r>
+            <a:endParaRPr lang="en-US" sz="1800" dirty="0"/>
+          </a:p>
+        </p:txBody>
+      </p:sp>
+      <p:sp>
+        <p:nvSpPr>
+          <p:cNvPr id="26" name="Shape 24"/>
+          <p:cNvSpPr/>
+          <p:nvPr/>
+        </p:nvSpPr>
+        <p:spPr>
+          <a:xfrm>
+            <a:off x="6400800" y="5166360"/>
+            <a:ext cx="5242255" cy="1097280"/>
+          </a:xfrm>
+          <a:prstGeom prst="roundRect">
+            <a:avLst>
+              <a:gd name="adj" fmla="val 10000"/>
+            </a:avLst>
+          </a:prstGeom>
+          <a:solidFill>
+            <a:srgbClr val="F4F5F8"/>
+          </a:solidFill>
+          <a:ln w="12700">
+            <a:solidFill>
+              <a:srgbClr val="F4F5F8"/>
+            </a:solidFill>
+            <a:prstDash val="solid"/>
+          </a:ln>
+        </p:spPr>
+      </p:sp>
+      <p:sp>
+        <p:nvSpPr>
+          <p:cNvPr id="27" name="Text 25"/>
+          <p:cNvSpPr txBox="1"/>
+          <p:nvPr/>
+        </p:nvSpPr>
+        <p:spPr>
+          <a:xfrm>
+            <a:off x="6675120" y="5349240"/>
+            <a:ext cx="3291840" cy="274320"/>
+          </a:xfrm>
+          <a:prstGeom prst="rect">
+            <a:avLst/>
+          </a:prstGeom>
+          <a:noFill/>
+          <a:ln/>
+        </p:spPr>
+        <p:txBody>
+          <a:bodyPr wrap="square" lIns="0" tIns="0" rIns="0" bIns="0" rtlCol="0" anchor="t"/>
+          <a:lstStyle/>
+          <a:p>
+            <a:pPr indent="0" marL="0">
+              <a:buNone/>
+            </a:pPr>
+            <a:r>
+              <a:rPr lang="en-US" sz="1200" b="1" dirty="0">
+                <a:solidFill>
+                  <a:srgbClr val="6B6E80"/>
+                </a:solidFill>
+                <a:latin typeface="Meiryo" pitchFamily="34" charset="0"/>
+                <a:ea typeface="Meiryo" pitchFamily="34" charset="-122"/>
+                <a:cs typeface="Meiryo" pitchFamily="34" charset="-120"/>
+              </a:rPr>
+              <a:t>現地に行く前の一次対応</a:t>
+            </a:r>
+            <a:endParaRPr lang="en-US" sz="1200" dirty="0"/>
+          </a:p>
+        </p:txBody>
+      </p:sp>
+      <p:sp>
+        <p:nvSpPr>
+          <p:cNvPr id="28" name="Text 26"/>
+          <p:cNvSpPr txBox="1"/>
+          <p:nvPr/>
+        </p:nvSpPr>
+        <p:spPr>
+          <a:xfrm>
+            <a:off x="6675120" y="5669280"/>
+            <a:ext cx="4693615" cy="411480"/>
+          </a:xfrm>
+          <a:prstGeom prst="rect">
+            <a:avLst/>
+          </a:prstGeom>
+          <a:noFill/>
+          <a:ln/>
+        </p:spPr>
+        <p:txBody>
+          <a:bodyPr wrap="square" lIns="0" tIns="0" rIns="0" bIns="0" rtlCol="0" anchor="t"/>
+          <a:lstStyle/>
+          <a:p>
+            <a:pPr indent="0" marL="0">
+              <a:buNone/>
+            </a:pPr>
+            <a:r>
+              <a:rPr lang="en-US" sz="1800" b="1" dirty="0">
+                <a:solidFill>
+                  <a:srgbClr val="2B2D42"/>
+                </a:solidFill>
+                <a:latin typeface="Meiryo" pitchFamily="34" charset="0"/>
+                <a:ea typeface="Meiryo" pitchFamily="34" charset="-122"/>
+                <a:cs typeface="Meiryo" pitchFamily="34" charset="-120"/>
+              </a:rPr>
+              <a:t>クレーム対応</a:t>
+            </a:r>
+            <a:pPr indent="0" marL="0">
+              <a:buNone/>
+            </a:pPr>
+            <a:r>
+              <a:rPr lang="en-US" sz="1800" b="1" dirty="0">
+                <a:solidFill>
+                  <a:srgbClr val="C8315F"/>
+                </a:solidFill>
+                <a:latin typeface="Meiryo" pitchFamily="34" charset="0"/>
+                <a:ea typeface="Meiryo" pitchFamily="34" charset="-122"/>
+                <a:cs typeface="Meiryo" pitchFamily="34" charset="-120"/>
+              </a:rPr>
+              <a:t>  →  </a:t>
+            </a:r>
+            <a:pPr indent="0" marL="0">
+              <a:buNone/>
+            </a:pPr>
+            <a:r>
+              <a:rPr lang="en-US" sz="1800" b="1" dirty="0">
+                <a:solidFill>
+                  <a:srgbClr val="C8315F"/>
+                </a:solidFill>
+                <a:latin typeface="Meiryo" pitchFamily="34" charset="0"/>
+                <a:ea typeface="Meiryo" pitchFamily="34" charset="-122"/>
+                <a:cs typeface="Meiryo" pitchFamily="34" charset="-120"/>
+              </a:rPr>
+              <a:t>駆けつけサービス</a:t>
+            </a:r>
+            <a:endParaRPr lang="en-US" sz="1800" dirty="0"/>
+          </a:p>
+        </p:txBody>
+      </p:sp>
+    </p:spTree>
+  </p:cSld>
+  <p:clrMapOvr>
+    <a:masterClrMapping/>
+  </p:clrMapOvr>
+</p:sld>
+</file>
+
+<file path=ppt/slides/slide5.xml><?xml version="1.0" encoding="utf-8"?>
+<p:sld xmlns:a="http://schemas.openxmlformats.org/drawingml/2006/main" xmlns:r="http://schemas.openxmlformats.org/officeDocument/2006/relationships" xmlns:p="http://schemas.openxmlformats.org/presentationml/2006/main">
+  <p:cSld name="Slide 5">
+    <p:bg>
+      <p:bgPr>
+        <a:solidFill>
+          <a:srgbClr val="FFFFFF"/>
+        </a:solidFill>
+      </p:bgPr>
+    </p:bg>
+    <p:spTree>
+      <p:nvGrpSpPr>
+        <p:cNvPr id="1" name=""/>
+        <p:cNvGrpSpPr/>
+        <p:nvPr/>
+      </p:nvGrpSpPr>
+      <p:grpSpPr>
+        <a:xfrm>
+          <a:off x="0" y="0"/>
+          <a:ext cx="0" cy="0"/>
+          <a:chOff x="0" y="0"/>
+          <a:chExt cx="0" cy="0"/>
+        </a:xfrm>
+      </p:grpSpPr>
+      <p:sp>
+        <p:nvSpPr>
+          <p:cNvPr id="2" name="Text 0"/>
+          <p:cNvSpPr txBox="1"/>
+          <p:nvPr/>
+        </p:nvSpPr>
+        <p:spPr>
+          <a:xfrm>
+            <a:off x="548640" y="457200"/>
+            <a:ext cx="5486400" cy="274320"/>
+          </a:xfrm>
+          <a:prstGeom prst="rect">
+            <a:avLst/>
+          </a:prstGeom>
+          <a:noFill/>
+          <a:ln/>
+        </p:spPr>
+        <p:txBody>
+          <a:bodyPr wrap="square" lIns="0" tIns="0" rIns="0" bIns="0" rtlCol="0" anchor="t"/>
+          <a:lstStyle/>
+          <a:p>
+            <a:pPr indent="0" marL="0">
+              <a:buNone/>
+            </a:pPr>
+            <a:r>
+              <a:rPr lang="en-US" sz="1200" b="1" dirty="0">
+                <a:solidFill>
+                  <a:srgbClr val="C8315F"/>
+                </a:solidFill>
+                <a:latin typeface="Meiryo" pitchFamily="34" charset="0"/>
+                <a:ea typeface="Meiryo" pitchFamily="34" charset="-122"/>
+                <a:cs typeface="Meiryo" pitchFamily="34" charset="-120"/>
+              </a:rPr>
+              <a:t>④ やること</a:t>
+            </a:r>
+            <a:endParaRPr lang="en-US" sz="1200" dirty="0"/>
+          </a:p>
+        </p:txBody>
+      </p:sp>
+      <p:sp>
+        <p:nvSpPr>
+          <p:cNvPr id="3" name="Text 1"/>
+          <p:cNvSpPr txBox="1"/>
+          <p:nvPr/>
+        </p:nvSpPr>
+        <p:spPr>
+          <a:xfrm>
+            <a:off x="548640" y="777240"/>
+            <a:ext cx="11094415" cy="594360"/>
+          </a:xfrm>
+          <a:prstGeom prst="rect">
+            <a:avLst/>
+          </a:prstGeom>
+          <a:noFill/>
+          <a:ln/>
+        </p:spPr>
+        <p:txBody>
+          <a:bodyPr wrap="square" lIns="0" tIns="0" rIns="0" bIns="0" rtlCol="0" anchor="ctr"/>
+          <a:lstStyle/>
+          <a:p>
+            <a:pPr indent="0" marL="0">
+              <a:buNone/>
+            </a:pPr>
+            <a:r>
+              <a:rPr lang="en-US" sz="2800" b="1" dirty="0">
+                <a:solidFill>
+                  <a:srgbClr val="2B2D42"/>
+                </a:solidFill>
+                <a:latin typeface="Meiryo" pitchFamily="34" charset="0"/>
+                <a:ea typeface="Meiryo" pitchFamily="34" charset="-122"/>
+                <a:cs typeface="Meiryo" pitchFamily="34" charset="-120"/>
+              </a:rPr>
+              <a:t>誰が・いつまでに・何をやるか（10〜12月）</a:t>
+            </a:r>
+            <a:endParaRPr lang="en-US" sz="2800" dirty="0"/>
+          </a:p>
+        </p:txBody>
+      </p:sp>
+      <p:sp>
+        <p:nvSpPr>
+          <p:cNvPr id="4" name="Text 2"/>
+          <p:cNvSpPr txBox="1"/>
+          <p:nvPr/>
+        </p:nvSpPr>
+        <p:spPr>
+          <a:xfrm>
+            <a:off x="10545775" y="6263640"/>
+            <a:ext cx="1097280" cy="228600"/>
+          </a:xfrm>
+          <a:prstGeom prst="rect">
+            <a:avLst/>
+          </a:prstGeom>
+          <a:noFill/>
+          <a:ln/>
+        </p:spPr>
+        <p:txBody>
+          <a:bodyPr wrap="square" lIns="0" tIns="0" rIns="0" bIns="0" rtlCol="0" anchor="t"/>
+          <a:lstStyle/>
+          <a:p>
+            <a:pPr algn="r" indent="0" marL="0">
+              <a:buNone/>
+            </a:pPr>
+            <a:r>
+              <a:rPr lang="en-US" sz="1100" dirty="0">
+                <a:solidFill>
+                  <a:srgbClr val="6B6E80"/>
+                </a:solidFill>
+                <a:latin typeface="Meiryo" pitchFamily="34" charset="0"/>
+                <a:ea typeface="Meiryo" pitchFamily="34" charset="-122"/>
+                <a:cs typeface="Meiryo" pitchFamily="34" charset="-120"/>
+              </a:rPr>
+              <a:t>5 / 5</a:t>
+            </a:r>
+            <a:endParaRPr lang="en-US" sz="1100" dirty="0"/>
+          </a:p>
+        </p:txBody>
+      </p:sp>
       <p:graphicFrame>
         <p:nvGraphicFramePr>
-          <p:cNvPr id="5" name="Table 0"/>
+          <p:cNvPr id="6" name="Table 0"/>
           <p:cNvGraphicFramePr>
             <a:graphicFrameLocks noGrp="1"/>
           </p:cNvGraphicFramePr>
@@ -3177,7 +4964,7 @@
           </p:nvPr>
         </p:nvGraphicFramePr>
         <p:xfrm>
-          <a:off x="548640" y="1737360"/>
+          <a:off x="548640" y="1645920"/>
           <a:ext cx="11094415" cy="914400"/>
         </p:xfrm>
         <a:graphic>
@@ -3186,9 +4973,9 @@
               <a:tblPr/>
               <a:tblGrid>
                 <a:gridCol w="731520"/>
-                <a:gridCol w="4114800"/>
-                <a:gridCol w="1463040"/>
-                <a:gridCol w="2011680"/>
+                <a:gridCol w="3931920"/>
+                <a:gridCol w="1828800"/>
+                <a:gridCol w="1828800"/>
                 <a:gridCol w="2773375"/>
               </a:tblGrid>
               <a:tr h="457200">
@@ -3533,7 +5320,7 @@
                   </a:tcPr>
                 </a:tc>
               </a:tr>
-              <a:tr h="960120">
+              <a:tr h="822960">
                 <a:tc>
                   <a:txBody>
                     <a:bodyPr/>
@@ -3608,7 +5395,7 @@
                         <a:buNone/>
                       </a:pPr>
                       <a:r>
-                        <a:rPr lang="en-US" sz="1700" b="1" dirty="0">
+                        <a:rPr lang="en-US" sz="1600" b="1" dirty="0">
                           <a:solidFill>
                             <a:srgbClr val="2B2D42"/>
                           </a:solidFill>
@@ -3616,7 +5403,72 @@
                           <a:ea typeface="Meiryo" pitchFamily="34" charset="-122"/>
                           <a:cs typeface="Meiryo" pitchFamily="34" charset="-120"/>
                         </a:rPr>
-                        <a:t>会計をDFEに外注</a:t>
+                        <a:t>物件入力・写真掲載をパートさんへ</a:t>
+                      </a:r>
+                      <a:endParaRPr lang="en-US" sz="1600" dirty="0">
+                        <a:latin typeface="Meiryo" charset="0"/>
+                        <a:ea typeface="Meiryo" charset="0"/>
+                        <a:cs typeface="Meiryo" charset="0"/>
+                      </a:endParaRPr>
+                    </a:p>
+                  </a:txBody>
+                  <a:tcPr marL="137160" marR="137160" marT="73152" marB="73152" anchor="ctr">
+                    <a:lnL w="12700" cap="flat" cmpd="sng" algn="ctr">
+                      <a:solidFill>
+                        <a:srgbClr val="E3E4EA"/>
+                      </a:solidFill>
+                      <a:prstDash val="solid"/>
+                      <a:round/>
+                      <a:headEnd type="none" w="med" len="med"/>
+                      <a:tailEnd type="none" w="med" len="med"/>
+                    </a:lnL>
+                    <a:lnR w="12700" cap="flat" cmpd="sng" algn="ctr">
+                      <a:solidFill>
+                        <a:srgbClr val="E3E4EA"/>
+                      </a:solidFill>
+                      <a:prstDash val="solid"/>
+                      <a:round/>
+                      <a:headEnd type="none" w="med" len="med"/>
+                      <a:tailEnd type="none" w="med" len="med"/>
+                    </a:lnR>
+                    <a:lnT w="12700" cap="flat" cmpd="sng" algn="ctr">
+                      <a:solidFill>
+                        <a:srgbClr val="E3E4EA"/>
+                      </a:solidFill>
+                      <a:prstDash val="solid"/>
+                      <a:round/>
+                      <a:headEnd type="none" w="med" len="med"/>
+                      <a:tailEnd type="none" w="med" len="med"/>
+                    </a:lnT>
+                    <a:lnB w="12700" cap="flat" cmpd="sng" algn="ctr">
+                      <a:solidFill>
+                        <a:srgbClr val="E3E4EA"/>
+                      </a:solidFill>
+                      <a:prstDash val="solid"/>
+                      <a:round/>
+                      <a:headEnd type="none" w="med" len="med"/>
+                      <a:tailEnd type="none" w="med" len="med"/>
+                    </a:lnB>
+                  </a:tcPr>
+                </a:tc>
+                <a:tc>
+                  <a:txBody>
+                    <a:bodyPr/>
+                    <a:lstStyle/>
+                    <a:p>
+                      <a:pPr algn="ctr" indent="0" marL="0">
+                        <a:buNone/>
+                      </a:pPr>
+                      <a:r>
+                        <a:rPr lang="en-US" sz="1500" dirty="0">
+                          <a:solidFill>
+                            <a:srgbClr val="2B2D42"/>
+                          </a:solidFill>
+                          <a:latin typeface="Meiryo" pitchFamily="34" charset="0"/>
+                          <a:ea typeface="Meiryo" pitchFamily="34" charset="-122"/>
+                          <a:cs typeface="Meiryo" pitchFamily="34" charset="-120"/>
+                        </a:rPr>
+                        <a:t>臼井さん・川上さん</a:t>
                       </a:r>
                       <a:endParaRPr lang="en-US" sz="1500" dirty="0">
                         <a:latin typeface="Meiryo" charset="0"/>
@@ -3624,22 +5476,263 @@
                         <a:cs typeface="Meiryo" charset="0"/>
                       </a:endParaRPr>
                     </a:p>
+                  </a:txBody>
+                  <a:tcPr marL="137160" marR="137160" marT="73152" marB="73152" anchor="ctr">
+                    <a:lnL w="12700" cap="flat" cmpd="sng" algn="ctr">
+                      <a:solidFill>
+                        <a:srgbClr val="E3E4EA"/>
+                      </a:solidFill>
+                      <a:prstDash val="solid"/>
+                      <a:round/>
+                      <a:headEnd type="none" w="med" len="med"/>
+                      <a:tailEnd type="none" w="med" len="med"/>
+                    </a:lnL>
+                    <a:lnR w="12700" cap="flat" cmpd="sng" algn="ctr">
+                      <a:solidFill>
+                        <a:srgbClr val="E3E4EA"/>
+                      </a:solidFill>
+                      <a:prstDash val="solid"/>
+                      <a:round/>
+                      <a:headEnd type="none" w="med" len="med"/>
+                      <a:tailEnd type="none" w="med" len="med"/>
+                    </a:lnR>
+                    <a:lnT w="12700" cap="flat" cmpd="sng" algn="ctr">
+                      <a:solidFill>
+                        <a:srgbClr val="E3E4EA"/>
+                      </a:solidFill>
+                      <a:prstDash val="solid"/>
+                      <a:round/>
+                      <a:headEnd type="none" w="med" len="med"/>
+                      <a:tailEnd type="none" w="med" len="med"/>
+                    </a:lnT>
+                    <a:lnB w="12700" cap="flat" cmpd="sng" algn="ctr">
+                      <a:solidFill>
+                        <a:srgbClr val="E3E4EA"/>
+                      </a:solidFill>
+                      <a:prstDash val="solid"/>
+                      <a:round/>
+                      <a:headEnd type="none" w="med" len="med"/>
+                      <a:tailEnd type="none" w="med" len="med"/>
+                    </a:lnB>
+                  </a:tcPr>
+                </a:tc>
+                <a:tc>
+                  <a:txBody>
+                    <a:bodyPr/>
+                    <a:lstStyle/>
                     <a:p>
                       <a:pPr indent="0" marL="0">
                         <a:buNone/>
                       </a:pPr>
                       <a:r>
-                        <a:rPr lang="en-US" sz="1200" dirty="0">
+                        <a:rPr lang="en-US" sz="1500" dirty="0">
                           <a:solidFill>
-                            <a:srgbClr val="6B6E80"/>
+                            <a:srgbClr val="2B2D42"/>
                           </a:solidFill>
                           <a:latin typeface="Meiryo" pitchFamily="34" charset="0"/>
                           <a:ea typeface="Meiryo" pitchFamily="34" charset="-122"/>
                           <a:cs typeface="Meiryo" pitchFamily="34" charset="-120"/>
                         </a:rPr>
-                        <a:t>見積 → 契約 → 10月分から移管</a:t>
+                        <a:t>10月末 独り立ち</a:t>
                       </a:r>
                       <a:endParaRPr lang="en-US" sz="1500" dirty="0">
+                        <a:latin typeface="Meiryo" charset="0"/>
+                        <a:ea typeface="Meiryo" charset="0"/>
+                        <a:cs typeface="Meiryo" charset="0"/>
+                      </a:endParaRPr>
+                    </a:p>
+                  </a:txBody>
+                  <a:tcPr marL="137160" marR="137160" marT="73152" marB="73152" anchor="ctr">
+                    <a:lnL w="12700" cap="flat" cmpd="sng" algn="ctr">
+                      <a:solidFill>
+                        <a:srgbClr val="E3E4EA"/>
+                      </a:solidFill>
+                      <a:prstDash val="solid"/>
+                      <a:round/>
+                      <a:headEnd type="none" w="med" len="med"/>
+                      <a:tailEnd type="none" w="med" len="med"/>
+                    </a:lnL>
+                    <a:lnR w="12700" cap="flat" cmpd="sng" algn="ctr">
+                      <a:solidFill>
+                        <a:srgbClr val="E3E4EA"/>
+                      </a:solidFill>
+                      <a:prstDash val="solid"/>
+                      <a:round/>
+                      <a:headEnd type="none" w="med" len="med"/>
+                      <a:tailEnd type="none" w="med" len="med"/>
+                    </a:lnR>
+                    <a:lnT w="12700" cap="flat" cmpd="sng" algn="ctr">
+                      <a:solidFill>
+                        <a:srgbClr val="E3E4EA"/>
+                      </a:solidFill>
+                      <a:prstDash val="solid"/>
+                      <a:round/>
+                      <a:headEnd type="none" w="med" len="med"/>
+                      <a:tailEnd type="none" w="med" len="med"/>
+                    </a:lnT>
+                    <a:lnB w="12700" cap="flat" cmpd="sng" algn="ctr">
+                      <a:solidFill>
+                        <a:srgbClr val="E3E4EA"/>
+                      </a:solidFill>
+                      <a:prstDash val="solid"/>
+                      <a:round/>
+                      <a:headEnd type="none" w="med" len="med"/>
+                      <a:tailEnd type="none" w="med" len="med"/>
+                    </a:lnB>
+                  </a:tcPr>
+                </a:tc>
+                <a:tc>
+                  <a:txBody>
+                    <a:bodyPr/>
+                    <a:lstStyle/>
+                    <a:p>
+                      <a:pPr indent="0" marL="0">
+                        <a:buNone/>
+                      </a:pPr>
+                      <a:r>
+                        <a:rPr lang="en-US" sz="1500" dirty="0">
+                          <a:solidFill>
+                            <a:srgbClr val="2B2D42"/>
+                          </a:solidFill>
+                          <a:latin typeface="Meiryo" pitchFamily="34" charset="0"/>
+                          <a:ea typeface="Meiryo" pitchFamily="34" charset="-122"/>
+                          <a:cs typeface="Meiryo" pitchFamily="34" charset="-120"/>
+                        </a:rPr>
+                        <a:t>営業が入力・掲載をしない</a:t>
+                      </a:r>
+                      <a:endParaRPr lang="en-US" sz="1500" dirty="0">
+                        <a:latin typeface="Meiryo" charset="0"/>
+                        <a:ea typeface="Meiryo" charset="0"/>
+                        <a:cs typeface="Meiryo" charset="0"/>
+                      </a:endParaRPr>
+                    </a:p>
+                  </a:txBody>
+                  <a:tcPr marL="137160" marR="137160" marT="73152" marB="73152" anchor="ctr">
+                    <a:lnL w="12700" cap="flat" cmpd="sng" algn="ctr">
+                      <a:solidFill>
+                        <a:srgbClr val="E3E4EA"/>
+                      </a:solidFill>
+                      <a:prstDash val="solid"/>
+                      <a:round/>
+                      <a:headEnd type="none" w="med" len="med"/>
+                      <a:tailEnd type="none" w="med" len="med"/>
+                    </a:lnL>
+                    <a:lnR w="12700" cap="flat" cmpd="sng" algn="ctr">
+                      <a:solidFill>
+                        <a:srgbClr val="E3E4EA"/>
+                      </a:solidFill>
+                      <a:prstDash val="solid"/>
+                      <a:round/>
+                      <a:headEnd type="none" w="med" len="med"/>
+                      <a:tailEnd type="none" w="med" len="med"/>
+                    </a:lnR>
+                    <a:lnT w="12700" cap="flat" cmpd="sng" algn="ctr">
+                      <a:solidFill>
+                        <a:srgbClr val="E3E4EA"/>
+                      </a:solidFill>
+                      <a:prstDash val="solid"/>
+                      <a:round/>
+                      <a:headEnd type="none" w="med" len="med"/>
+                      <a:tailEnd type="none" w="med" len="med"/>
+                    </a:lnT>
+                    <a:lnB w="12700" cap="flat" cmpd="sng" algn="ctr">
+                      <a:solidFill>
+                        <a:srgbClr val="E3E4EA"/>
+                      </a:solidFill>
+                      <a:prstDash val="solid"/>
+                      <a:round/>
+                      <a:headEnd type="none" w="med" len="med"/>
+                      <a:tailEnd type="none" w="med" len="med"/>
+                    </a:lnB>
+                  </a:tcPr>
+                </a:tc>
+              </a:tr>
+              <a:tr h="822960">
+                <a:tc>
+                  <a:txBody>
+                    <a:bodyPr/>
+                    <a:lstStyle/>
+                    <a:p>
+                      <a:pPr algn="ctr" indent="0" marL="0">
+                        <a:buNone/>
+                      </a:pPr>
+                      <a:r>
+                        <a:rPr lang="en-US" sz="1800" b="1" dirty="0">
+                          <a:solidFill>
+                            <a:srgbClr val="C8315F"/>
+                          </a:solidFill>
+                          <a:latin typeface="Meiryo" pitchFamily="34" charset="0"/>
+                          <a:ea typeface="Meiryo" pitchFamily="34" charset="-122"/>
+                          <a:cs typeface="Meiryo" pitchFamily="34" charset="-120"/>
+                        </a:rPr>
+                        <a:t>02</a:t>
+                      </a:r>
+                      <a:endParaRPr lang="en-US" sz="1800" dirty="0">
+                        <a:latin typeface="Meiryo" charset="0"/>
+                        <a:ea typeface="Meiryo" charset="0"/>
+                        <a:cs typeface="Meiryo" charset="0"/>
+                      </a:endParaRPr>
+                    </a:p>
+                  </a:txBody>
+                  <a:tcPr marL="137160" marR="137160" marT="73152" marB="73152" anchor="ctr">
+                    <a:lnL w="12700" cap="flat" cmpd="sng" algn="ctr">
+                      <a:solidFill>
+                        <a:srgbClr val="E3E4EA"/>
+                      </a:solidFill>
+                      <a:prstDash val="solid"/>
+                      <a:round/>
+                      <a:headEnd type="none" w="med" len="med"/>
+                      <a:tailEnd type="none" w="med" len="med"/>
+                    </a:lnL>
+                    <a:lnR w="12700" cap="flat" cmpd="sng" algn="ctr">
+                      <a:solidFill>
+                        <a:srgbClr val="E3E4EA"/>
+                      </a:solidFill>
+                      <a:prstDash val="solid"/>
+                      <a:round/>
+                      <a:headEnd type="none" w="med" len="med"/>
+                      <a:tailEnd type="none" w="med" len="med"/>
+                    </a:lnR>
+                    <a:lnT w="12700" cap="flat" cmpd="sng" algn="ctr">
+                      <a:solidFill>
+                        <a:srgbClr val="E3E4EA"/>
+                      </a:solidFill>
+                      <a:prstDash val="solid"/>
+                      <a:round/>
+                      <a:headEnd type="none" w="med" len="med"/>
+                      <a:tailEnd type="none" w="med" len="med"/>
+                    </a:lnT>
+                    <a:lnB w="12700" cap="flat" cmpd="sng" algn="ctr">
+                      <a:solidFill>
+                        <a:srgbClr val="E3E4EA"/>
+                      </a:solidFill>
+                      <a:prstDash val="solid"/>
+                      <a:round/>
+                      <a:headEnd type="none" w="med" len="med"/>
+                      <a:tailEnd type="none" w="med" len="med"/>
+                    </a:lnB>
+                  </a:tcPr>
+                </a:tc>
+                <a:tc>
+                  <a:txBody>
+                    <a:bodyPr/>
+                    <a:lstStyle/>
+                    <a:p>
+                      <a:pPr indent="0" marL="0">
+                        <a:buNone/>
+                      </a:pPr>
+                      <a:r>
+                        <a:rPr lang="en-US" sz="1600" b="1" dirty="0">
+                          <a:solidFill>
+                            <a:srgbClr val="2B2D42"/>
+                          </a:solidFill>
+                          <a:latin typeface="Meiryo" pitchFamily="34" charset="0"/>
+                          <a:ea typeface="Meiryo" pitchFamily="34" charset="-122"/>
+                          <a:cs typeface="Meiryo" pitchFamily="34" charset="-120"/>
+                        </a:rPr>
+                        <a:t>会計をDFEへ</a:t>
+                      </a:r>
+                      <a:endParaRPr lang="en-US" sz="1600" dirty="0">
                         <a:latin typeface="Meiryo" charset="0"/>
                         <a:ea typeface="Meiryo" charset="0"/>
                         <a:cs typeface="Meiryo" charset="0"/>
@@ -3791,7 +5884,7 @@
                           <a:ea typeface="Meiryo" pitchFamily="34" charset="-122"/>
                           <a:cs typeface="Meiryo" pitchFamily="34" charset="-120"/>
                         </a:rPr>
-                        <a:t>11月 移管完了</a:t>
+                        <a:t>11月 移管</a:t>
                       </a:r>
                       <a:endParaRPr lang="en-US" sz="1500" dirty="0">
                         <a:latin typeface="Meiryo" charset="0"/>
@@ -3905,358 +5998,7 @@
                   </a:tcPr>
                 </a:tc>
               </a:tr>
-              <a:tr h="960120">
-                <a:tc>
-                  <a:txBody>
-                    <a:bodyPr/>
-                    <a:lstStyle/>
-                    <a:p>
-                      <a:pPr algn="ctr" indent="0" marL="0">
-                        <a:buNone/>
-                      </a:pPr>
-                      <a:r>
-                        <a:rPr lang="en-US" sz="1800" b="1" dirty="0">
-                          <a:solidFill>
-                            <a:srgbClr val="C8315F"/>
-                          </a:solidFill>
-                          <a:latin typeface="Meiryo" pitchFamily="34" charset="0"/>
-                          <a:ea typeface="Meiryo" pitchFamily="34" charset="-122"/>
-                          <a:cs typeface="Meiryo" pitchFamily="34" charset="-120"/>
-                        </a:rPr>
-                        <a:t>02</a:t>
-                      </a:r>
-                      <a:endParaRPr lang="en-US" sz="1800" dirty="0">
-                        <a:latin typeface="Meiryo" charset="0"/>
-                        <a:ea typeface="Meiryo" charset="0"/>
-                        <a:cs typeface="Meiryo" charset="0"/>
-                      </a:endParaRPr>
-                    </a:p>
-                  </a:txBody>
-                  <a:tcPr marL="137160" marR="137160" marT="73152" marB="73152" anchor="ctr">
-                    <a:lnL w="12700" cap="flat" cmpd="sng" algn="ctr">
-                      <a:solidFill>
-                        <a:srgbClr val="E3E4EA"/>
-                      </a:solidFill>
-                      <a:prstDash val="solid"/>
-                      <a:round/>
-                      <a:headEnd type="none" w="med" len="med"/>
-                      <a:tailEnd type="none" w="med" len="med"/>
-                    </a:lnL>
-                    <a:lnR w="12700" cap="flat" cmpd="sng" algn="ctr">
-                      <a:solidFill>
-                        <a:srgbClr val="E3E4EA"/>
-                      </a:solidFill>
-                      <a:prstDash val="solid"/>
-                      <a:round/>
-                      <a:headEnd type="none" w="med" len="med"/>
-                      <a:tailEnd type="none" w="med" len="med"/>
-                    </a:lnR>
-                    <a:lnT w="12700" cap="flat" cmpd="sng" algn="ctr">
-                      <a:solidFill>
-                        <a:srgbClr val="E3E4EA"/>
-                      </a:solidFill>
-                      <a:prstDash val="solid"/>
-                      <a:round/>
-                      <a:headEnd type="none" w="med" len="med"/>
-                      <a:tailEnd type="none" w="med" len="med"/>
-                    </a:lnT>
-                    <a:lnB w="12700" cap="flat" cmpd="sng" algn="ctr">
-                      <a:solidFill>
-                        <a:srgbClr val="E3E4EA"/>
-                      </a:solidFill>
-                      <a:prstDash val="solid"/>
-                      <a:round/>
-                      <a:headEnd type="none" w="med" len="med"/>
-                      <a:tailEnd type="none" w="med" len="med"/>
-                    </a:lnB>
-                  </a:tcPr>
-                </a:tc>
-                <a:tc>
-                  <a:txBody>
-                    <a:bodyPr/>
-                    <a:lstStyle/>
-                    <a:p>
-                      <a:pPr indent="0" marL="0">
-                        <a:buNone/>
-                      </a:pPr>
-                      <a:r>
-                        <a:rPr lang="en-US" sz="1700" b="1" dirty="0">
-                          <a:solidFill>
-                            <a:srgbClr val="2B2D42"/>
-                          </a:solidFill>
-                          <a:latin typeface="Meiryo" pitchFamily="34" charset="0"/>
-                          <a:ea typeface="Meiryo" pitchFamily="34" charset="-122"/>
-                          <a:cs typeface="Meiryo" pitchFamily="34" charset="-120"/>
-                        </a:rPr>
-                        <a:t>写真撮影・入力をパートさんへ</a:t>
-                      </a:r>
-                      <a:endParaRPr lang="en-US" sz="1500" dirty="0">
-                        <a:latin typeface="Meiryo" charset="0"/>
-                        <a:ea typeface="Meiryo" charset="0"/>
-                        <a:cs typeface="Meiryo" charset="0"/>
-                      </a:endParaRPr>
-                    </a:p>
-                    <a:p>
-                      <a:pPr indent="0" marL="0">
-                        <a:buNone/>
-                      </a:pPr>
-                      <a:r>
-                        <a:rPr lang="en-US" sz="1200" dirty="0">
-                          <a:solidFill>
-                            <a:srgbClr val="6B6E80"/>
-                          </a:solidFill>
-                          <a:latin typeface="Meiryo" pitchFamily="34" charset="0"/>
-                          <a:ea typeface="Meiryo" pitchFamily="34" charset="-122"/>
-                          <a:cs typeface="Meiryo" pitchFamily="34" charset="-120"/>
-                        </a:rPr>
-                        <a:t>9/18採用のパートさんに手順を引き継ぐ</a:t>
-                      </a:r>
-                      <a:endParaRPr lang="en-US" sz="1500" dirty="0">
-                        <a:latin typeface="Meiryo" charset="0"/>
-                        <a:ea typeface="Meiryo" charset="0"/>
-                        <a:cs typeface="Meiryo" charset="0"/>
-                      </a:endParaRPr>
-                    </a:p>
-                  </a:txBody>
-                  <a:tcPr marL="137160" marR="137160" marT="73152" marB="73152" anchor="ctr">
-                    <a:lnL w="12700" cap="flat" cmpd="sng" algn="ctr">
-                      <a:solidFill>
-                        <a:srgbClr val="E3E4EA"/>
-                      </a:solidFill>
-                      <a:prstDash val="solid"/>
-                      <a:round/>
-                      <a:headEnd type="none" w="med" len="med"/>
-                      <a:tailEnd type="none" w="med" len="med"/>
-                    </a:lnL>
-                    <a:lnR w="12700" cap="flat" cmpd="sng" algn="ctr">
-                      <a:solidFill>
-                        <a:srgbClr val="E3E4EA"/>
-                      </a:solidFill>
-                      <a:prstDash val="solid"/>
-                      <a:round/>
-                      <a:headEnd type="none" w="med" len="med"/>
-                      <a:tailEnd type="none" w="med" len="med"/>
-                    </a:lnR>
-                    <a:lnT w="12700" cap="flat" cmpd="sng" algn="ctr">
-                      <a:solidFill>
-                        <a:srgbClr val="E3E4EA"/>
-                      </a:solidFill>
-                      <a:prstDash val="solid"/>
-                      <a:round/>
-                      <a:headEnd type="none" w="med" len="med"/>
-                      <a:tailEnd type="none" w="med" len="med"/>
-                    </a:lnT>
-                    <a:lnB w="12700" cap="flat" cmpd="sng" algn="ctr">
-                      <a:solidFill>
-                        <a:srgbClr val="E3E4EA"/>
-                      </a:solidFill>
-                      <a:prstDash val="solid"/>
-                      <a:round/>
-                      <a:headEnd type="none" w="med" len="med"/>
-                      <a:tailEnd type="none" w="med" len="med"/>
-                    </a:lnB>
-                  </a:tcPr>
-                </a:tc>
-                <a:tc>
-                  <a:txBody>
-                    <a:bodyPr/>
-                    <a:lstStyle/>
-                    <a:p>
-                      <a:pPr algn="ctr" indent="0" marL="0">
-                        <a:buNone/>
-                      </a:pPr>
-                      <a:r>
-                        <a:rPr lang="en-US" sz="1500" b="1" dirty="0">
-                          <a:solidFill>
-                            <a:srgbClr val="C77700"/>
-                          </a:solidFill>
-                          <a:latin typeface="Meiryo" pitchFamily="34" charset="0"/>
-                          <a:ea typeface="Meiryo" pitchFamily="34" charset="-122"/>
-                          <a:cs typeface="Meiryo" pitchFamily="34" charset="-120"/>
-                        </a:rPr>
-                        <a:t>要記入</a:t>
-                      </a:r>
-                      <a:endParaRPr lang="en-US" sz="1500" dirty="0">
-                        <a:latin typeface="Meiryo" charset="0"/>
-                        <a:ea typeface="Meiryo" charset="0"/>
-                        <a:cs typeface="Meiryo" charset="0"/>
-                      </a:endParaRPr>
-                    </a:p>
-                  </a:txBody>
-                  <a:tcPr marL="137160" marR="137160" marT="73152" marB="73152" anchor="ctr">
-                    <a:lnL w="12700" cap="flat" cmpd="sng" algn="ctr">
-                      <a:solidFill>
-                        <a:srgbClr val="E3E4EA"/>
-                      </a:solidFill>
-                      <a:prstDash val="solid"/>
-                      <a:round/>
-                      <a:headEnd type="none" w="med" len="med"/>
-                      <a:tailEnd type="none" w="med" len="med"/>
-                    </a:lnL>
-                    <a:lnR w="12700" cap="flat" cmpd="sng" algn="ctr">
-                      <a:solidFill>
-                        <a:srgbClr val="E3E4EA"/>
-                      </a:solidFill>
-                      <a:prstDash val="solid"/>
-                      <a:round/>
-                      <a:headEnd type="none" w="med" len="med"/>
-                      <a:tailEnd type="none" w="med" len="med"/>
-                    </a:lnR>
-                    <a:lnT w="12700" cap="flat" cmpd="sng" algn="ctr">
-                      <a:solidFill>
-                        <a:srgbClr val="E3E4EA"/>
-                      </a:solidFill>
-                      <a:prstDash val="solid"/>
-                      <a:round/>
-                      <a:headEnd type="none" w="med" len="med"/>
-                      <a:tailEnd type="none" w="med" len="med"/>
-                    </a:lnT>
-                    <a:lnB w="12700" cap="flat" cmpd="sng" algn="ctr">
-                      <a:solidFill>
-                        <a:srgbClr val="E3E4EA"/>
-                      </a:solidFill>
-                      <a:prstDash val="solid"/>
-                      <a:round/>
-                      <a:headEnd type="none" w="med" len="med"/>
-                      <a:tailEnd type="none" w="med" len="med"/>
-                    </a:lnB>
-                    <a:solidFill>
-                      <a:srgbClr val="FFF3DD"/>
-                    </a:solidFill>
-                  </a:tcPr>
-                </a:tc>
-                <a:tc>
-                  <a:txBody>
-                    <a:bodyPr/>
-                    <a:lstStyle/>
-                    <a:p>
-                      <a:pPr indent="0" marL="0">
-                        <a:buNone/>
-                      </a:pPr>
-                      <a:r>
-                        <a:rPr lang="en-US" sz="1500" dirty="0">
-                          <a:solidFill>
-                            <a:srgbClr val="2B2D42"/>
-                          </a:solidFill>
-                          <a:latin typeface="Meiryo" pitchFamily="34" charset="0"/>
-                          <a:ea typeface="Meiryo" pitchFamily="34" charset="-122"/>
-                          <a:cs typeface="Meiryo" pitchFamily="34" charset="-120"/>
-                        </a:rPr>
-                        <a:t>10月末 独り立ち</a:t>
-                      </a:r>
-                      <a:endParaRPr lang="en-US" sz="1500" dirty="0">
-                        <a:latin typeface="Meiryo" charset="0"/>
-                        <a:ea typeface="Meiryo" charset="0"/>
-                        <a:cs typeface="Meiryo" charset="0"/>
-                      </a:endParaRPr>
-                    </a:p>
-                  </a:txBody>
-                  <a:tcPr marL="137160" marR="137160" marT="73152" marB="73152" anchor="ctr">
-                    <a:lnL w="12700" cap="flat" cmpd="sng" algn="ctr">
-                      <a:solidFill>
-                        <a:srgbClr val="E3E4EA"/>
-                      </a:solidFill>
-                      <a:prstDash val="solid"/>
-                      <a:round/>
-                      <a:headEnd type="none" w="med" len="med"/>
-                      <a:tailEnd type="none" w="med" len="med"/>
-                    </a:lnL>
-                    <a:lnR w="12700" cap="flat" cmpd="sng" algn="ctr">
-                      <a:solidFill>
-                        <a:srgbClr val="E3E4EA"/>
-                      </a:solidFill>
-                      <a:prstDash val="solid"/>
-                      <a:round/>
-                      <a:headEnd type="none" w="med" len="med"/>
-                      <a:tailEnd type="none" w="med" len="med"/>
-                    </a:lnR>
-                    <a:lnT w="12700" cap="flat" cmpd="sng" algn="ctr">
-                      <a:solidFill>
-                        <a:srgbClr val="E3E4EA"/>
-                      </a:solidFill>
-                      <a:prstDash val="solid"/>
-                      <a:round/>
-                      <a:headEnd type="none" w="med" len="med"/>
-                      <a:tailEnd type="none" w="med" len="med"/>
-                    </a:lnT>
-                    <a:lnB w="12700" cap="flat" cmpd="sng" algn="ctr">
-                      <a:solidFill>
-                        <a:srgbClr val="E3E4EA"/>
-                      </a:solidFill>
-                      <a:prstDash val="solid"/>
-                      <a:round/>
-                      <a:headEnd type="none" w="med" len="med"/>
-                      <a:tailEnd type="none" w="med" len="med"/>
-                    </a:lnB>
-                  </a:tcPr>
-                </a:tc>
-                <a:tc>
-                  <a:txBody>
-                    <a:bodyPr/>
-                    <a:lstStyle/>
-                    <a:p>
-                      <a:pPr indent="0" marL="0">
-                        <a:buNone/>
-                      </a:pPr>
-                      <a:r>
-                        <a:rPr lang="en-US" sz="1500" dirty="0">
-                          <a:solidFill>
-                            <a:srgbClr val="2B2D42"/>
-                          </a:solidFill>
-                          <a:latin typeface="Meiryo" pitchFamily="34" charset="0"/>
-                          <a:ea typeface="Meiryo" pitchFamily="34" charset="-122"/>
-                          <a:cs typeface="Meiryo" pitchFamily="34" charset="-120"/>
-                        </a:rPr>
-                        <a:t>営業が撮影・入力をしない</a:t>
-                      </a:r>
-                      <a:endParaRPr lang="en-US" sz="1500" dirty="0">
-                        <a:latin typeface="Meiryo" charset="0"/>
-                        <a:ea typeface="Meiryo" charset="0"/>
-                        <a:cs typeface="Meiryo" charset="0"/>
-                      </a:endParaRPr>
-                    </a:p>
-                  </a:txBody>
-                  <a:tcPr marL="137160" marR="137160" marT="73152" marB="73152" anchor="ctr">
-                    <a:lnL w="12700" cap="flat" cmpd="sng" algn="ctr">
-                      <a:solidFill>
-                        <a:srgbClr val="E3E4EA"/>
-                      </a:solidFill>
-                      <a:prstDash val="solid"/>
-                      <a:round/>
-                      <a:headEnd type="none" w="med" len="med"/>
-                      <a:tailEnd type="none" w="med" len="med"/>
-                    </a:lnL>
-                    <a:lnR w="12700" cap="flat" cmpd="sng" algn="ctr">
-                      <a:solidFill>
-                        <a:srgbClr val="E3E4EA"/>
-                      </a:solidFill>
-                      <a:prstDash val="solid"/>
-                      <a:round/>
-                      <a:headEnd type="none" w="med" len="med"/>
-                      <a:tailEnd type="none" w="med" len="med"/>
-                    </a:lnR>
-                    <a:lnT w="12700" cap="flat" cmpd="sng" algn="ctr">
-                      <a:solidFill>
-                        <a:srgbClr val="E3E4EA"/>
-                      </a:solidFill>
-                      <a:prstDash val="solid"/>
-                      <a:round/>
-                      <a:headEnd type="none" w="med" len="med"/>
-                      <a:tailEnd type="none" w="med" len="med"/>
-                    </a:lnT>
-                    <a:lnB w="12700" cap="flat" cmpd="sng" algn="ctr">
-                      <a:solidFill>
-                        <a:srgbClr val="E3E4EA"/>
-                      </a:solidFill>
-                      <a:prstDash val="solid"/>
-                      <a:round/>
-                      <a:headEnd type="none" w="med" len="med"/>
-                      <a:tailEnd type="none" w="med" len="med"/>
-                    </a:lnB>
-                  </a:tcPr>
-                </a:tc>
-              </a:tr>
-              <a:tr h="960120">
+              <a:tr h="822960">
                 <a:tc>
                   <a:txBody>
                     <a:bodyPr/>
@@ -4331,7 +6073,7 @@
                         <a:buNone/>
                       </a:pPr>
                       <a:r>
-                        <a:rPr lang="en-US" sz="1700" b="1" dirty="0">
+                        <a:rPr lang="en-US" sz="1600" b="1" dirty="0">
                           <a:solidFill>
                             <a:srgbClr val="2B2D42"/>
                           </a:solidFill>
@@ -4339,30 +6081,9 @@
                           <a:ea typeface="Meiryo" pitchFamily="34" charset="-122"/>
                           <a:cs typeface="Meiryo" pitchFamily="34" charset="-120"/>
                         </a:rPr>
-                        <a:t>クレーム一次対応を外注</a:t>
+                        <a:t>クレーム一次対応を駆けつけサービスへ</a:t>
                       </a:r>
-                      <a:endParaRPr lang="en-US" sz="1500" dirty="0">
-                        <a:latin typeface="Meiryo" charset="0"/>
-                        <a:ea typeface="Meiryo" charset="0"/>
-                        <a:cs typeface="Meiryo" charset="0"/>
-                      </a:endParaRPr>
-                    </a:p>
-                    <a:p>
-                      <a:pPr indent="0" marL="0">
-                        <a:buNone/>
-                      </a:pPr>
-                      <a:r>
-                        <a:rPr lang="en-US" sz="1200" dirty="0">
-                          <a:solidFill>
-                            <a:srgbClr val="6B6E80"/>
-                          </a:solidFill>
-                          <a:latin typeface="Meiryo" pitchFamily="34" charset="0"/>
-                          <a:ea typeface="Meiryo" pitchFamily="34" charset="-122"/>
-                          <a:cs typeface="Meiryo" pitchFamily="34" charset="-120"/>
-                        </a:rPr>
-                        <a:t>コールセンター・駆けつけ業者と契約</a:t>
-                      </a:r>
-                      <a:endParaRPr lang="en-US" sz="1500" dirty="0">
+                      <a:endParaRPr lang="en-US" sz="1600" dirty="0">
                         <a:latin typeface="Meiryo" charset="0"/>
                         <a:ea typeface="Meiryo" charset="0"/>
                         <a:cs typeface="Meiryo" charset="0"/>
@@ -4640,7 +6361,7 @@
         </p:nvSpPr>
         <p:spPr>
           <a:xfrm>
-            <a:off x="548640" y="5440680"/>
+            <a:off x="548640" y="4892040"/>
             <a:ext cx="11094415" cy="274320"/>
           </a:xfrm>
           <a:prstGeom prst="rect">
@@ -4679,1030 +6400,26 @@
                 <a:ea typeface="Meiryo" pitchFamily="34" charset="-122"/>
                 <a:cs typeface="Meiryo" pitchFamily="34" charset="-120"/>
               </a:rPr>
-              <a:t>＝発表までに埋める欄。期限は案なので、実態に合わせて修正してください。</a:t>
+              <a:t>＝発表までに埋める欄。期限は案。毎月末に売上と進み具合を確認します。</a:t>
             </a:r>
             <a:endParaRPr lang="en-US" sz="1200" dirty="0"/>
           </a:p>
         </p:txBody>
       </p:sp>
-    </p:spTree>
-  </p:cSld>
-  <p:clrMapOvr>
-    <a:masterClrMapping/>
-  </p:clrMapOvr>
-</p:sld>
-</file>
-
-<file path=ppt/slides/slide5.xml><?xml version="1.0" encoding="utf-8"?>
-<p:sld xmlns:a="http://schemas.openxmlformats.org/drawingml/2006/main" xmlns:r="http://schemas.openxmlformats.org/officeDocument/2006/relationships" xmlns:p="http://schemas.openxmlformats.org/presentationml/2006/main">
-  <p:cSld name="Slide 5">
-    <p:bg>
-      <p:bgPr>
-        <a:solidFill>
-          <a:srgbClr val="FFFFFF"/>
-        </a:solidFill>
-      </p:bgPr>
-    </p:bg>
-    <p:spTree>
-      <p:nvGrpSpPr>
-        <p:cNvPr id="1" name=""/>
-        <p:cNvGrpSpPr/>
-        <p:nvPr/>
-      </p:nvGrpSpPr>
-      <p:grpSpPr>
-        <a:xfrm>
-          <a:off x="0" y="0"/>
-          <a:ext cx="0" cy="0"/>
-          <a:chOff x="0" y="0"/>
-          <a:chExt cx="0" cy="0"/>
-        </a:xfrm>
-      </p:grpSpPr>
-      <p:sp>
-        <p:nvSpPr>
-          <p:cNvPr id="2" name="Text 0"/>
-          <p:cNvSpPr txBox="1"/>
-          <p:nvPr/>
-        </p:nvSpPr>
-        <p:spPr>
-          <a:xfrm>
-            <a:off x="548640" y="457200"/>
-            <a:ext cx="5486400" cy="274320"/>
-          </a:xfrm>
-          <a:prstGeom prst="rect">
-            <a:avLst/>
-          </a:prstGeom>
-          <a:noFill/>
-          <a:ln/>
-        </p:spPr>
-        <p:txBody>
-          <a:bodyPr wrap="square" lIns="0" tIns="0" rIns="0" bIns="0" rtlCol="0" anchor="t"/>
-          <a:lstStyle/>
-          <a:p>
-            <a:pPr indent="0" marL="0">
-              <a:buNone/>
-            </a:pPr>
-            <a:r>
-              <a:rPr lang="en-US" sz="1200" b="1" dirty="0">
-                <a:solidFill>
-                  <a:srgbClr val="C8315F"/>
-                </a:solidFill>
-                <a:latin typeface="Meiryo" pitchFamily="34" charset="0"/>
-                <a:ea typeface="Meiryo" pitchFamily="34" charset="-122"/>
-                <a:cs typeface="Meiryo" pitchFamily="34" charset="-120"/>
-              </a:rPr>
-              <a:t>④ スケジュール</a:t>
-            </a:r>
-            <a:endParaRPr lang="en-US" sz="1200" dirty="0"/>
-          </a:p>
-        </p:txBody>
-      </p:sp>
-      <p:sp>
-        <p:nvSpPr>
-          <p:cNvPr id="3" name="Text 1"/>
-          <p:cNvSpPr txBox="1"/>
-          <p:nvPr/>
-        </p:nvSpPr>
-        <p:spPr>
-          <a:xfrm>
-            <a:off x="548640" y="777240"/>
-            <a:ext cx="11094415" cy="594360"/>
-          </a:xfrm>
-          <a:prstGeom prst="rect">
-            <a:avLst/>
-          </a:prstGeom>
-          <a:noFill/>
-          <a:ln/>
-        </p:spPr>
-        <p:txBody>
-          <a:bodyPr wrap="square" lIns="0" tIns="0" rIns="0" bIns="0" rtlCol="0" anchor="ctr"/>
-          <a:lstStyle/>
-          <a:p>
-            <a:pPr indent="0" marL="0">
-              <a:buNone/>
-            </a:pPr>
-            <a:r>
-              <a:rPr lang="en-US" sz="3000" b="1" dirty="0">
-                <a:solidFill>
-                  <a:srgbClr val="2B2D42"/>
-                </a:solidFill>
-                <a:latin typeface="Meiryo" pitchFamily="34" charset="0"/>
-                <a:ea typeface="Meiryo" pitchFamily="34" charset="-122"/>
-                <a:cs typeface="Meiryo" pitchFamily="34" charset="-120"/>
-              </a:rPr>
-              <a:t>10〜12月で、3つとも動かす</a:t>
-            </a:r>
-            <a:endParaRPr lang="en-US" sz="3000" dirty="0"/>
-          </a:p>
-        </p:txBody>
-      </p:sp>
-      <p:sp>
-        <p:nvSpPr>
-          <p:cNvPr id="4" name="Text 2"/>
-          <p:cNvSpPr txBox="1"/>
-          <p:nvPr/>
-        </p:nvSpPr>
-        <p:spPr>
-          <a:xfrm>
-            <a:off x="10545775" y="6217920"/>
-            <a:ext cx="1097280" cy="228600"/>
-          </a:xfrm>
-          <a:prstGeom prst="rect">
-            <a:avLst/>
-          </a:prstGeom>
-          <a:noFill/>
-          <a:ln/>
-        </p:spPr>
-        <p:txBody>
-          <a:bodyPr wrap="square" lIns="0" tIns="0" rIns="0" bIns="0" rtlCol="0" anchor="t"/>
-          <a:lstStyle/>
-          <a:p>
-            <a:pPr algn="r" indent="0" marL="0">
-              <a:buNone/>
-            </a:pPr>
-            <a:r>
-              <a:rPr lang="en-US" sz="1100" dirty="0">
-                <a:solidFill>
-                  <a:srgbClr val="6B6E80"/>
-                </a:solidFill>
-                <a:latin typeface="Meiryo" pitchFamily="34" charset="0"/>
-                <a:ea typeface="Meiryo" pitchFamily="34" charset="-122"/>
-                <a:cs typeface="Meiryo" pitchFamily="34" charset="-120"/>
-              </a:rPr>
-              <a:t>5 / 5</a:t>
-            </a:r>
-            <a:endParaRPr lang="en-US" sz="1100" dirty="0"/>
-          </a:p>
-        </p:txBody>
-      </p:sp>
-      <p:sp>
-        <p:nvSpPr>
-          <p:cNvPr id="5" name="Shape 3"/>
+      <p:sp>
+        <p:nvSpPr>
+          <p:cNvPr id="7" name="Shape 4"/>
           <p:cNvSpPr/>
           <p:nvPr/>
         </p:nvSpPr>
         <p:spPr>
           <a:xfrm>
-            <a:off x="3840480" y="1691640"/>
-            <a:ext cx="2600858" cy="411480"/>
-          </a:xfrm>
-          <a:prstGeom prst="rect">
-            <a:avLst/>
-          </a:prstGeom>
-          <a:solidFill>
-            <a:srgbClr val="2B2D42"/>
-          </a:solidFill>
-          <a:ln w="19050">
-            <a:solidFill>
-              <a:srgbClr val="FFFFFF"/>
-            </a:solidFill>
-            <a:prstDash val="solid"/>
-          </a:ln>
-        </p:spPr>
-      </p:sp>
-      <p:sp>
-        <p:nvSpPr>
-          <p:cNvPr id="6" name="Text 4"/>
-          <p:cNvSpPr txBox="1"/>
-          <p:nvPr/>
-        </p:nvSpPr>
-        <p:spPr>
-          <a:xfrm>
-            <a:off x="3840480" y="1691640"/>
-            <a:ext cx="2600858" cy="411480"/>
-          </a:xfrm>
-          <a:prstGeom prst="rect">
-            <a:avLst/>
-          </a:prstGeom>
-          <a:noFill/>
-          <a:ln/>
-        </p:spPr>
-        <p:txBody>
-          <a:bodyPr wrap="square" lIns="0" tIns="0" rIns="0" bIns="0" rtlCol="0" anchor="ctr"/>
-          <a:lstStyle/>
-          <a:p>
-            <a:pPr algn="ctr" indent="0" marL="0">
-              <a:buNone/>
-            </a:pPr>
-            <a:r>
-              <a:rPr lang="en-US" sz="1500" b="1" dirty="0">
-                <a:solidFill>
-                  <a:srgbClr val="FFFFFF"/>
-                </a:solidFill>
-                <a:latin typeface="Meiryo" pitchFamily="34" charset="0"/>
-                <a:ea typeface="Meiryo" pitchFamily="34" charset="-122"/>
-                <a:cs typeface="Meiryo" pitchFamily="34" charset="-120"/>
-              </a:rPr>
-              <a:t>10月</a:t>
-            </a:r>
-            <a:endParaRPr lang="en-US" sz="1500" dirty="0"/>
-          </a:p>
-        </p:txBody>
-      </p:sp>
-      <p:sp>
-        <p:nvSpPr>
-          <p:cNvPr id="7" name="Shape 5"/>
-          <p:cNvSpPr/>
-          <p:nvPr/>
-        </p:nvSpPr>
-        <p:spPr>
-          <a:xfrm>
-            <a:off x="6441338" y="1691640"/>
-            <a:ext cx="2600858" cy="411480"/>
-          </a:xfrm>
-          <a:prstGeom prst="rect">
-            <a:avLst/>
-          </a:prstGeom>
-          <a:solidFill>
-            <a:srgbClr val="2B2D42"/>
-          </a:solidFill>
-          <a:ln w="19050">
-            <a:solidFill>
-              <a:srgbClr val="FFFFFF"/>
-            </a:solidFill>
-            <a:prstDash val="solid"/>
-          </a:ln>
-        </p:spPr>
-      </p:sp>
-      <p:sp>
-        <p:nvSpPr>
-          <p:cNvPr id="8" name="Text 6"/>
-          <p:cNvSpPr txBox="1"/>
-          <p:nvPr/>
-        </p:nvSpPr>
-        <p:spPr>
-          <a:xfrm>
-            <a:off x="6441338" y="1691640"/>
-            <a:ext cx="2600858" cy="411480"/>
-          </a:xfrm>
-          <a:prstGeom prst="rect">
-            <a:avLst/>
-          </a:prstGeom>
-          <a:noFill/>
-          <a:ln/>
-        </p:spPr>
-        <p:txBody>
-          <a:bodyPr wrap="square" lIns="0" tIns="0" rIns="0" bIns="0" rtlCol="0" anchor="ctr"/>
-          <a:lstStyle/>
-          <a:p>
-            <a:pPr algn="ctr" indent="0" marL="0">
-              <a:buNone/>
-            </a:pPr>
-            <a:r>
-              <a:rPr lang="en-US" sz="1500" b="1" dirty="0">
-                <a:solidFill>
-                  <a:srgbClr val="FFFFFF"/>
-                </a:solidFill>
-                <a:latin typeface="Meiryo" pitchFamily="34" charset="0"/>
-                <a:ea typeface="Meiryo" pitchFamily="34" charset="-122"/>
-                <a:cs typeface="Meiryo" pitchFamily="34" charset="-120"/>
-              </a:rPr>
-              <a:t>11月</a:t>
-            </a:r>
-            <a:endParaRPr lang="en-US" sz="1500" dirty="0"/>
-          </a:p>
-        </p:txBody>
-      </p:sp>
-      <p:sp>
-        <p:nvSpPr>
-          <p:cNvPr id="9" name="Shape 7"/>
-          <p:cNvSpPr/>
-          <p:nvPr/>
-        </p:nvSpPr>
-        <p:spPr>
-          <a:xfrm>
-            <a:off x="9042197" y="1691640"/>
-            <a:ext cx="2600858" cy="411480"/>
-          </a:xfrm>
-          <a:prstGeom prst="rect">
-            <a:avLst/>
-          </a:prstGeom>
-          <a:solidFill>
-            <a:srgbClr val="2B2D42"/>
-          </a:solidFill>
-          <a:ln w="19050">
-            <a:solidFill>
-              <a:srgbClr val="FFFFFF"/>
-            </a:solidFill>
-            <a:prstDash val="solid"/>
-          </a:ln>
-        </p:spPr>
-      </p:sp>
-      <p:sp>
-        <p:nvSpPr>
-          <p:cNvPr id="10" name="Text 8"/>
-          <p:cNvSpPr txBox="1"/>
-          <p:nvPr/>
-        </p:nvSpPr>
-        <p:spPr>
-          <a:xfrm>
-            <a:off x="9042197" y="1691640"/>
-            <a:ext cx="2600858" cy="411480"/>
-          </a:xfrm>
-          <a:prstGeom prst="rect">
-            <a:avLst/>
-          </a:prstGeom>
-          <a:noFill/>
-          <a:ln/>
-        </p:spPr>
-        <p:txBody>
-          <a:bodyPr wrap="square" lIns="0" tIns="0" rIns="0" bIns="0" rtlCol="0" anchor="ctr"/>
-          <a:lstStyle/>
-          <a:p>
-            <a:pPr algn="ctr" indent="0" marL="0">
-              <a:buNone/>
-            </a:pPr>
-            <a:r>
-              <a:rPr lang="en-US" sz="1500" b="1" dirty="0">
-                <a:solidFill>
-                  <a:srgbClr val="FFFFFF"/>
-                </a:solidFill>
-                <a:latin typeface="Meiryo" pitchFamily="34" charset="0"/>
-                <a:ea typeface="Meiryo" pitchFamily="34" charset="-122"/>
-                <a:cs typeface="Meiryo" pitchFamily="34" charset="-120"/>
-              </a:rPr>
-              <a:t>12月</a:t>
-            </a:r>
-            <a:endParaRPr lang="en-US" sz="1500" dirty="0"/>
-          </a:p>
-        </p:txBody>
-      </p:sp>
-      <p:sp>
-        <p:nvSpPr>
-          <p:cNvPr id="11" name="Text 9"/>
-          <p:cNvSpPr txBox="1"/>
-          <p:nvPr/>
-        </p:nvSpPr>
-        <p:spPr>
-          <a:xfrm>
-            <a:off x="548640" y="2194560"/>
-            <a:ext cx="3108960" cy="640080"/>
-          </a:xfrm>
-          <a:prstGeom prst="rect">
-            <a:avLst/>
-          </a:prstGeom>
-          <a:noFill/>
-          <a:ln/>
-        </p:spPr>
-        <p:txBody>
-          <a:bodyPr wrap="square" lIns="0" tIns="0" rIns="0" bIns="0" rtlCol="0" anchor="ctr"/>
-          <a:lstStyle/>
-          <a:p>
-            <a:pPr indent="0" marL="0">
-              <a:buNone/>
-            </a:pPr>
-            <a:r>
-              <a:rPr lang="en-US" sz="1500" b="1" dirty="0">
-                <a:solidFill>
-                  <a:srgbClr val="C8315F"/>
-                </a:solidFill>
-                <a:latin typeface="Meiryo" pitchFamily="34" charset="0"/>
-                <a:ea typeface="Meiryo" pitchFamily="34" charset="-122"/>
-                <a:cs typeface="Meiryo" pitchFamily="34" charset="-120"/>
-              </a:rPr>
-              <a:t>01  </a:t>
-            </a:r>
-            <a:pPr indent="0" marL="0">
-              <a:buNone/>
-            </a:pPr>
-            <a:r>
-              <a:rPr lang="en-US" sz="1500" b="1" dirty="0">
-                <a:solidFill>
-                  <a:srgbClr val="2B2D42"/>
-                </a:solidFill>
-                <a:latin typeface="Meiryo" pitchFamily="34" charset="0"/>
-                <a:ea typeface="Meiryo" pitchFamily="34" charset="-122"/>
-                <a:cs typeface="Meiryo" pitchFamily="34" charset="-120"/>
-              </a:rPr>
-              <a:t>会計 → DFE</a:t>
-            </a:r>
-            <a:endParaRPr lang="en-US" sz="1500" dirty="0"/>
-          </a:p>
-        </p:txBody>
-      </p:sp>
-      <p:sp>
-        <p:nvSpPr>
-          <p:cNvPr id="12" name="Shape 10"/>
-          <p:cNvSpPr/>
-          <p:nvPr/>
-        </p:nvSpPr>
-        <p:spPr>
-          <a:xfrm>
-            <a:off x="548640" y="2834640"/>
-            <a:ext cx="11094415" cy="0"/>
-          </a:xfrm>
-          <a:prstGeom prst="line">
-            <a:avLst/>
-          </a:prstGeom>
-          <a:noFill/>
-          <a:ln w="12700">
-            <a:solidFill>
-              <a:srgbClr val="E3E4EA"/>
-            </a:solidFill>
-            <a:prstDash val="solid"/>
-          </a:ln>
-        </p:spPr>
-      </p:sp>
-      <p:sp>
-        <p:nvSpPr>
-          <p:cNvPr id="13" name="Text 11"/>
-          <p:cNvSpPr txBox="1"/>
-          <p:nvPr/>
-        </p:nvSpPr>
-        <p:spPr>
-          <a:xfrm>
-            <a:off x="548640" y="2834640"/>
-            <a:ext cx="3108960" cy="640080"/>
-          </a:xfrm>
-          <a:prstGeom prst="rect">
-            <a:avLst/>
-          </a:prstGeom>
-          <a:noFill/>
-          <a:ln/>
-        </p:spPr>
-        <p:txBody>
-          <a:bodyPr wrap="square" lIns="0" tIns="0" rIns="0" bIns="0" rtlCol="0" anchor="ctr"/>
-          <a:lstStyle/>
-          <a:p>
-            <a:pPr indent="0" marL="0">
-              <a:buNone/>
-            </a:pPr>
-            <a:r>
-              <a:rPr lang="en-US" sz="1500" b="1" dirty="0">
-                <a:solidFill>
-                  <a:srgbClr val="C8315F"/>
-                </a:solidFill>
-                <a:latin typeface="Meiryo" pitchFamily="34" charset="0"/>
-                <a:ea typeface="Meiryo" pitchFamily="34" charset="-122"/>
-                <a:cs typeface="Meiryo" pitchFamily="34" charset="-120"/>
-              </a:rPr>
-              <a:t>02  </a:t>
-            </a:r>
-            <a:pPr indent="0" marL="0">
-              <a:buNone/>
-            </a:pPr>
-            <a:r>
-              <a:rPr lang="en-US" sz="1500" b="1" dirty="0">
-                <a:solidFill>
-                  <a:srgbClr val="2B2D42"/>
-                </a:solidFill>
-                <a:latin typeface="Meiryo" pitchFamily="34" charset="0"/>
-                <a:ea typeface="Meiryo" pitchFamily="34" charset="-122"/>
-                <a:cs typeface="Meiryo" pitchFamily="34" charset="-120"/>
-              </a:rPr>
-              <a:t>写真撮影・入力 → パート</a:t>
-            </a:r>
-            <a:endParaRPr lang="en-US" sz="1500" dirty="0"/>
-          </a:p>
-        </p:txBody>
-      </p:sp>
-      <p:sp>
-        <p:nvSpPr>
-          <p:cNvPr id="14" name="Shape 12"/>
-          <p:cNvSpPr/>
-          <p:nvPr/>
-        </p:nvSpPr>
-        <p:spPr>
-          <a:xfrm>
-            <a:off x="548640" y="3474720"/>
-            <a:ext cx="11094415" cy="0"/>
-          </a:xfrm>
-          <a:prstGeom prst="line">
-            <a:avLst/>
-          </a:prstGeom>
-          <a:noFill/>
-          <a:ln w="12700">
-            <a:solidFill>
-              <a:srgbClr val="E3E4EA"/>
-            </a:solidFill>
-            <a:prstDash val="solid"/>
-          </a:ln>
-        </p:spPr>
-      </p:sp>
-      <p:sp>
-        <p:nvSpPr>
-          <p:cNvPr id="15" name="Text 13"/>
-          <p:cNvSpPr txBox="1"/>
-          <p:nvPr/>
-        </p:nvSpPr>
-        <p:spPr>
-          <a:xfrm>
-            <a:off x="548640" y="3474720"/>
-            <a:ext cx="3108960" cy="640080"/>
-          </a:xfrm>
-          <a:prstGeom prst="rect">
-            <a:avLst/>
-          </a:prstGeom>
-          <a:noFill/>
-          <a:ln/>
-        </p:spPr>
-        <p:txBody>
-          <a:bodyPr wrap="square" lIns="0" tIns="0" rIns="0" bIns="0" rtlCol="0" anchor="ctr"/>
-          <a:lstStyle/>
-          <a:p>
-            <a:pPr indent="0" marL="0">
-              <a:buNone/>
-            </a:pPr>
-            <a:r>
-              <a:rPr lang="en-US" sz="1500" b="1" dirty="0">
-                <a:solidFill>
-                  <a:srgbClr val="C8315F"/>
-                </a:solidFill>
-                <a:latin typeface="Meiryo" pitchFamily="34" charset="0"/>
-                <a:ea typeface="Meiryo" pitchFamily="34" charset="-122"/>
-                <a:cs typeface="Meiryo" pitchFamily="34" charset="-120"/>
-              </a:rPr>
-              <a:t>03  </a:t>
-            </a:r>
-            <a:pPr indent="0" marL="0">
-              <a:buNone/>
-            </a:pPr>
-            <a:r>
-              <a:rPr lang="en-US" sz="1500" b="1" dirty="0">
-                <a:solidFill>
-                  <a:srgbClr val="2B2D42"/>
-                </a:solidFill>
-                <a:latin typeface="Meiryo" pitchFamily="34" charset="0"/>
-                <a:ea typeface="Meiryo" pitchFamily="34" charset="-122"/>
-                <a:cs typeface="Meiryo" pitchFamily="34" charset="-120"/>
-              </a:rPr>
-              <a:t>クレーム一次対応 → 外注</a:t>
-            </a:r>
-            <a:endParaRPr lang="en-US" sz="1500" dirty="0"/>
-          </a:p>
-        </p:txBody>
-      </p:sp>
-      <p:sp>
-        <p:nvSpPr>
-          <p:cNvPr id="16" name="Shape 14"/>
-          <p:cNvSpPr/>
-          <p:nvPr/>
-        </p:nvSpPr>
-        <p:spPr>
-          <a:xfrm>
-            <a:off x="548640" y="4114800"/>
-            <a:ext cx="11094415" cy="0"/>
-          </a:xfrm>
-          <a:prstGeom prst="line">
-            <a:avLst/>
-          </a:prstGeom>
-          <a:noFill/>
-          <a:ln w="12700">
-            <a:solidFill>
-              <a:srgbClr val="E3E4EA"/>
-            </a:solidFill>
-            <a:prstDash val="solid"/>
-          </a:ln>
-        </p:spPr>
-      </p:sp>
-      <p:sp>
-        <p:nvSpPr>
-          <p:cNvPr id="17" name="Shape 15"/>
-          <p:cNvSpPr/>
-          <p:nvPr/>
-        </p:nvSpPr>
-        <p:spPr>
-          <a:xfrm>
-            <a:off x="3895344" y="2304288"/>
-            <a:ext cx="2491130" cy="420624"/>
+            <a:off x="548640" y="5349240"/>
+            <a:ext cx="11094415" cy="777240"/>
           </a:xfrm>
           <a:prstGeom prst="roundRect">
             <a:avLst>
-              <a:gd name="adj" fmla="val 13043"/>
-            </a:avLst>
-          </a:prstGeom>
-          <a:solidFill>
-            <a:srgbClr val="F2B8CA"/>
-          </a:solidFill>
-          <a:ln w="12700">
-            <a:solidFill>
-              <a:srgbClr val="F2B8CA"/>
-            </a:solidFill>
-            <a:prstDash val="solid"/>
-          </a:ln>
-        </p:spPr>
-      </p:sp>
-      <p:sp>
-        <p:nvSpPr>
-          <p:cNvPr id="18" name="Text 16"/>
-          <p:cNvSpPr txBox="1"/>
-          <p:nvPr/>
-        </p:nvSpPr>
-        <p:spPr>
-          <a:xfrm>
-            <a:off x="4032504" y="2304288"/>
-            <a:ext cx="2216810" cy="420624"/>
-          </a:xfrm>
-          <a:prstGeom prst="rect">
-            <a:avLst/>
-          </a:prstGeom>
-          <a:noFill/>
-          <a:ln/>
-        </p:spPr>
-        <p:txBody>
-          <a:bodyPr wrap="square" lIns="0" tIns="0" rIns="0" bIns="0" rtlCol="0" anchor="ctr"/>
-          <a:lstStyle/>
-          <a:p>
-            <a:pPr indent="0" marL="0">
-              <a:buNone/>
-            </a:pPr>
-            <a:r>
-              <a:rPr lang="en-US" sz="1300" b="1" dirty="0">
-                <a:solidFill>
-                  <a:srgbClr val="2B2D42"/>
-                </a:solidFill>
-                <a:latin typeface="Meiryo" pitchFamily="34" charset="0"/>
-                <a:ea typeface="Meiryo" pitchFamily="34" charset="-122"/>
-                <a:cs typeface="Meiryo" pitchFamily="34" charset="-120"/>
-              </a:rPr>
-              <a:t>見積・契約</a:t>
-            </a:r>
-            <a:endParaRPr lang="en-US" sz="1300" dirty="0"/>
-          </a:p>
-        </p:txBody>
-      </p:sp>
-      <p:sp>
-        <p:nvSpPr>
-          <p:cNvPr id="19" name="Shape 17"/>
-          <p:cNvSpPr/>
-          <p:nvPr/>
-        </p:nvSpPr>
-        <p:spPr>
-          <a:xfrm>
-            <a:off x="6496202" y="2304288"/>
-            <a:ext cx="5091989" cy="420624"/>
-          </a:xfrm>
-          <a:prstGeom prst="roundRect">
-            <a:avLst>
-              <a:gd name="adj" fmla="val 13043"/>
-            </a:avLst>
-          </a:prstGeom>
-          <a:solidFill>
-            <a:srgbClr val="C8315F"/>
-          </a:solidFill>
-          <a:ln w="12700">
-            <a:solidFill>
-              <a:srgbClr val="C8315F"/>
-            </a:solidFill>
-            <a:prstDash val="solid"/>
-          </a:ln>
-        </p:spPr>
-      </p:sp>
-      <p:sp>
-        <p:nvSpPr>
-          <p:cNvPr id="20" name="Text 18"/>
-          <p:cNvSpPr txBox="1"/>
-          <p:nvPr/>
-        </p:nvSpPr>
-        <p:spPr>
-          <a:xfrm>
-            <a:off x="6633362" y="2304288"/>
-            <a:ext cx="4817669" cy="420624"/>
-          </a:xfrm>
-          <a:prstGeom prst="rect">
-            <a:avLst/>
-          </a:prstGeom>
-          <a:noFill/>
-          <a:ln/>
-        </p:spPr>
-        <p:txBody>
-          <a:bodyPr wrap="square" lIns="0" tIns="0" rIns="0" bIns="0" rtlCol="0" anchor="ctr"/>
-          <a:lstStyle/>
-          <a:p>
-            <a:pPr indent="0" marL="0">
-              <a:buNone/>
-            </a:pPr>
-            <a:r>
-              <a:rPr lang="en-US" sz="1300" b="1" dirty="0">
-                <a:solidFill>
-                  <a:srgbClr val="FFFFFF"/>
-                </a:solidFill>
-                <a:latin typeface="Meiryo" pitchFamily="34" charset="0"/>
-                <a:ea typeface="Meiryo" pitchFamily="34" charset="-122"/>
-                <a:cs typeface="Meiryo" pitchFamily="34" charset="-120"/>
-              </a:rPr>
-              <a:t>DFEで運用</a:t>
-            </a:r>
-            <a:endParaRPr lang="en-US" sz="1300" dirty="0"/>
-          </a:p>
-        </p:txBody>
-      </p:sp>
-      <p:sp>
-        <p:nvSpPr>
-          <p:cNvPr id="21" name="Shape 19"/>
-          <p:cNvSpPr/>
-          <p:nvPr/>
-        </p:nvSpPr>
-        <p:spPr>
-          <a:xfrm>
-            <a:off x="3895344" y="2944368"/>
-            <a:ext cx="2491130" cy="420624"/>
-          </a:xfrm>
-          <a:prstGeom prst="roundRect">
-            <a:avLst>
-              <a:gd name="adj" fmla="val 13043"/>
-            </a:avLst>
-          </a:prstGeom>
-          <a:solidFill>
-            <a:srgbClr val="F2B8CA"/>
-          </a:solidFill>
-          <a:ln w="12700">
-            <a:solidFill>
-              <a:srgbClr val="F2B8CA"/>
-            </a:solidFill>
-            <a:prstDash val="solid"/>
-          </a:ln>
-        </p:spPr>
-      </p:sp>
-      <p:sp>
-        <p:nvSpPr>
-          <p:cNvPr id="22" name="Text 20"/>
-          <p:cNvSpPr txBox="1"/>
-          <p:nvPr/>
-        </p:nvSpPr>
-        <p:spPr>
-          <a:xfrm>
-            <a:off x="4032504" y="2944368"/>
-            <a:ext cx="2216810" cy="420624"/>
-          </a:xfrm>
-          <a:prstGeom prst="rect">
-            <a:avLst/>
-          </a:prstGeom>
-          <a:noFill/>
-          <a:ln/>
-        </p:spPr>
-        <p:txBody>
-          <a:bodyPr wrap="square" lIns="0" tIns="0" rIns="0" bIns="0" rtlCol="0" anchor="ctr"/>
-          <a:lstStyle/>
-          <a:p>
-            <a:pPr indent="0" marL="0">
-              <a:buNone/>
-            </a:pPr>
-            <a:r>
-              <a:rPr lang="en-US" sz="1300" b="1" dirty="0">
-                <a:solidFill>
-                  <a:srgbClr val="2B2D42"/>
-                </a:solidFill>
-                <a:latin typeface="Meiryo" pitchFamily="34" charset="0"/>
-                <a:ea typeface="Meiryo" pitchFamily="34" charset="-122"/>
-                <a:cs typeface="Meiryo" pitchFamily="34" charset="-120"/>
-              </a:rPr>
-              <a:t>引き継ぎ</a:t>
-            </a:r>
-            <a:endParaRPr lang="en-US" sz="1300" dirty="0"/>
-          </a:p>
-        </p:txBody>
-      </p:sp>
-      <p:sp>
-        <p:nvSpPr>
-          <p:cNvPr id="23" name="Shape 21"/>
-          <p:cNvSpPr/>
-          <p:nvPr/>
-        </p:nvSpPr>
-        <p:spPr>
-          <a:xfrm>
-            <a:off x="6496202" y="2944368"/>
-            <a:ext cx="5091989" cy="420624"/>
-          </a:xfrm>
-          <a:prstGeom prst="roundRect">
-            <a:avLst>
-              <a:gd name="adj" fmla="val 13043"/>
-            </a:avLst>
-          </a:prstGeom>
-          <a:solidFill>
-            <a:srgbClr val="C8315F"/>
-          </a:solidFill>
-          <a:ln w="12700">
-            <a:solidFill>
-              <a:srgbClr val="C8315F"/>
-            </a:solidFill>
-            <a:prstDash val="solid"/>
-          </a:ln>
-        </p:spPr>
-      </p:sp>
-      <p:sp>
-        <p:nvSpPr>
-          <p:cNvPr id="24" name="Text 22"/>
-          <p:cNvSpPr txBox="1"/>
-          <p:nvPr/>
-        </p:nvSpPr>
-        <p:spPr>
-          <a:xfrm>
-            <a:off x="6633362" y="2944368"/>
-            <a:ext cx="4817669" cy="420624"/>
-          </a:xfrm>
-          <a:prstGeom prst="rect">
-            <a:avLst/>
-          </a:prstGeom>
-          <a:noFill/>
-          <a:ln/>
-        </p:spPr>
-        <p:txBody>
-          <a:bodyPr wrap="square" lIns="0" tIns="0" rIns="0" bIns="0" rtlCol="0" anchor="ctr"/>
-          <a:lstStyle/>
-          <a:p>
-            <a:pPr indent="0" marL="0">
-              <a:buNone/>
-            </a:pPr>
-            <a:r>
-              <a:rPr lang="en-US" sz="1300" b="1" dirty="0">
-                <a:solidFill>
-                  <a:srgbClr val="FFFFFF"/>
-                </a:solidFill>
-                <a:latin typeface="Meiryo" pitchFamily="34" charset="0"/>
-                <a:ea typeface="Meiryo" pitchFamily="34" charset="-122"/>
-                <a:cs typeface="Meiryo" pitchFamily="34" charset="-120"/>
-              </a:rPr>
-              <a:t>パートさんが担当</a:t>
-            </a:r>
-            <a:endParaRPr lang="en-US" sz="1300" dirty="0"/>
-          </a:p>
-        </p:txBody>
-      </p:sp>
-      <p:sp>
-        <p:nvSpPr>
-          <p:cNvPr id="25" name="Shape 23"/>
-          <p:cNvSpPr/>
-          <p:nvPr/>
-        </p:nvSpPr>
-        <p:spPr>
-          <a:xfrm>
-            <a:off x="3895344" y="3584448"/>
-            <a:ext cx="5091989" cy="420624"/>
-          </a:xfrm>
-          <a:prstGeom prst="roundRect">
-            <a:avLst>
-              <a:gd name="adj" fmla="val 13043"/>
-            </a:avLst>
-          </a:prstGeom>
-          <a:solidFill>
-            <a:srgbClr val="F2B8CA"/>
-          </a:solidFill>
-          <a:ln w="12700">
-            <a:solidFill>
-              <a:srgbClr val="F2B8CA"/>
-            </a:solidFill>
-            <a:prstDash val="solid"/>
-          </a:ln>
-        </p:spPr>
-      </p:sp>
-      <p:sp>
-        <p:nvSpPr>
-          <p:cNvPr id="26" name="Text 24"/>
-          <p:cNvSpPr txBox="1"/>
-          <p:nvPr/>
-        </p:nvSpPr>
-        <p:spPr>
-          <a:xfrm>
-            <a:off x="4032504" y="3584448"/>
-            <a:ext cx="4817669" cy="420624"/>
-          </a:xfrm>
-          <a:prstGeom prst="rect">
-            <a:avLst/>
-          </a:prstGeom>
-          <a:noFill/>
-          <a:ln/>
-        </p:spPr>
-        <p:txBody>
-          <a:bodyPr wrap="square" lIns="0" tIns="0" rIns="0" bIns="0" rtlCol="0" anchor="ctr"/>
-          <a:lstStyle/>
-          <a:p>
-            <a:pPr indent="0" marL="0">
-              <a:buNone/>
-            </a:pPr>
-            <a:r>
-              <a:rPr lang="en-US" sz="1300" b="1" dirty="0">
-                <a:solidFill>
-                  <a:srgbClr val="2B2D42"/>
-                </a:solidFill>
-                <a:latin typeface="Meiryo" pitchFamily="34" charset="0"/>
-                <a:ea typeface="Meiryo" pitchFamily="34" charset="-122"/>
-                <a:cs typeface="Meiryo" pitchFamily="34" charset="-120"/>
-              </a:rPr>
-              <a:t>業者選び・契約・周知</a:t>
-            </a:r>
-            <a:endParaRPr lang="en-US" sz="1300" dirty="0"/>
-          </a:p>
-        </p:txBody>
-      </p:sp>
-      <p:sp>
-        <p:nvSpPr>
-          <p:cNvPr id="27" name="Shape 25"/>
-          <p:cNvSpPr/>
-          <p:nvPr/>
-        </p:nvSpPr>
-        <p:spPr>
-          <a:xfrm>
-            <a:off x="9097061" y="3584448"/>
-            <a:ext cx="2491130" cy="420624"/>
-          </a:xfrm>
-          <a:prstGeom prst="roundRect">
-            <a:avLst>
-              <a:gd name="adj" fmla="val 13043"/>
-            </a:avLst>
-          </a:prstGeom>
-          <a:solidFill>
-            <a:srgbClr val="C8315F"/>
-          </a:solidFill>
-          <a:ln w="12700">
-            <a:solidFill>
-              <a:srgbClr val="C8315F"/>
-            </a:solidFill>
-            <a:prstDash val="solid"/>
-          </a:ln>
-        </p:spPr>
-      </p:sp>
-      <p:sp>
-        <p:nvSpPr>
-          <p:cNvPr id="28" name="Text 26"/>
-          <p:cNvSpPr txBox="1"/>
-          <p:nvPr/>
-        </p:nvSpPr>
-        <p:spPr>
-          <a:xfrm>
-            <a:off x="9234221" y="3584448"/>
-            <a:ext cx="2216810" cy="420624"/>
-          </a:xfrm>
-          <a:prstGeom prst="rect">
-            <a:avLst/>
-          </a:prstGeom>
-          <a:noFill/>
-          <a:ln/>
-        </p:spPr>
-        <p:txBody>
-          <a:bodyPr wrap="square" lIns="0" tIns="0" rIns="0" bIns="0" rtlCol="0" anchor="ctr"/>
-          <a:lstStyle/>
-          <a:p>
-            <a:pPr indent="0" marL="0">
-              <a:buNone/>
-            </a:pPr>
-            <a:r>
-              <a:rPr lang="en-US" sz="1300" b="1" dirty="0">
-                <a:solidFill>
-                  <a:srgbClr val="FFFFFF"/>
-                </a:solidFill>
-                <a:latin typeface="Meiryo" pitchFamily="34" charset="0"/>
-                <a:ea typeface="Meiryo" pitchFamily="34" charset="-122"/>
-                <a:cs typeface="Meiryo" pitchFamily="34" charset="-120"/>
-              </a:rPr>
-              <a:t>稼働</a:t>
-            </a:r>
-            <a:endParaRPr lang="en-US" sz="1300" dirty="0"/>
-          </a:p>
-        </p:txBody>
-      </p:sp>
-      <p:sp>
-        <p:nvSpPr>
-          <p:cNvPr id="29" name="Text 27"/>
-          <p:cNvSpPr txBox="1"/>
-          <p:nvPr/>
-        </p:nvSpPr>
-        <p:spPr>
-          <a:xfrm>
-            <a:off x="3840480" y="4251960"/>
-            <a:ext cx="5486400" cy="274320"/>
-          </a:xfrm>
-          <a:prstGeom prst="rect">
-            <a:avLst/>
-          </a:prstGeom>
-          <a:noFill/>
-          <a:ln/>
-        </p:spPr>
-        <p:txBody>
-          <a:bodyPr wrap="square" lIns="0" tIns="0" rIns="0" bIns="0" rtlCol="0" anchor="t"/>
-          <a:lstStyle/>
-          <a:p>
-            <a:pPr indent="0" marL="0">
-              <a:buNone/>
-            </a:pPr>
-            <a:r>
-              <a:rPr lang="en-US" sz="1300" dirty="0">
-                <a:solidFill>
-                  <a:srgbClr val="6B6E80"/>
-                </a:solidFill>
-                <a:latin typeface="Meiryo" pitchFamily="34" charset="0"/>
-                <a:ea typeface="Meiryo" pitchFamily="34" charset="-122"/>
-                <a:cs typeface="Meiryo" pitchFamily="34" charset="-120"/>
-              </a:rPr>
-              <a:t>毎月末に売上と進み具合を確認</a:t>
-            </a:r>
-            <a:endParaRPr lang="en-US" sz="1300" dirty="0"/>
-          </a:p>
-        </p:txBody>
-      </p:sp>
-      <p:sp>
-        <p:nvSpPr>
-          <p:cNvPr id="30" name="Shape 28"/>
-          <p:cNvSpPr/>
-          <p:nvPr/>
-        </p:nvSpPr>
-        <p:spPr>
-          <a:xfrm>
-            <a:off x="548640" y="4846320"/>
-            <a:ext cx="11094415" cy="914400"/>
-          </a:xfrm>
-          <a:prstGeom prst="roundRect">
-            <a:avLst>
-              <a:gd name="adj" fmla="val 12000"/>
+              <a:gd name="adj" fmla="val 14118"/>
             </a:avLst>
           </a:prstGeom>
           <a:solidFill>
@@ -5718,14 +6435,14 @@
       </p:sp>
       <p:sp>
         <p:nvSpPr>
-          <p:cNvPr id="31" name="Text 29"/>
+          <p:cNvPr id="8" name="Text 5"/>
           <p:cNvSpPr txBox="1"/>
           <p:nvPr/>
         </p:nvSpPr>
         <p:spPr>
           <a:xfrm>
-            <a:off x="868680" y="4846320"/>
-            <a:ext cx="2926080" cy="914400"/>
+            <a:off x="868680" y="5349240"/>
+            <a:ext cx="3017520" cy="777240"/>
           </a:xfrm>
           <a:prstGeom prst="rect">
             <a:avLst/>
@@ -5741,7 +6458,7 @@
               <a:buNone/>
             </a:pPr>
             <a:r>
-              <a:rPr lang="en-US" sz="1800" b="1" dirty="0">
+              <a:rPr lang="en-US" sz="1700" b="1" dirty="0">
                 <a:solidFill>
                   <a:srgbClr val="C77700"/>
                 </a:solidFill>
@@ -5751,20 +6468,20 @@
               </a:rPr>
               <a:t>会社に決めてほしいこと</a:t>
             </a:r>
-            <a:endParaRPr lang="en-US" sz="1800" dirty="0"/>
-          </a:p>
-        </p:txBody>
-      </p:sp>
-      <p:sp>
-        <p:nvSpPr>
-          <p:cNvPr id="32" name="Text 30"/>
+            <a:endParaRPr lang="en-US" sz="1700" dirty="0"/>
+          </a:p>
+        </p:txBody>
+      </p:sp>
+      <p:sp>
+        <p:nvSpPr>
+          <p:cNvPr id="9" name="Text 6"/>
           <p:cNvSpPr txBox="1"/>
           <p:nvPr/>
         </p:nvSpPr>
         <p:spPr>
           <a:xfrm>
-            <a:off x="3931920" y="4846320"/>
-            <a:ext cx="7436815" cy="914400"/>
+            <a:off x="4023360" y="5349240"/>
+            <a:ext cx="7345375" cy="777240"/>
           </a:xfrm>
           <a:prstGeom prst="rect">
             <a:avLst/>
@@ -5780,7 +6497,7 @@
               <a:buNone/>
             </a:pPr>
             <a:r>
-              <a:rPr lang="en-US" sz="1800" b="1" dirty="0">
+              <a:rPr lang="en-US" sz="1700" b="1" dirty="0">
                 <a:solidFill>
                   <a:srgbClr val="2B2D42"/>
                 </a:solidFill>
@@ -5788,9 +6505,9 @@
                 <a:ea typeface="Meiryo" pitchFamily="34" charset="-122"/>
                 <a:cs typeface="Meiryo" pitchFamily="34" charset="-120"/>
               </a:rPr>
-              <a:t>外注の予算枠（DFE・コールセンター・駆けつけ）</a:t>
-            </a:r>
-            <a:endParaRPr lang="en-US" sz="1800" dirty="0"/>
+              <a:t>外注の予算枠（DFE・駆けつけサービス）</a:t>
+            </a:r>
+            <a:endParaRPr lang="en-US" sz="1700" dirty="0"/>
           </a:p>
         </p:txBody>
       </p:sp>
